--- a/slides/session1.pptx
+++ b/slides/session1.pptx
@@ -21,7 +21,6 @@
     <p:sldId id="269" r:id="rId21"/>
     <p:sldId id="270" r:id="rId22"/>
     <p:sldId id="271" r:id="rId23"/>
-    <p:sldId id="272" r:id="rId24"/>
   </p:sldIdLst>
   <p:sldSz cx="12191695" cy="6858000" type="screen4x3"/>
   <p:notesSz cx="6858000" cy="9144000"/>
@@ -603,17 +602,22 @@
           </a:p>
           <a:p>
             <a:r>
-              <a:t>全部揃っている必要はないが、目標は必須。</a:t>
-            </a:r>
-          </a:p>
-          <a:p>
-            <a:r>
-              <a:t>悪い例：「この機能を改善して」→ 何を改善？どう改善？が不明。</a:t>
-            </a:r>
-          </a:p>
-          <a:p>
-            <a:r>
-              <a:t>良い例：Slide 7と同じビルド失敗シナリオ。現状・目標・制約が明確。</a:t>
+              <a:t>全部揃っている必要はない。しかし、目標は必須。</a:t>
+            </a:r>
+          </a:p>
+          <a:p>
+            <a:r>
+              <a:t>悪い例：「この機能を改善して」。何を？どう？がまったく不明。</a:t>
+            </a:r>
+          </a:p>
+          <a:p>
+            <a:r>
+              <a:t>良い例：Slide 07と同じCIのシナリオ。現状・目標・制約・出力形式が明確。</a:t>
+            </a:r>
+          </a:p>
+          <a:p>
+            <a:r>
+              <a:t>「コードの変更はまだしないこと」が地味に大事。やってほしくないことを書くと暴走を防げる。</a:t>
             </a:r>
           </a:p>
           <a:p>
@@ -688,37 +692,32 @@
           <a:lstStyle/>
           <a:p>
             <a:r>
-              <a:t>コンテキストを渡す方法はいくつかある。</a:t>
-            </a:r>
-          </a:p>
-          <a:p>
-            <a:r>
-              <a:t>迷ったら「画像・URL・ファイル名」の3つから始めればOK。</a:t>
-            </a:r>
-          </a:p>
-          <a:p>
-            <a:r>
-              <a:t>画像もコピー＆ペーストで渡せる。エラー画面やデザインカンプなど。</a:t>
-            </a:r>
-          </a:p>
-          <a:p>
-            <a:r>
-              <a:t>URLを渡してWebページを読ませることもできる。</a:t>
-            </a:r>
-          </a:p>
-          <a:p>
-            <a:r>
-              <a:t>ファイル名を伝えて対象を明示する方法は基本的。VS Code拡張なら@記法も使える。</a:t>
-            </a:r>
-          </a:p>
-          <a:p>
-            <a:r>
-              <a:t>パイプでコマンド出力を渡す方法は上級者向け。ログ分析などに便利。-p フラグでプロンプトも一緒に渡せる。</a:t>
-            </a:r>
-          </a:p>
-          <a:p>
-            <a:r>
-              <a:t>ディレクトリ指定でClaude自身に探索させることも可能。</a:t>
+              <a:t>最初から完璧を求めない。これが一番大事なマインドセット。</a:t>
+            </a:r>
+          </a:p>
+          <a:p>
+            <a:r>
+              <a:t>まず出力を見て、良い点と悪い点を具体的にフィードバックし、改善版を出してもらう。</a:t>
+            </a:r>
+          </a:p>
+          <a:p>
+            <a:r>
+              <a:t>テクニック3つ。</a:t>
+            </a:r>
+          </a:p>
+          <a:p>
+            <a:r>
+              <a:t>1つ目：「なぜそうしたのか」と聞く。自分の指示に問題があったケースも多い。</a:t>
+            </a:r>
+          </a:p>
+          <a:p>
+            <a:r>
+              <a:t>2つ目：命令ではなく提案。「Xを考えているが、どう思うか」と聞くと、自分では気づかなかった選択肢が出てくる。</a:t>
+            </a:r>
+          </a:p>
+          <a:p>
+            <a:r>
+              <a:t>3つ目：自分でコードを直接編集したら、必ずClaudeに伝える。伝えないと古い状態を前提に動いてしまう。</a:t>
             </a:r>
           </a:p>
         </p:txBody>
@@ -788,32 +787,27 @@
           <a:lstStyle/>
           <a:p>
             <a:r>
-              <a:t>最初から完璧を求めず、たたき台→改善のループで進める。</a:t>
-            </a:r>
-          </a:p>
-          <a:p>
-            <a:r>
-              <a:t>テクニック：</a:t>
-            </a:r>
-          </a:p>
-          <a:p>
-            <a:r>
-              <a:t>- 「なぜそうしたのか」と聞くと、自分の指示の問題が見えることがある</a:t>
-            </a:r>
-          </a:p>
-          <a:p>
-            <a:r>
-              <a:t>- 提案形式で伝えると、Claudeが別の選択肢を出してくれる</a:t>
-            </a:r>
-          </a:p>
-          <a:p>
-            <a:r>
-              <a:t>- 自分で直接コードを編集したら、その旨を伝える。伝えないと古い状態を前提に動く</a:t>
-            </a:r>
-          </a:p>
-          <a:p>
-            <a:r>
-              <a:t>- 「全然違う」と言うより「この部分は良い、この部分は変えて」と具体的に</a:t>
+              <a:t>Part 3。Plan Modeの話。</a:t>
+            </a:r>
+          </a:p>
+          <a:p>
+            <a:r>
+              <a:t>「いきなりコードを書かせない」。これが合言葉。</a:t>
+            </a:r>
+          </a:p>
+          <a:p>
+            <a:r>
+              <a:t>ここまでのPART 1-2で「何ができるか」と「どう伝えるか」を見てきた。</a:t>
+            </a:r>
+          </a:p>
+          <a:p>
+            <a:r>
+              <a:t>PART 3は「どう進めるか」。ワークフローの話。</a:t>
+            </a:r>
+          </a:p>
+          <a:p>
+            <a:r>
+              <a:t>計画から始めることで手戻りを大幅に減らせる。</a:t>
             </a:r>
           </a:p>
         </p:txBody>
@@ -883,17 +877,47 @@
           <a:lstStyle/>
           <a:p>
             <a:r>
-              <a:t>Part 3。Plan Modeの話。</a:t>
-            </a:r>
-          </a:p>
-          <a:p>
-            <a:r>
-              <a:t>「いきなりコードを書かせない」が合言葉。</a:t>
-            </a:r>
-          </a:p>
-          <a:p>
-            <a:r>
-              <a:t>計画から始めることで手戻りを減らせる。</a:t>
+              <a:t>Plan Modeは読み取り専用。ファイルを見たり検索はできるが、編集やコマンド実行はできない。</a:t>
+            </a:r>
+          </a:p>
+          <a:p>
+            <a:r>
+              <a:t>なぜ計画から始めるのか。Anthropicのベストプラクティスにも明記されている。</a:t>
+            </a:r>
+          </a:p>
+          <a:p>
+            <a:r>
+              <a:t>「ステップ1-2は重要。これがないと、Claudeは直接コーディングに飛び込む傾向がある」と。</a:t>
+            </a:r>
+          </a:p>
+          <a:p>
+            <a:r>
+              <a:t>計画なしで実装を始めると、前提の認識ズレで根本から作り直しになることがある。</a:t>
+            </a:r>
+          </a:p>
+          <a:p>
+            <a:r>
+              <a:t>Plan Modeなら壊すリスクはゼロ。安心して調査・計画できる。</a:t>
+            </a:r>
+          </a:p>
+          <a:p>
+            <a:r>
+              <a:t>操作はShift+Tabで切替。起動時に --permission-mode plan で指定もできる。</a:t>
+            </a:r>
+          </a:p>
+          <a:p>
+            <a:r>
+              <a:t>Extended Thinkingとは別の概念。</a:t>
+            </a:r>
+          </a:p>
+          <a:p>
+            <a:r>
+              <a:t>Extended Thinking = 深く考えさせる（think, think hard）。Plan Mode = ツール制限。</a:t>
+            </a:r>
+          </a:p>
+          <a:p>
+            <a:r>
+              <a:t>両者の併用も可能。</a:t>
             </a:r>
           </a:p>
         </p:txBody>
@@ -963,47 +987,42 @@
           <a:lstStyle/>
           <a:p>
             <a:r>
-              <a:t>Plan Modeは読み取り専用のモード。</a:t>
-            </a:r>
-          </a:p>
-          <a:p>
-            <a:r>
-              <a:t>まずPlan Modeで方針を固め、実装はレビュー後に許可する。</a:t>
-            </a:r>
-          </a:p>
-          <a:p>
-            <a:r>
-              <a:t>最初はPlan Mode固定で始めると失敗しにくい。</a:t>
-            </a:r>
-          </a:p>
-          <a:p>
-            <a:r>
-              <a:t>操作方法：セッション中はShift+TabかAlt+Mで切替。</a:t>
-            </a:r>
-          </a:p>
-          <a:p>
-            <a:r>
-              <a:t>起動時に --permission-mode plan で指定もできる。</a:t>
-            </a:r>
-          </a:p>
-          <a:p>
-            <a:r>
-              <a:t>Extended Thinkingとは別の概念。</a:t>
-            </a:r>
-          </a:p>
-          <a:p>
-            <a:r>
-              <a:t>Extended Thinking = 深く考えさせる（think, think hard）</a:t>
-            </a:r>
-          </a:p>
-          <a:p>
-            <a:r>
-              <a:t>Plan Mode = 使えるツールを制限する</a:t>
-            </a:r>
-          </a:p>
-          <a:p>
-            <a:r>
-              <a:t>両者の併用も可能。</a:t>
+              <a:t>4ステップのワークフロー。</a:t>
+            </a:r>
+          </a:p>
+          <a:p>
+            <a:r>
+              <a:t>Step 1：「計画を立てて。実装はまだしないで。」この一言が鍵。</a:t>
+            </a:r>
+          </a:p>
+          <a:p>
+            <a:r>
+              <a:t>このとき、受け入れ基準・禁止事項・想定外の扱いも伝えておくとブレない。</a:t>
+            </a:r>
+          </a:p>
+          <a:p>
+            <a:r>
+              <a:t>例えば「既存APIは壊さない」「計画にない問題を見つけたら報告して止まって」など。</a:t>
+            </a:r>
+          </a:p>
+          <a:p>
+            <a:r>
+              <a:t>Step 2：計画が返ってきたらレビューする。「後方互換性は？」「テストは？」と聞く。</a:t>
+            </a:r>
+          </a:p>
+          <a:p>
+            <a:r>
+              <a:t>Step 3：計画に納得したら「OK、実装して」。調査だけが目的ならここで完了。</a:t>
+            </a:r>
+          </a:p>
+          <a:p>
+            <a:r>
+              <a:t>Step 4：テストを実行し、結果を確認してコミット。</a:t>
+            </a:r>
+          </a:p>
+          <a:p>
+            <a:r>
+              <a:t>小さな修正でもこの流れを習慣にすると手戻りが劇的に減る。</a:t>
             </a:r>
           </a:p>
         </p:txBody>
@@ -1073,32 +1092,32 @@
           <a:lstStyle/>
           <a:p>
             <a:r>
-              <a:t>計画 → レビュー → 実装 → 確認の4ステップ。</a:t>
-            </a:r>
-          </a:p>
-          <a:p>
-            <a:r>
-              <a:t>ポイント：</a:t>
-            </a:r>
-          </a:p>
-          <a:p>
-            <a:r>
-              <a:t>- 「まだコードを書かないで」と明示的に伝える</a:t>
-            </a:r>
-          </a:p>
-          <a:p>
-            <a:r>
-              <a:t>- 計画段階で疑問点をつぶす。「後方互換性は？」「テストは？」</a:t>
-            </a:r>
-          </a:p>
-          <a:p>
-            <a:r>
-              <a:t>- 計画に納得したらモード切替で実装を許可</a:t>
-            </a:r>
-          </a:p>
-          <a:p>
-            <a:r>
-              <a:t>- 小さな修正でもこの流れを習慣にすると手戻りが減る</a:t>
+              <a:t>実際に使い始める手順。</a:t>
+            </a:r>
+          </a:p>
+          <a:p>
+            <a:r>
+              <a:t>インストールはワンライナー。自動更新されるので常に最新版。</a:t>
+            </a:r>
+          </a:p>
+          <a:p>
+            <a:r>
+              <a:t>対象リポジトリのディレクトリで claude を実行するだけ。初回は認証設定が求められる。</a:t>
+            </a:r>
+          </a:p>
+          <a:p>
+            <a:r>
+              <a:t>最初のタスクは結果がわかりやすいものが良い。</a:t>
+            </a:r>
+          </a:p>
+          <a:p>
+            <a:r>
+              <a:t>リポジトリの要約、テスト実行、参照箇所の列挙など。</a:t>
+            </a:r>
+          </a:p>
+          <a:p>
+            <a:r>
+              <a:t>権限設定は /config で確認できる。最初はPlan Mode固定で始めると安全。</a:t>
             </a:r>
           </a:p>
         </p:txBody>
@@ -1168,117 +1187,32 @@
           <a:lstStyle/>
           <a:p>
             <a:r>
-              <a:t>計画段階で確認すべき5つの項目。</a:t>
-            </a:r>
-          </a:p>
-          <a:p>
-            <a:r>
-              <a:t>ゴール：何を達成したいか。最も重要。</a:t>
-            </a:r>
-          </a:p>
-          <a:p>
-            <a:r>
-              <a:t>背景・制約：なぜ必要か。技術的な制約も含む。</a:t>
-            </a:r>
-          </a:p>
-          <a:p>
-            <a:r>
-              <a:t>受け入れ基準：どうなったら完了か。テストが通る、レビューOKなど。</a:t>
-            </a:r>
-          </a:p>
-          <a:p>
-            <a:r>
-              <a:t>禁止事項：既存APIの破壊、特定ファイルの変更禁止など。</a:t>
-            </a:r>
-          </a:p>
-          <a:p>
-            <a:r>
-              <a:t>想定外の扱い：計画外の問題は報告して止まる、自己判断で対処、など。</a:t>
-            </a:r>
-          </a:p>
-        </p:txBody>
-      </p:sp>
-      <p:sp>
-        <p:nvSpPr>
-          <p:cNvPr id="4" name="Slide Number Placeholder 3"/>
-          <p:cNvSpPr>
-            <a:spLocks noGrp="1"/>
-          </p:cNvSpPr>
-          <p:nvPr>
-            <p:ph type="sldNum" idx="5" sz="quarter"/>
-          </p:nvPr>
-        </p:nvSpPr>
-        <p:spPr/>
-      </p:sp>
-    </p:spTree>
-  </p:cSld>
-  <p:clrMapOvr>
-    <a:masterClrMapping/>
-  </p:clrMapOvr>
-</p:notes>
-</file>
-
-<file path=ppt/notesSlides/notesSlide17.xml><?xml version="1.0" encoding="utf-8"?>
-<p:notes xmlns:a="http://schemas.openxmlformats.org/drawingml/2006/main" xmlns:p="http://schemas.openxmlformats.org/presentationml/2006/main" xmlns:r="http://schemas.openxmlformats.org/officeDocument/2006/relationships">
-  <p:cSld>
-    <p:spTree>
-      <p:nvGrpSpPr>
-        <p:cNvPr id="1" name=""/>
-        <p:cNvGrpSpPr/>
-        <p:nvPr/>
-      </p:nvGrpSpPr>
-      <p:grpSpPr>
-        <a:xfrm>
-          <a:off x="0" y="0"/>
-          <a:ext cx="0" cy="0"/>
-          <a:chOff x="0" y="0"/>
-          <a:chExt cx="0" cy="0"/>
-        </a:xfrm>
-      </p:grpSpPr>
-      <p:sp>
-        <p:nvSpPr>
-          <p:cNvPr id="2" name="Slide Image Placeholder 1"/>
-          <p:cNvSpPr>
-            <a:spLocks noGrp="1"/>
-          </p:cNvSpPr>
-          <p:nvPr>
-            <p:ph type="sldImg" idx="2"/>
-          </p:nvPr>
-        </p:nvSpPr>
-        <p:spPr/>
-      </p:sp>
-      <p:sp>
-        <p:nvSpPr>
-          <p:cNvPr id="3" name="Notes Placeholder 2"/>
-          <p:cNvSpPr>
-            <a:spLocks noGrp="1"/>
-          </p:cNvSpPr>
-          <p:nvPr>
-            <p:ph type="body" idx="3" sz="quarter"/>
-          </p:nvPr>
-        </p:nvSpPr>
-        <p:spPr/>
-        <p:txBody>
-          <a:bodyPr/>
-          <a:lstStyle/>
-          <a:p>
-            <a:r>
-              <a:t>まとめの3つの要点を読み上げ。</a:t>
-            </a:r>
-          </a:p>
-          <a:p>
-            <a:r>
-              <a:t>今日の持ち帰りは「面倒な調査を、まず任せる」。</a:t>
-            </a:r>
-          </a:p>
-          <a:p>
-            <a:r>
-              <a:t>次回は「カスタマイズする」がテーマ。</a:t>
-            </a:r>
-          </a:p>
-          <a:p>
-            <a:r>
-              <a:t>コンテキスト管理、Skills、サブエージェント、Plan Modeの深掘りを扱う。</a:t>
+              <a:t>まとめ。今日の持ち帰りは3つ。</a:t>
+            </a:r>
+          </a:p>
+          <a:p>
+            <a:r>
+              <a:t>1つ目：Claude Codeはコード補完ではなく「作業を進める」ツール。</a:t>
+            </a:r>
+          </a:p>
+          <a:p>
+            <a:r>
+              <a:t>2つ目：伝え方で結果が変わる。目標・背景・現状・期待出力を伝える。</a:t>
+            </a:r>
+          </a:p>
+          <a:p>
+            <a:r>
+              <a:t>3つ目：いきなりコードを書かせない。Plan Modeで方針を固めてから実装に入る。</a:t>
+            </a:r>
+          </a:p>
+          <a:p>
+            <a:r>
+              <a:t>面倒な調査タスクを1件、任せてみてほしい。</a:t>
+            </a:r>
+          </a:p>
+          <a:p>
+            <a:r>
+              <a:t>次回は「カスタマイズする」がテーマ。コンテキスト管理、Skills、サブエージェント。</a:t>
             </a:r>
           </a:p>
           <a:p>
@@ -1378,7 +1312,7 @@
           </a:p>
           <a:p>
             <a:r>
-              <a:t>今日のゴールは「調査・要約を任せられるようになる」。</a:t>
+              <a:t>今日のゴールは明確に。「面倒な調査を1件、任せられる」ようになること。</a:t>
             </a:r>
           </a:p>
         </p:txBody>
@@ -1448,27 +1382,22 @@
           <a:lstStyle/>
           <a:p>
             <a:r>
-              <a:t>まず「業務の一部だけ任せる」という現実的な入口を示す。</a:t>
-            </a:r>
-          </a:p>
-          <a:p>
-            <a:r>
               <a:t>調査・影響範囲の把握は時間が溶けやすい。ここが最初の狙いどころ。</a:t>
             </a:r>
           </a:p>
           <a:p>
             <a:r>
-              <a:t>最初の小さな成果が「影響範囲が数分で整理できる」などの即効性。</a:t>
-            </a:r>
-          </a:p>
-          <a:p>
-            <a:r>
-              <a:t>いきなり実装させるのではなく、調査・要約・差分整理に限定する。</a:t>
-            </a:r>
-          </a:p>
-          <a:p>
-            <a:r>
-              <a:t>この範囲なら既存業務と直結し、リスクも低い。</a:t>
+              <a:t>いきなり実装を任せる必要はない。読み取り専用で始められるのでリスクも低い。</a:t>
+            </a:r>
+          </a:p>
+          <a:p>
+            <a:r>
+              <a:t>Before/Afterは体感の話。人やリポジトリによって差はある。</a:t>
+            </a:r>
+          </a:p>
+          <a:p>
+            <a:r>
+              <a:t>ただ「調査の時間が減る」のは共通して体感しやすいポイント。</a:t>
             </a:r>
           </a:p>
           <a:p>
@@ -1548,27 +1477,17 @@
           </a:p>
           <a:p>
             <a:r>
-              <a:t>GitHub Copilotのような単発のコード補完とは違い、</a:t>
-            </a:r>
-          </a:p>
-          <a:p>
-            <a:r>
-              <a:t>調査・修正・検証・変更内容の取りまとめを、</a:t>
-            </a:r>
-          </a:p>
-          <a:p>
-            <a:r>
-              <a:t>ひとつのセッション内で連続して扱える。</a:t>
-            </a:r>
-          </a:p>
-          <a:p>
-            <a:r>
-              <a:t>安全面：デフォルトは読み取り専用で、ファイル編集やコマンド実行には都度許可が必要。勝手に何か壊す心配はない。</a:t>
-            </a:r>
-          </a:p>
-          <a:p>
-            <a:r>
-              <a:t>デモGIFがあれば見せる。</a:t>
+              <a:t>「AIにコードを書かせるツールでしょ？」と思われがちだが、コード生成はできることの一部。</a:t>
+            </a:r>
+          </a:p>
+          <a:p>
+            <a:r>
+              <a:t>調査、計画、実装、検証、取りまとめを一つのセッションで連続的に扱える。</a:t>
+            </a:r>
+          </a:p>
+          <a:p>
+            <a:r>
+              <a:t>安全面：デフォルトは読み取り専用で、ファイル編集やコマンド実行には都度許可が必要。勝手に壊す心配はない。</a:t>
             </a:r>
           </a:p>
         </p:txBody>
@@ -1643,22 +1562,27 @@
           </a:p>
           <a:p>
             <a:r>
-              <a:t>ChatGPTは設計議論や仕様の言語化が得意。</a:t>
-            </a:r>
-          </a:p>
-          <a:p>
-            <a:r>
-              <a:t>Copilotはコードを書くことが得意。</a:t>
-            </a:r>
-          </a:p>
-          <a:p>
-            <a:r>
-              <a:t>Claude Codeは一連の作業を進めることが得意。</a:t>
-            </a:r>
-          </a:p>
-          <a:p>
-            <a:r>
-              <a:t>IDEで記述し、ターミナル側で調査・実行・差分整理を担当する分担が自然。</a:t>
+              <a:t>ChatGPTは壁打ちに強い。設計議論、仕様の言語化、アプローチ比較。</a:t>
+            </a:r>
+          </a:p>
+          <a:p>
+            <a:r>
+              <a:t>Copilotはコードを書くことに強い。IDEから離れずに入力を補助。</a:t>
+            </a:r>
+          </a:p>
+          <a:p>
+            <a:r>
+              <a:t>Claude Codeは一連の作業フローを進めることに強い。</a:t>
+            </a:r>
+          </a:p>
+          <a:p>
+            <a:r>
+              <a:t>IDEで記述し、ターミナル側で調査・実行・差分整理という分担が自然。</a:t>
+            </a:r>
+          </a:p>
+          <a:p>
+            <a:r>
+              <a:t>大事なのは「どれか1つ」ではなく使い分けること。</a:t>
             </a:r>
           </a:p>
         </p:txBody>
@@ -1728,27 +1652,22 @@
           <a:lstStyle/>
           <a:p>
             <a:r>
-              <a:t>通常の開発では全工程を自分で回す。</a:t>
-            </a:r>
-          </a:p>
-          <a:p>
-            <a:r>
-              <a:t>Claude Codeを使うと、開発者の仕事は「何をしたいか伝える」と「要所でレビューする」に変わる。</a:t>
-            </a:r>
-          </a:p>
-          <a:p>
-            <a:r>
-              <a:t>ターミナルだけの話ではない。設計→実装→検証のワークフロー全体が変わる。</a:t>
-            </a:r>
-          </a:p>
-          <a:p>
-            <a:r>
-              <a:t>これが「コード補完」と「エージェント」の本質的な違い。</a:t>
-            </a:r>
-          </a:p>
-          <a:p>
-            <a:r>
-              <a:t>次のスライドで、具体的なタスクを例に、この流れを見てみる。</a:t>
+              <a:t>従来の開発では全工程を自分で回す。6ステップすべてが自分の作業。</a:t>
+            </a:r>
+          </a:p>
+          <a:p>
+            <a:r>
+              <a:t>Claude Codeを使うと、開発者の出番は2箇所に絞られる。最初の方向づけと、途中の判断。</a:t>
+            </a:r>
+          </a:p>
+          <a:p>
+            <a:r>
+              <a:t>これは「サボる」ではなく「判断に集中する」ということ。</a:t>
+            </a:r>
+          </a:p>
+          <a:p>
+            <a:r>
+              <a:t>「コード補完」と「エージェント」の本質的な違いはここにある。</a:t>
             </a:r>
           </a:p>
         </p:txBody>
@@ -1823,7 +1742,7 @@
           </a:p>
           <a:p>
             <a:r>
-              <a:t>「ビルド失敗ログの要約」という課題をClaude Codeで進める場合。</a:t>
+              <a:t>「CIが落ちた」という日常的なシナリオ。</a:t>
             </a:r>
           </a:p>
           <a:p>
@@ -1838,12 +1757,12 @@
           </a:p>
           <a:p>
             <a:r>
-              <a:t>ここで気づいてほしいのは、開発者の介入ポイントが2箇所あること。</a:t>
-            </a:r>
-          </a:p>
-          <a:p>
-            <a:r>
-              <a:t>「丸投げ」ではなく「要所で判断する」。この感覚が大事。</a:t>
+              <a:t>開発者の介入は2回。方向づけと判断。</a:t>
+            </a:r>
+          </a:p>
+          <a:p>
+            <a:r>
+              <a:t>「丸投げ」ではない。要所で判断を入れるから品質を保てる。</a:t>
             </a:r>
           </a:p>
           <a:p>
@@ -1853,7 +1772,7 @@
           </a:p>
           <a:p>
             <a:r>
-              <a:t>PART 2で「伝え方」を、PART 3で「計画の立て方」を詳しく見ていく。</a:t>
+              <a:t>ここからPART 2で「伝え方のコツ」を見ていく。</a:t>
             </a:r>
           </a:p>
         </p:txBody>
@@ -1923,22 +1842,27 @@
           <a:lstStyle/>
           <a:p>
             <a:r>
-              <a:t>先ほどの例で、開発者の発話は2回だけだった。短いが、伝え方で結果は大きく変わる。</a:t>
-            </a:r>
-          </a:p>
-          <a:p>
-            <a:r>
-              <a:t>ここからPart 2。コミュニケーションの話。</a:t>
-            </a:r>
-          </a:p>
-          <a:p>
-            <a:r>
-              <a:t>Claude Codeは自然言語で指示を出せるが「何でも伝わる」わけではない。</a:t>
-            </a:r>
-          </a:p>
-          <a:p>
-            <a:r>
-              <a:t>人間相手と同じで、伝え方によって結果が変わる。</a:t>
+              <a:t>PART 2。コミュニケーションの話。</a:t>
+            </a:r>
+          </a:p>
+          <a:p>
+            <a:r>
+              <a:t>先ほどの例で、開発者の発話は2回だけだった。短い。でも、伝え方で結果は大きく変わる。</a:t>
+            </a:r>
+          </a:p>
+          <a:p>
+            <a:r>
+              <a:t>Anthropicのベストプラクティスにも明記されている。</a:t>
+            </a:r>
+          </a:p>
+          <a:p>
+            <a:r>
+              <a:t>「Claude Codeとの通信方法は、結果の質に大きく影響します」と。</a:t>
+            </a:r>
+          </a:p>
+          <a:p>
+            <a:r>
+              <a:t>人間相手と同じ。何をしてほしいか明確に伝えないと、期待通りの結果は返ってこない。</a:t>
             </a:r>
           </a:p>
         </p:txBody>
@@ -2008,37 +1932,32 @@
           <a:lstStyle/>
           <a:p>
             <a:r>
-              <a:t>チャットボットとエージェントの根本的な違い。</a:t>
-            </a:r>
-          </a:p>
-          <a:p>
-            <a:r>
-              <a:t>チャットボット：ユーザーが1ステップずつ指示する。受動的。</a:t>
-            </a:r>
-          </a:p>
-          <a:p>
-            <a:r>
-              <a:t>エージェント：ゴールを伝えたら、自分で探索・計画・実行する。自律的。</a:t>
-            </a:r>
-          </a:p>
-          <a:p>
-            <a:r>
-              <a:t>アナロジー：チャットボットは電話サポート、エージェントは仕事を任せた同僚。</a:t>
-            </a:r>
-          </a:p>
-          <a:p>
-            <a:r>
-              <a:t>同僚に仕事を任せるとき、1行ずつ何をするか指示しない。</a:t>
-            </a:r>
-          </a:p>
-          <a:p>
-            <a:r>
-              <a:t>ゴールと背景を伝えて、やり方は任せる。</a:t>
-            </a:r>
-          </a:p>
-          <a:p>
-            <a:r>
-              <a:t>この「委任」の感覚がClaude Codeでは重要。</a:t>
+              <a:t>チャットボットとエージェントは根本的に違う。</a:t>
+            </a:r>
+          </a:p>
+          <a:p>
+            <a:r>
+              <a:t>チャットボットは電話サポートに近い。こちらが1ステップずつ指示して、その都度答えが返ってくる。</a:t>
+            </a:r>
+          </a:p>
+          <a:p>
+            <a:r>
+              <a:t>エージェントは仕事を任せた同僚に近い。ゴールと背景を伝えたら、やり方は本人が判断する。</a:t>
+            </a:r>
+          </a:p>
+          <a:p>
+            <a:r>
+              <a:t>同僚に仕事を任せるとき、1行ずつ「次はこのファイルを開いて、次はこの関数を見て」と指示しない。</a:t>
+            </a:r>
+          </a:p>
+          <a:p>
+            <a:r>
+              <a:t>「CIが落ちてるから原因を調べて」と伝えて、やり方は任せる。</a:t>
+            </a:r>
+          </a:p>
+          <a:p>
+            <a:r>
+              <a:t>この「委任」の感覚が、Claude Codeではとても重要。</a:t>
             </a:r>
           </a:p>
         </p:txBody>
@@ -5283,7 +5202,7 @@
               </a:defRPr>
             </a:pPr>
             <a:r>
-              <a:t>効果的な指示の4要素</a:t>
+              <a:t>指示の出し方</a:t>
             </a:r>
           </a:p>
         </p:txBody>
@@ -5812,48 +5731,6 @@
         </p:nvSpPr>
         <p:spPr>
           <a:xfrm>
-            <a:off x="731520" y="5669280"/>
-            <a:ext cx="4572000" cy="365760"/>
-          </a:xfrm>
-          <a:prstGeom prst="rect">
-            <a:avLst/>
-          </a:prstGeom>
-          <a:noFill/>
-        </p:spPr>
-        <p:txBody>
-          <a:bodyPr wrap="square">
-            <a:spAutoFit/>
-          </a:bodyPr>
-          <a:lstStyle/>
-          <a:p>
-            <a:pPr algn="l">
-              <a:lnSpc>
-                <a:spcPts val="1950"/>
-              </a:lnSpc>
-              <a:spcAft>
-                <a:spcPts val="0"/>
-              </a:spcAft>
-              <a:defRPr sz="1300" b="0">
-                <a:solidFill>
-                  <a:srgbClr val="B0AEA5"/>
-                </a:solidFill>
-                <a:latin typeface="SF Mono"/>
-              </a:defRPr>
-            </a:pPr>
-            <a:r>
-              <a:t>テンプレ: 目標 / 背景・制約 / 現状 / 期待する出力</a:t>
-            </a:r>
-          </a:p>
-        </p:txBody>
-      </p:sp>
-      <p:sp>
-        <p:nvSpPr>
-          <p:cNvPr id="17" name="TextBox 16"/>
-          <p:cNvSpPr txBox="1"/>
-          <p:nvPr/>
-        </p:nvSpPr>
-        <p:spPr>
-          <a:xfrm>
             <a:off x="5943600" y="1737360"/>
             <a:ext cx="2743200" cy="365760"/>
           </a:xfrm>
@@ -5890,7 +5767,7 @@
       </p:sp>
       <p:sp>
         <p:nvSpPr>
-          <p:cNvPr id="18" name="Rounded Rectangle 17"/>
+          <p:cNvPr id="17" name="Rounded Rectangle 16"/>
           <p:cNvSpPr/>
           <p:nvPr/>
         </p:nvSpPr>
@@ -5935,7 +5812,7 @@
       </p:sp>
       <p:sp>
         <p:nvSpPr>
-          <p:cNvPr id="19" name="TextBox 18"/>
+          <p:cNvPr id="18" name="TextBox 17"/>
           <p:cNvSpPr txBox="1"/>
           <p:nvPr/>
         </p:nvSpPr>
@@ -5977,7 +5854,7 @@
       </p:sp>
       <p:sp>
         <p:nvSpPr>
-          <p:cNvPr id="20" name="TextBox 19"/>
+          <p:cNvPr id="19" name="TextBox 18"/>
           <p:cNvSpPr txBox="1"/>
           <p:nvPr/>
         </p:nvSpPr>
@@ -6019,7 +5896,7 @@
       </p:sp>
       <p:sp>
         <p:nvSpPr>
-          <p:cNvPr id="21" name="Rounded Rectangle 20"/>
+          <p:cNvPr id="20" name="Rounded Rectangle 19"/>
           <p:cNvSpPr/>
           <p:nvPr/>
         </p:nvSpPr>
@@ -6064,7 +5941,7 @@
       </p:sp>
       <p:sp>
         <p:nvSpPr>
-          <p:cNvPr id="22" name="TextBox 21"/>
+          <p:cNvPr id="21" name="TextBox 20"/>
           <p:cNvSpPr txBox="1"/>
           <p:nvPr/>
         </p:nvSpPr>
@@ -6099,7 +5976,7 @@
               </a:defRPr>
             </a:pPr>
             <a:r>
-              <a:t>ビルドが失敗している。</a:t>
+              <a:t>CIが落ちている。</a:t>
             </a:r>
           </a:p>
           <a:p>
@@ -6118,7 +5995,7 @@
               </a:defRPr>
             </a:pPr>
             <a:r>
-              <a:t>現状：昨日のリファクタ以降通らなくなった。</a:t>
+              <a:t>現状：昨日のリファクタ以降失敗するようになった。</a:t>
             </a:r>
           </a:p>
           <a:p>
@@ -6182,7 +6059,7 @@
       </p:sp>
       <p:sp>
         <p:nvSpPr>
-          <p:cNvPr id="23" name="TextBox 22"/>
+          <p:cNvPr id="22" name="TextBox 21"/>
           <p:cNvSpPr txBox="1"/>
           <p:nvPr/>
         </p:nvSpPr>
@@ -6217,7 +6094,7 @@
               </a:defRPr>
             </a:pPr>
             <a:r>
-              <a:t>10 / 17</a:t>
+              <a:t>10 / 16</a:t>
             </a:r>
           </a:p>
         </p:txBody>
@@ -6327,7 +6204,7 @@
               </a:defRPr>
             </a:pPr>
             <a:r>
-              <a:t>コンテキストの渡し方</a:t>
+              <a:t>たたき台から始める</a:t>
             </a:r>
           </a:p>
         </p:txBody>
@@ -6341,11 +6218,11 @@
         <p:spPr>
           <a:xfrm>
             <a:off x="731520" y="1828800"/>
-            <a:ext cx="10515600" cy="777240"/>
+            <a:ext cx="2468880" cy="822960"/>
           </a:xfrm>
           <a:prstGeom prst="roundRect">
             <a:avLst>
-              <a:gd name="adj" fmla="val 2000"/>
+              <a:gd name="adj" fmla="val 3000"/>
             </a:avLst>
           </a:prstGeom>
           <a:solidFill>
@@ -6385,138 +6262,54 @@
         </p:nvSpPr>
         <p:spPr>
           <a:xfrm>
-            <a:off x="1188720" y="1965960"/>
-            <a:ext cx="2560320" cy="457200"/>
-          </a:xfrm>
-          <a:prstGeom prst="rect">
-            <a:avLst/>
-          </a:prstGeom>
-          <a:noFill/>
-        </p:spPr>
-        <p:txBody>
-          <a:bodyPr wrap="square">
-            <a:spAutoFit/>
-          </a:bodyPr>
-          <a:lstStyle/>
-          <a:p>
-            <a:pPr algn="l">
-              <a:lnSpc>
-                <a:spcPts val="2700"/>
-              </a:lnSpc>
-              <a:spcAft>
-                <a:spcPts val="0"/>
-              </a:spcAft>
-              <a:defRPr sz="1800" b="1">
-                <a:solidFill>
-                  <a:srgbClr val="6A9BCC"/>
+            <a:off x="822960" y="1965960"/>
+            <a:ext cx="2286000" cy="548640"/>
+          </a:xfrm>
+          <a:prstGeom prst="rect">
+            <a:avLst/>
+          </a:prstGeom>
+          <a:noFill/>
+        </p:spPr>
+        <p:txBody>
+          <a:bodyPr wrap="square">
+            <a:spAutoFit/>
+          </a:bodyPr>
+          <a:lstStyle/>
+          <a:p>
+            <a:pPr algn="ctr">
+              <a:lnSpc>
+                <a:spcPts val="2400"/>
+              </a:lnSpc>
+              <a:spcAft>
+                <a:spcPts val="0"/>
+              </a:spcAft>
+              <a:defRPr sz="1600" b="1">
+                <a:solidFill>
+                  <a:srgbClr val="D97757"/>
                 </a:solidFill>
                 <a:latin typeface="Hiragino Sans"/>
               </a:defRPr>
             </a:pPr>
             <a:r>
-              <a:t>画像ペースト  *</a:t>
-            </a:r>
-          </a:p>
-        </p:txBody>
-      </p:sp>
-      <p:sp>
-        <p:nvSpPr>
-          <p:cNvPr id="6" name="TextBox 5"/>
-          <p:cNvSpPr txBox="1"/>
-          <p:nvPr/>
-        </p:nvSpPr>
-        <p:spPr>
-          <a:xfrm>
-            <a:off x="3931920" y="1965960"/>
-            <a:ext cx="2743200" cy="457200"/>
-          </a:xfrm>
-          <a:prstGeom prst="rect">
-            <a:avLst/>
-          </a:prstGeom>
-          <a:noFill/>
-        </p:spPr>
-        <p:txBody>
-          <a:bodyPr wrap="square">
-            <a:spAutoFit/>
-          </a:bodyPr>
-          <a:lstStyle/>
-          <a:p>
-            <a:pPr algn="l">
-              <a:lnSpc>
-                <a:spcPts val="2250"/>
-              </a:lnSpc>
-              <a:spcAft>
-                <a:spcPts val="0"/>
-              </a:spcAft>
-              <a:defRPr sz="1500" b="0">
-                <a:solidFill>
-                  <a:srgbClr val="C5C3BB"/>
-                </a:solidFill>
-                <a:latin typeface="Hiragino Sans"/>
-              </a:defRPr>
-            </a:pPr>
-            <a:r>
-              <a:t>スクショやデザインを共有</a:t>
-            </a:r>
-          </a:p>
-        </p:txBody>
-      </p:sp>
-      <p:sp>
-        <p:nvSpPr>
-          <p:cNvPr id="7" name="TextBox 6"/>
-          <p:cNvSpPr txBox="1"/>
-          <p:nvPr/>
-        </p:nvSpPr>
-        <p:spPr>
-          <a:xfrm>
-            <a:off x="6858000" y="1965960"/>
-            <a:ext cx="4114800" cy="457200"/>
-          </a:xfrm>
-          <a:prstGeom prst="rect">
-            <a:avLst/>
-          </a:prstGeom>
-          <a:noFill/>
-        </p:spPr>
-        <p:txBody>
-          <a:bodyPr wrap="square">
-            <a:spAutoFit/>
-          </a:bodyPr>
-          <a:lstStyle/>
-          <a:p>
-            <a:pPr algn="l">
-              <a:lnSpc>
-                <a:spcPts val="1950"/>
-              </a:lnSpc>
-              <a:spcAft>
-                <a:spcPts val="0"/>
-              </a:spcAft>
-              <a:defRPr sz="1300" b="0">
-                <a:solidFill>
-                  <a:srgbClr val="B0AEA5"/>
-                </a:solidFill>
-                <a:latin typeface="SF Mono"/>
-              </a:defRPr>
-            </a:pPr>
-            <a:r>
-              <a:t>エラー画面のキャプチャを貼る</a:t>
-            </a:r>
-          </a:p>
-        </p:txBody>
-      </p:sp>
-      <p:sp>
-        <p:nvSpPr>
-          <p:cNvPr id="8" name="Rounded Rectangle 7"/>
+              <a:t>1. 指示を出す</a:t>
+            </a:r>
+          </a:p>
+        </p:txBody>
+      </p:sp>
+      <p:sp>
+        <p:nvSpPr>
+          <p:cNvPr id="6" name="Rounded Rectangle 5"/>
           <p:cNvSpPr/>
           <p:nvPr/>
         </p:nvSpPr>
         <p:spPr>
           <a:xfrm>
-            <a:off x="731520" y="2697480"/>
-            <a:ext cx="10515600" cy="777240"/>
+            <a:off x="3474720" y="1828800"/>
+            <a:ext cx="2468880" cy="822960"/>
           </a:xfrm>
           <a:prstGeom prst="roundRect">
             <a:avLst>
-              <a:gd name="adj" fmla="val 2000"/>
+              <a:gd name="adj" fmla="val 3000"/>
             </a:avLst>
           </a:prstGeom>
           <a:solidFill>
@@ -6550,144 +6343,60 @@
       </p:sp>
       <p:sp>
         <p:nvSpPr>
-          <p:cNvPr id="9" name="TextBox 8"/>
-          <p:cNvSpPr txBox="1"/>
-          <p:nvPr/>
-        </p:nvSpPr>
-        <p:spPr>
-          <a:xfrm>
-            <a:off x="1188720" y="2834640"/>
-            <a:ext cx="2560320" cy="457200"/>
-          </a:xfrm>
-          <a:prstGeom prst="rect">
-            <a:avLst/>
-          </a:prstGeom>
-          <a:noFill/>
-        </p:spPr>
-        <p:txBody>
-          <a:bodyPr wrap="square">
-            <a:spAutoFit/>
-          </a:bodyPr>
-          <a:lstStyle/>
-          <a:p>
-            <a:pPr algn="l">
-              <a:lnSpc>
-                <a:spcPts val="2700"/>
-              </a:lnSpc>
-              <a:spcAft>
-                <a:spcPts val="0"/>
-              </a:spcAft>
-              <a:defRPr sz="1800" b="1">
-                <a:solidFill>
-                  <a:srgbClr val="6A9BCC"/>
+          <p:cNvPr id="7" name="TextBox 6"/>
+          <p:cNvSpPr txBox="1"/>
+          <p:nvPr/>
+        </p:nvSpPr>
+        <p:spPr>
+          <a:xfrm>
+            <a:off x="3566160" y="1965960"/>
+            <a:ext cx="2286000" cy="548640"/>
+          </a:xfrm>
+          <a:prstGeom prst="rect">
+            <a:avLst/>
+          </a:prstGeom>
+          <a:noFill/>
+        </p:spPr>
+        <p:txBody>
+          <a:bodyPr wrap="square">
+            <a:spAutoFit/>
+          </a:bodyPr>
+          <a:lstStyle/>
+          <a:p>
+            <a:pPr algn="ctr">
+              <a:lnSpc>
+                <a:spcPts val="2400"/>
+              </a:lnSpc>
+              <a:spcAft>
+                <a:spcPts val="0"/>
+              </a:spcAft>
+              <a:defRPr sz="1600" b="1">
+                <a:solidFill>
+                  <a:srgbClr val="FAF9F5"/>
                 </a:solidFill>
                 <a:latin typeface="Hiragino Sans"/>
               </a:defRPr>
             </a:pPr>
             <a:r>
-              <a:t>URL指定  *</a:t>
-            </a:r>
-          </a:p>
-        </p:txBody>
-      </p:sp>
-      <p:sp>
-        <p:nvSpPr>
-          <p:cNvPr id="10" name="TextBox 9"/>
-          <p:cNvSpPr txBox="1"/>
-          <p:nvPr/>
-        </p:nvSpPr>
-        <p:spPr>
-          <a:xfrm>
-            <a:off x="3931920" y="2834640"/>
-            <a:ext cx="2743200" cy="457200"/>
-          </a:xfrm>
-          <a:prstGeom prst="rect">
-            <a:avLst/>
-          </a:prstGeom>
-          <a:noFill/>
-        </p:spPr>
-        <p:txBody>
-          <a:bodyPr wrap="square">
-            <a:spAutoFit/>
-          </a:bodyPr>
-          <a:lstStyle/>
-          <a:p>
-            <a:pPr algn="l">
-              <a:lnSpc>
-                <a:spcPts val="2250"/>
-              </a:lnSpc>
-              <a:spcAft>
-                <a:spcPts val="0"/>
-              </a:spcAft>
-              <a:defRPr sz="1500" b="0">
-                <a:solidFill>
-                  <a:srgbClr val="C5C3BB"/>
-                </a:solidFill>
-                <a:latin typeface="Hiragino Sans"/>
-              </a:defRPr>
-            </a:pPr>
-            <a:r>
-              <a:t>Webページを読ませる</a:t>
-            </a:r>
-          </a:p>
-        </p:txBody>
-      </p:sp>
-      <p:sp>
-        <p:nvSpPr>
-          <p:cNvPr id="11" name="TextBox 10"/>
-          <p:cNvSpPr txBox="1"/>
-          <p:nvPr/>
-        </p:nvSpPr>
-        <p:spPr>
-          <a:xfrm>
-            <a:off x="6858000" y="2834640"/>
-            <a:ext cx="4114800" cy="457200"/>
-          </a:xfrm>
-          <a:prstGeom prst="rect">
-            <a:avLst/>
-          </a:prstGeom>
-          <a:noFill/>
-        </p:spPr>
-        <p:txBody>
-          <a:bodyPr wrap="square">
-            <a:spAutoFit/>
-          </a:bodyPr>
-          <a:lstStyle/>
-          <a:p>
-            <a:pPr algn="l">
-              <a:lnSpc>
-                <a:spcPts val="1950"/>
-              </a:lnSpc>
-              <a:spcAft>
-                <a:spcPts val="0"/>
-              </a:spcAft>
-              <a:defRPr sz="1300" b="0">
-                <a:solidFill>
-                  <a:srgbClr val="B0AEA5"/>
-                </a:solidFill>
-                <a:latin typeface="SF Mono"/>
-              </a:defRPr>
-            </a:pPr>
-            <a:r>
-              <a:t>このドキュメントを読んで: https://...</a:t>
-            </a:r>
-          </a:p>
-        </p:txBody>
-      </p:sp>
-      <p:sp>
-        <p:nvSpPr>
-          <p:cNvPr id="12" name="Rounded Rectangle 11"/>
+              <a:t>2. 出力を確認</a:t>
+            </a:r>
+          </a:p>
+        </p:txBody>
+      </p:sp>
+      <p:sp>
+        <p:nvSpPr>
+          <p:cNvPr id="8" name="Rounded Rectangle 7"/>
           <p:cNvSpPr/>
           <p:nvPr/>
         </p:nvSpPr>
         <p:spPr>
           <a:xfrm>
-            <a:off x="731520" y="3566160"/>
-            <a:ext cx="10515600" cy="777240"/>
+            <a:off x="6217920" y="1828800"/>
+            <a:ext cx="2468880" cy="822960"/>
           </a:xfrm>
           <a:prstGeom prst="roundRect">
             <a:avLst>
-              <a:gd name="adj" fmla="val 2000"/>
+              <a:gd name="adj" fmla="val 3000"/>
             </a:avLst>
           </a:prstGeom>
           <a:solidFill>
@@ -6721,144 +6430,60 @@
       </p:sp>
       <p:sp>
         <p:nvSpPr>
-          <p:cNvPr id="13" name="TextBox 12"/>
-          <p:cNvSpPr txBox="1"/>
-          <p:nvPr/>
-        </p:nvSpPr>
-        <p:spPr>
-          <a:xfrm>
-            <a:off x="1188720" y="3703320"/>
-            <a:ext cx="2560320" cy="457200"/>
-          </a:xfrm>
-          <a:prstGeom prst="rect">
-            <a:avLst/>
-          </a:prstGeom>
-          <a:noFill/>
-        </p:spPr>
-        <p:txBody>
-          <a:bodyPr wrap="square">
-            <a:spAutoFit/>
-          </a:bodyPr>
-          <a:lstStyle/>
-          <a:p>
-            <a:pPr algn="l">
-              <a:lnSpc>
-                <a:spcPts val="2700"/>
-              </a:lnSpc>
-              <a:spcAft>
-                <a:spcPts val="0"/>
-              </a:spcAft>
-              <a:defRPr sz="1800" b="1">
-                <a:solidFill>
-                  <a:srgbClr val="6A9BCC"/>
+          <p:cNvPr id="9" name="TextBox 8"/>
+          <p:cNvSpPr txBox="1"/>
+          <p:nvPr/>
+        </p:nvSpPr>
+        <p:spPr>
+          <a:xfrm>
+            <a:off x="6309360" y="1965960"/>
+            <a:ext cx="2286000" cy="548640"/>
+          </a:xfrm>
+          <a:prstGeom prst="rect">
+            <a:avLst/>
+          </a:prstGeom>
+          <a:noFill/>
+        </p:spPr>
+        <p:txBody>
+          <a:bodyPr wrap="square">
+            <a:spAutoFit/>
+          </a:bodyPr>
+          <a:lstStyle/>
+          <a:p>
+            <a:pPr algn="ctr">
+              <a:lnSpc>
+                <a:spcPts val="2400"/>
+              </a:lnSpc>
+              <a:spcAft>
+                <a:spcPts val="0"/>
+              </a:spcAft>
+              <a:defRPr sz="1600" b="1">
+                <a:solidFill>
+                  <a:srgbClr val="7BC9A0"/>
                 </a:solidFill>
                 <a:latin typeface="Hiragino Sans"/>
               </a:defRPr>
             </a:pPr>
             <a:r>
-              <a:t>ファイル名を伝える  *</a:t>
-            </a:r>
-          </a:p>
-        </p:txBody>
-      </p:sp>
-      <p:sp>
-        <p:nvSpPr>
-          <p:cNvPr id="14" name="TextBox 13"/>
-          <p:cNvSpPr txBox="1"/>
-          <p:nvPr/>
-        </p:nvSpPr>
-        <p:spPr>
-          <a:xfrm>
-            <a:off x="3931920" y="3703320"/>
-            <a:ext cx="2743200" cy="457200"/>
-          </a:xfrm>
-          <a:prstGeom prst="rect">
-            <a:avLst/>
-          </a:prstGeom>
-          <a:noFill/>
-        </p:spPr>
-        <p:txBody>
-          <a:bodyPr wrap="square">
-            <a:spAutoFit/>
-          </a:bodyPr>
-          <a:lstStyle/>
-          <a:p>
-            <a:pPr algn="l">
-              <a:lnSpc>
-                <a:spcPts val="2250"/>
-              </a:lnSpc>
-              <a:spcAft>
-                <a:spcPts val="0"/>
-              </a:spcAft>
-              <a:defRPr sz="1500" b="0">
-                <a:solidFill>
-                  <a:srgbClr val="C5C3BB"/>
-                </a:solidFill>
-                <a:latin typeface="Hiragino Sans"/>
-              </a:defRPr>
-            </a:pPr>
-            <a:r>
-              <a:t>対象ファイルを明示する</a:t>
-            </a:r>
-          </a:p>
-        </p:txBody>
-      </p:sp>
-      <p:sp>
-        <p:nvSpPr>
-          <p:cNvPr id="15" name="TextBox 14"/>
-          <p:cNvSpPr txBox="1"/>
-          <p:nvPr/>
-        </p:nvSpPr>
-        <p:spPr>
-          <a:xfrm>
-            <a:off x="6858000" y="3703320"/>
-            <a:ext cx="4114800" cy="457200"/>
-          </a:xfrm>
-          <a:prstGeom prst="rect">
-            <a:avLst/>
-          </a:prstGeom>
-          <a:noFill/>
-        </p:spPr>
-        <p:txBody>
-          <a:bodyPr wrap="square">
-            <a:spAutoFit/>
-          </a:bodyPr>
-          <a:lstStyle/>
-          <a:p>
-            <a:pPr algn="l">
-              <a:lnSpc>
-                <a:spcPts val="1950"/>
-              </a:lnSpc>
-              <a:spcAft>
-                <a:spcPts val="0"/>
-              </a:spcAft>
-              <a:defRPr sz="1300" b="0">
-                <a:solidFill>
-                  <a:srgbClr val="B0AEA5"/>
-                </a:solidFill>
-                <a:latin typeface="SF Mono"/>
-              </a:defRPr>
-            </a:pPr>
-            <a:r>
-              <a:t>src/auth.ts を見て</a:t>
-            </a:r>
-          </a:p>
-        </p:txBody>
-      </p:sp>
-      <p:sp>
-        <p:nvSpPr>
-          <p:cNvPr id="16" name="Rounded Rectangle 15"/>
+              <a:t>3. フィードバック</a:t>
+            </a:r>
+          </a:p>
+        </p:txBody>
+      </p:sp>
+      <p:sp>
+        <p:nvSpPr>
+          <p:cNvPr id="10" name="Rounded Rectangle 9"/>
           <p:cNvSpPr/>
           <p:nvPr/>
         </p:nvSpPr>
         <p:spPr>
           <a:xfrm>
-            <a:off x="731520" y="4434840"/>
-            <a:ext cx="10515600" cy="777240"/>
+            <a:off x="8961120" y="1828800"/>
+            <a:ext cx="2468880" cy="822960"/>
           </a:xfrm>
           <a:prstGeom prst="roundRect">
             <a:avLst>
-              <a:gd name="adj" fmla="val 2000"/>
+              <a:gd name="adj" fmla="val 3000"/>
             </a:avLst>
           </a:prstGeom>
           <a:solidFill>
@@ -6892,14 +6517,56 @@
       </p:sp>
       <p:sp>
         <p:nvSpPr>
-          <p:cNvPr id="17" name="TextBox 16"/>
-          <p:cNvSpPr txBox="1"/>
-          <p:nvPr/>
-        </p:nvSpPr>
-        <p:spPr>
-          <a:xfrm>
-            <a:off x="1188720" y="4572000"/>
-            <a:ext cx="2560320" cy="457200"/>
+          <p:cNvPr id="11" name="TextBox 10"/>
+          <p:cNvSpPr txBox="1"/>
+          <p:nvPr/>
+        </p:nvSpPr>
+        <p:spPr>
+          <a:xfrm>
+            <a:off x="9052560" y="1965960"/>
+            <a:ext cx="2286000" cy="548640"/>
+          </a:xfrm>
+          <a:prstGeom prst="rect">
+            <a:avLst/>
+          </a:prstGeom>
+          <a:noFill/>
+        </p:spPr>
+        <p:txBody>
+          <a:bodyPr wrap="square">
+            <a:spAutoFit/>
+          </a:bodyPr>
+          <a:lstStyle/>
+          <a:p>
+            <a:pPr algn="ctr">
+              <a:lnSpc>
+                <a:spcPts val="2400"/>
+              </a:lnSpc>
+              <a:spcAft>
+                <a:spcPts val="0"/>
+              </a:spcAft>
+              <a:defRPr sz="1600" b="1">
+                <a:solidFill>
+                  <a:srgbClr val="FAF9F5"/>
+                </a:solidFill>
+                <a:latin typeface="Hiragino Sans"/>
+              </a:defRPr>
+            </a:pPr>
+            <a:r>
+              <a:t>4. 改善版</a:t>
+            </a:r>
+          </a:p>
+        </p:txBody>
+      </p:sp>
+      <p:sp>
+        <p:nvSpPr>
+          <p:cNvPr id="12" name="TextBox 11"/>
+          <p:cNvSpPr txBox="1"/>
+          <p:nvPr/>
+        </p:nvSpPr>
+        <p:spPr>
+          <a:xfrm>
+            <a:off x="731520" y="3200400"/>
+            <a:ext cx="10058400" cy="457200"/>
           </a:xfrm>
           <a:prstGeom prst="rect">
             <a:avLst/>
@@ -6914,118 +6581,34 @@
           <a:p>
             <a:pPr algn="l">
               <a:lnSpc>
-                <a:spcPts val="2700"/>
-              </a:lnSpc>
-              <a:spcAft>
-                <a:spcPts val="0"/>
-              </a:spcAft>
-              <a:defRPr sz="1800" b="1">
-                <a:solidFill>
-                  <a:srgbClr val="6A9BCC"/>
+                <a:spcPts val="3300"/>
+              </a:lnSpc>
+              <a:spcAft>
+                <a:spcPts val="0"/>
+              </a:spcAft>
+              <a:defRPr sz="2200" b="1">
+                <a:solidFill>
+                  <a:srgbClr val="FAF9F5"/>
                 </a:solidFill>
                 <a:latin typeface="Hiragino Sans"/>
               </a:defRPr>
             </a:pPr>
             <a:r>
-              <a:t>ディレクトリ指定</a:t>
-            </a:r>
-          </a:p>
-        </p:txBody>
-      </p:sp>
-      <p:sp>
-        <p:nvSpPr>
-          <p:cNvPr id="18" name="TextBox 17"/>
-          <p:cNvSpPr txBox="1"/>
-          <p:nvPr/>
-        </p:nvSpPr>
-        <p:spPr>
-          <a:xfrm>
-            <a:off x="3931920" y="4572000"/>
-            <a:ext cx="2743200" cy="457200"/>
-          </a:xfrm>
-          <a:prstGeom prst="rect">
-            <a:avLst/>
-          </a:prstGeom>
-          <a:noFill/>
-        </p:spPr>
-        <p:txBody>
-          <a:bodyPr wrap="square">
-            <a:spAutoFit/>
-          </a:bodyPr>
-          <a:lstStyle/>
-          <a:p>
-            <a:pPr algn="l">
-              <a:lnSpc>
-                <a:spcPts val="2250"/>
-              </a:lnSpc>
-              <a:spcAft>
-                <a:spcPts val="0"/>
-              </a:spcAft>
-              <a:defRPr sz="1500" b="0">
-                <a:solidFill>
-                  <a:srgbClr val="C5C3BB"/>
-                </a:solidFill>
-                <a:latin typeface="Hiragino Sans"/>
-              </a:defRPr>
-            </a:pPr>
-            <a:r>
-              <a:t>Claudeに探索させる</a:t>
-            </a:r>
-          </a:p>
-        </p:txBody>
-      </p:sp>
-      <p:sp>
-        <p:nvSpPr>
-          <p:cNvPr id="19" name="TextBox 18"/>
-          <p:cNvSpPr txBox="1"/>
-          <p:nvPr/>
-        </p:nvSpPr>
-        <p:spPr>
-          <a:xfrm>
-            <a:off x="6858000" y="4572000"/>
-            <a:ext cx="4114800" cy="457200"/>
-          </a:xfrm>
-          <a:prstGeom prst="rect">
-            <a:avLst/>
-          </a:prstGeom>
-          <a:noFill/>
-        </p:spPr>
-        <p:txBody>
-          <a:bodyPr wrap="square">
-            <a:spAutoFit/>
-          </a:bodyPr>
-          <a:lstStyle/>
-          <a:p>
-            <a:pPr algn="l">
-              <a:lnSpc>
-                <a:spcPts val="1950"/>
-              </a:lnSpc>
-              <a:spcAft>
-                <a:spcPts val="0"/>
-              </a:spcAft>
-              <a:defRPr sz="1300" b="0">
-                <a:solidFill>
-                  <a:srgbClr val="B0AEA5"/>
-                </a:solidFill>
-                <a:latin typeface="SF Mono"/>
-              </a:defRPr>
-            </a:pPr>
-            <a:r>
-              <a:t>このディレクトリを調べて</a:t>
-            </a:r>
-          </a:p>
-        </p:txBody>
-      </p:sp>
-      <p:sp>
-        <p:nvSpPr>
-          <p:cNvPr id="20" name="Rounded Rectangle 19"/>
+              <a:t>3つのテクニック</a:t>
+            </a:r>
+          </a:p>
+        </p:txBody>
+      </p:sp>
+      <p:sp>
+        <p:nvSpPr>
+          <p:cNvPr id="13" name="Rounded Rectangle 12"/>
           <p:cNvSpPr/>
           <p:nvPr/>
         </p:nvSpPr>
         <p:spPr>
           <a:xfrm>
-            <a:off x="731520" y="5303520"/>
-            <a:ext cx="10515600" cy="777240"/>
+            <a:off x="731520" y="3840480"/>
+            <a:ext cx="10515600" cy="1005840"/>
           </a:xfrm>
           <a:prstGeom prst="roundRect">
             <a:avLst>
@@ -7063,14 +6646,322 @@
       </p:sp>
       <p:sp>
         <p:nvSpPr>
+          <p:cNvPr id="14" name="TextBox 13"/>
+          <p:cNvSpPr txBox="1"/>
+          <p:nvPr/>
+        </p:nvSpPr>
+        <p:spPr>
+          <a:xfrm>
+            <a:off x="1188720" y="3931920"/>
+            <a:ext cx="2743200" cy="457200"/>
+          </a:xfrm>
+          <a:prstGeom prst="rect">
+            <a:avLst/>
+          </a:prstGeom>
+          <a:noFill/>
+        </p:spPr>
+        <p:txBody>
+          <a:bodyPr wrap="square">
+            <a:spAutoFit/>
+          </a:bodyPr>
+          <a:lstStyle/>
+          <a:p>
+            <a:pPr algn="l">
+              <a:lnSpc>
+                <a:spcPts val="2700"/>
+              </a:lnSpc>
+              <a:spcAft>
+                <a:spcPts val="0"/>
+              </a:spcAft>
+              <a:defRPr sz="1800" b="1">
+                <a:solidFill>
+                  <a:srgbClr val="6A9BCC"/>
+                </a:solidFill>
+                <a:latin typeface="Hiragino Sans"/>
+              </a:defRPr>
+            </a:pPr>
+            <a:r>
+              <a:t>「なぜ」を聞く</a:t>
+            </a:r>
+          </a:p>
+        </p:txBody>
+      </p:sp>
+      <p:sp>
+        <p:nvSpPr>
+          <p:cNvPr id="15" name="TextBox 14"/>
+          <p:cNvSpPr txBox="1"/>
+          <p:nvPr/>
+        </p:nvSpPr>
+        <p:spPr>
+          <a:xfrm>
+            <a:off x="4114800" y="3931920"/>
+            <a:ext cx="6858000" cy="822960"/>
+          </a:xfrm>
+          <a:prstGeom prst="rect">
+            <a:avLst/>
+          </a:prstGeom>
+          <a:noFill/>
+        </p:spPr>
+        <p:txBody>
+          <a:bodyPr wrap="square">
+            <a:spAutoFit/>
+          </a:bodyPr>
+          <a:lstStyle/>
+          <a:p>
+            <a:pPr algn="l">
+              <a:lnSpc>
+                <a:spcPts val="2100"/>
+              </a:lnSpc>
+              <a:spcAft>
+                <a:spcPts val="0"/>
+              </a:spcAft>
+              <a:defRPr sz="1400" b="0">
+                <a:solidFill>
+                  <a:srgbClr val="C5C3BB"/>
+                </a:solidFill>
+                <a:latin typeface="Hiragino Sans"/>
+              </a:defRPr>
+            </a:pPr>
+            <a:r>
+              <a:t>期待と違ったら、修正指示の前に理由を聞く。</a:t>
+            </a:r>
+            <a:br/>
+            <a:r>
+              <a:t>自分の指示の問題が見えることがある</a:t>
+            </a:r>
+          </a:p>
+        </p:txBody>
+      </p:sp>
+      <p:sp>
+        <p:nvSpPr>
+          <p:cNvPr id="16" name="Rounded Rectangle 15"/>
+          <p:cNvSpPr/>
+          <p:nvPr/>
+        </p:nvSpPr>
+        <p:spPr>
+          <a:xfrm>
+            <a:off x="731520" y="4937760"/>
+            <a:ext cx="10515600" cy="1005840"/>
+          </a:xfrm>
+          <a:prstGeom prst="roundRect">
+            <a:avLst>
+              <a:gd name="adj" fmla="val 2000"/>
+            </a:avLst>
+          </a:prstGeom>
+          <a:solidFill>
+            <a:srgbClr val="252220"/>
+          </a:solidFill>
+          <a:ln>
+            <a:noFill/>
+          </a:ln>
+        </p:spPr>
+        <p:style>
+          <a:lnRef idx="1">
+            <a:schemeClr val="accent1"/>
+          </a:lnRef>
+          <a:fillRef idx="3">
+            <a:schemeClr val="accent1"/>
+          </a:fillRef>
+          <a:effectRef idx="2">
+            <a:schemeClr val="accent1"/>
+          </a:effectRef>
+          <a:fontRef idx="minor">
+            <a:schemeClr val="lt1"/>
+          </a:fontRef>
+        </p:style>
+        <p:txBody>
+          <a:bodyPr rtlCol="0" anchor="ctr"/>
+          <a:lstStyle/>
+          <a:p>
+            <a:pPr algn="ctr"/>
+          </a:p>
+        </p:txBody>
+      </p:sp>
+      <p:sp>
+        <p:nvSpPr>
+          <p:cNvPr id="17" name="TextBox 16"/>
+          <p:cNvSpPr txBox="1"/>
+          <p:nvPr/>
+        </p:nvSpPr>
+        <p:spPr>
+          <a:xfrm>
+            <a:off x="1188720" y="5029200"/>
+            <a:ext cx="2743200" cy="457200"/>
+          </a:xfrm>
+          <a:prstGeom prst="rect">
+            <a:avLst/>
+          </a:prstGeom>
+          <a:noFill/>
+        </p:spPr>
+        <p:txBody>
+          <a:bodyPr wrap="square">
+            <a:spAutoFit/>
+          </a:bodyPr>
+          <a:lstStyle/>
+          <a:p>
+            <a:pPr algn="l">
+              <a:lnSpc>
+                <a:spcPts val="2700"/>
+              </a:lnSpc>
+              <a:spcAft>
+                <a:spcPts val="0"/>
+              </a:spcAft>
+              <a:defRPr sz="1800" b="1">
+                <a:solidFill>
+                  <a:srgbClr val="6A9BCC"/>
+                </a:solidFill>
+                <a:latin typeface="Hiragino Sans"/>
+              </a:defRPr>
+            </a:pPr>
+            <a:r>
+              <a:t>提案形式で伝える</a:t>
+            </a:r>
+          </a:p>
+        </p:txBody>
+      </p:sp>
+      <p:sp>
+        <p:nvSpPr>
+          <p:cNvPr id="18" name="TextBox 17"/>
+          <p:cNvSpPr txBox="1"/>
+          <p:nvPr/>
+        </p:nvSpPr>
+        <p:spPr>
+          <a:xfrm>
+            <a:off x="4114800" y="5029200"/>
+            <a:ext cx="6858000" cy="822960"/>
+          </a:xfrm>
+          <a:prstGeom prst="rect">
+            <a:avLst/>
+          </a:prstGeom>
+          <a:noFill/>
+        </p:spPr>
+        <p:txBody>
+          <a:bodyPr wrap="square">
+            <a:spAutoFit/>
+          </a:bodyPr>
+          <a:lstStyle/>
+          <a:p>
+            <a:pPr algn="l">
+              <a:lnSpc>
+                <a:spcPts val="2100"/>
+              </a:lnSpc>
+              <a:spcAft>
+                <a:spcPts val="0"/>
+              </a:spcAft>
+              <a:defRPr sz="1400" b="0">
+                <a:solidFill>
+                  <a:srgbClr val="C5C3BB"/>
+                </a:solidFill>
+                <a:latin typeface="Hiragino Sans"/>
+              </a:defRPr>
+            </a:pPr>
+            <a:r>
+              <a:t>「Xをして」より「Xを考えているが、どう思うか」。</a:t>
+            </a:r>
+            <a:br/>
+            <a:r>
+              <a:t>別の選択肢が出てくる</a:t>
+            </a:r>
+          </a:p>
+        </p:txBody>
+      </p:sp>
+      <p:sp>
+        <p:nvSpPr>
+          <p:cNvPr id="19" name="Rounded Rectangle 18"/>
+          <p:cNvSpPr/>
+          <p:nvPr/>
+        </p:nvSpPr>
+        <p:spPr>
+          <a:xfrm>
+            <a:off x="731520" y="6035040"/>
+            <a:ext cx="10515600" cy="1005840"/>
+          </a:xfrm>
+          <a:prstGeom prst="roundRect">
+            <a:avLst>
+              <a:gd name="adj" fmla="val 2000"/>
+            </a:avLst>
+          </a:prstGeom>
+          <a:solidFill>
+            <a:srgbClr val="252220"/>
+          </a:solidFill>
+          <a:ln>
+            <a:noFill/>
+          </a:ln>
+        </p:spPr>
+        <p:style>
+          <a:lnRef idx="1">
+            <a:schemeClr val="accent1"/>
+          </a:lnRef>
+          <a:fillRef idx="3">
+            <a:schemeClr val="accent1"/>
+          </a:fillRef>
+          <a:effectRef idx="2">
+            <a:schemeClr val="accent1"/>
+          </a:effectRef>
+          <a:fontRef idx="minor">
+            <a:schemeClr val="lt1"/>
+          </a:fontRef>
+        </p:style>
+        <p:txBody>
+          <a:bodyPr rtlCol="0" anchor="ctr"/>
+          <a:lstStyle/>
+          <a:p>
+            <a:pPr algn="ctr"/>
+          </a:p>
+        </p:txBody>
+      </p:sp>
+      <p:sp>
+        <p:nvSpPr>
+          <p:cNvPr id="20" name="TextBox 19"/>
+          <p:cNvSpPr txBox="1"/>
+          <p:nvPr/>
+        </p:nvSpPr>
+        <p:spPr>
+          <a:xfrm>
+            <a:off x="1188720" y="6126480"/>
+            <a:ext cx="2743200" cy="457200"/>
+          </a:xfrm>
+          <a:prstGeom prst="rect">
+            <a:avLst/>
+          </a:prstGeom>
+          <a:noFill/>
+        </p:spPr>
+        <p:txBody>
+          <a:bodyPr wrap="square">
+            <a:spAutoFit/>
+          </a:bodyPr>
+          <a:lstStyle/>
+          <a:p>
+            <a:pPr algn="l">
+              <a:lnSpc>
+                <a:spcPts val="2700"/>
+              </a:lnSpc>
+              <a:spcAft>
+                <a:spcPts val="0"/>
+              </a:spcAft>
+              <a:defRPr sz="1800" b="1">
+                <a:solidFill>
+                  <a:srgbClr val="6A9BCC"/>
+                </a:solidFill>
+                <a:latin typeface="Hiragino Sans"/>
+              </a:defRPr>
+            </a:pPr>
+            <a:r>
+              <a:t>手直ししたら伝える</a:t>
+            </a:r>
+          </a:p>
+        </p:txBody>
+      </p:sp>
+      <p:sp>
+        <p:nvSpPr>
           <p:cNvPr id="21" name="TextBox 20"/>
           <p:cNvSpPr txBox="1"/>
           <p:nvPr/>
         </p:nvSpPr>
         <p:spPr>
           <a:xfrm>
-            <a:off x="1188720" y="5440680"/>
-            <a:ext cx="2560320" cy="457200"/>
+            <a:off x="4114800" y="6126480"/>
+            <a:ext cx="6858000" cy="822960"/>
           </a:xfrm>
           <a:prstGeom prst="rect">
             <a:avLst/>
@@ -7085,20 +6976,24 @@
           <a:p>
             <a:pPr algn="l">
               <a:lnSpc>
-                <a:spcPts val="2700"/>
-              </a:lnSpc>
-              <a:spcAft>
-                <a:spcPts val="0"/>
-              </a:spcAft>
-              <a:defRPr sz="1800" b="1">
-                <a:solidFill>
-                  <a:srgbClr val="6A9BCC"/>
+                <a:spcPts val="2100"/>
+              </a:lnSpc>
+              <a:spcAft>
+                <a:spcPts val="0"/>
+              </a:spcAft>
+              <a:defRPr sz="1400" b="0">
+                <a:solidFill>
+                  <a:srgbClr val="C5C3BB"/>
                 </a:solidFill>
                 <a:latin typeface="Hiragino Sans"/>
               </a:defRPr>
             </a:pPr>
             <a:r>
-              <a:t>パイプ（上級者向け）</a:t>
+              <a:t>自分で編集した場合はClaudeに共有する。</a:t>
+            </a:r>
+            <a:br/>
+            <a:r>
+              <a:t>伝えないと古い状態で動き続ける</a:t>
             </a:r>
           </a:p>
         </p:txBody>
@@ -7111,8 +7006,8 @@
         </p:nvSpPr>
         <p:spPr>
           <a:xfrm>
-            <a:off x="3931920" y="5440680"/>
-            <a:ext cx="2743200" cy="457200"/>
+            <a:off x="731520" y="6309360"/>
+            <a:ext cx="10515600" cy="365760"/>
           </a:xfrm>
           <a:prstGeom prst="rect">
             <a:avLst/>
@@ -7127,20 +7022,20 @@
           <a:p>
             <a:pPr algn="l">
               <a:lnSpc>
-                <a:spcPts val="2250"/>
-              </a:lnSpc>
-              <a:spcAft>
-                <a:spcPts val="0"/>
-              </a:spcAft>
-              <a:defRPr sz="1500" b="0">
-                <a:solidFill>
-                  <a:srgbClr val="C5C3BB"/>
+                <a:spcPts val="2400"/>
+              </a:lnSpc>
+              <a:spcAft>
+                <a:spcPts val="0"/>
+              </a:spcAft>
+              <a:defRPr sz="1600" b="0">
+                <a:solidFill>
+                  <a:srgbClr val="D97757"/>
                 </a:solidFill>
                 <a:latin typeface="Hiragino Sans"/>
               </a:defRPr>
             </a:pPr>
             <a:r>
-              <a:t>コマンド出力を渡す</a:t>
+              <a:t>→ 「全然違う」より「この部分は良い、ここを変えて」</a:t>
             </a:r>
           </a:p>
         </p:txBody>
@@ -7148,90 +7043,6 @@
       <p:sp>
         <p:nvSpPr>
           <p:cNvPr id="23" name="TextBox 22"/>
-          <p:cNvSpPr txBox="1"/>
-          <p:nvPr/>
-        </p:nvSpPr>
-        <p:spPr>
-          <a:xfrm>
-            <a:off x="6858000" y="5440680"/>
-            <a:ext cx="4114800" cy="457200"/>
-          </a:xfrm>
-          <a:prstGeom prst="rect">
-            <a:avLst/>
-          </a:prstGeom>
-          <a:noFill/>
-        </p:spPr>
-        <p:txBody>
-          <a:bodyPr wrap="square">
-            <a:spAutoFit/>
-          </a:bodyPr>
-          <a:lstStyle/>
-          <a:p>
-            <a:pPr algn="l">
-              <a:lnSpc>
-                <a:spcPts val="1950"/>
-              </a:lnSpc>
-              <a:spcAft>
-                <a:spcPts val="0"/>
-              </a:spcAft>
-              <a:defRPr sz="1300" b="0">
-                <a:solidFill>
-                  <a:srgbClr val="B0AEA5"/>
-                </a:solidFill>
-                <a:latin typeface="SF Mono"/>
-              </a:defRPr>
-            </a:pPr>
-            <a:r>
-              <a:t>cat error.log | claude -p "原因を教えて"</a:t>
-            </a:r>
-          </a:p>
-        </p:txBody>
-      </p:sp>
-      <p:sp>
-        <p:nvSpPr>
-          <p:cNvPr id="24" name="TextBox 23"/>
-          <p:cNvSpPr txBox="1"/>
-          <p:nvPr/>
-        </p:nvSpPr>
-        <p:spPr>
-          <a:xfrm>
-            <a:off x="731520" y="6355080"/>
-            <a:ext cx="10058400" cy="365760"/>
-          </a:xfrm>
-          <a:prstGeom prst="rect">
-            <a:avLst/>
-          </a:prstGeom>
-          <a:noFill/>
-        </p:spPr>
-        <p:txBody>
-          <a:bodyPr wrap="square">
-            <a:spAutoFit/>
-          </a:bodyPr>
-          <a:lstStyle/>
-          <a:p>
-            <a:pPr algn="l">
-              <a:lnSpc>
-                <a:spcPts val="1950"/>
-              </a:lnSpc>
-              <a:spcAft>
-                <a:spcPts val="0"/>
-              </a:spcAft>
-              <a:defRPr sz="1300" b="0">
-                <a:solidFill>
-                  <a:srgbClr val="B0AEA5"/>
-                </a:solidFill>
-                <a:latin typeface="Hiragino Sans"/>
-              </a:defRPr>
-            </a:pPr>
-            <a:r>
-              <a:t>* まずはこの3つから / VS Code拡張では @ファイル名 でも参照可</a:t>
-            </a:r>
-          </a:p>
-        </p:txBody>
-      </p:sp>
-      <p:sp>
-        <p:nvSpPr>
-          <p:cNvPr id="25" name="TextBox 24"/>
           <p:cNvSpPr txBox="1"/>
           <p:nvPr/>
         </p:nvSpPr>
@@ -7266,7 +7077,7 @@
               </a:defRPr>
             </a:pPr>
             <a:r>
-              <a:t>11 / 17</a:t>
+              <a:t>11 / 16</a:t>
             </a:r>
           </a:p>
         </p:txBody>
@@ -7280,6 +7091,200 @@
 </file>
 
 <file path=ppt/slides/slide12.xml><?xml version="1.0" encoding="utf-8"?>
+<p:sld xmlns:a="http://schemas.openxmlformats.org/drawingml/2006/main" xmlns:p="http://schemas.openxmlformats.org/presentationml/2006/main" xmlns:r="http://schemas.openxmlformats.org/officeDocument/2006/relationships">
+  <p:cSld>
+    <p:bg>
+      <p:bgPr>
+        <a:solidFill>
+          <a:srgbClr val="231F1D"/>
+        </a:solidFill>
+        <a:effectLst/>
+      </p:bgPr>
+    </p:bg>
+    <p:spTree>
+      <p:nvGrpSpPr>
+        <p:cNvPr id="1" name=""/>
+        <p:cNvGrpSpPr/>
+        <p:nvPr/>
+      </p:nvGrpSpPr>
+      <p:grpSpPr/>
+      <p:sp>
+        <p:nvSpPr>
+          <p:cNvPr id="2" name="TextBox 1"/>
+          <p:cNvSpPr txBox="1"/>
+          <p:nvPr/>
+        </p:nvSpPr>
+        <p:spPr>
+          <a:xfrm>
+            <a:off x="1371600" y="1371600"/>
+            <a:ext cx="9144000" cy="457200"/>
+          </a:xfrm>
+          <a:prstGeom prst="rect">
+            <a:avLst/>
+          </a:prstGeom>
+          <a:noFill/>
+        </p:spPr>
+        <p:txBody>
+          <a:bodyPr wrap="square">
+            <a:spAutoFit/>
+          </a:bodyPr>
+          <a:lstStyle/>
+          <a:p>
+            <a:pPr algn="ctr">
+              <a:lnSpc>
+                <a:spcPts val="2700"/>
+              </a:lnSpc>
+              <a:spcAft>
+                <a:spcPts val="0"/>
+              </a:spcAft>
+              <a:defRPr sz="1800" b="1">
+                <a:solidFill>
+                  <a:srgbClr val="D97757"/>
+                </a:solidFill>
+                <a:latin typeface="Helvetica Neue"/>
+              </a:defRPr>
+            </a:pPr>
+            <a:r>
+              <a:t>PART 3</a:t>
+            </a:r>
+          </a:p>
+        </p:txBody>
+      </p:sp>
+      <p:sp>
+        <p:nvSpPr>
+          <p:cNvPr id="3" name="TextBox 2"/>
+          <p:cNvSpPr txBox="1"/>
+          <p:nvPr/>
+        </p:nvSpPr>
+        <p:spPr>
+          <a:xfrm>
+            <a:off x="1371600" y="2103120"/>
+            <a:ext cx="9144000" cy="914400"/>
+          </a:xfrm>
+          <a:prstGeom prst="rect">
+            <a:avLst/>
+          </a:prstGeom>
+          <a:noFill/>
+        </p:spPr>
+        <p:txBody>
+          <a:bodyPr wrap="square">
+            <a:spAutoFit/>
+          </a:bodyPr>
+          <a:lstStyle/>
+          <a:p>
+            <a:pPr algn="ctr">
+              <a:lnSpc>
+                <a:spcPts val="6600"/>
+              </a:lnSpc>
+              <a:spcAft>
+                <a:spcPts val="0"/>
+              </a:spcAft>
+              <a:defRPr sz="4400" b="1">
+                <a:solidFill>
+                  <a:srgbClr val="FAF9F5"/>
+                </a:solidFill>
+                <a:latin typeface="Helvetica Neue"/>
+              </a:defRPr>
+            </a:pPr>
+            <a:r>
+              <a:t>Plan Mode</a:t>
+            </a:r>
+          </a:p>
+        </p:txBody>
+      </p:sp>
+      <p:sp>
+        <p:nvSpPr>
+          <p:cNvPr id="4" name="TextBox 3"/>
+          <p:cNvSpPr txBox="1"/>
+          <p:nvPr/>
+        </p:nvSpPr>
+        <p:spPr>
+          <a:xfrm>
+            <a:off x="1371600" y="3657600"/>
+            <a:ext cx="9144000" cy="914400"/>
+          </a:xfrm>
+          <a:prstGeom prst="rect">
+            <a:avLst/>
+          </a:prstGeom>
+          <a:noFill/>
+        </p:spPr>
+        <p:txBody>
+          <a:bodyPr wrap="square">
+            <a:spAutoFit/>
+          </a:bodyPr>
+          <a:lstStyle/>
+          <a:p>
+            <a:pPr algn="ctr">
+              <a:lnSpc>
+                <a:spcPts val="3600"/>
+              </a:lnSpc>
+              <a:spcAft>
+                <a:spcPts val="0"/>
+              </a:spcAft>
+              <a:defRPr sz="2400" b="0">
+                <a:solidFill>
+                  <a:srgbClr val="C5C3BB"/>
+                </a:solidFill>
+                <a:latin typeface="Hiragino Sans"/>
+              </a:defRPr>
+            </a:pPr>
+            <a:r>
+              <a:t>いきなりコードを書かせない</a:t>
+            </a:r>
+          </a:p>
+        </p:txBody>
+      </p:sp>
+      <p:sp>
+        <p:nvSpPr>
+          <p:cNvPr id="5" name="TextBox 4"/>
+          <p:cNvSpPr txBox="1"/>
+          <p:nvPr/>
+        </p:nvSpPr>
+        <p:spPr>
+          <a:xfrm>
+            <a:off x="11277295" y="6400800"/>
+            <a:ext cx="731520" cy="274320"/>
+          </a:xfrm>
+          <a:prstGeom prst="rect">
+            <a:avLst/>
+          </a:prstGeom>
+          <a:noFill/>
+        </p:spPr>
+        <p:txBody>
+          <a:bodyPr wrap="square">
+            <a:spAutoFit/>
+          </a:bodyPr>
+          <a:lstStyle/>
+          <a:p>
+            <a:pPr algn="r">
+              <a:lnSpc>
+                <a:spcPts val="1500"/>
+              </a:lnSpc>
+              <a:spcAft>
+                <a:spcPts val="0"/>
+              </a:spcAft>
+              <a:defRPr sz="1000" b="0">
+                <a:solidFill>
+                  <a:srgbClr val="B0AEA5"/>
+                </a:solidFill>
+                <a:latin typeface="Helvetica Neue"/>
+              </a:defRPr>
+            </a:pPr>
+            <a:r>
+              <a:t>12 / 16</a:t>
+            </a:r>
+          </a:p>
+        </p:txBody>
+      </p:sp>
+    </p:spTree>
+  </p:cSld>
+  <p:clrMapOvr>
+    <a:masterClrMapping/>
+  </p:clrMapOvr>
+</p:sld>
+</file>
+
+<file path=ppt/slides/slide13.xml><?xml version="1.0" encoding="utf-8"?>
 <p:sld xmlns:a="http://schemas.openxmlformats.org/drawingml/2006/main" xmlns:p="http://schemas.openxmlformats.org/presentationml/2006/main" xmlns:r="http://schemas.openxmlformats.org/officeDocument/2006/relationships">
   <p:cSld>
     <p:bg>
@@ -7334,7 +7339,7 @@
               </a:defRPr>
             </a:pPr>
             <a:r>
-              <a:t>PART 2 — コミュニケーション</a:t>
+              <a:t>PART 3 — Plan Mode</a:t>
             </a:r>
           </a:p>
         </p:txBody>
@@ -7376,21 +7381,162 @@
               </a:defRPr>
             </a:pPr>
             <a:r>
-              <a:t>たたき台 → 改善ループ</a:t>
-            </a:r>
-          </a:p>
-        </p:txBody>
-      </p:sp>
-      <p:sp>
-        <p:nvSpPr>
-          <p:cNvPr id="4" name="Rounded Rectangle 3"/>
+              <a:t>Plan Mode とは</a:t>
+            </a:r>
+          </a:p>
+        </p:txBody>
+      </p:sp>
+      <p:sp>
+        <p:nvSpPr>
+          <p:cNvPr id="4" name="TextBox 3"/>
+          <p:cNvSpPr txBox="1"/>
+          <p:nvPr/>
+        </p:nvSpPr>
+        <p:spPr>
+          <a:xfrm>
+            <a:off x="731520" y="1828800"/>
+            <a:ext cx="5029200" cy="2560320"/>
+          </a:xfrm>
+          <a:prstGeom prst="rect">
+            <a:avLst/>
+          </a:prstGeom>
+          <a:noFill/>
+        </p:spPr>
+        <p:txBody>
+          <a:bodyPr wrap="square">
+            <a:spAutoFit/>
+          </a:bodyPr>
+          <a:lstStyle/>
+          <a:p>
+            <a:pPr>
+              <a:lnSpc>
+                <a:spcPts val="2880"/>
+              </a:lnSpc>
+              <a:spcAft>
+                <a:spcPts val="800"/>
+              </a:spcAft>
+              <a:defRPr sz="1800">
+                <a:solidFill>
+                  <a:srgbClr val="FAF9F5"/>
+                </a:solidFill>
+                <a:latin typeface="Hiragino Sans"/>
+              </a:defRPr>
+            </a:pPr>
+            <a:r>
+              <a:t>• 読み取り専用のモード</a:t>
+            </a:r>
+          </a:p>
+          <a:p>
+            <a:pPr>
+              <a:lnSpc>
+                <a:spcPts val="2880"/>
+              </a:lnSpc>
+              <a:spcAft>
+                <a:spcPts val="800"/>
+              </a:spcAft>
+              <a:defRPr sz="1800">
+                <a:solidFill>
+                  <a:srgbClr val="FAF9F5"/>
+                </a:solidFill>
+                <a:latin typeface="Hiragino Sans"/>
+              </a:defRPr>
+            </a:pPr>
+            <a:r>
+              <a:t>• ファイル閲覧・検索・Web検索は可能</a:t>
+            </a:r>
+          </a:p>
+          <a:p>
+            <a:pPr>
+              <a:lnSpc>
+                <a:spcPts val="2880"/>
+              </a:lnSpc>
+              <a:spcAft>
+                <a:spcPts val="800"/>
+              </a:spcAft>
+              <a:defRPr sz="1800">
+                <a:solidFill>
+                  <a:srgbClr val="FAF9F5"/>
+                </a:solidFill>
+                <a:latin typeface="Hiragino Sans"/>
+              </a:defRPr>
+            </a:pPr>
+            <a:r>
+              <a:t>• ファイル編集・コマンド実行は不可</a:t>
+            </a:r>
+          </a:p>
+          <a:p>
+            <a:pPr>
+              <a:lnSpc>
+                <a:spcPts val="2880"/>
+              </a:lnSpc>
+              <a:spcAft>
+                <a:spcPts val="800"/>
+              </a:spcAft>
+              <a:defRPr sz="1800">
+                <a:solidFill>
+                  <a:srgbClr val="FAF9F5"/>
+                </a:solidFill>
+                <a:latin typeface="Hiragino Sans"/>
+              </a:defRPr>
+            </a:pPr>
+            <a:r>
+              <a:t>• 調査と計画立案に集中するためのモード</a:t>
+            </a:r>
+          </a:p>
+        </p:txBody>
+      </p:sp>
+      <p:sp>
+        <p:nvSpPr>
+          <p:cNvPr id="5" name="TextBox 4"/>
+          <p:cNvSpPr txBox="1"/>
+          <p:nvPr/>
+        </p:nvSpPr>
+        <p:spPr>
+          <a:xfrm>
+            <a:off x="6400800" y="1828800"/>
+            <a:ext cx="4572000" cy="457200"/>
+          </a:xfrm>
+          <a:prstGeom prst="rect">
+            <a:avLst/>
+          </a:prstGeom>
+          <a:noFill/>
+        </p:spPr>
+        <p:txBody>
+          <a:bodyPr wrap="square">
+            <a:spAutoFit/>
+          </a:bodyPr>
+          <a:lstStyle/>
+          <a:p>
+            <a:pPr algn="l">
+              <a:lnSpc>
+                <a:spcPts val="3000"/>
+              </a:lnSpc>
+              <a:spcAft>
+                <a:spcPts val="0"/>
+              </a:spcAft>
+              <a:defRPr sz="2000" b="1">
+                <a:solidFill>
+                  <a:srgbClr val="D97757"/>
+                </a:solidFill>
+                <a:latin typeface="Hiragino Sans"/>
+              </a:defRPr>
+            </a:pPr>
+            <a:r>
+              <a:t>なぜ計画から始めるのか</a:t>
+            </a:r>
+          </a:p>
+        </p:txBody>
+      </p:sp>
+      <p:sp>
+        <p:nvSpPr>
+          <p:cNvPr id="6" name="Rounded Rectangle 5"/>
           <p:cNvSpPr/>
           <p:nvPr/>
         </p:nvSpPr>
         <p:spPr>
           <a:xfrm>
-            <a:off x="731520" y="1828800"/>
-            <a:ext cx="2468880" cy="822960"/>
+            <a:off x="6400800" y="2468880"/>
+            <a:ext cx="4572000" cy="731520"/>
           </a:xfrm>
           <a:prstGeom prst="roundRect">
             <a:avLst>
@@ -7428,56 +7574,56 @@
       </p:sp>
       <p:sp>
         <p:nvSpPr>
-          <p:cNvPr id="5" name="TextBox 4"/>
-          <p:cNvSpPr txBox="1"/>
-          <p:nvPr/>
-        </p:nvSpPr>
-        <p:spPr>
-          <a:xfrm>
-            <a:off x="822960" y="1965960"/>
-            <a:ext cx="2286000" cy="548640"/>
-          </a:xfrm>
-          <a:prstGeom prst="rect">
-            <a:avLst/>
-          </a:prstGeom>
-          <a:noFill/>
-        </p:spPr>
-        <p:txBody>
-          <a:bodyPr wrap="square">
-            <a:spAutoFit/>
-          </a:bodyPr>
-          <a:lstStyle/>
-          <a:p>
-            <a:pPr algn="ctr">
+          <p:cNvPr id="7" name="TextBox 6"/>
+          <p:cNvSpPr txBox="1"/>
+          <p:nvPr/>
+        </p:nvSpPr>
+        <p:spPr>
+          <a:xfrm>
+            <a:off x="6766560" y="2606040"/>
+            <a:ext cx="3840480" cy="457200"/>
+          </a:xfrm>
+          <a:prstGeom prst="rect">
+            <a:avLst/>
+          </a:prstGeom>
+          <a:noFill/>
+        </p:spPr>
+        <p:txBody>
+          <a:bodyPr wrap="square">
+            <a:spAutoFit/>
+          </a:bodyPr>
+          <a:lstStyle/>
+          <a:p>
+            <a:pPr algn="l">
               <a:lnSpc>
                 <a:spcPts val="2400"/>
               </a:lnSpc>
               <a:spcAft>
                 <a:spcPts val="0"/>
               </a:spcAft>
-              <a:defRPr sz="1600" b="1">
-                <a:solidFill>
-                  <a:srgbClr val="D97757"/>
+              <a:defRPr sz="1600" b="0">
+                <a:solidFill>
+                  <a:srgbClr val="C5C3BB"/>
                 </a:solidFill>
                 <a:latin typeface="Hiragino Sans"/>
               </a:defRPr>
             </a:pPr>
             <a:r>
-              <a:t>1. 指示を出す</a:t>
-            </a:r>
-          </a:p>
-        </p:txBody>
-      </p:sp>
-      <p:sp>
-        <p:nvSpPr>
-          <p:cNvPr id="6" name="Rounded Rectangle 5"/>
+              <a:t>計画段階で認識のズレに気づける</a:t>
+            </a:r>
+          </a:p>
+        </p:txBody>
+      </p:sp>
+      <p:sp>
+        <p:nvSpPr>
+          <p:cNvPr id="8" name="Rounded Rectangle 7"/>
           <p:cNvSpPr/>
           <p:nvPr/>
         </p:nvSpPr>
         <p:spPr>
           <a:xfrm>
-            <a:off x="3474720" y="1828800"/>
-            <a:ext cx="2468880" cy="822960"/>
+            <a:off x="6400800" y="3337560"/>
+            <a:ext cx="4572000" cy="731520"/>
           </a:xfrm>
           <a:prstGeom prst="roundRect">
             <a:avLst>
@@ -7515,56 +7661,56 @@
       </p:sp>
       <p:sp>
         <p:nvSpPr>
-          <p:cNvPr id="7" name="TextBox 6"/>
-          <p:cNvSpPr txBox="1"/>
-          <p:nvPr/>
-        </p:nvSpPr>
-        <p:spPr>
-          <a:xfrm>
-            <a:off x="3566160" y="1965960"/>
-            <a:ext cx="2286000" cy="548640"/>
-          </a:xfrm>
-          <a:prstGeom prst="rect">
-            <a:avLst/>
-          </a:prstGeom>
-          <a:noFill/>
-        </p:spPr>
-        <p:txBody>
-          <a:bodyPr wrap="square">
-            <a:spAutoFit/>
-          </a:bodyPr>
-          <a:lstStyle/>
-          <a:p>
-            <a:pPr algn="ctr">
+          <p:cNvPr id="9" name="TextBox 8"/>
+          <p:cNvSpPr txBox="1"/>
+          <p:nvPr/>
+        </p:nvSpPr>
+        <p:spPr>
+          <a:xfrm>
+            <a:off x="6766560" y="3474720"/>
+            <a:ext cx="3840480" cy="457200"/>
+          </a:xfrm>
+          <a:prstGeom prst="rect">
+            <a:avLst/>
+          </a:prstGeom>
+          <a:noFill/>
+        </p:spPr>
+        <p:txBody>
+          <a:bodyPr wrap="square">
+            <a:spAutoFit/>
+          </a:bodyPr>
+          <a:lstStyle/>
+          <a:p>
+            <a:pPr algn="l">
               <a:lnSpc>
                 <a:spcPts val="2400"/>
               </a:lnSpc>
               <a:spcAft>
                 <a:spcPts val="0"/>
               </a:spcAft>
-              <a:defRPr sz="1600" b="1">
-                <a:solidFill>
-                  <a:srgbClr val="FAF9F5"/>
+              <a:defRPr sz="1600" b="0">
+                <a:solidFill>
+                  <a:srgbClr val="C5C3BB"/>
                 </a:solidFill>
                 <a:latin typeface="Hiragino Sans"/>
               </a:defRPr>
             </a:pPr>
             <a:r>
-              <a:t>2. 出力を確認する</a:t>
-            </a:r>
-          </a:p>
-        </p:txBody>
-      </p:sp>
-      <p:sp>
-        <p:nvSpPr>
-          <p:cNvPr id="8" name="Rounded Rectangle 7"/>
+              <a:t>コードを壊すリスクがゼロ</a:t>
+            </a:r>
+          </a:p>
+        </p:txBody>
+      </p:sp>
+      <p:sp>
+        <p:nvSpPr>
+          <p:cNvPr id="10" name="Rounded Rectangle 9"/>
           <p:cNvSpPr/>
           <p:nvPr/>
         </p:nvSpPr>
         <p:spPr>
           <a:xfrm>
-            <a:off x="6217920" y="1828800"/>
-            <a:ext cx="2468880" cy="822960"/>
+            <a:off x="6400800" y="4206240"/>
+            <a:ext cx="4572000" cy="731520"/>
           </a:xfrm>
           <a:prstGeom prst="roundRect">
             <a:avLst>
@@ -7602,121 +7748,118 @@
       </p:sp>
       <p:sp>
         <p:nvSpPr>
-          <p:cNvPr id="9" name="TextBox 8"/>
-          <p:cNvSpPr txBox="1"/>
-          <p:nvPr/>
-        </p:nvSpPr>
-        <p:spPr>
-          <a:xfrm>
-            <a:off x="6309360" y="1965960"/>
-            <a:ext cx="2286000" cy="548640"/>
-          </a:xfrm>
-          <a:prstGeom prst="rect">
-            <a:avLst/>
-          </a:prstGeom>
-          <a:noFill/>
-        </p:spPr>
-        <p:txBody>
-          <a:bodyPr wrap="square">
-            <a:spAutoFit/>
-          </a:bodyPr>
-          <a:lstStyle/>
-          <a:p>
-            <a:pPr algn="ctr">
+          <p:cNvPr id="11" name="TextBox 10"/>
+          <p:cNvSpPr txBox="1"/>
+          <p:nvPr/>
+        </p:nvSpPr>
+        <p:spPr>
+          <a:xfrm>
+            <a:off x="6766560" y="4343400"/>
+            <a:ext cx="3840480" cy="457200"/>
+          </a:xfrm>
+          <a:prstGeom prst="rect">
+            <a:avLst/>
+          </a:prstGeom>
+          <a:noFill/>
+        </p:spPr>
+        <p:txBody>
+          <a:bodyPr wrap="square">
+            <a:spAutoFit/>
+          </a:bodyPr>
+          <a:lstStyle/>
+          <a:p>
+            <a:pPr algn="l">
               <a:lnSpc>
                 <a:spcPts val="2400"/>
               </a:lnSpc>
               <a:spcAft>
                 <a:spcPts val="0"/>
               </a:spcAft>
-              <a:defRPr sz="1600" b="1">
-                <a:solidFill>
-                  <a:srgbClr val="7BC9A0"/>
+              <a:defRPr sz="1600" b="0">
+                <a:solidFill>
+                  <a:srgbClr val="C5C3BB"/>
                 </a:solidFill>
                 <a:latin typeface="Hiragino Sans"/>
               </a:defRPr>
             </a:pPr>
             <a:r>
-              <a:t>3. 具体的にフィードバック</a:t>
-            </a:r>
-          </a:p>
-        </p:txBody>
-      </p:sp>
-      <p:sp>
-        <p:nvSpPr>
-          <p:cNvPr id="10" name="Rounded Rectangle 9"/>
-          <p:cNvSpPr/>
-          <p:nvPr/>
-        </p:nvSpPr>
-        <p:spPr>
-          <a:xfrm>
-            <a:off x="8961120" y="1828800"/>
-            <a:ext cx="2468880" cy="822960"/>
-          </a:xfrm>
-          <a:prstGeom prst="roundRect">
-            <a:avLst>
-              <a:gd name="adj" fmla="val 3000"/>
-            </a:avLst>
-          </a:prstGeom>
-          <a:solidFill>
-            <a:srgbClr val="252220"/>
-          </a:solidFill>
-          <a:ln>
-            <a:noFill/>
-          </a:ln>
-        </p:spPr>
-        <p:style>
-          <a:lnRef idx="1">
-            <a:schemeClr val="accent1"/>
-          </a:lnRef>
-          <a:fillRef idx="3">
-            <a:schemeClr val="accent1"/>
-          </a:fillRef>
-          <a:effectRef idx="2">
-            <a:schemeClr val="accent1"/>
-          </a:effectRef>
-          <a:fontRef idx="minor">
-            <a:schemeClr val="lt1"/>
-          </a:fontRef>
-        </p:style>
-        <p:txBody>
-          <a:bodyPr rtlCol="0" anchor="ctr"/>
-          <a:lstStyle/>
-          <a:p>
-            <a:pPr algn="ctr"/>
-          </a:p>
-        </p:txBody>
-      </p:sp>
-      <p:sp>
-        <p:nvSpPr>
-          <p:cNvPr id="11" name="TextBox 10"/>
-          <p:cNvSpPr txBox="1"/>
-          <p:nvPr/>
-        </p:nvSpPr>
-        <p:spPr>
-          <a:xfrm>
-            <a:off x="9052560" y="1965960"/>
-            <a:ext cx="2286000" cy="548640"/>
-          </a:xfrm>
-          <a:prstGeom prst="rect">
-            <a:avLst/>
-          </a:prstGeom>
-          <a:noFill/>
-        </p:spPr>
-        <p:txBody>
-          <a:bodyPr wrap="square">
-            <a:spAutoFit/>
-          </a:bodyPr>
-          <a:lstStyle/>
-          <a:p>
-            <a:pPr algn="ctr">
+              <a:t>手戻りを最小限にしてから実装に入れる</a:t>
+            </a:r>
+          </a:p>
+        </p:txBody>
+      </p:sp>
+      <p:sp>
+        <p:nvSpPr>
+          <p:cNvPr id="12" name="TextBox 11"/>
+          <p:cNvSpPr txBox="1"/>
+          <p:nvPr/>
+        </p:nvSpPr>
+        <p:spPr>
+          <a:xfrm>
+            <a:off x="731520" y="4754880"/>
+            <a:ext cx="5486400" cy="457200"/>
+          </a:xfrm>
+          <a:prstGeom prst="rect">
+            <a:avLst/>
+          </a:prstGeom>
+          <a:noFill/>
+        </p:spPr>
+        <p:txBody>
+          <a:bodyPr wrap="square">
+            <a:spAutoFit/>
+          </a:bodyPr>
+          <a:lstStyle/>
+          <a:p>
+            <a:pPr algn="l">
+              <a:lnSpc>
+                <a:spcPts val="3000"/>
+              </a:lnSpc>
+              <a:spcAft>
+                <a:spcPts val="0"/>
+              </a:spcAft>
+              <a:defRPr sz="2000" b="1">
+                <a:solidFill>
+                  <a:srgbClr val="D97757"/>
+                </a:solidFill>
+                <a:latin typeface="Hiragino Sans"/>
+              </a:defRPr>
+            </a:pPr>
+            <a:r>
+              <a:t>操作方法</a:t>
+            </a:r>
+          </a:p>
+        </p:txBody>
+      </p:sp>
+      <p:sp>
+        <p:nvSpPr>
+          <p:cNvPr id="13" name="TextBox 12"/>
+          <p:cNvSpPr txBox="1"/>
+          <p:nvPr/>
+        </p:nvSpPr>
+        <p:spPr>
+          <a:xfrm>
+            <a:off x="1097280" y="5303520"/>
+            <a:ext cx="9144000" cy="1188720"/>
+          </a:xfrm>
+          <a:prstGeom prst="rect">
+            <a:avLst/>
+          </a:prstGeom>
+          <a:noFill/>
+        </p:spPr>
+        <p:txBody>
+          <a:bodyPr wrap="square">
+            <a:spAutoFit/>
+          </a:bodyPr>
+          <a:lstStyle/>
+          <a:p>
+            <a:pPr>
               <a:lnSpc>
                 <a:spcPts val="2400"/>
               </a:lnSpc>
               <a:spcAft>
-                <a:spcPts val="0"/>
-              </a:spcAft>
-              <a:defRPr sz="1600" b="1">
+                <a:spcPts val="800"/>
+              </a:spcAft>
+              <a:defRPr sz="1600">
                 <a:solidFill>
                   <a:srgbClr val="FAF9F5"/>
                 </a:solidFill>
@@ -7724,41 +7867,18 @@
               </a:defRPr>
             </a:pPr>
             <a:r>
-              <a:t>4. 改善版を受け取る</a:t>
-            </a:r>
-          </a:p>
-        </p:txBody>
-      </p:sp>
-      <p:sp>
-        <p:nvSpPr>
-          <p:cNvPr id="12" name="TextBox 11"/>
-          <p:cNvSpPr txBox="1"/>
-          <p:nvPr/>
-        </p:nvSpPr>
-        <p:spPr>
-          <a:xfrm>
-            <a:off x="731520" y="3200400"/>
-            <a:ext cx="10058400" cy="457200"/>
-          </a:xfrm>
-          <a:prstGeom prst="rect">
-            <a:avLst/>
-          </a:prstGeom>
-          <a:noFill/>
-        </p:spPr>
-        <p:txBody>
-          <a:bodyPr wrap="square">
-            <a:spAutoFit/>
-          </a:bodyPr>
-          <a:lstStyle/>
-          <a:p>
-            <a:pPr algn="l">
-              <a:lnSpc>
-                <a:spcPts val="3300"/>
-              </a:lnSpc>
-              <a:spcAft>
-                <a:spcPts val="0"/>
-              </a:spcAft>
-              <a:defRPr sz="2200" b="1">
+              <a:t>• Shift+Tab で切替（Normal → Auto Accept → Plan）</a:t>
+            </a:r>
+          </a:p>
+          <a:p>
+            <a:pPr>
+              <a:lnSpc>
+                <a:spcPts val="2400"/>
+              </a:lnSpc>
+              <a:spcAft>
+                <a:spcPts val="800"/>
+              </a:spcAft>
+              <a:defRPr sz="1600">
                 <a:solidFill>
                   <a:srgbClr val="FAF9F5"/>
                 </a:solidFill>
@@ -7766,49 +7886,7 @@
               </a:defRPr>
             </a:pPr>
             <a:r>
-              <a:t>実践テクニック</a:t>
-            </a:r>
-          </a:p>
-        </p:txBody>
-      </p:sp>
-      <p:sp>
-        <p:nvSpPr>
-          <p:cNvPr id="13" name="TextBox 12"/>
-          <p:cNvSpPr txBox="1"/>
-          <p:nvPr/>
-        </p:nvSpPr>
-        <p:spPr>
-          <a:xfrm>
-            <a:off x="1097280" y="3840480"/>
-            <a:ext cx="3200400" cy="457200"/>
-          </a:xfrm>
-          <a:prstGeom prst="rect">
-            <a:avLst/>
-          </a:prstGeom>
-          <a:noFill/>
-        </p:spPr>
-        <p:txBody>
-          <a:bodyPr wrap="square">
-            <a:spAutoFit/>
-          </a:bodyPr>
-          <a:lstStyle/>
-          <a:p>
-            <a:pPr algn="l">
-              <a:lnSpc>
-                <a:spcPts val="2550"/>
-              </a:lnSpc>
-              <a:spcAft>
-                <a:spcPts val="0"/>
-              </a:spcAft>
-              <a:defRPr sz="1700" b="1">
-                <a:solidFill>
-                  <a:srgbClr val="6A9BCC"/>
-                </a:solidFill>
-                <a:latin typeface="Hiragino Sans"/>
-              </a:defRPr>
-            </a:pPr>
-            <a:r>
-              <a:t>「なぜ」を聞く</a:t>
+              <a:t>• claude --permission-mode plan で起動</a:t>
             </a:r>
           </a:p>
         </p:txBody>
@@ -7816,300 +7894,6 @@
       <p:sp>
         <p:nvSpPr>
           <p:cNvPr id="14" name="TextBox 13"/>
-          <p:cNvSpPr txBox="1"/>
-          <p:nvPr/>
-        </p:nvSpPr>
-        <p:spPr>
-          <a:xfrm>
-            <a:off x="4572000" y="3840480"/>
-            <a:ext cx="6400800" cy="457200"/>
-          </a:xfrm>
-          <a:prstGeom prst="rect">
-            <a:avLst/>
-          </a:prstGeom>
-          <a:noFill/>
-        </p:spPr>
-        <p:txBody>
-          <a:bodyPr wrap="square">
-            <a:spAutoFit/>
-          </a:bodyPr>
-          <a:lstStyle/>
-          <a:p>
-            <a:pPr algn="l">
-              <a:lnSpc>
-                <a:spcPts val="2250"/>
-              </a:lnSpc>
-              <a:spcAft>
-                <a:spcPts val="0"/>
-              </a:spcAft>
-              <a:defRPr sz="1500" b="0">
-                <a:solidFill>
-                  <a:srgbClr val="C5C3BB"/>
-                </a:solidFill>
-                <a:latin typeface="Hiragino Sans"/>
-              </a:defRPr>
-            </a:pPr>
-            <a:r>
-              <a:t>期待と違う動きをしたら、すぐ修正を指示する前に理由を聞く</a:t>
-            </a:r>
-          </a:p>
-        </p:txBody>
-      </p:sp>
-      <p:sp>
-        <p:nvSpPr>
-          <p:cNvPr id="15" name="TextBox 14"/>
-          <p:cNvSpPr txBox="1"/>
-          <p:nvPr/>
-        </p:nvSpPr>
-        <p:spPr>
-          <a:xfrm>
-            <a:off x="1097280" y="4480560"/>
-            <a:ext cx="3200400" cy="457200"/>
-          </a:xfrm>
-          <a:prstGeom prst="rect">
-            <a:avLst/>
-          </a:prstGeom>
-          <a:noFill/>
-        </p:spPr>
-        <p:txBody>
-          <a:bodyPr wrap="square">
-            <a:spAutoFit/>
-          </a:bodyPr>
-          <a:lstStyle/>
-          <a:p>
-            <a:pPr algn="l">
-              <a:lnSpc>
-                <a:spcPts val="2550"/>
-              </a:lnSpc>
-              <a:spcAft>
-                <a:spcPts val="0"/>
-              </a:spcAft>
-              <a:defRPr sz="1700" b="1">
-                <a:solidFill>
-                  <a:srgbClr val="6A9BCC"/>
-                </a:solidFill>
-                <a:latin typeface="Hiragino Sans"/>
-              </a:defRPr>
-            </a:pPr>
-            <a:r>
-              <a:t>提案形式で伝える</a:t>
-            </a:r>
-          </a:p>
-        </p:txBody>
-      </p:sp>
-      <p:sp>
-        <p:nvSpPr>
-          <p:cNvPr id="16" name="TextBox 15"/>
-          <p:cNvSpPr txBox="1"/>
-          <p:nvPr/>
-        </p:nvSpPr>
-        <p:spPr>
-          <a:xfrm>
-            <a:off x="4572000" y="4480560"/>
-            <a:ext cx="6400800" cy="457200"/>
-          </a:xfrm>
-          <a:prstGeom prst="rect">
-            <a:avLst/>
-          </a:prstGeom>
-          <a:noFill/>
-        </p:spPr>
-        <p:txBody>
-          <a:bodyPr wrap="square">
-            <a:spAutoFit/>
-          </a:bodyPr>
-          <a:lstStyle/>
-          <a:p>
-            <a:pPr algn="l">
-              <a:lnSpc>
-                <a:spcPts val="2250"/>
-              </a:lnSpc>
-              <a:spcAft>
-                <a:spcPts val="0"/>
-              </a:spcAft>
-              <a:defRPr sz="1500" b="0">
-                <a:solidFill>
-                  <a:srgbClr val="C5C3BB"/>
-                </a:solidFill>
-                <a:latin typeface="Hiragino Sans"/>
-              </a:defRPr>
-            </a:pPr>
-            <a:r>
-              <a:t>「Xをして」より「Xを考えているが、どう思うか」</a:t>
-            </a:r>
-          </a:p>
-        </p:txBody>
-      </p:sp>
-      <p:sp>
-        <p:nvSpPr>
-          <p:cNvPr id="17" name="TextBox 16"/>
-          <p:cNvSpPr txBox="1"/>
-          <p:nvPr/>
-        </p:nvSpPr>
-        <p:spPr>
-          <a:xfrm>
-            <a:off x="1097280" y="5120640"/>
-            <a:ext cx="3200400" cy="457200"/>
-          </a:xfrm>
-          <a:prstGeom prst="rect">
-            <a:avLst/>
-          </a:prstGeom>
-          <a:noFill/>
-        </p:spPr>
-        <p:txBody>
-          <a:bodyPr wrap="square">
-            <a:spAutoFit/>
-          </a:bodyPr>
-          <a:lstStyle/>
-          <a:p>
-            <a:pPr algn="l">
-              <a:lnSpc>
-                <a:spcPts val="2550"/>
-              </a:lnSpc>
-              <a:spcAft>
-                <a:spcPts val="0"/>
-              </a:spcAft>
-              <a:defRPr sz="1700" b="1">
-                <a:solidFill>
-                  <a:srgbClr val="6A9BCC"/>
-                </a:solidFill>
-                <a:latin typeface="Hiragino Sans"/>
-              </a:defRPr>
-            </a:pPr>
-            <a:r>
-              <a:t>手直ししたら伝える</a:t>
-            </a:r>
-          </a:p>
-        </p:txBody>
-      </p:sp>
-      <p:sp>
-        <p:nvSpPr>
-          <p:cNvPr id="18" name="TextBox 17"/>
-          <p:cNvSpPr txBox="1"/>
-          <p:nvPr/>
-        </p:nvSpPr>
-        <p:spPr>
-          <a:xfrm>
-            <a:off x="4572000" y="5120640"/>
-            <a:ext cx="6400800" cy="457200"/>
-          </a:xfrm>
-          <a:prstGeom prst="rect">
-            <a:avLst/>
-          </a:prstGeom>
-          <a:noFill/>
-        </p:spPr>
-        <p:txBody>
-          <a:bodyPr wrap="square">
-            <a:spAutoFit/>
-          </a:bodyPr>
-          <a:lstStyle/>
-          <a:p>
-            <a:pPr algn="l">
-              <a:lnSpc>
-                <a:spcPts val="2250"/>
-              </a:lnSpc>
-              <a:spcAft>
-                <a:spcPts val="0"/>
-              </a:spcAft>
-              <a:defRPr sz="1500" b="0">
-                <a:solidFill>
-                  <a:srgbClr val="C5C3BB"/>
-                </a:solidFill>
-                <a:latin typeface="Hiragino Sans"/>
-              </a:defRPr>
-            </a:pPr>
-            <a:r>
-              <a:t>自分で編集した場合はClaudeに共有する</a:t>
-            </a:r>
-          </a:p>
-        </p:txBody>
-      </p:sp>
-      <p:sp>
-        <p:nvSpPr>
-          <p:cNvPr id="19" name="TextBox 18"/>
-          <p:cNvSpPr txBox="1"/>
-          <p:nvPr/>
-        </p:nvSpPr>
-        <p:spPr>
-          <a:xfrm>
-            <a:off x="1097280" y="5760720"/>
-            <a:ext cx="3200400" cy="457200"/>
-          </a:xfrm>
-          <a:prstGeom prst="rect">
-            <a:avLst/>
-          </a:prstGeom>
-          <a:noFill/>
-        </p:spPr>
-        <p:txBody>
-          <a:bodyPr wrap="square">
-            <a:spAutoFit/>
-          </a:bodyPr>
-          <a:lstStyle/>
-          <a:p>
-            <a:pPr algn="l">
-              <a:lnSpc>
-                <a:spcPts val="2550"/>
-              </a:lnSpc>
-              <a:spcAft>
-                <a:spcPts val="0"/>
-              </a:spcAft>
-              <a:defRPr sz="1700" b="1">
-                <a:solidFill>
-                  <a:srgbClr val="6A9BCC"/>
-                </a:solidFill>
-                <a:latin typeface="Hiragino Sans"/>
-              </a:defRPr>
-            </a:pPr>
-            <a:r>
-              <a:t>初回で完璧を求めない</a:t>
-            </a:r>
-          </a:p>
-        </p:txBody>
-      </p:sp>
-      <p:sp>
-        <p:nvSpPr>
-          <p:cNvPr id="20" name="TextBox 19"/>
-          <p:cNvSpPr txBox="1"/>
-          <p:nvPr/>
-        </p:nvSpPr>
-        <p:spPr>
-          <a:xfrm>
-            <a:off x="4572000" y="5760720"/>
-            <a:ext cx="6400800" cy="457200"/>
-          </a:xfrm>
-          <a:prstGeom prst="rect">
-            <a:avLst/>
-          </a:prstGeom>
-          <a:noFill/>
-        </p:spPr>
-        <p:txBody>
-          <a:bodyPr wrap="square">
-            <a:spAutoFit/>
-          </a:bodyPr>
-          <a:lstStyle/>
-          <a:p>
-            <a:pPr algn="l">
-              <a:lnSpc>
-                <a:spcPts val="2250"/>
-              </a:lnSpc>
-              <a:spcAft>
-                <a:spcPts val="0"/>
-              </a:spcAft>
-              <a:defRPr sz="1500" b="0">
-                <a:solidFill>
-                  <a:srgbClr val="C5C3BB"/>
-                </a:solidFill>
-                <a:latin typeface="Hiragino Sans"/>
-              </a:defRPr>
-            </a:pPr>
-            <a:r>
-              <a:t>「全然違う」より「この部分は良い、ここを変えて」</a:t>
-            </a:r>
-          </a:p>
-        </p:txBody>
-      </p:sp>
-      <p:sp>
-        <p:nvSpPr>
-          <p:cNvPr id="21" name="TextBox 20"/>
           <p:cNvSpPr txBox="1"/>
           <p:nvPr/>
         </p:nvSpPr>
@@ -8144,201 +7928,7 @@
               </a:defRPr>
             </a:pPr>
             <a:r>
-              <a:t>12 / 17</a:t>
-            </a:r>
-          </a:p>
-        </p:txBody>
-      </p:sp>
-    </p:spTree>
-  </p:cSld>
-  <p:clrMapOvr>
-    <a:masterClrMapping/>
-  </p:clrMapOvr>
-</p:sld>
-</file>
-
-<file path=ppt/slides/slide13.xml><?xml version="1.0" encoding="utf-8"?>
-<p:sld xmlns:a="http://schemas.openxmlformats.org/drawingml/2006/main" xmlns:p="http://schemas.openxmlformats.org/presentationml/2006/main" xmlns:r="http://schemas.openxmlformats.org/officeDocument/2006/relationships">
-  <p:cSld>
-    <p:bg>
-      <p:bgPr>
-        <a:solidFill>
-          <a:srgbClr val="231F1D"/>
-        </a:solidFill>
-        <a:effectLst/>
-      </p:bgPr>
-    </p:bg>
-    <p:spTree>
-      <p:nvGrpSpPr>
-        <p:cNvPr id="1" name=""/>
-        <p:cNvGrpSpPr/>
-        <p:nvPr/>
-      </p:nvGrpSpPr>
-      <p:grpSpPr/>
-      <p:sp>
-        <p:nvSpPr>
-          <p:cNvPr id="2" name="TextBox 1"/>
-          <p:cNvSpPr txBox="1"/>
-          <p:nvPr/>
-        </p:nvSpPr>
-        <p:spPr>
-          <a:xfrm>
-            <a:off x="1371600" y="1371600"/>
-            <a:ext cx="9144000" cy="457200"/>
-          </a:xfrm>
-          <a:prstGeom prst="rect">
-            <a:avLst/>
-          </a:prstGeom>
-          <a:noFill/>
-        </p:spPr>
-        <p:txBody>
-          <a:bodyPr wrap="square">
-            <a:spAutoFit/>
-          </a:bodyPr>
-          <a:lstStyle/>
-          <a:p>
-            <a:pPr algn="ctr">
-              <a:lnSpc>
-                <a:spcPts val="2700"/>
-              </a:lnSpc>
-              <a:spcAft>
-                <a:spcPts val="0"/>
-              </a:spcAft>
-              <a:defRPr sz="1800" b="1">
-                <a:solidFill>
-                  <a:srgbClr val="D97757"/>
-                </a:solidFill>
-                <a:latin typeface="Helvetica Neue"/>
-              </a:defRPr>
-            </a:pPr>
-            <a:r>
-              <a:t>PART 3</a:t>
-            </a:r>
-          </a:p>
-        </p:txBody>
-      </p:sp>
-      <p:sp>
-        <p:nvSpPr>
-          <p:cNvPr id="3" name="TextBox 2"/>
-          <p:cNvSpPr txBox="1"/>
-          <p:nvPr/>
-        </p:nvSpPr>
-        <p:spPr>
-          <a:xfrm>
-            <a:off x="1371600" y="2103120"/>
-            <a:ext cx="9144000" cy="914400"/>
-          </a:xfrm>
-          <a:prstGeom prst="rect">
-            <a:avLst/>
-          </a:prstGeom>
-          <a:noFill/>
-        </p:spPr>
-        <p:txBody>
-          <a:bodyPr wrap="square">
-            <a:spAutoFit/>
-          </a:bodyPr>
-          <a:lstStyle/>
-          <a:p>
-            <a:pPr algn="ctr">
-              <a:lnSpc>
-                <a:spcPts val="6600"/>
-              </a:lnSpc>
-              <a:spcAft>
-                <a:spcPts val="0"/>
-              </a:spcAft>
-              <a:defRPr sz="4400" b="1">
-                <a:solidFill>
-                  <a:srgbClr val="FAF9F5"/>
-                </a:solidFill>
-                <a:latin typeface="Helvetica Neue"/>
-              </a:defRPr>
-            </a:pPr>
-            <a:r>
-              <a:t>Plan Mode</a:t>
-            </a:r>
-          </a:p>
-        </p:txBody>
-      </p:sp>
-      <p:sp>
-        <p:nvSpPr>
-          <p:cNvPr id="4" name="TextBox 3"/>
-          <p:cNvSpPr txBox="1"/>
-          <p:nvPr/>
-        </p:nvSpPr>
-        <p:spPr>
-          <a:xfrm>
-            <a:off x="1371600" y="3657600"/>
-            <a:ext cx="9144000" cy="914400"/>
-          </a:xfrm>
-          <a:prstGeom prst="rect">
-            <a:avLst/>
-          </a:prstGeom>
-          <a:noFill/>
-        </p:spPr>
-        <p:txBody>
-          <a:bodyPr wrap="square">
-            <a:spAutoFit/>
-          </a:bodyPr>
-          <a:lstStyle/>
-          <a:p>
-            <a:pPr algn="ctr">
-              <a:lnSpc>
-                <a:spcPts val="3600"/>
-              </a:lnSpc>
-              <a:spcAft>
-                <a:spcPts val="0"/>
-              </a:spcAft>
-              <a:defRPr sz="2400" b="0">
-                <a:solidFill>
-                  <a:srgbClr val="C5C3BB"/>
-                </a:solidFill>
-                <a:latin typeface="Hiragino Sans"/>
-              </a:defRPr>
-            </a:pPr>
-            <a:r>
-              <a:t>いきなりコードを書かせない</a:t>
-            </a:r>
-          </a:p>
-        </p:txBody>
-      </p:sp>
-      <p:sp>
-        <p:nvSpPr>
-          <p:cNvPr id="5" name="TextBox 4"/>
-          <p:cNvSpPr txBox="1"/>
-          <p:nvPr/>
-        </p:nvSpPr>
-        <p:spPr>
-          <a:xfrm>
-            <a:off x="11277295" y="6400800"/>
-            <a:ext cx="731520" cy="274320"/>
-          </a:xfrm>
-          <a:prstGeom prst="rect">
-            <a:avLst/>
-          </a:prstGeom>
-          <a:noFill/>
-        </p:spPr>
-        <p:txBody>
-          <a:bodyPr wrap="square">
-            <a:spAutoFit/>
-          </a:bodyPr>
-          <a:lstStyle/>
-          <a:p>
-            <a:pPr algn="r">
-              <a:lnSpc>
-                <a:spcPts val="1500"/>
-              </a:lnSpc>
-              <a:spcAft>
-                <a:spcPts val="0"/>
-              </a:spcAft>
-              <a:defRPr sz="1000" b="0">
-                <a:solidFill>
-                  <a:srgbClr val="B0AEA5"/>
-                </a:solidFill>
-                <a:latin typeface="Helvetica Neue"/>
-              </a:defRPr>
-            </a:pPr>
-            <a:r>
-              <a:t>13 / 17</a:t>
+              <a:t>13 / 16</a:t>
             </a:r>
           </a:p>
         </p:txBody>
@@ -8448,170 +8038,25 @@
               </a:defRPr>
             </a:pPr>
             <a:r>
-              <a:t>Plan Mode とは</a:t>
-            </a:r>
-          </a:p>
-        </p:txBody>
-      </p:sp>
-      <p:sp>
-        <p:nvSpPr>
-          <p:cNvPr id="4" name="TextBox 3"/>
-          <p:cNvSpPr txBox="1"/>
-          <p:nvPr/>
-        </p:nvSpPr>
-        <p:spPr>
-          <a:xfrm>
-            <a:off x="731520" y="1828800"/>
-            <a:ext cx="5029200" cy="2560320"/>
-          </a:xfrm>
-          <a:prstGeom prst="rect">
-            <a:avLst/>
-          </a:prstGeom>
-          <a:noFill/>
-        </p:spPr>
-        <p:txBody>
-          <a:bodyPr wrap="square">
-            <a:spAutoFit/>
-          </a:bodyPr>
-          <a:lstStyle/>
-          <a:p>
-            <a:pPr>
-              <a:lnSpc>
-                <a:spcPts val="2880"/>
-              </a:lnSpc>
-              <a:spcAft>
-                <a:spcPts val="800"/>
-              </a:spcAft>
-              <a:defRPr sz="1800">
-                <a:solidFill>
-                  <a:srgbClr val="FAF9F5"/>
-                </a:solidFill>
-                <a:latin typeface="Hiragino Sans"/>
-              </a:defRPr>
-            </a:pPr>
-            <a:r>
-              <a:t>• 読み取り専用の実行モード</a:t>
-            </a:r>
-          </a:p>
-          <a:p>
-            <a:pPr>
-              <a:lnSpc>
-                <a:spcPts val="2880"/>
-              </a:lnSpc>
-              <a:spcAft>
-                <a:spcPts val="800"/>
-              </a:spcAft>
-              <a:defRPr sz="1800">
-                <a:solidFill>
-                  <a:srgbClr val="FAF9F5"/>
-                </a:solidFill>
-                <a:latin typeface="Hiragino Sans"/>
-              </a:defRPr>
-            </a:pPr>
-            <a:r>
-              <a:t>• ファイル閲覧・検索は可能</a:t>
-            </a:r>
-            <a:br/>
-            <a:r>
-              <a:t>  Webアクセスは権限設定次第</a:t>
-            </a:r>
-          </a:p>
-          <a:p>
-            <a:pPr>
-              <a:lnSpc>
-                <a:spcPts val="2880"/>
-              </a:lnSpc>
-              <a:spcAft>
-                <a:spcPts val="800"/>
-              </a:spcAft>
-              <a:defRPr sz="1800">
-                <a:solidFill>
-                  <a:srgbClr val="FAF9F5"/>
-                </a:solidFill>
-                <a:latin typeface="Hiragino Sans"/>
-              </a:defRPr>
-            </a:pPr>
-            <a:r>
-              <a:t>• ファイル編集・コマンド実行は不可</a:t>
-            </a:r>
-          </a:p>
-          <a:p>
-            <a:pPr>
-              <a:lnSpc>
-                <a:spcPts val="2880"/>
-              </a:lnSpc>
-              <a:spcAft>
-                <a:spcPts val="800"/>
-              </a:spcAft>
-              <a:defRPr sz="1800">
-                <a:solidFill>
-                  <a:srgbClr val="FAF9F5"/>
-                </a:solidFill>
-                <a:latin typeface="Hiragino Sans"/>
-              </a:defRPr>
-            </a:pPr>
-            <a:r>
-              <a:t>• 調査と計画立案に集中するためのモード</a:t>
-            </a:r>
-          </a:p>
-        </p:txBody>
-      </p:sp>
-      <p:sp>
-        <p:nvSpPr>
-          <p:cNvPr id="5" name="TextBox 4"/>
-          <p:cNvSpPr txBox="1"/>
-          <p:nvPr/>
-        </p:nvSpPr>
-        <p:spPr>
-          <a:xfrm>
-            <a:off x="6400800" y="1828800"/>
-            <a:ext cx="4572000" cy="457200"/>
-          </a:xfrm>
-          <a:prstGeom prst="rect">
-            <a:avLst/>
-          </a:prstGeom>
-          <a:noFill/>
-        </p:spPr>
-        <p:txBody>
-          <a:bodyPr wrap="square">
-            <a:spAutoFit/>
-          </a:bodyPr>
-          <a:lstStyle/>
-          <a:p>
-            <a:pPr algn="l">
-              <a:lnSpc>
-                <a:spcPts val="3000"/>
-              </a:lnSpc>
-              <a:spcAft>
-                <a:spcPts val="0"/>
-              </a:spcAft>
-              <a:defRPr sz="2000" b="1">
-                <a:solidFill>
-                  <a:srgbClr val="D97757"/>
-                </a:solidFill>
-                <a:latin typeface="Hiragino Sans"/>
-              </a:defRPr>
-            </a:pPr>
-            <a:r>
-              <a:t>ポイント</a:t>
-            </a:r>
-          </a:p>
-        </p:txBody>
-      </p:sp>
-      <p:sp>
-        <p:nvSpPr>
-          <p:cNvPr id="6" name="Rounded Rectangle 5"/>
+              <a:t>Plan Mode の実践ワークフロー</a:t>
+            </a:r>
+          </a:p>
+        </p:txBody>
+      </p:sp>
+      <p:sp>
+        <p:nvSpPr>
+          <p:cNvPr id="4" name="Rounded Rectangle 3"/>
           <p:cNvSpPr/>
           <p:nvPr/>
         </p:nvSpPr>
         <p:spPr>
           <a:xfrm>
-            <a:off x="6400800" y="2468880"/>
-            <a:ext cx="4572000" cy="731520"/>
+            <a:off x="731520" y="1737360"/>
+            <a:ext cx="10515600" cy="822960"/>
           </a:xfrm>
           <a:prstGeom prst="roundRect">
             <a:avLst>
-              <a:gd name="adj" fmla="val 3000"/>
+              <a:gd name="adj" fmla="val 2000"/>
             </a:avLst>
           </a:prstGeom>
           <a:solidFill>
@@ -8645,14 +8090,98 @@
       </p:sp>
       <p:sp>
         <p:nvSpPr>
+          <p:cNvPr id="5" name="TextBox 4"/>
+          <p:cNvSpPr txBox="1"/>
+          <p:nvPr/>
+        </p:nvSpPr>
+        <p:spPr>
+          <a:xfrm>
+            <a:off x="1097280" y="1783080"/>
+            <a:ext cx="1097280" cy="365760"/>
+          </a:xfrm>
+          <a:prstGeom prst="rect">
+            <a:avLst/>
+          </a:prstGeom>
+          <a:noFill/>
+        </p:spPr>
+        <p:txBody>
+          <a:bodyPr wrap="square">
+            <a:spAutoFit/>
+          </a:bodyPr>
+          <a:lstStyle/>
+          <a:p>
+            <a:pPr algn="l">
+              <a:lnSpc>
+                <a:spcPts val="2100"/>
+              </a:lnSpc>
+              <a:spcAft>
+                <a:spcPts val="0"/>
+              </a:spcAft>
+              <a:defRPr sz="1400" b="1">
+                <a:solidFill>
+                  <a:srgbClr val="7BC9A0"/>
+                </a:solidFill>
+                <a:latin typeface="Helvetica Neue"/>
+              </a:defRPr>
+            </a:pPr>
+            <a:r>
+              <a:t>Step 1</a:t>
+            </a:r>
+          </a:p>
+        </p:txBody>
+      </p:sp>
+      <p:sp>
+        <p:nvSpPr>
+          <p:cNvPr id="6" name="TextBox 5"/>
+          <p:cNvSpPr txBox="1"/>
+          <p:nvPr/>
+        </p:nvSpPr>
+        <p:spPr>
+          <a:xfrm>
+            <a:off x="2286000" y="1783080"/>
+            <a:ext cx="3200400" cy="365760"/>
+          </a:xfrm>
+          <a:prstGeom prst="rect">
+            <a:avLst/>
+          </a:prstGeom>
+          <a:noFill/>
+        </p:spPr>
+        <p:txBody>
+          <a:bodyPr wrap="square">
+            <a:spAutoFit/>
+          </a:bodyPr>
+          <a:lstStyle/>
+          <a:p>
+            <a:pPr algn="l">
+              <a:lnSpc>
+                <a:spcPts val="2550"/>
+              </a:lnSpc>
+              <a:spcAft>
+                <a:spcPts val="0"/>
+              </a:spcAft>
+              <a:defRPr sz="1700" b="1">
+                <a:solidFill>
+                  <a:srgbClr val="FAF9F5"/>
+                </a:solidFill>
+                <a:latin typeface="Hiragino Sans"/>
+              </a:defRPr>
+            </a:pPr>
+            <a:r>
+              <a:t>Plan Mode で調査・計画</a:t>
+            </a:r>
+          </a:p>
+        </p:txBody>
+      </p:sp>
+      <p:sp>
+        <p:nvSpPr>
           <p:cNvPr id="7" name="TextBox 6"/>
           <p:cNvSpPr txBox="1"/>
           <p:nvPr/>
         </p:nvSpPr>
         <p:spPr>
           <a:xfrm>
-            <a:off x="6766560" y="2606040"/>
-            <a:ext cx="3840480" cy="457200"/>
+            <a:off x="1097280" y="2176272"/>
+            <a:ext cx="4572000" cy="365760"/>
           </a:xfrm>
           <a:prstGeom prst="rect">
             <a:avLst/>
@@ -8667,12 +8196,54 @@
           <a:p>
             <a:pPr algn="l">
               <a:lnSpc>
-                <a:spcPts val="2400"/>
-              </a:lnSpc>
-              <a:spcAft>
-                <a:spcPts val="0"/>
-              </a:spcAft>
-              <a:defRPr sz="1600" b="0">
+                <a:spcPts val="1950"/>
+              </a:lnSpc>
+              <a:spcAft>
+                <a:spcPts val="0"/>
+              </a:spcAft>
+              <a:defRPr sz="1300" b="0">
+                <a:solidFill>
+                  <a:srgbClr val="6A9BCC"/>
+                </a:solidFill>
+                <a:latin typeface="SF Mono"/>
+              </a:defRPr>
+            </a:pPr>
+            <a:r>
+              <a:t>「計画を立てて。実装はまだしないで。」</a:t>
+            </a:r>
+          </a:p>
+        </p:txBody>
+      </p:sp>
+      <p:sp>
+        <p:nvSpPr>
+          <p:cNvPr id="8" name="TextBox 7"/>
+          <p:cNvSpPr txBox="1"/>
+          <p:nvPr/>
+        </p:nvSpPr>
+        <p:spPr>
+          <a:xfrm>
+            <a:off x="6400800" y="1965960"/>
+            <a:ext cx="4572000" cy="457200"/>
+          </a:xfrm>
+          <a:prstGeom prst="rect">
+            <a:avLst/>
+          </a:prstGeom>
+          <a:noFill/>
+        </p:spPr>
+        <p:txBody>
+          <a:bodyPr wrap="square">
+            <a:spAutoFit/>
+          </a:bodyPr>
+          <a:lstStyle/>
+          <a:p>
+            <a:pPr algn="l">
+              <a:lnSpc>
+                <a:spcPts val="2100"/>
+              </a:lnSpc>
+              <a:spcAft>
+                <a:spcPts val="0"/>
+              </a:spcAft>
+              <a:defRPr sz="1400" b="0">
                 <a:solidFill>
                   <a:srgbClr val="C5C3BB"/>
                 </a:solidFill>
@@ -8680,25 +8251,25 @@
               </a:defRPr>
             </a:pPr>
             <a:r>
-              <a:t>まずPlan Modeで調査・計画を固める</a:t>
-            </a:r>
-          </a:p>
-        </p:txBody>
-      </p:sp>
-      <p:sp>
-        <p:nvSpPr>
-          <p:cNvPr id="8" name="Rounded Rectangle 7"/>
+              <a:t>Claudeがコードを読み、方針を提案する</a:t>
+            </a:r>
+          </a:p>
+        </p:txBody>
+      </p:sp>
+      <p:sp>
+        <p:nvSpPr>
+          <p:cNvPr id="9" name="Rounded Rectangle 8"/>
           <p:cNvSpPr/>
           <p:nvPr/>
         </p:nvSpPr>
         <p:spPr>
           <a:xfrm>
-            <a:off x="6400800" y="3337560"/>
-            <a:ext cx="4572000" cy="731520"/>
+            <a:off x="731520" y="2697480"/>
+            <a:ext cx="10515600" cy="822960"/>
           </a:xfrm>
           <a:prstGeom prst="roundRect">
             <a:avLst>
-              <a:gd name="adj" fmla="val 3000"/>
+              <a:gd name="adj" fmla="val 2000"/>
             </a:avLst>
           </a:prstGeom>
           <a:solidFill>
@@ -8732,14 +8303,14 @@
       </p:sp>
       <p:sp>
         <p:nvSpPr>
-          <p:cNvPr id="9" name="TextBox 8"/>
-          <p:cNvSpPr txBox="1"/>
-          <p:nvPr/>
-        </p:nvSpPr>
-        <p:spPr>
-          <a:xfrm>
-            <a:off x="6766560" y="3474720"/>
-            <a:ext cx="3840480" cy="457200"/>
+          <p:cNvPr id="10" name="TextBox 9"/>
+          <p:cNvSpPr txBox="1"/>
+          <p:nvPr/>
+        </p:nvSpPr>
+        <p:spPr>
+          <a:xfrm>
+            <a:off x="1097280" y="2743200"/>
+            <a:ext cx="1097280" cy="365760"/>
           </a:xfrm>
           <a:prstGeom prst="rect">
             <a:avLst/>
@@ -8754,12 +8325,138 @@
           <a:p>
             <a:pPr algn="l">
               <a:lnSpc>
-                <a:spcPts val="2400"/>
-              </a:lnSpc>
-              <a:spcAft>
-                <a:spcPts val="0"/>
-              </a:spcAft>
-              <a:defRPr sz="1600" b="0">
+                <a:spcPts val="2100"/>
+              </a:lnSpc>
+              <a:spcAft>
+                <a:spcPts val="0"/>
+              </a:spcAft>
+              <a:defRPr sz="1400" b="1">
+                <a:solidFill>
+                  <a:srgbClr val="6A9BCC"/>
+                </a:solidFill>
+                <a:latin typeface="Helvetica Neue"/>
+              </a:defRPr>
+            </a:pPr>
+            <a:r>
+              <a:t>Step 2</a:t>
+            </a:r>
+          </a:p>
+        </p:txBody>
+      </p:sp>
+      <p:sp>
+        <p:nvSpPr>
+          <p:cNvPr id="11" name="TextBox 10"/>
+          <p:cNvSpPr txBox="1"/>
+          <p:nvPr/>
+        </p:nvSpPr>
+        <p:spPr>
+          <a:xfrm>
+            <a:off x="2286000" y="2743200"/>
+            <a:ext cx="3200400" cy="365760"/>
+          </a:xfrm>
+          <a:prstGeom prst="rect">
+            <a:avLst/>
+          </a:prstGeom>
+          <a:noFill/>
+        </p:spPr>
+        <p:txBody>
+          <a:bodyPr wrap="square">
+            <a:spAutoFit/>
+          </a:bodyPr>
+          <a:lstStyle/>
+          <a:p>
+            <a:pPr algn="l">
+              <a:lnSpc>
+                <a:spcPts val="2550"/>
+              </a:lnSpc>
+              <a:spcAft>
+                <a:spcPts val="0"/>
+              </a:spcAft>
+              <a:defRPr sz="1700" b="1">
+                <a:solidFill>
+                  <a:srgbClr val="FAF9F5"/>
+                </a:solidFill>
+                <a:latin typeface="Hiragino Sans"/>
+              </a:defRPr>
+            </a:pPr>
+            <a:r>
+              <a:t>計画をレビュー</a:t>
+            </a:r>
+          </a:p>
+        </p:txBody>
+      </p:sp>
+      <p:sp>
+        <p:nvSpPr>
+          <p:cNvPr id="12" name="TextBox 11"/>
+          <p:cNvSpPr txBox="1"/>
+          <p:nvPr/>
+        </p:nvSpPr>
+        <p:spPr>
+          <a:xfrm>
+            <a:off x="1097280" y="3136392"/>
+            <a:ext cx="4572000" cy="365760"/>
+          </a:xfrm>
+          <a:prstGeom prst="rect">
+            <a:avLst/>
+          </a:prstGeom>
+          <a:noFill/>
+        </p:spPr>
+        <p:txBody>
+          <a:bodyPr wrap="square">
+            <a:spAutoFit/>
+          </a:bodyPr>
+          <a:lstStyle/>
+          <a:p>
+            <a:pPr algn="l">
+              <a:lnSpc>
+                <a:spcPts val="1950"/>
+              </a:lnSpc>
+              <a:spcAft>
+                <a:spcPts val="0"/>
+              </a:spcAft>
+              <a:defRPr sz="1300" b="0">
+                <a:solidFill>
+                  <a:srgbClr val="6A9BCC"/>
+                </a:solidFill>
+                <a:latin typeface="SF Mono"/>
+              </a:defRPr>
+            </a:pPr>
+            <a:r>
+              <a:t>「後方互換性はどうする？」「テストは？」</a:t>
+            </a:r>
+          </a:p>
+        </p:txBody>
+      </p:sp>
+      <p:sp>
+        <p:nvSpPr>
+          <p:cNvPr id="13" name="TextBox 12"/>
+          <p:cNvSpPr txBox="1"/>
+          <p:nvPr/>
+        </p:nvSpPr>
+        <p:spPr>
+          <a:xfrm>
+            <a:off x="6400800" y="2926080"/>
+            <a:ext cx="4572000" cy="457200"/>
+          </a:xfrm>
+          <a:prstGeom prst="rect">
+            <a:avLst/>
+          </a:prstGeom>
+          <a:noFill/>
+        </p:spPr>
+        <p:txBody>
+          <a:bodyPr wrap="square">
+            <a:spAutoFit/>
+          </a:bodyPr>
+          <a:lstStyle/>
+          <a:p>
+            <a:pPr algn="l">
+              <a:lnSpc>
+                <a:spcPts val="2100"/>
+              </a:lnSpc>
+              <a:spcAft>
+                <a:spcPts val="0"/>
+              </a:spcAft>
+              <a:defRPr sz="1400" b="0">
                 <a:solidFill>
                   <a:srgbClr val="C5C3BB"/>
                 </a:solidFill>
@@ -8767,25 +8464,25 @@
               </a:defRPr>
             </a:pPr>
             <a:r>
-              <a:t>実装はレビュー後に許可する</a:t>
-            </a:r>
-          </a:p>
-        </p:txBody>
-      </p:sp>
-      <p:sp>
-        <p:nvSpPr>
-          <p:cNvPr id="10" name="Rounded Rectangle 9"/>
+              <a:t>不明点をつぶし、計画を確定する</a:t>
+            </a:r>
+          </a:p>
+        </p:txBody>
+      </p:sp>
+      <p:sp>
+        <p:nvSpPr>
+          <p:cNvPr id="14" name="Rounded Rectangle 13"/>
           <p:cNvSpPr/>
           <p:nvPr/>
         </p:nvSpPr>
         <p:spPr>
           <a:xfrm>
-            <a:off x="6400800" y="4206240"/>
-            <a:ext cx="4572000" cy="731520"/>
+            <a:off x="731520" y="3657600"/>
+            <a:ext cx="10515600" cy="822960"/>
           </a:xfrm>
           <a:prstGeom prst="roundRect">
             <a:avLst>
-              <a:gd name="adj" fmla="val 3000"/>
+              <a:gd name="adj" fmla="val 2000"/>
             </a:avLst>
           </a:prstGeom>
           <a:solidFill>
@@ -8819,14 +8516,14 @@
       </p:sp>
       <p:sp>
         <p:nvSpPr>
-          <p:cNvPr id="11" name="TextBox 10"/>
-          <p:cNvSpPr txBox="1"/>
-          <p:nvPr/>
-        </p:nvSpPr>
-        <p:spPr>
-          <a:xfrm>
-            <a:off x="6766560" y="4343400"/>
-            <a:ext cx="3840480" cy="457200"/>
+          <p:cNvPr id="15" name="TextBox 14"/>
+          <p:cNvSpPr txBox="1"/>
+          <p:nvPr/>
+        </p:nvSpPr>
+        <p:spPr>
+          <a:xfrm>
+            <a:off x="1097280" y="3703320"/>
+            <a:ext cx="1097280" cy="365760"/>
           </a:xfrm>
           <a:prstGeom prst="rect">
             <a:avLst/>
@@ -8841,12 +8538,138 @@
           <a:p>
             <a:pPr algn="l">
               <a:lnSpc>
-                <a:spcPts val="2400"/>
-              </a:lnSpc>
-              <a:spcAft>
-                <a:spcPts val="0"/>
-              </a:spcAft>
-              <a:defRPr sz="1600" b="0">
+                <a:spcPts val="2100"/>
+              </a:lnSpc>
+              <a:spcAft>
+                <a:spcPts val="0"/>
+              </a:spcAft>
+              <a:defRPr sz="1400" b="1">
+                <a:solidFill>
+                  <a:srgbClr val="D97757"/>
+                </a:solidFill>
+                <a:latin typeface="Helvetica Neue"/>
+              </a:defRPr>
+            </a:pPr>
+            <a:r>
+              <a:t>Step 3</a:t>
+            </a:r>
+          </a:p>
+        </p:txBody>
+      </p:sp>
+      <p:sp>
+        <p:nvSpPr>
+          <p:cNvPr id="16" name="TextBox 15"/>
+          <p:cNvSpPr txBox="1"/>
+          <p:nvPr/>
+        </p:nvSpPr>
+        <p:spPr>
+          <a:xfrm>
+            <a:off x="2286000" y="3703320"/>
+            <a:ext cx="3200400" cy="365760"/>
+          </a:xfrm>
+          <a:prstGeom prst="rect">
+            <a:avLst/>
+          </a:prstGeom>
+          <a:noFill/>
+        </p:spPr>
+        <p:txBody>
+          <a:bodyPr wrap="square">
+            <a:spAutoFit/>
+          </a:bodyPr>
+          <a:lstStyle/>
+          <a:p>
+            <a:pPr algn="l">
+              <a:lnSpc>
+                <a:spcPts val="2550"/>
+              </a:lnSpc>
+              <a:spcAft>
+                <a:spcPts val="0"/>
+              </a:spcAft>
+              <a:defRPr sz="1700" b="1">
+                <a:solidFill>
+                  <a:srgbClr val="FAF9F5"/>
+                </a:solidFill>
+                <a:latin typeface="Hiragino Sans"/>
+              </a:defRPr>
+            </a:pPr>
+            <a:r>
+              <a:t>実装を許可</a:t>
+            </a:r>
+          </a:p>
+        </p:txBody>
+      </p:sp>
+      <p:sp>
+        <p:nvSpPr>
+          <p:cNvPr id="17" name="TextBox 16"/>
+          <p:cNvSpPr txBox="1"/>
+          <p:nvPr/>
+        </p:nvSpPr>
+        <p:spPr>
+          <a:xfrm>
+            <a:off x="1097280" y="4096512"/>
+            <a:ext cx="4572000" cy="365760"/>
+          </a:xfrm>
+          <a:prstGeom prst="rect">
+            <a:avLst/>
+          </a:prstGeom>
+          <a:noFill/>
+        </p:spPr>
+        <p:txBody>
+          <a:bodyPr wrap="square">
+            <a:spAutoFit/>
+          </a:bodyPr>
+          <a:lstStyle/>
+          <a:p>
+            <a:pPr algn="l">
+              <a:lnSpc>
+                <a:spcPts val="1950"/>
+              </a:lnSpc>
+              <a:spcAft>
+                <a:spcPts val="0"/>
+              </a:spcAft>
+              <a:defRPr sz="1300" b="0">
+                <a:solidFill>
+                  <a:srgbClr val="6A9BCC"/>
+                </a:solidFill>
+                <a:latin typeface="SF Mono"/>
+              </a:defRPr>
+            </a:pPr>
+            <a:r>
+              <a:t>「OK、実装して」/ 調査だけならここで完了</a:t>
+            </a:r>
+          </a:p>
+        </p:txBody>
+      </p:sp>
+      <p:sp>
+        <p:nvSpPr>
+          <p:cNvPr id="18" name="TextBox 17"/>
+          <p:cNvSpPr txBox="1"/>
+          <p:nvPr/>
+        </p:nvSpPr>
+        <p:spPr>
+          <a:xfrm>
+            <a:off x="6400800" y="3886200"/>
+            <a:ext cx="4572000" cy="457200"/>
+          </a:xfrm>
+          <a:prstGeom prst="rect">
+            <a:avLst/>
+          </a:prstGeom>
+          <a:noFill/>
+        </p:spPr>
+        <p:txBody>
+          <a:bodyPr wrap="square">
+            <a:spAutoFit/>
+          </a:bodyPr>
+          <a:lstStyle/>
+          <a:p>
+            <a:pPr algn="l">
+              <a:lnSpc>
+                <a:spcPts val="2100"/>
+              </a:lnSpc>
+              <a:spcAft>
+                <a:spcPts val="0"/>
+              </a:spcAft>
+              <a:defRPr sz="1400" b="0">
                 <a:solidFill>
                   <a:srgbClr val="C5C3BB"/>
                 </a:solidFill>
@@ -8854,21 +8677,66 @@
               </a:defRPr>
             </a:pPr>
             <a:r>
-              <a:t>最初はPlan Mode固定にする</a:t>
-            </a:r>
-          </a:p>
-        </p:txBody>
-      </p:sp>
-      <p:sp>
-        <p:nvSpPr>
-          <p:cNvPr id="12" name="TextBox 11"/>
-          <p:cNvSpPr txBox="1"/>
-          <p:nvPr/>
-        </p:nvSpPr>
-        <p:spPr>
-          <a:xfrm>
-            <a:off x="731520" y="4754880"/>
-            <a:ext cx="5486400" cy="457200"/>
+              <a:t>計画に沿って実装、または調査結果を活用</a:t>
+            </a:r>
+          </a:p>
+        </p:txBody>
+      </p:sp>
+      <p:sp>
+        <p:nvSpPr>
+          <p:cNvPr id="19" name="Rounded Rectangle 18"/>
+          <p:cNvSpPr/>
+          <p:nvPr/>
+        </p:nvSpPr>
+        <p:spPr>
+          <a:xfrm>
+            <a:off x="731520" y="4617720"/>
+            <a:ext cx="10515600" cy="822960"/>
+          </a:xfrm>
+          <a:prstGeom prst="roundRect">
+            <a:avLst>
+              <a:gd name="adj" fmla="val 2000"/>
+            </a:avLst>
+          </a:prstGeom>
+          <a:solidFill>
+            <a:srgbClr val="252220"/>
+          </a:solidFill>
+          <a:ln>
+            <a:noFill/>
+          </a:ln>
+        </p:spPr>
+        <p:style>
+          <a:lnRef idx="1">
+            <a:schemeClr val="accent1"/>
+          </a:lnRef>
+          <a:fillRef idx="3">
+            <a:schemeClr val="accent1"/>
+          </a:fillRef>
+          <a:effectRef idx="2">
+            <a:schemeClr val="accent1"/>
+          </a:effectRef>
+          <a:fontRef idx="minor">
+            <a:schemeClr val="lt1"/>
+          </a:fontRef>
+        </p:style>
+        <p:txBody>
+          <a:bodyPr rtlCol="0" anchor="ctr"/>
+          <a:lstStyle/>
+          <a:p>
+            <a:pPr algn="ctr"/>
+          </a:p>
+        </p:txBody>
+      </p:sp>
+      <p:sp>
+        <p:nvSpPr>
+          <p:cNvPr id="20" name="TextBox 19"/>
+          <p:cNvSpPr txBox="1"/>
+          <p:nvPr/>
+        </p:nvSpPr>
+        <p:spPr>
+          <a:xfrm>
+            <a:off x="1097280" y="4663440"/>
+            <a:ext cx="1097280" cy="365760"/>
           </a:xfrm>
           <a:prstGeom prst="rect">
             <a:avLst/>
@@ -8883,12 +8751,180 @@
           <a:p>
             <a:pPr algn="l">
               <a:lnSpc>
-                <a:spcPts val="3000"/>
-              </a:lnSpc>
-              <a:spcAft>
-                <a:spcPts val="0"/>
-              </a:spcAft>
-              <a:defRPr sz="2000" b="1">
+                <a:spcPts val="2100"/>
+              </a:lnSpc>
+              <a:spcAft>
+                <a:spcPts val="0"/>
+              </a:spcAft>
+              <a:defRPr sz="1400" b="1">
+                <a:solidFill>
+                  <a:srgbClr val="FAF9F5"/>
+                </a:solidFill>
+                <a:latin typeface="Helvetica Neue"/>
+              </a:defRPr>
+            </a:pPr>
+            <a:r>
+              <a:t>Step 4</a:t>
+            </a:r>
+          </a:p>
+        </p:txBody>
+      </p:sp>
+      <p:sp>
+        <p:nvSpPr>
+          <p:cNvPr id="21" name="TextBox 20"/>
+          <p:cNvSpPr txBox="1"/>
+          <p:nvPr/>
+        </p:nvSpPr>
+        <p:spPr>
+          <a:xfrm>
+            <a:off x="2286000" y="4663440"/>
+            <a:ext cx="3200400" cy="365760"/>
+          </a:xfrm>
+          <a:prstGeom prst="rect">
+            <a:avLst/>
+          </a:prstGeom>
+          <a:noFill/>
+        </p:spPr>
+        <p:txBody>
+          <a:bodyPr wrap="square">
+            <a:spAutoFit/>
+          </a:bodyPr>
+          <a:lstStyle/>
+          <a:p>
+            <a:pPr algn="l">
+              <a:lnSpc>
+                <a:spcPts val="2550"/>
+              </a:lnSpc>
+              <a:spcAft>
+                <a:spcPts val="0"/>
+              </a:spcAft>
+              <a:defRPr sz="1700" b="1">
+                <a:solidFill>
+                  <a:srgbClr val="FAF9F5"/>
+                </a:solidFill>
+                <a:latin typeface="Hiragino Sans"/>
+              </a:defRPr>
+            </a:pPr>
+            <a:r>
+              <a:t>結果を確認</a:t>
+            </a:r>
+          </a:p>
+        </p:txBody>
+      </p:sp>
+      <p:sp>
+        <p:nvSpPr>
+          <p:cNvPr id="22" name="TextBox 21"/>
+          <p:cNvSpPr txBox="1"/>
+          <p:nvPr/>
+        </p:nvSpPr>
+        <p:spPr>
+          <a:xfrm>
+            <a:off x="1097280" y="5056632"/>
+            <a:ext cx="4572000" cy="365760"/>
+          </a:xfrm>
+          <a:prstGeom prst="rect">
+            <a:avLst/>
+          </a:prstGeom>
+          <a:noFill/>
+        </p:spPr>
+        <p:txBody>
+          <a:bodyPr wrap="square">
+            <a:spAutoFit/>
+          </a:bodyPr>
+          <a:lstStyle/>
+          <a:p>
+            <a:pPr algn="l">
+              <a:lnSpc>
+                <a:spcPts val="1950"/>
+              </a:lnSpc>
+              <a:spcAft>
+                <a:spcPts val="0"/>
+              </a:spcAft>
+              <a:defRPr sz="1300" b="0">
+                <a:solidFill>
+                  <a:srgbClr val="6A9BCC"/>
+                </a:solidFill>
+                <a:latin typeface="SF Mono"/>
+              </a:defRPr>
+            </a:pPr>
+            <a:r>
+              <a:t>テスト実行 → PR作成</a:t>
+            </a:r>
+          </a:p>
+        </p:txBody>
+      </p:sp>
+      <p:sp>
+        <p:nvSpPr>
+          <p:cNvPr id="23" name="TextBox 22"/>
+          <p:cNvSpPr txBox="1"/>
+          <p:nvPr/>
+        </p:nvSpPr>
+        <p:spPr>
+          <a:xfrm>
+            <a:off x="6400800" y="4846320"/>
+            <a:ext cx="4572000" cy="457200"/>
+          </a:xfrm>
+          <a:prstGeom prst="rect">
+            <a:avLst/>
+          </a:prstGeom>
+          <a:noFill/>
+        </p:spPr>
+        <p:txBody>
+          <a:bodyPr wrap="square">
+            <a:spAutoFit/>
+          </a:bodyPr>
+          <a:lstStyle/>
+          <a:p>
+            <a:pPr algn="l">
+              <a:lnSpc>
+                <a:spcPts val="2100"/>
+              </a:lnSpc>
+              <a:spcAft>
+                <a:spcPts val="0"/>
+              </a:spcAft>
+              <a:defRPr sz="1400" b="0">
+                <a:solidFill>
+                  <a:srgbClr val="C5C3BB"/>
+                </a:solidFill>
+                <a:latin typeface="Hiragino Sans"/>
+              </a:defRPr>
+            </a:pPr>
+            <a:r>
+              <a:t>変更内容を取りまとめて完了</a:t>
+            </a:r>
+          </a:p>
+        </p:txBody>
+      </p:sp>
+      <p:sp>
+        <p:nvSpPr>
+          <p:cNvPr id="24" name="TextBox 23"/>
+          <p:cNvSpPr txBox="1"/>
+          <p:nvPr/>
+        </p:nvSpPr>
+        <p:spPr>
+          <a:xfrm>
+            <a:off x="731520" y="5486400"/>
+            <a:ext cx="4572000" cy="365760"/>
+          </a:xfrm>
+          <a:prstGeom prst="rect">
+            <a:avLst/>
+          </a:prstGeom>
+          <a:noFill/>
+        </p:spPr>
+        <p:txBody>
+          <a:bodyPr wrap="square">
+            <a:spAutoFit/>
+          </a:bodyPr>
+          <a:lstStyle/>
+          <a:p>
+            <a:pPr algn="l">
+              <a:lnSpc>
+                <a:spcPts val="2250"/>
+              </a:lnSpc>
+              <a:spcAft>
+                <a:spcPts val="0"/>
+              </a:spcAft>
+              <a:defRPr sz="1500" b="1">
                 <a:solidFill>
                   <a:srgbClr val="D97757"/>
                 </a:solidFill>
@@ -8896,94 +8932,401 @@
               </a:defRPr>
             </a:pPr>
             <a:r>
-              <a:t>なぜ Plan Mode から始めるのか</a:t>
-            </a:r>
-          </a:p>
-        </p:txBody>
-      </p:sp>
-      <p:sp>
-        <p:nvSpPr>
-          <p:cNvPr id="13" name="TextBox 12"/>
-          <p:cNvSpPr txBox="1"/>
-          <p:nvPr/>
-        </p:nvSpPr>
-        <p:spPr>
-          <a:xfrm>
-            <a:off x="1097280" y="5303520"/>
-            <a:ext cx="9144000" cy="1188720"/>
-          </a:xfrm>
-          <a:prstGeom prst="rect">
-            <a:avLst/>
-          </a:prstGeom>
-          <a:noFill/>
-        </p:spPr>
-        <p:txBody>
-          <a:bodyPr wrap="square">
-            <a:spAutoFit/>
-          </a:bodyPr>
-          <a:lstStyle/>
-          <a:p>
-            <a:pPr>
-              <a:lnSpc>
-                <a:spcPts val="2400"/>
-              </a:lnSpc>
-              <a:spcAft>
-                <a:spcPts val="800"/>
-              </a:spcAft>
-              <a:defRPr sz="1600">
-                <a:solidFill>
-                  <a:srgbClr val="FAF9F5"/>
+              <a:t>Step 1で伝えておくと良いこと</a:t>
+            </a:r>
+          </a:p>
+        </p:txBody>
+      </p:sp>
+      <p:sp>
+        <p:nvSpPr>
+          <p:cNvPr id="25" name="Rounded Rectangle 24"/>
+          <p:cNvSpPr/>
+          <p:nvPr/>
+        </p:nvSpPr>
+        <p:spPr>
+          <a:xfrm>
+            <a:off x="731520" y="5943600"/>
+            <a:ext cx="3291840" cy="640080"/>
+          </a:xfrm>
+          <a:prstGeom prst="roundRect">
+            <a:avLst>
+              <a:gd name="adj" fmla="val 3000"/>
+            </a:avLst>
+          </a:prstGeom>
+          <a:solidFill>
+            <a:srgbClr val="252220"/>
+          </a:solidFill>
+          <a:ln>
+            <a:noFill/>
+          </a:ln>
+        </p:spPr>
+        <p:style>
+          <a:lnRef idx="1">
+            <a:schemeClr val="accent1"/>
+          </a:lnRef>
+          <a:fillRef idx="3">
+            <a:schemeClr val="accent1"/>
+          </a:fillRef>
+          <a:effectRef idx="2">
+            <a:schemeClr val="accent1"/>
+          </a:effectRef>
+          <a:fontRef idx="minor">
+            <a:schemeClr val="lt1"/>
+          </a:fontRef>
+        </p:style>
+        <p:txBody>
+          <a:bodyPr rtlCol="0" anchor="ctr"/>
+          <a:lstStyle/>
+          <a:p>
+            <a:pPr algn="ctr"/>
+          </a:p>
+        </p:txBody>
+      </p:sp>
+      <p:sp>
+        <p:nvSpPr>
+          <p:cNvPr id="26" name="TextBox 25"/>
+          <p:cNvSpPr txBox="1"/>
+          <p:nvPr/>
+        </p:nvSpPr>
+        <p:spPr>
+          <a:xfrm>
+            <a:off x="868680" y="5971032"/>
+            <a:ext cx="3017520" cy="274320"/>
+          </a:xfrm>
+          <a:prstGeom prst="rect">
+            <a:avLst/>
+          </a:prstGeom>
+          <a:noFill/>
+        </p:spPr>
+        <p:txBody>
+          <a:bodyPr wrap="square">
+            <a:spAutoFit/>
+          </a:bodyPr>
+          <a:lstStyle/>
+          <a:p>
+            <a:pPr algn="l">
+              <a:lnSpc>
+                <a:spcPts val="1950"/>
+              </a:lnSpc>
+              <a:spcAft>
+                <a:spcPts val="0"/>
+              </a:spcAft>
+              <a:defRPr sz="1300" b="1">
+                <a:solidFill>
+                  <a:srgbClr val="7BC9A0"/>
                 </a:solidFill>
                 <a:latin typeface="Hiragino Sans"/>
               </a:defRPr>
             </a:pPr>
             <a:r>
-              <a:t>• 計画段階で認識のズレに気づける</a:t>
-            </a:r>
-          </a:p>
-          <a:p>
-            <a:pPr>
-              <a:lnSpc>
-                <a:spcPts val="2400"/>
-              </a:lnSpc>
-              <a:spcAft>
-                <a:spcPts val="800"/>
-              </a:spcAft>
-              <a:defRPr sz="1600">
-                <a:solidFill>
-                  <a:srgbClr val="FAF9F5"/>
+              <a:t>受け入れ基準</a:t>
+            </a:r>
+          </a:p>
+        </p:txBody>
+      </p:sp>
+      <p:sp>
+        <p:nvSpPr>
+          <p:cNvPr id="27" name="TextBox 26"/>
+          <p:cNvSpPr txBox="1"/>
+          <p:nvPr/>
+        </p:nvSpPr>
+        <p:spPr>
+          <a:xfrm>
+            <a:off x="868680" y="6263640"/>
+            <a:ext cx="3017520" cy="274320"/>
+          </a:xfrm>
+          <a:prstGeom prst="rect">
+            <a:avLst/>
+          </a:prstGeom>
+          <a:noFill/>
+        </p:spPr>
+        <p:txBody>
+          <a:bodyPr wrap="square">
+            <a:spAutoFit/>
+          </a:bodyPr>
+          <a:lstStyle/>
+          <a:p>
+            <a:pPr algn="l">
+              <a:lnSpc>
+                <a:spcPts val="1650"/>
+              </a:lnSpc>
+              <a:spcAft>
+                <a:spcPts val="0"/>
+              </a:spcAft>
+              <a:defRPr sz="1100" b="0">
+                <a:solidFill>
+                  <a:srgbClr val="B0AEA5"/>
                 </a:solidFill>
                 <a:latin typeface="Hiragino Sans"/>
               </a:defRPr>
             </a:pPr>
             <a:r>
-              <a:t>• コードを壊すリスクがゼロ</a:t>
-            </a:r>
-          </a:p>
-          <a:p>
-            <a:pPr>
-              <a:lnSpc>
-                <a:spcPts val="2400"/>
-              </a:lnSpc>
-              <a:spcAft>
-                <a:spcPts val="800"/>
-              </a:spcAft>
-              <a:defRPr sz="1600">
-                <a:solidFill>
-                  <a:srgbClr val="FAF9F5"/>
+              <a:t>どうなったら完了か</a:t>
+            </a:r>
+          </a:p>
+        </p:txBody>
+      </p:sp>
+      <p:sp>
+        <p:nvSpPr>
+          <p:cNvPr id="28" name="Rounded Rectangle 27"/>
+          <p:cNvSpPr/>
+          <p:nvPr/>
+        </p:nvSpPr>
+        <p:spPr>
+          <a:xfrm>
+            <a:off x="4206240" y="5943600"/>
+            <a:ext cx="3291840" cy="640080"/>
+          </a:xfrm>
+          <a:prstGeom prst="roundRect">
+            <a:avLst>
+              <a:gd name="adj" fmla="val 3000"/>
+            </a:avLst>
+          </a:prstGeom>
+          <a:solidFill>
+            <a:srgbClr val="252220"/>
+          </a:solidFill>
+          <a:ln>
+            <a:noFill/>
+          </a:ln>
+        </p:spPr>
+        <p:style>
+          <a:lnRef idx="1">
+            <a:schemeClr val="accent1"/>
+          </a:lnRef>
+          <a:fillRef idx="3">
+            <a:schemeClr val="accent1"/>
+          </a:fillRef>
+          <a:effectRef idx="2">
+            <a:schemeClr val="accent1"/>
+          </a:effectRef>
+          <a:fontRef idx="minor">
+            <a:schemeClr val="lt1"/>
+          </a:fontRef>
+        </p:style>
+        <p:txBody>
+          <a:bodyPr rtlCol="0" anchor="ctr"/>
+          <a:lstStyle/>
+          <a:p>
+            <a:pPr algn="ctr"/>
+          </a:p>
+        </p:txBody>
+      </p:sp>
+      <p:sp>
+        <p:nvSpPr>
+          <p:cNvPr id="29" name="TextBox 28"/>
+          <p:cNvSpPr txBox="1"/>
+          <p:nvPr/>
+        </p:nvSpPr>
+        <p:spPr>
+          <a:xfrm>
+            <a:off x="4343400" y="5971032"/>
+            <a:ext cx="3017520" cy="274320"/>
+          </a:xfrm>
+          <a:prstGeom prst="rect">
+            <a:avLst/>
+          </a:prstGeom>
+          <a:noFill/>
+        </p:spPr>
+        <p:txBody>
+          <a:bodyPr wrap="square">
+            <a:spAutoFit/>
+          </a:bodyPr>
+          <a:lstStyle/>
+          <a:p>
+            <a:pPr algn="l">
+              <a:lnSpc>
+                <a:spcPts val="1950"/>
+              </a:lnSpc>
+              <a:spcAft>
+                <a:spcPts val="0"/>
+              </a:spcAft>
+              <a:defRPr sz="1300" b="1">
+                <a:solidFill>
+                  <a:srgbClr val="7BC9A0"/>
                 </a:solidFill>
                 <a:latin typeface="Hiragino Sans"/>
               </a:defRPr>
             </a:pPr>
             <a:r>
-              <a:t>• 手戻りを最小限にしてから実装に入れる</a:t>
-            </a:r>
-          </a:p>
-        </p:txBody>
-      </p:sp>
-      <p:sp>
-        <p:nvSpPr>
-          <p:cNvPr id="14" name="TextBox 13"/>
+              <a:t>禁止事項</a:t>
+            </a:r>
+          </a:p>
+        </p:txBody>
+      </p:sp>
+      <p:sp>
+        <p:nvSpPr>
+          <p:cNvPr id="30" name="TextBox 29"/>
+          <p:cNvSpPr txBox="1"/>
+          <p:nvPr/>
+        </p:nvSpPr>
+        <p:spPr>
+          <a:xfrm>
+            <a:off x="4343400" y="6263640"/>
+            <a:ext cx="3017520" cy="274320"/>
+          </a:xfrm>
+          <a:prstGeom prst="rect">
+            <a:avLst/>
+          </a:prstGeom>
+          <a:noFill/>
+        </p:spPr>
+        <p:txBody>
+          <a:bodyPr wrap="square">
+            <a:spAutoFit/>
+          </a:bodyPr>
+          <a:lstStyle/>
+          <a:p>
+            <a:pPr algn="l">
+              <a:lnSpc>
+                <a:spcPts val="1650"/>
+              </a:lnSpc>
+              <a:spcAft>
+                <a:spcPts val="0"/>
+              </a:spcAft>
+              <a:defRPr sz="1100" b="0">
+                <a:solidFill>
+                  <a:srgbClr val="B0AEA5"/>
+                </a:solidFill>
+                <a:latin typeface="Hiragino Sans"/>
+              </a:defRPr>
+            </a:pPr>
+            <a:r>
+              <a:t>絶対にやってはいけない変更</a:t>
+            </a:r>
+          </a:p>
+        </p:txBody>
+      </p:sp>
+      <p:sp>
+        <p:nvSpPr>
+          <p:cNvPr id="31" name="Rounded Rectangle 30"/>
+          <p:cNvSpPr/>
+          <p:nvPr/>
+        </p:nvSpPr>
+        <p:spPr>
+          <a:xfrm>
+            <a:off x="7680960" y="5943600"/>
+            <a:ext cx="3291840" cy="640080"/>
+          </a:xfrm>
+          <a:prstGeom prst="roundRect">
+            <a:avLst>
+              <a:gd name="adj" fmla="val 3000"/>
+            </a:avLst>
+          </a:prstGeom>
+          <a:solidFill>
+            <a:srgbClr val="252220"/>
+          </a:solidFill>
+          <a:ln>
+            <a:noFill/>
+          </a:ln>
+        </p:spPr>
+        <p:style>
+          <a:lnRef idx="1">
+            <a:schemeClr val="accent1"/>
+          </a:lnRef>
+          <a:fillRef idx="3">
+            <a:schemeClr val="accent1"/>
+          </a:fillRef>
+          <a:effectRef idx="2">
+            <a:schemeClr val="accent1"/>
+          </a:effectRef>
+          <a:fontRef idx="minor">
+            <a:schemeClr val="lt1"/>
+          </a:fontRef>
+        </p:style>
+        <p:txBody>
+          <a:bodyPr rtlCol="0" anchor="ctr"/>
+          <a:lstStyle/>
+          <a:p>
+            <a:pPr algn="ctr"/>
+          </a:p>
+        </p:txBody>
+      </p:sp>
+      <p:sp>
+        <p:nvSpPr>
+          <p:cNvPr id="32" name="TextBox 31"/>
+          <p:cNvSpPr txBox="1"/>
+          <p:nvPr/>
+        </p:nvSpPr>
+        <p:spPr>
+          <a:xfrm>
+            <a:off x="7818120" y="5971032"/>
+            <a:ext cx="3017520" cy="274320"/>
+          </a:xfrm>
+          <a:prstGeom prst="rect">
+            <a:avLst/>
+          </a:prstGeom>
+          <a:noFill/>
+        </p:spPr>
+        <p:txBody>
+          <a:bodyPr wrap="square">
+            <a:spAutoFit/>
+          </a:bodyPr>
+          <a:lstStyle/>
+          <a:p>
+            <a:pPr algn="l">
+              <a:lnSpc>
+                <a:spcPts val="1950"/>
+              </a:lnSpc>
+              <a:spcAft>
+                <a:spcPts val="0"/>
+              </a:spcAft>
+              <a:defRPr sz="1300" b="1">
+                <a:solidFill>
+                  <a:srgbClr val="7BC9A0"/>
+                </a:solidFill>
+                <a:latin typeface="Hiragino Sans"/>
+              </a:defRPr>
+            </a:pPr>
+            <a:r>
+              <a:t>想定外の扱い</a:t>
+            </a:r>
+          </a:p>
+        </p:txBody>
+      </p:sp>
+      <p:sp>
+        <p:nvSpPr>
+          <p:cNvPr id="33" name="TextBox 32"/>
+          <p:cNvSpPr txBox="1"/>
+          <p:nvPr/>
+        </p:nvSpPr>
+        <p:spPr>
+          <a:xfrm>
+            <a:off x="7818120" y="6263640"/>
+            <a:ext cx="3017520" cy="274320"/>
+          </a:xfrm>
+          <a:prstGeom prst="rect">
+            <a:avLst/>
+          </a:prstGeom>
+          <a:noFill/>
+        </p:spPr>
+        <p:txBody>
+          <a:bodyPr wrap="square">
+            <a:spAutoFit/>
+          </a:bodyPr>
+          <a:lstStyle/>
+          <a:p>
+            <a:pPr algn="l">
+              <a:lnSpc>
+                <a:spcPts val="1650"/>
+              </a:lnSpc>
+              <a:spcAft>
+                <a:spcPts val="0"/>
+              </a:spcAft>
+              <a:defRPr sz="1100" b="0">
+                <a:solidFill>
+                  <a:srgbClr val="B0AEA5"/>
+                </a:solidFill>
+                <a:latin typeface="Hiragino Sans"/>
+              </a:defRPr>
+            </a:pPr>
+            <a:r>
+              <a:t>計画にない問題を見つけたらどうするか</a:t>
+            </a:r>
+          </a:p>
+        </p:txBody>
+      </p:sp>
+      <p:sp>
+        <p:nvSpPr>
+          <p:cNvPr id="34" name="TextBox 33"/>
           <p:cNvSpPr txBox="1"/>
           <p:nvPr/>
         </p:nvSpPr>
@@ -9018,7 +9361,7 @@
               </a:defRPr>
             </a:pPr>
             <a:r>
-              <a:t>14 / 17</a:t>
+              <a:t>14 / 16</a:t>
             </a:r>
           </a:p>
         </p:txBody>
@@ -9057,8 +9400,8 @@
         </p:nvSpPr>
         <p:spPr>
           <a:xfrm>
-            <a:off x="731520" y="365760"/>
-            <a:ext cx="2743200" cy="365760"/>
+            <a:off x="731520" y="457200"/>
+            <a:ext cx="10058400" cy="731520"/>
           </a:xfrm>
           <a:prstGeom prst="rect">
             <a:avLst/>
@@ -9073,62 +9416,62 @@
           <a:p>
             <a:pPr algn="l">
               <a:lnSpc>
-                <a:spcPts val="1800"/>
-              </a:lnSpc>
-              <a:spcAft>
-                <a:spcPts val="0"/>
-              </a:spcAft>
-              <a:defRPr sz="1200" b="1">
+                <a:spcPts val="5400"/>
+              </a:lnSpc>
+              <a:spcAft>
+                <a:spcPts val="0"/>
+              </a:spcAft>
+              <a:defRPr sz="3600" b="1">
+                <a:solidFill>
+                  <a:srgbClr val="FAF9F5"/>
+                </a:solidFill>
+                <a:latin typeface="Hiragino Sans"/>
+              </a:defRPr>
+            </a:pPr>
+            <a:r>
+              <a:t>始め方</a:t>
+            </a:r>
+          </a:p>
+        </p:txBody>
+      </p:sp>
+      <p:sp>
+        <p:nvSpPr>
+          <p:cNvPr id="3" name="TextBox 2"/>
+          <p:cNvSpPr txBox="1"/>
+          <p:nvPr/>
+        </p:nvSpPr>
+        <p:spPr>
+          <a:xfrm>
+            <a:off x="731520" y="1371600"/>
+            <a:ext cx="2743200" cy="457200"/>
+          </a:xfrm>
+          <a:prstGeom prst="rect">
+            <a:avLst/>
+          </a:prstGeom>
+          <a:noFill/>
+        </p:spPr>
+        <p:txBody>
+          <a:bodyPr wrap="square">
+            <a:spAutoFit/>
+          </a:bodyPr>
+          <a:lstStyle/>
+          <a:p>
+            <a:pPr algn="l">
+              <a:lnSpc>
+                <a:spcPts val="3000"/>
+              </a:lnSpc>
+              <a:spcAft>
+                <a:spcPts val="0"/>
+              </a:spcAft>
+              <a:defRPr sz="2000" b="1">
                 <a:solidFill>
                   <a:srgbClr val="D97757"/>
                 </a:solidFill>
-                <a:latin typeface="Helvetica Neue"/>
-              </a:defRPr>
-            </a:pPr>
-            <a:r>
-              <a:t>PART 3 — Plan Mode</a:t>
-            </a:r>
-          </a:p>
-        </p:txBody>
-      </p:sp>
-      <p:sp>
-        <p:nvSpPr>
-          <p:cNvPr id="3" name="TextBox 2"/>
-          <p:cNvSpPr txBox="1"/>
-          <p:nvPr/>
-        </p:nvSpPr>
-        <p:spPr>
-          <a:xfrm>
-            <a:off x="731520" y="822960"/>
-            <a:ext cx="10058400" cy="731520"/>
-          </a:xfrm>
-          <a:prstGeom prst="rect">
-            <a:avLst/>
-          </a:prstGeom>
-          <a:noFill/>
-        </p:spPr>
-        <p:txBody>
-          <a:bodyPr wrap="square">
-            <a:spAutoFit/>
-          </a:bodyPr>
-          <a:lstStyle/>
-          <a:p>
-            <a:pPr algn="l">
-              <a:lnSpc>
-                <a:spcPts val="4800"/>
-              </a:lnSpc>
-              <a:spcAft>
-                <a:spcPts val="0"/>
-              </a:spcAft>
-              <a:defRPr sz="3200" b="1">
-                <a:solidFill>
-                  <a:srgbClr val="FAF9F5"/>
-                </a:solidFill>
                 <a:latin typeface="Hiragino Sans"/>
               </a:defRPr>
             </a:pPr>
             <a:r>
-              <a:t>実践ワークフロー</a:t>
+              <a:t>インストール</a:t>
             </a:r>
           </a:p>
         </p:txBody>
@@ -9141,8 +9484,382 @@
         </p:nvSpPr>
         <p:spPr>
           <a:xfrm>
-            <a:off x="731520" y="1828800"/>
-            <a:ext cx="10515600" cy="1005840"/>
+            <a:off x="731520" y="1920240"/>
+            <a:ext cx="5029200" cy="1463040"/>
+          </a:xfrm>
+          <a:prstGeom prst="roundRect">
+            <a:avLst>
+              <a:gd name="adj" fmla="val 3000"/>
+            </a:avLst>
+          </a:prstGeom>
+          <a:solidFill>
+            <a:srgbClr val="141210"/>
+          </a:solidFill>
+          <a:ln>
+            <a:noFill/>
+          </a:ln>
+        </p:spPr>
+        <p:style>
+          <a:lnRef idx="1">
+            <a:schemeClr val="accent1"/>
+          </a:lnRef>
+          <a:fillRef idx="3">
+            <a:schemeClr val="accent1"/>
+          </a:fillRef>
+          <a:effectRef idx="2">
+            <a:schemeClr val="accent1"/>
+          </a:effectRef>
+          <a:fontRef idx="minor">
+            <a:schemeClr val="lt1"/>
+          </a:fontRef>
+        </p:style>
+        <p:txBody>
+          <a:bodyPr rtlCol="0" anchor="ctr"/>
+          <a:lstStyle/>
+          <a:p>
+            <a:pPr algn="ctr"/>
+          </a:p>
+        </p:txBody>
+      </p:sp>
+      <p:sp>
+        <p:nvSpPr>
+          <p:cNvPr id="5" name="TextBox 4"/>
+          <p:cNvSpPr txBox="1"/>
+          <p:nvPr/>
+        </p:nvSpPr>
+        <p:spPr>
+          <a:xfrm>
+            <a:off x="1005840" y="2103120"/>
+            <a:ext cx="4480560" cy="1097280"/>
+          </a:xfrm>
+          <a:prstGeom prst="rect">
+            <a:avLst/>
+          </a:prstGeom>
+          <a:noFill/>
+        </p:spPr>
+        <p:txBody>
+          <a:bodyPr wrap="square">
+            <a:spAutoFit/>
+          </a:bodyPr>
+          <a:lstStyle/>
+          <a:p>
+            <a:pPr>
+              <a:lnSpc>
+                <a:spcPts val="2080"/>
+              </a:lnSpc>
+              <a:spcAft>
+                <a:spcPts val="200"/>
+              </a:spcAft>
+              <a:defRPr sz="1300">
+                <a:solidFill>
+                  <a:srgbClr val="6A9BCC"/>
+                </a:solidFill>
+                <a:latin typeface="SF Mono"/>
+              </a:defRPr>
+            </a:pPr>
+            <a:r>
+              <a:t># Mac</a:t>
+            </a:r>
+          </a:p>
+          <a:p>
+            <a:pPr>
+              <a:lnSpc>
+                <a:spcPts val="2080"/>
+              </a:lnSpc>
+              <a:spcAft>
+                <a:spcPts val="200"/>
+              </a:spcAft>
+              <a:defRPr sz="1300">
+                <a:solidFill>
+                  <a:srgbClr val="6A9BCC"/>
+                </a:solidFill>
+                <a:latin typeface="SF Mono"/>
+              </a:defRPr>
+            </a:pPr>
+            <a:r>
+              <a:t>curl -fsSL https://claude.ai/install.sh | bash</a:t>
+            </a:r>
+          </a:p>
+          <a:p>
+            <a:pPr>
+              <a:lnSpc>
+                <a:spcPts val="2080"/>
+              </a:lnSpc>
+              <a:spcAft>
+                <a:spcPts val="200"/>
+              </a:spcAft>
+              <a:defRPr sz="1300">
+                <a:solidFill>
+                  <a:srgbClr val="6A9BCC"/>
+                </a:solidFill>
+                <a:latin typeface="SF Mono"/>
+              </a:defRPr>
+            </a:pPr>
+          </a:p>
+          <a:p>
+            <a:pPr>
+              <a:lnSpc>
+                <a:spcPts val="2080"/>
+              </a:lnSpc>
+              <a:spcAft>
+                <a:spcPts val="200"/>
+              </a:spcAft>
+              <a:defRPr sz="1300">
+                <a:solidFill>
+                  <a:srgbClr val="6A9BCC"/>
+                </a:solidFill>
+                <a:latin typeface="SF Mono"/>
+              </a:defRPr>
+            </a:pPr>
+            <a:r>
+              <a:t># Windows</a:t>
+            </a:r>
+          </a:p>
+          <a:p>
+            <a:pPr>
+              <a:lnSpc>
+                <a:spcPts val="2080"/>
+              </a:lnSpc>
+              <a:spcAft>
+                <a:spcPts val="200"/>
+              </a:spcAft>
+              <a:defRPr sz="1300">
+                <a:solidFill>
+                  <a:srgbClr val="6A9BCC"/>
+                </a:solidFill>
+                <a:latin typeface="SF Mono"/>
+              </a:defRPr>
+            </a:pPr>
+            <a:r>
+              <a:t>winget install Anthropic.ClaudeCode</a:t>
+            </a:r>
+          </a:p>
+        </p:txBody>
+      </p:sp>
+      <p:sp>
+        <p:nvSpPr>
+          <p:cNvPr id="6" name="TextBox 5"/>
+          <p:cNvSpPr txBox="1"/>
+          <p:nvPr/>
+        </p:nvSpPr>
+        <p:spPr>
+          <a:xfrm>
+            <a:off x="6400800" y="1371600"/>
+            <a:ext cx="4572000" cy="457200"/>
+          </a:xfrm>
+          <a:prstGeom prst="rect">
+            <a:avLst/>
+          </a:prstGeom>
+          <a:noFill/>
+        </p:spPr>
+        <p:txBody>
+          <a:bodyPr wrap="square">
+            <a:spAutoFit/>
+          </a:bodyPr>
+          <a:lstStyle/>
+          <a:p>
+            <a:pPr algn="l">
+              <a:lnSpc>
+                <a:spcPts val="3000"/>
+              </a:lnSpc>
+              <a:spcAft>
+                <a:spcPts val="0"/>
+              </a:spcAft>
+              <a:defRPr sz="2000" b="1">
+                <a:solidFill>
+                  <a:srgbClr val="D97757"/>
+                </a:solidFill>
+                <a:latin typeface="Hiragino Sans"/>
+              </a:defRPr>
+            </a:pPr>
+            <a:r>
+              <a:t>起動</a:t>
+            </a:r>
+          </a:p>
+        </p:txBody>
+      </p:sp>
+      <p:sp>
+        <p:nvSpPr>
+          <p:cNvPr id="7" name="TextBox 6"/>
+          <p:cNvSpPr txBox="1"/>
+          <p:nvPr/>
+        </p:nvSpPr>
+        <p:spPr>
+          <a:xfrm>
+            <a:off x="6400800" y="1920240"/>
+            <a:ext cx="4572000" cy="457200"/>
+          </a:xfrm>
+          <a:prstGeom prst="rect">
+            <a:avLst/>
+          </a:prstGeom>
+          <a:noFill/>
+        </p:spPr>
+        <p:txBody>
+          <a:bodyPr wrap="square">
+            <a:spAutoFit/>
+          </a:bodyPr>
+          <a:lstStyle/>
+          <a:p>
+            <a:pPr algn="l">
+              <a:lnSpc>
+                <a:spcPts val="2400"/>
+              </a:lnSpc>
+              <a:spcAft>
+                <a:spcPts val="0"/>
+              </a:spcAft>
+              <a:defRPr sz="1600" b="0">
+                <a:solidFill>
+                  <a:srgbClr val="C5C3BB"/>
+                </a:solidFill>
+                <a:latin typeface="Hiragino Sans"/>
+              </a:defRPr>
+            </a:pPr>
+            <a:r>
+              <a:t>対象リポジトリで claude を実行</a:t>
+            </a:r>
+          </a:p>
+        </p:txBody>
+      </p:sp>
+      <p:sp>
+        <p:nvSpPr>
+          <p:cNvPr id="8" name="TextBox 7"/>
+          <p:cNvSpPr txBox="1"/>
+          <p:nvPr/>
+        </p:nvSpPr>
+        <p:spPr>
+          <a:xfrm>
+            <a:off x="6400800" y="2651760"/>
+            <a:ext cx="4572000" cy="457200"/>
+          </a:xfrm>
+          <a:prstGeom prst="rect">
+            <a:avLst/>
+          </a:prstGeom>
+          <a:noFill/>
+        </p:spPr>
+        <p:txBody>
+          <a:bodyPr wrap="square">
+            <a:spAutoFit/>
+          </a:bodyPr>
+          <a:lstStyle/>
+          <a:p>
+            <a:pPr algn="l">
+              <a:lnSpc>
+                <a:spcPts val="3000"/>
+              </a:lnSpc>
+              <a:spcAft>
+                <a:spcPts val="0"/>
+              </a:spcAft>
+              <a:defRPr sz="2000" b="1">
+                <a:solidFill>
+                  <a:srgbClr val="D97757"/>
+                </a:solidFill>
+                <a:latin typeface="Hiragino Sans"/>
+              </a:defRPr>
+            </a:pPr>
+            <a:r>
+              <a:t>権限設定</a:t>
+            </a:r>
+          </a:p>
+        </p:txBody>
+      </p:sp>
+      <p:sp>
+        <p:nvSpPr>
+          <p:cNvPr id="9" name="TextBox 8"/>
+          <p:cNvSpPr txBox="1"/>
+          <p:nvPr/>
+        </p:nvSpPr>
+        <p:spPr>
+          <a:xfrm>
+            <a:off x="6400800" y="3108960"/>
+            <a:ext cx="4572000" cy="731520"/>
+          </a:xfrm>
+          <a:prstGeom prst="rect">
+            <a:avLst/>
+          </a:prstGeom>
+          <a:noFill/>
+        </p:spPr>
+        <p:txBody>
+          <a:bodyPr wrap="square">
+            <a:spAutoFit/>
+          </a:bodyPr>
+          <a:lstStyle/>
+          <a:p>
+            <a:pPr algn="l">
+              <a:lnSpc>
+                <a:spcPts val="2250"/>
+              </a:lnSpc>
+              <a:spcAft>
+                <a:spcPts val="0"/>
+              </a:spcAft>
+              <a:defRPr sz="1500" b="0">
+                <a:solidFill>
+                  <a:srgbClr val="C5C3BB"/>
+                </a:solidFill>
+                <a:latin typeface="Hiragino Sans"/>
+              </a:defRPr>
+            </a:pPr>
+            <a:r>
+              <a:t>/config で確認・変更</a:t>
+            </a:r>
+            <a:br/>
+            <a:r>
+              <a:t>最初は Plan Mode 固定がおすすめ</a:t>
+            </a:r>
+          </a:p>
+        </p:txBody>
+      </p:sp>
+      <p:sp>
+        <p:nvSpPr>
+          <p:cNvPr id="10" name="TextBox 9"/>
+          <p:cNvSpPr txBox="1"/>
+          <p:nvPr/>
+        </p:nvSpPr>
+        <p:spPr>
+          <a:xfrm>
+            <a:off x="731520" y="3931920"/>
+            <a:ext cx="10058400" cy="457200"/>
+          </a:xfrm>
+          <a:prstGeom prst="rect">
+            <a:avLst/>
+          </a:prstGeom>
+          <a:noFill/>
+        </p:spPr>
+        <p:txBody>
+          <a:bodyPr wrap="square">
+            <a:spAutoFit/>
+          </a:bodyPr>
+          <a:lstStyle/>
+          <a:p>
+            <a:pPr algn="l">
+              <a:lnSpc>
+                <a:spcPts val="3000"/>
+              </a:lnSpc>
+              <a:spcAft>
+                <a:spcPts val="0"/>
+              </a:spcAft>
+              <a:defRPr sz="2000" b="1">
+                <a:solidFill>
+                  <a:srgbClr val="D97757"/>
+                </a:solidFill>
+                <a:latin typeface="Hiragino Sans"/>
+              </a:defRPr>
+            </a:pPr>
+            <a:r>
+              <a:t>最初のタスク例</a:t>
+            </a:r>
+          </a:p>
+        </p:txBody>
+      </p:sp>
+      <p:sp>
+        <p:nvSpPr>
+          <p:cNvPr id="11" name="Rounded Rectangle 10"/>
+          <p:cNvSpPr/>
+          <p:nvPr/>
+        </p:nvSpPr>
+        <p:spPr>
+          <a:xfrm>
+            <a:off x="731520" y="4480560"/>
+            <a:ext cx="10515600" cy="640080"/>
           </a:xfrm>
           <a:prstGeom prst="roundRect">
             <a:avLst>
@@ -9180,14 +9897,14 @@
       </p:sp>
       <p:sp>
         <p:nvSpPr>
-          <p:cNvPr id="5" name="TextBox 4"/>
-          <p:cNvSpPr txBox="1"/>
-          <p:nvPr/>
-        </p:nvSpPr>
-        <p:spPr>
-          <a:xfrm>
-            <a:off x="1097280" y="1901952"/>
-            <a:ext cx="1097280" cy="365760"/>
+          <p:cNvPr id="12" name="TextBox 11"/>
+          <p:cNvSpPr txBox="1"/>
+          <p:nvPr/>
+        </p:nvSpPr>
+        <p:spPr>
+          <a:xfrm>
+            <a:off x="1188720" y="4590288"/>
+            <a:ext cx="9601200" cy="457200"/>
           </a:xfrm>
           <a:prstGeom prst="rect">
             <a:avLst/>
@@ -9202,96 +9919,12 @@
           <a:p>
             <a:pPr algn="l">
               <a:lnSpc>
-                <a:spcPts val="2100"/>
-              </a:lnSpc>
-              <a:spcAft>
-                <a:spcPts val="0"/>
-              </a:spcAft>
-              <a:defRPr sz="1400" b="1">
-                <a:solidFill>
-                  <a:srgbClr val="7BC9A0"/>
-                </a:solidFill>
-                <a:latin typeface="Helvetica Neue"/>
-              </a:defRPr>
-            </a:pPr>
-            <a:r>
-              <a:t>Step 1</a:t>
-            </a:r>
-          </a:p>
-        </p:txBody>
-      </p:sp>
-      <p:sp>
-        <p:nvSpPr>
-          <p:cNvPr id="6" name="TextBox 5"/>
-          <p:cNvSpPr txBox="1"/>
-          <p:nvPr/>
-        </p:nvSpPr>
-        <p:spPr>
-          <a:xfrm>
-            <a:off x="2286000" y="1901952"/>
-            <a:ext cx="3200400" cy="365760"/>
-          </a:xfrm>
-          <a:prstGeom prst="rect">
-            <a:avLst/>
-          </a:prstGeom>
-          <a:noFill/>
-        </p:spPr>
-        <p:txBody>
-          <a:bodyPr wrap="square">
-            <a:spAutoFit/>
-          </a:bodyPr>
-          <a:lstStyle/>
-          <a:p>
-            <a:pPr algn="l">
-              <a:lnSpc>
-                <a:spcPts val="2550"/>
-              </a:lnSpc>
-              <a:spcAft>
-                <a:spcPts val="0"/>
-              </a:spcAft>
-              <a:defRPr sz="1700" b="1">
-                <a:solidFill>
-                  <a:srgbClr val="FAF9F5"/>
-                </a:solidFill>
-                <a:latin typeface="Hiragino Sans"/>
-              </a:defRPr>
-            </a:pPr>
-            <a:r>
-              <a:t>Plan Mode で調査・計画</a:t>
-            </a:r>
-          </a:p>
-        </p:txBody>
-      </p:sp>
-      <p:sp>
-        <p:nvSpPr>
-          <p:cNvPr id="7" name="TextBox 6"/>
-          <p:cNvSpPr txBox="1"/>
-          <p:nvPr/>
-        </p:nvSpPr>
-        <p:spPr>
-          <a:xfrm>
-            <a:off x="1097280" y="2331720"/>
-            <a:ext cx="4572000" cy="365760"/>
-          </a:xfrm>
-          <a:prstGeom prst="rect">
-            <a:avLst/>
-          </a:prstGeom>
-          <a:noFill/>
-        </p:spPr>
-        <p:txBody>
-          <a:bodyPr wrap="square">
-            <a:spAutoFit/>
-          </a:bodyPr>
-          <a:lstStyle/>
-          <a:p>
-            <a:pPr algn="l">
-              <a:lnSpc>
-                <a:spcPts val="1950"/>
-              </a:lnSpc>
-              <a:spcAft>
-                <a:spcPts val="0"/>
-              </a:spcAft>
-              <a:defRPr sz="1300" b="0">
+                <a:spcPts val="2400"/>
+              </a:lnSpc>
+              <a:spcAft>
+                <a:spcPts val="0"/>
+              </a:spcAft>
+              <a:defRPr sz="1600" b="0">
                 <a:solidFill>
                   <a:srgbClr val="6A9BCC"/>
                 </a:solidFill>
@@ -9299,63 +9932,21 @@
               </a:defRPr>
             </a:pPr>
             <a:r>
-              <a:t>「計画を立てて。実装はまだしないで。」</a:t>
-            </a:r>
-          </a:p>
-        </p:txBody>
-      </p:sp>
-      <p:sp>
-        <p:nvSpPr>
-          <p:cNvPr id="8" name="TextBox 7"/>
-          <p:cNvSpPr txBox="1"/>
-          <p:nvPr/>
-        </p:nvSpPr>
-        <p:spPr>
-          <a:xfrm>
-            <a:off x="6400800" y="2103120"/>
-            <a:ext cx="4572000" cy="457200"/>
-          </a:xfrm>
-          <a:prstGeom prst="rect">
-            <a:avLst/>
-          </a:prstGeom>
-          <a:noFill/>
-        </p:spPr>
-        <p:txBody>
-          <a:bodyPr wrap="square">
-            <a:spAutoFit/>
-          </a:bodyPr>
-          <a:lstStyle/>
-          <a:p>
-            <a:pPr algn="l">
-              <a:lnSpc>
-                <a:spcPts val="2100"/>
-              </a:lnSpc>
-              <a:spcAft>
-                <a:spcPts val="0"/>
-              </a:spcAft>
-              <a:defRPr sz="1400" b="0">
-                <a:solidFill>
-                  <a:srgbClr val="C5C3BB"/>
-                </a:solidFill>
-                <a:latin typeface="Hiragino Sans"/>
-              </a:defRPr>
-            </a:pPr>
-            <a:r>
-              <a:t>Claudeがコードを読み、方針を提案する</a:t>
-            </a:r>
-          </a:p>
-        </p:txBody>
-      </p:sp>
-      <p:sp>
-        <p:nvSpPr>
-          <p:cNvPr id="9" name="Rounded Rectangle 8"/>
+              <a:t>「このリポジトリの構成を要約して」</a:t>
+            </a:r>
+          </a:p>
+        </p:txBody>
+      </p:sp>
+      <p:sp>
+        <p:nvSpPr>
+          <p:cNvPr id="13" name="Rounded Rectangle 12"/>
           <p:cNvSpPr/>
           <p:nvPr/>
         </p:nvSpPr>
         <p:spPr>
           <a:xfrm>
-            <a:off x="731520" y="2971800"/>
-            <a:ext cx="10515600" cy="1005840"/>
+            <a:off x="731520" y="5212080"/>
+            <a:ext cx="10515600" cy="640080"/>
           </a:xfrm>
           <a:prstGeom prst="roundRect">
             <a:avLst>
@@ -9393,14 +9984,14 @@
       </p:sp>
       <p:sp>
         <p:nvSpPr>
-          <p:cNvPr id="10" name="TextBox 9"/>
-          <p:cNvSpPr txBox="1"/>
-          <p:nvPr/>
-        </p:nvSpPr>
-        <p:spPr>
-          <a:xfrm>
-            <a:off x="1097280" y="3044952"/>
-            <a:ext cx="1097280" cy="365760"/>
+          <p:cNvPr id="14" name="TextBox 13"/>
+          <p:cNvSpPr txBox="1"/>
+          <p:nvPr/>
+        </p:nvSpPr>
+        <p:spPr>
+          <a:xfrm>
+            <a:off x="1188720" y="5321808"/>
+            <a:ext cx="9601200" cy="457200"/>
           </a:xfrm>
           <a:prstGeom prst="rect">
             <a:avLst/>
@@ -9415,160 +10006,34 @@
           <a:p>
             <a:pPr algn="l">
               <a:lnSpc>
-                <a:spcPts val="2100"/>
-              </a:lnSpc>
-              <a:spcAft>
-                <a:spcPts val="0"/>
-              </a:spcAft>
-              <a:defRPr sz="1400" b="1">
+                <a:spcPts val="2400"/>
+              </a:lnSpc>
+              <a:spcAft>
+                <a:spcPts val="0"/>
+              </a:spcAft>
+              <a:defRPr sz="1600" b="0">
                 <a:solidFill>
                   <a:srgbClr val="6A9BCC"/>
                 </a:solidFill>
-                <a:latin typeface="Helvetica Neue"/>
-              </a:defRPr>
-            </a:pPr>
-            <a:r>
-              <a:t>Step 2</a:t>
-            </a:r>
-          </a:p>
-        </p:txBody>
-      </p:sp>
-      <p:sp>
-        <p:nvSpPr>
-          <p:cNvPr id="11" name="TextBox 10"/>
-          <p:cNvSpPr txBox="1"/>
-          <p:nvPr/>
-        </p:nvSpPr>
-        <p:spPr>
-          <a:xfrm>
-            <a:off x="2286000" y="3044952"/>
-            <a:ext cx="3200400" cy="365760"/>
-          </a:xfrm>
-          <a:prstGeom prst="rect">
-            <a:avLst/>
-          </a:prstGeom>
-          <a:noFill/>
-        </p:spPr>
-        <p:txBody>
-          <a:bodyPr wrap="square">
-            <a:spAutoFit/>
-          </a:bodyPr>
-          <a:lstStyle/>
-          <a:p>
-            <a:pPr algn="l">
-              <a:lnSpc>
-                <a:spcPts val="2550"/>
-              </a:lnSpc>
-              <a:spcAft>
-                <a:spcPts val="0"/>
-              </a:spcAft>
-              <a:defRPr sz="1700" b="1">
-                <a:solidFill>
-                  <a:srgbClr val="FAF9F5"/>
-                </a:solidFill>
-                <a:latin typeface="Hiragino Sans"/>
-              </a:defRPr>
-            </a:pPr>
-            <a:r>
-              <a:t>計画をレビュー</a:t>
-            </a:r>
-          </a:p>
-        </p:txBody>
-      </p:sp>
-      <p:sp>
-        <p:nvSpPr>
-          <p:cNvPr id="12" name="TextBox 11"/>
-          <p:cNvSpPr txBox="1"/>
-          <p:nvPr/>
-        </p:nvSpPr>
-        <p:spPr>
-          <a:xfrm>
-            <a:off x="1097280" y="3474720"/>
-            <a:ext cx="4572000" cy="365760"/>
-          </a:xfrm>
-          <a:prstGeom prst="rect">
-            <a:avLst/>
-          </a:prstGeom>
-          <a:noFill/>
-        </p:spPr>
-        <p:txBody>
-          <a:bodyPr wrap="square">
-            <a:spAutoFit/>
-          </a:bodyPr>
-          <a:lstStyle/>
-          <a:p>
-            <a:pPr algn="l">
-              <a:lnSpc>
-                <a:spcPts val="1950"/>
-              </a:lnSpc>
-              <a:spcAft>
-                <a:spcPts val="0"/>
-              </a:spcAft>
-              <a:defRPr sz="1300" b="0">
-                <a:solidFill>
-                  <a:srgbClr val="6A9BCC"/>
-                </a:solidFill>
                 <a:latin typeface="SF Mono"/>
               </a:defRPr>
             </a:pPr>
             <a:r>
-              <a:t>「後方互換性はどうする？」「テストは？」</a:t>
-            </a:r>
-          </a:p>
-        </p:txBody>
-      </p:sp>
-      <p:sp>
-        <p:nvSpPr>
-          <p:cNvPr id="13" name="TextBox 12"/>
-          <p:cNvSpPr txBox="1"/>
-          <p:nvPr/>
-        </p:nvSpPr>
-        <p:spPr>
-          <a:xfrm>
-            <a:off x="6400800" y="3246120"/>
-            <a:ext cx="4572000" cy="457200"/>
-          </a:xfrm>
-          <a:prstGeom prst="rect">
-            <a:avLst/>
-          </a:prstGeom>
-          <a:noFill/>
-        </p:spPr>
-        <p:txBody>
-          <a:bodyPr wrap="square">
-            <a:spAutoFit/>
-          </a:bodyPr>
-          <a:lstStyle/>
-          <a:p>
-            <a:pPr algn="l">
-              <a:lnSpc>
-                <a:spcPts val="2100"/>
-              </a:lnSpc>
-              <a:spcAft>
-                <a:spcPts val="0"/>
-              </a:spcAft>
-              <a:defRPr sz="1400" b="0">
-                <a:solidFill>
-                  <a:srgbClr val="C5C3BB"/>
-                </a:solidFill>
-                <a:latin typeface="Hiragino Sans"/>
-              </a:defRPr>
-            </a:pPr>
-            <a:r>
-              <a:t>不明点をつぶし、計画を確定する</a:t>
-            </a:r>
-          </a:p>
-        </p:txBody>
-      </p:sp>
-      <p:sp>
-        <p:nvSpPr>
-          <p:cNvPr id="14" name="Rounded Rectangle 13"/>
+              <a:t>「テストを実行して、失敗しているケースがあれば原因を教えて」</a:t>
+            </a:r>
+          </a:p>
+        </p:txBody>
+      </p:sp>
+      <p:sp>
+        <p:nvSpPr>
+          <p:cNvPr id="15" name="Rounded Rectangle 14"/>
           <p:cNvSpPr/>
           <p:nvPr/>
         </p:nvSpPr>
         <p:spPr>
           <a:xfrm>
-            <a:off x="731520" y="4114800"/>
-            <a:ext cx="10515600" cy="1005840"/>
+            <a:off x="731520" y="5943600"/>
+            <a:ext cx="10515600" cy="640080"/>
           </a:xfrm>
           <a:prstGeom prst="roundRect">
             <a:avLst>
@@ -9606,14 +10071,14 @@
       </p:sp>
       <p:sp>
         <p:nvSpPr>
-          <p:cNvPr id="15" name="TextBox 14"/>
-          <p:cNvSpPr txBox="1"/>
-          <p:nvPr/>
-        </p:nvSpPr>
-        <p:spPr>
-          <a:xfrm>
-            <a:off x="1097280" y="4187952"/>
-            <a:ext cx="1097280" cy="365760"/>
+          <p:cNvPr id="16" name="TextBox 15"/>
+          <p:cNvSpPr txBox="1"/>
+          <p:nvPr/>
+        </p:nvSpPr>
+        <p:spPr>
+          <a:xfrm>
+            <a:off x="1188720" y="6053328"/>
+            <a:ext cx="9601200" cy="457200"/>
           </a:xfrm>
           <a:prstGeom prst="rect">
             <a:avLst/>
@@ -9628,62 +10093,20 @@
           <a:p>
             <a:pPr algn="l">
               <a:lnSpc>
-                <a:spcPts val="2100"/>
-              </a:lnSpc>
-              <a:spcAft>
-                <a:spcPts val="0"/>
-              </a:spcAft>
-              <a:defRPr sz="1400" b="1">
-                <a:solidFill>
-                  <a:srgbClr val="D97757"/>
-                </a:solidFill>
-                <a:latin typeface="Helvetica Neue"/>
-              </a:defRPr>
-            </a:pPr>
-            <a:r>
-              <a:t>Step 3</a:t>
-            </a:r>
-          </a:p>
-        </p:txBody>
-      </p:sp>
-      <p:sp>
-        <p:nvSpPr>
-          <p:cNvPr id="16" name="TextBox 15"/>
-          <p:cNvSpPr txBox="1"/>
-          <p:nvPr/>
-        </p:nvSpPr>
-        <p:spPr>
-          <a:xfrm>
-            <a:off x="2286000" y="4187952"/>
-            <a:ext cx="3200400" cy="365760"/>
-          </a:xfrm>
-          <a:prstGeom prst="rect">
-            <a:avLst/>
-          </a:prstGeom>
-          <a:noFill/>
-        </p:spPr>
-        <p:txBody>
-          <a:bodyPr wrap="square">
-            <a:spAutoFit/>
-          </a:bodyPr>
-          <a:lstStyle/>
-          <a:p>
-            <a:pPr algn="l">
-              <a:lnSpc>
-                <a:spcPts val="2550"/>
-              </a:lnSpc>
-              <a:spcAft>
-                <a:spcPts val="0"/>
-              </a:spcAft>
-              <a:defRPr sz="1700" b="1">
-                <a:solidFill>
-                  <a:srgbClr val="FAF9F5"/>
-                </a:solidFill>
-                <a:latin typeface="Hiragino Sans"/>
-              </a:defRPr>
-            </a:pPr>
-            <a:r>
-              <a:t>必要に応じて実装を許可</a:t>
+                <a:spcPts val="2400"/>
+              </a:lnSpc>
+              <a:spcAft>
+                <a:spcPts val="0"/>
+              </a:spcAft>
+              <a:defRPr sz="1600" b="0">
+                <a:solidFill>
+                  <a:srgbClr val="6A9BCC"/>
+                </a:solidFill>
+                <a:latin typeface="SF Mono"/>
+              </a:defRPr>
+            </a:pPr>
+            <a:r>
+              <a:t>「この関数の参照箇所を全部列挙して」</a:t>
             </a:r>
           </a:p>
         </p:txBody>
@@ -9691,303 +10114,6 @@
       <p:sp>
         <p:nvSpPr>
           <p:cNvPr id="17" name="TextBox 16"/>
-          <p:cNvSpPr txBox="1"/>
-          <p:nvPr/>
-        </p:nvSpPr>
-        <p:spPr>
-          <a:xfrm>
-            <a:off x="1097280" y="4617720"/>
-            <a:ext cx="4572000" cy="365760"/>
-          </a:xfrm>
-          <a:prstGeom prst="rect">
-            <a:avLst/>
-          </a:prstGeom>
-          <a:noFill/>
-        </p:spPr>
-        <p:txBody>
-          <a:bodyPr wrap="square">
-            <a:spAutoFit/>
-          </a:bodyPr>
-          <a:lstStyle/>
-          <a:p>
-            <a:pPr algn="l">
-              <a:lnSpc>
-                <a:spcPts val="1950"/>
-              </a:lnSpc>
-              <a:spcAft>
-                <a:spcPts val="0"/>
-              </a:spcAft>
-              <a:defRPr sz="1300" b="0">
-                <a:solidFill>
-                  <a:srgbClr val="6A9BCC"/>
-                </a:solidFill>
-                <a:latin typeface="SF Mono"/>
-              </a:defRPr>
-            </a:pPr>
-            <a:r>
-              <a:t>「OK、実装して」/ 調査だけならここで完了</a:t>
-            </a:r>
-          </a:p>
-        </p:txBody>
-      </p:sp>
-      <p:sp>
-        <p:nvSpPr>
-          <p:cNvPr id="18" name="TextBox 17"/>
-          <p:cNvSpPr txBox="1"/>
-          <p:nvPr/>
-        </p:nvSpPr>
-        <p:spPr>
-          <a:xfrm>
-            <a:off x="6400800" y="4389120"/>
-            <a:ext cx="4572000" cy="457200"/>
-          </a:xfrm>
-          <a:prstGeom prst="rect">
-            <a:avLst/>
-          </a:prstGeom>
-          <a:noFill/>
-        </p:spPr>
-        <p:txBody>
-          <a:bodyPr wrap="square">
-            <a:spAutoFit/>
-          </a:bodyPr>
-          <a:lstStyle/>
-          <a:p>
-            <a:pPr algn="l">
-              <a:lnSpc>
-                <a:spcPts val="2100"/>
-              </a:lnSpc>
-              <a:spcAft>
-                <a:spcPts val="0"/>
-              </a:spcAft>
-              <a:defRPr sz="1400" b="0">
-                <a:solidFill>
-                  <a:srgbClr val="C5C3BB"/>
-                </a:solidFill>
-                <a:latin typeface="Hiragino Sans"/>
-              </a:defRPr>
-            </a:pPr>
-            <a:r>
-              <a:t>計画に沿って実装、または調査結果を活用</a:t>
-            </a:r>
-          </a:p>
-        </p:txBody>
-      </p:sp>
-      <p:sp>
-        <p:nvSpPr>
-          <p:cNvPr id="19" name="Rounded Rectangle 18"/>
-          <p:cNvSpPr/>
-          <p:nvPr/>
-        </p:nvSpPr>
-        <p:spPr>
-          <a:xfrm>
-            <a:off x="731520" y="5257800"/>
-            <a:ext cx="10515600" cy="1005840"/>
-          </a:xfrm>
-          <a:prstGeom prst="roundRect">
-            <a:avLst>
-              <a:gd name="adj" fmla="val 2000"/>
-            </a:avLst>
-          </a:prstGeom>
-          <a:solidFill>
-            <a:srgbClr val="252220"/>
-          </a:solidFill>
-          <a:ln>
-            <a:noFill/>
-          </a:ln>
-        </p:spPr>
-        <p:style>
-          <a:lnRef idx="1">
-            <a:schemeClr val="accent1"/>
-          </a:lnRef>
-          <a:fillRef idx="3">
-            <a:schemeClr val="accent1"/>
-          </a:fillRef>
-          <a:effectRef idx="2">
-            <a:schemeClr val="accent1"/>
-          </a:effectRef>
-          <a:fontRef idx="minor">
-            <a:schemeClr val="lt1"/>
-          </a:fontRef>
-        </p:style>
-        <p:txBody>
-          <a:bodyPr rtlCol="0" anchor="ctr"/>
-          <a:lstStyle/>
-          <a:p>
-            <a:pPr algn="ctr"/>
-          </a:p>
-        </p:txBody>
-      </p:sp>
-      <p:sp>
-        <p:nvSpPr>
-          <p:cNvPr id="20" name="TextBox 19"/>
-          <p:cNvSpPr txBox="1"/>
-          <p:nvPr/>
-        </p:nvSpPr>
-        <p:spPr>
-          <a:xfrm>
-            <a:off x="1097280" y="5330952"/>
-            <a:ext cx="1097280" cy="365760"/>
-          </a:xfrm>
-          <a:prstGeom prst="rect">
-            <a:avLst/>
-          </a:prstGeom>
-          <a:noFill/>
-        </p:spPr>
-        <p:txBody>
-          <a:bodyPr wrap="square">
-            <a:spAutoFit/>
-          </a:bodyPr>
-          <a:lstStyle/>
-          <a:p>
-            <a:pPr algn="l">
-              <a:lnSpc>
-                <a:spcPts val="2100"/>
-              </a:lnSpc>
-              <a:spcAft>
-                <a:spcPts val="0"/>
-              </a:spcAft>
-              <a:defRPr sz="1400" b="1">
-                <a:solidFill>
-                  <a:srgbClr val="FAF9F5"/>
-                </a:solidFill>
-                <a:latin typeface="Helvetica Neue"/>
-              </a:defRPr>
-            </a:pPr>
-            <a:r>
-              <a:t>Step 4</a:t>
-            </a:r>
-          </a:p>
-        </p:txBody>
-      </p:sp>
-      <p:sp>
-        <p:nvSpPr>
-          <p:cNvPr id="21" name="TextBox 20"/>
-          <p:cNvSpPr txBox="1"/>
-          <p:nvPr/>
-        </p:nvSpPr>
-        <p:spPr>
-          <a:xfrm>
-            <a:off x="2286000" y="5330952"/>
-            <a:ext cx="3200400" cy="365760"/>
-          </a:xfrm>
-          <a:prstGeom prst="rect">
-            <a:avLst/>
-          </a:prstGeom>
-          <a:noFill/>
-        </p:spPr>
-        <p:txBody>
-          <a:bodyPr wrap="square">
-            <a:spAutoFit/>
-          </a:bodyPr>
-          <a:lstStyle/>
-          <a:p>
-            <a:pPr algn="l">
-              <a:lnSpc>
-                <a:spcPts val="2550"/>
-              </a:lnSpc>
-              <a:spcAft>
-                <a:spcPts val="0"/>
-              </a:spcAft>
-              <a:defRPr sz="1700" b="1">
-                <a:solidFill>
-                  <a:srgbClr val="FAF9F5"/>
-                </a:solidFill>
-                <a:latin typeface="Hiragino Sans"/>
-              </a:defRPr>
-            </a:pPr>
-            <a:r>
-              <a:t>結果を確認・コミット</a:t>
-            </a:r>
-          </a:p>
-        </p:txBody>
-      </p:sp>
-      <p:sp>
-        <p:nvSpPr>
-          <p:cNvPr id="22" name="TextBox 21"/>
-          <p:cNvSpPr txBox="1"/>
-          <p:nvPr/>
-        </p:nvSpPr>
-        <p:spPr>
-          <a:xfrm>
-            <a:off x="1097280" y="5760720"/>
-            <a:ext cx="4572000" cy="365760"/>
-          </a:xfrm>
-          <a:prstGeom prst="rect">
-            <a:avLst/>
-          </a:prstGeom>
-          <a:noFill/>
-        </p:spPr>
-        <p:txBody>
-          <a:bodyPr wrap="square">
-            <a:spAutoFit/>
-          </a:bodyPr>
-          <a:lstStyle/>
-          <a:p>
-            <a:pPr algn="l">
-              <a:lnSpc>
-                <a:spcPts val="1950"/>
-              </a:lnSpc>
-              <a:spcAft>
-                <a:spcPts val="0"/>
-              </a:spcAft>
-              <a:defRPr sz="1300" b="0">
-                <a:solidFill>
-                  <a:srgbClr val="6A9BCC"/>
-                </a:solidFill>
-                <a:latin typeface="SF Mono"/>
-              </a:defRPr>
-            </a:pPr>
-            <a:r>
-              <a:t>テスト実行 → PR作成</a:t>
-            </a:r>
-          </a:p>
-        </p:txBody>
-      </p:sp>
-      <p:sp>
-        <p:nvSpPr>
-          <p:cNvPr id="23" name="TextBox 22"/>
-          <p:cNvSpPr txBox="1"/>
-          <p:nvPr/>
-        </p:nvSpPr>
-        <p:spPr>
-          <a:xfrm>
-            <a:off x="6400800" y="5532120"/>
-            <a:ext cx="4572000" cy="457200"/>
-          </a:xfrm>
-          <a:prstGeom prst="rect">
-            <a:avLst/>
-          </a:prstGeom>
-          <a:noFill/>
-        </p:spPr>
-        <p:txBody>
-          <a:bodyPr wrap="square">
-            <a:spAutoFit/>
-          </a:bodyPr>
-          <a:lstStyle/>
-          <a:p>
-            <a:pPr algn="l">
-              <a:lnSpc>
-                <a:spcPts val="2100"/>
-              </a:lnSpc>
-              <a:spcAft>
-                <a:spcPts val="0"/>
-              </a:spcAft>
-              <a:defRPr sz="1400" b="0">
-                <a:solidFill>
-                  <a:srgbClr val="C5C3BB"/>
-                </a:solidFill>
-                <a:latin typeface="Hiragino Sans"/>
-              </a:defRPr>
-            </a:pPr>
-            <a:r>
-              <a:t>変更内容を取りまとめて完了</a:t>
-            </a:r>
-          </a:p>
-        </p:txBody>
-      </p:sp>
-      <p:sp>
-        <p:nvSpPr>
-          <p:cNvPr id="24" name="TextBox 23"/>
           <p:cNvSpPr txBox="1"/>
           <p:nvPr/>
         </p:nvSpPr>
@@ -10022,7 +10148,7 @@
               </a:defRPr>
             </a:pPr>
             <a:r>
-              <a:t>15 / 17</a:t>
+              <a:t>15 / 16</a:t>
             </a:r>
           </a:p>
         </p:txBody>
@@ -10061,8 +10187,8 @@
         </p:nvSpPr>
         <p:spPr>
           <a:xfrm>
-            <a:off x="731520" y="365760"/>
-            <a:ext cx="2743200" cy="365760"/>
+            <a:off x="731520" y="457200"/>
+            <a:ext cx="10058400" cy="731520"/>
           </a:xfrm>
           <a:prstGeom prst="rect">
             <a:avLst/>
@@ -10077,54 +10203,12 @@
           <a:p>
             <a:pPr algn="l">
               <a:lnSpc>
-                <a:spcPts val="1800"/>
-              </a:lnSpc>
-              <a:spcAft>
-                <a:spcPts val="0"/>
-              </a:spcAft>
-              <a:defRPr sz="1200" b="1">
-                <a:solidFill>
-                  <a:srgbClr val="D97757"/>
-                </a:solidFill>
-                <a:latin typeface="Helvetica Neue"/>
-              </a:defRPr>
-            </a:pPr>
-            <a:r>
-              <a:t>PART 3 — Plan Mode</a:t>
-            </a:r>
-          </a:p>
-        </p:txBody>
-      </p:sp>
-      <p:sp>
-        <p:nvSpPr>
-          <p:cNvPr id="3" name="TextBox 2"/>
-          <p:cNvSpPr txBox="1"/>
-          <p:nvPr/>
-        </p:nvSpPr>
-        <p:spPr>
-          <a:xfrm>
-            <a:off x="731520" y="822960"/>
-            <a:ext cx="10058400" cy="731520"/>
-          </a:xfrm>
-          <a:prstGeom prst="rect">
-            <a:avLst/>
-          </a:prstGeom>
-          <a:noFill/>
-        </p:spPr>
-        <p:txBody>
-          <a:bodyPr wrap="square">
-            <a:spAutoFit/>
-          </a:bodyPr>
-          <a:lstStyle/>
-          <a:p>
-            <a:pPr algn="l">
-              <a:lnSpc>
-                <a:spcPts val="4800"/>
-              </a:lnSpc>
-              <a:spcAft>
-                <a:spcPts val="0"/>
-              </a:spcAft>
-              <a:defRPr sz="3200" b="1">
+                <a:spcPts val="5400"/>
+              </a:lnSpc>
+              <a:spcAft>
+                <a:spcPts val="0"/>
+              </a:spcAft>
+              <a:defRPr sz="3600" b="1">
                 <a:solidFill>
                   <a:srgbClr val="FAF9F5"/>
                 </a:solidFill>
@@ -10132,21 +10216,21 @@
               </a:defRPr>
             </a:pPr>
             <a:r>
-              <a:t>計画段階のチェックリスト</a:t>
-            </a:r>
-          </a:p>
-        </p:txBody>
-      </p:sp>
-      <p:sp>
-        <p:nvSpPr>
-          <p:cNvPr id="4" name="Rounded Rectangle 3"/>
+              <a:t>まとめ / 次回予告</a:t>
+            </a:r>
+          </a:p>
+        </p:txBody>
+      </p:sp>
+      <p:sp>
+        <p:nvSpPr>
+          <p:cNvPr id="3" name="Rounded Rectangle 2"/>
           <p:cNvSpPr/>
           <p:nvPr/>
         </p:nvSpPr>
         <p:spPr>
           <a:xfrm>
-            <a:off x="731520" y="1828800"/>
-            <a:ext cx="10515600" cy="822960"/>
+            <a:off x="731520" y="1463040"/>
+            <a:ext cx="10515600" cy="1097280"/>
           </a:xfrm>
           <a:prstGeom prst="roundRect">
             <a:avLst>
@@ -10184,14 +10268,56 @@
       </p:sp>
       <p:sp>
         <p:nvSpPr>
+          <p:cNvPr id="4" name="TextBox 3"/>
+          <p:cNvSpPr txBox="1"/>
+          <p:nvPr/>
+        </p:nvSpPr>
+        <p:spPr>
+          <a:xfrm>
+            <a:off x="1097280" y="1554480"/>
+            <a:ext cx="457200" cy="457200"/>
+          </a:xfrm>
+          <a:prstGeom prst="rect">
+            <a:avLst/>
+          </a:prstGeom>
+          <a:noFill/>
+        </p:spPr>
+        <p:txBody>
+          <a:bodyPr wrap="square">
+            <a:spAutoFit/>
+          </a:bodyPr>
+          <a:lstStyle/>
+          <a:p>
+            <a:pPr algn="l">
+              <a:lnSpc>
+                <a:spcPts val="4200"/>
+              </a:lnSpc>
+              <a:spcAft>
+                <a:spcPts val="0"/>
+              </a:spcAft>
+              <a:defRPr sz="2800" b="1">
+                <a:solidFill>
+                  <a:srgbClr val="D97757"/>
+                </a:solidFill>
+                <a:latin typeface="Helvetica Neue"/>
+              </a:defRPr>
+            </a:pPr>
+            <a:r>
+              <a:t>1</a:t>
+            </a:r>
+          </a:p>
+        </p:txBody>
+      </p:sp>
+      <p:sp>
+        <p:nvSpPr>
           <p:cNvPr id="5" name="TextBox 4"/>
           <p:cNvSpPr txBox="1"/>
           <p:nvPr/>
         </p:nvSpPr>
         <p:spPr>
           <a:xfrm>
-            <a:off x="1188720" y="1993392"/>
-            <a:ext cx="2743200" cy="457200"/>
+            <a:off x="1828800" y="1554480"/>
+            <a:ext cx="8686800" cy="457200"/>
           </a:xfrm>
           <a:prstGeom prst="rect">
             <a:avLst/>
@@ -10213,13 +10339,17 @@
               </a:spcAft>
               <a:defRPr sz="2000" b="1">
                 <a:solidFill>
-                  <a:srgbClr val="7BC9A0"/>
+                  <a:srgbClr val="FAF9F5"/>
                 </a:solidFill>
                 <a:latin typeface="Hiragino Sans"/>
               </a:defRPr>
             </a:pPr>
             <a:r>
-              <a:t>ゴール</a:t>
+              <a:t>Claude Code はコード補完ではなく</a:t>
+            </a:r>
+            <a:br/>
+            <a:r>
+              <a:t>「作業を進める」ツール</a:t>
             </a:r>
           </a:p>
         </p:txBody>
@@ -10232,8 +10362,8 @@
         </p:nvSpPr>
         <p:spPr>
           <a:xfrm>
-            <a:off x="4572000" y="1993392"/>
-            <a:ext cx="6400800" cy="457200"/>
+            <a:off x="1828800" y="2057400"/>
+            <a:ext cx="8686800" cy="457200"/>
           </a:xfrm>
           <a:prstGeom prst="rect">
             <a:avLst/>
@@ -10248,12 +10378,12 @@
           <a:p>
             <a:pPr algn="l">
               <a:lnSpc>
-                <a:spcPts val="2550"/>
-              </a:lnSpc>
-              <a:spcAft>
-                <a:spcPts val="0"/>
-              </a:spcAft>
-              <a:defRPr sz="1700" b="0">
+                <a:spcPts val="2250"/>
+              </a:lnSpc>
+              <a:spcAft>
+                <a:spcPts val="0"/>
+              </a:spcAft>
+              <a:defRPr sz="1500" b="0">
                 <a:solidFill>
                   <a:srgbClr val="C5C3BB"/>
                 </a:solidFill>
@@ -10261,7 +10391,7 @@
               </a:defRPr>
             </a:pPr>
             <a:r>
-              <a:t>何を達成したいか</a:t>
+              <a:t>調査→計画→実装→検証→取りまとめの一連フロー</a:t>
             </a:r>
           </a:p>
         </p:txBody>
@@ -10275,7 +10405,7 @@
         <p:spPr>
           <a:xfrm>
             <a:off x="731520" y="2743200"/>
-            <a:ext cx="10515600" cy="822960"/>
+            <a:ext cx="10515600" cy="1097280"/>
           </a:xfrm>
           <a:prstGeom prst="roundRect">
             <a:avLst>
@@ -10319,8 +10449,8 @@
         </p:nvSpPr>
         <p:spPr>
           <a:xfrm>
-            <a:off x="1188720" y="2907792"/>
-            <a:ext cx="2743200" cy="457200"/>
+            <a:off x="1097280" y="2834640"/>
+            <a:ext cx="457200" cy="457200"/>
           </a:xfrm>
           <a:prstGeom prst="rect">
             <a:avLst/>
@@ -10335,6 +10465,48 @@
           <a:p>
             <a:pPr algn="l">
               <a:lnSpc>
+                <a:spcPts val="4200"/>
+              </a:lnSpc>
+              <a:spcAft>
+                <a:spcPts val="0"/>
+              </a:spcAft>
+              <a:defRPr sz="2800" b="1">
+                <a:solidFill>
+                  <a:srgbClr val="D97757"/>
+                </a:solidFill>
+                <a:latin typeface="Helvetica Neue"/>
+              </a:defRPr>
+            </a:pPr>
+            <a:r>
+              <a:t>2</a:t>
+            </a:r>
+          </a:p>
+        </p:txBody>
+      </p:sp>
+      <p:sp>
+        <p:nvSpPr>
+          <p:cNvPr id="9" name="TextBox 8"/>
+          <p:cNvSpPr txBox="1"/>
+          <p:nvPr/>
+        </p:nvSpPr>
+        <p:spPr>
+          <a:xfrm>
+            <a:off x="1828800" y="2834640"/>
+            <a:ext cx="8686800" cy="457200"/>
+          </a:xfrm>
+          <a:prstGeom prst="rect">
+            <a:avLst/>
+          </a:prstGeom>
+          <a:noFill/>
+        </p:spPr>
+        <p:txBody>
+          <a:bodyPr wrap="square">
+            <a:spAutoFit/>
+          </a:bodyPr>
+          <a:lstStyle/>
+          <a:p>
+            <a:pPr algn="l">
+              <a:lnSpc>
                 <a:spcPts val="3000"/>
               </a:lnSpc>
               <a:spcAft>
@@ -10342,27 +10514,27 @@
               </a:spcAft>
               <a:defRPr sz="2000" b="1">
                 <a:solidFill>
-                  <a:srgbClr val="7BC9A0"/>
+                  <a:srgbClr val="FAF9F5"/>
                 </a:solidFill>
                 <a:latin typeface="Hiragino Sans"/>
               </a:defRPr>
             </a:pPr>
             <a:r>
-              <a:t>背景・制約</a:t>
-            </a:r>
-          </a:p>
-        </p:txBody>
-      </p:sp>
-      <p:sp>
-        <p:nvSpPr>
-          <p:cNvPr id="9" name="TextBox 8"/>
-          <p:cNvSpPr txBox="1"/>
-          <p:nvPr/>
-        </p:nvSpPr>
-        <p:spPr>
-          <a:xfrm>
-            <a:off x="4572000" y="2907792"/>
-            <a:ext cx="6400800" cy="457200"/>
+              <a:t>伝え方で結果が変わる</a:t>
+            </a:r>
+          </a:p>
+        </p:txBody>
+      </p:sp>
+      <p:sp>
+        <p:nvSpPr>
+          <p:cNvPr id="10" name="TextBox 9"/>
+          <p:cNvSpPr txBox="1"/>
+          <p:nvPr/>
+        </p:nvSpPr>
+        <p:spPr>
+          <a:xfrm>
+            <a:off x="1828800" y="3337560"/>
+            <a:ext cx="8686800" cy="457200"/>
           </a:xfrm>
           <a:prstGeom prst="rect">
             <a:avLst/>
@@ -10377,12 +10549,12 @@
           <a:p>
             <a:pPr algn="l">
               <a:lnSpc>
-                <a:spcPts val="2550"/>
-              </a:lnSpc>
-              <a:spcAft>
-                <a:spcPts val="0"/>
-              </a:spcAft>
-              <a:defRPr sz="1700" b="0">
+                <a:spcPts val="2250"/>
+              </a:lnSpc>
+              <a:spcAft>
+                <a:spcPts val="0"/>
+              </a:spcAft>
+              <a:defRPr sz="1500" b="0">
                 <a:solidFill>
                   <a:srgbClr val="C5C3BB"/>
                 </a:solidFill>
@@ -10390,21 +10562,21 @@
               </a:defRPr>
             </a:pPr>
             <a:r>
-              <a:t>なぜ必要か / やってはいけないこと</a:t>
-            </a:r>
-          </a:p>
-        </p:txBody>
-      </p:sp>
-      <p:sp>
-        <p:nvSpPr>
-          <p:cNvPr id="10" name="Rounded Rectangle 9"/>
+              <a:t>目標・背景・現状・期待出力を伝え、たたき台→改善ループで進める</a:t>
+            </a:r>
+          </a:p>
+        </p:txBody>
+      </p:sp>
+      <p:sp>
+        <p:nvSpPr>
+          <p:cNvPr id="11" name="Rounded Rectangle 10"/>
           <p:cNvSpPr/>
           <p:nvPr/>
         </p:nvSpPr>
         <p:spPr>
           <a:xfrm>
-            <a:off x="731520" y="3657600"/>
-            <a:ext cx="10515600" cy="822960"/>
+            <a:off x="731520" y="4023360"/>
+            <a:ext cx="10515600" cy="1097280"/>
           </a:xfrm>
           <a:prstGeom prst="roundRect">
             <a:avLst>
@@ -10442,14 +10614,14 @@
       </p:sp>
       <p:sp>
         <p:nvSpPr>
-          <p:cNvPr id="11" name="TextBox 10"/>
-          <p:cNvSpPr txBox="1"/>
-          <p:nvPr/>
-        </p:nvSpPr>
-        <p:spPr>
-          <a:xfrm>
-            <a:off x="1188720" y="3822192"/>
-            <a:ext cx="2743200" cy="457200"/>
+          <p:cNvPr id="12" name="TextBox 11"/>
+          <p:cNvSpPr txBox="1"/>
+          <p:nvPr/>
+        </p:nvSpPr>
+        <p:spPr>
+          <a:xfrm>
+            <a:off x="1097280" y="4114800"/>
+            <a:ext cx="457200" cy="457200"/>
           </a:xfrm>
           <a:prstGeom prst="rect">
             <a:avLst/>
@@ -10464,6 +10636,48 @@
           <a:p>
             <a:pPr algn="l">
               <a:lnSpc>
+                <a:spcPts val="4200"/>
+              </a:lnSpc>
+              <a:spcAft>
+                <a:spcPts val="0"/>
+              </a:spcAft>
+              <a:defRPr sz="2800" b="1">
+                <a:solidFill>
+                  <a:srgbClr val="D97757"/>
+                </a:solidFill>
+                <a:latin typeface="Helvetica Neue"/>
+              </a:defRPr>
+            </a:pPr>
+            <a:r>
+              <a:t>3</a:t>
+            </a:r>
+          </a:p>
+        </p:txBody>
+      </p:sp>
+      <p:sp>
+        <p:nvSpPr>
+          <p:cNvPr id="13" name="TextBox 12"/>
+          <p:cNvSpPr txBox="1"/>
+          <p:nvPr/>
+        </p:nvSpPr>
+        <p:spPr>
+          <a:xfrm>
+            <a:off x="1828800" y="4114800"/>
+            <a:ext cx="8686800" cy="457200"/>
+          </a:xfrm>
+          <a:prstGeom prst="rect">
+            <a:avLst/>
+          </a:prstGeom>
+          <a:noFill/>
+        </p:spPr>
+        <p:txBody>
+          <a:bodyPr wrap="square">
+            <a:spAutoFit/>
+          </a:bodyPr>
+          <a:lstStyle/>
+          <a:p>
+            <a:pPr algn="l">
+              <a:lnSpc>
                 <a:spcPts val="3000"/>
               </a:lnSpc>
               <a:spcAft>
@@ -10471,27 +10685,27 @@
               </a:spcAft>
               <a:defRPr sz="2000" b="1">
                 <a:solidFill>
-                  <a:srgbClr val="7BC9A0"/>
+                  <a:srgbClr val="FAF9F5"/>
                 </a:solidFill>
                 <a:latin typeface="Hiragino Sans"/>
               </a:defRPr>
             </a:pPr>
             <a:r>
-              <a:t>受け入れ基準</a:t>
-            </a:r>
-          </a:p>
-        </p:txBody>
-      </p:sp>
-      <p:sp>
-        <p:nvSpPr>
-          <p:cNvPr id="12" name="TextBox 11"/>
-          <p:cNvSpPr txBox="1"/>
-          <p:nvPr/>
-        </p:nvSpPr>
-        <p:spPr>
-          <a:xfrm>
-            <a:off x="4572000" y="3822192"/>
-            <a:ext cx="6400800" cy="457200"/>
+              <a:t>いきなりコードを書かせない</a:t>
+            </a:r>
+          </a:p>
+        </p:txBody>
+      </p:sp>
+      <p:sp>
+        <p:nvSpPr>
+          <p:cNvPr id="14" name="TextBox 13"/>
+          <p:cNvSpPr txBox="1"/>
+          <p:nvPr/>
+        </p:nvSpPr>
+        <p:spPr>
+          <a:xfrm>
+            <a:off x="1828800" y="4617720"/>
+            <a:ext cx="8686800" cy="457200"/>
           </a:xfrm>
           <a:prstGeom prst="rect">
             <a:avLst/>
@@ -10506,12 +10720,12 @@
           <a:p>
             <a:pPr algn="l">
               <a:lnSpc>
-                <a:spcPts val="2550"/>
-              </a:lnSpc>
-              <a:spcAft>
-                <a:spcPts val="0"/>
-              </a:spcAft>
-              <a:defRPr sz="1700" b="0">
+                <a:spcPts val="2250"/>
+              </a:lnSpc>
+              <a:spcAft>
+                <a:spcPts val="0"/>
+              </a:spcAft>
+              <a:defRPr sz="1500" b="0">
                 <a:solidFill>
                   <a:srgbClr val="C5C3BB"/>
                 </a:solidFill>
@@ -10519,66 +10733,21 @@
               </a:defRPr>
             </a:pPr>
             <a:r>
-              <a:t>どうなったら完了か</a:t>
-            </a:r>
-          </a:p>
-        </p:txBody>
-      </p:sp>
-      <p:sp>
-        <p:nvSpPr>
-          <p:cNvPr id="13" name="Rounded Rectangle 12"/>
-          <p:cNvSpPr/>
-          <p:nvPr/>
-        </p:nvSpPr>
-        <p:spPr>
-          <a:xfrm>
-            <a:off x="731520" y="4572000"/>
-            <a:ext cx="10515600" cy="822960"/>
-          </a:xfrm>
-          <a:prstGeom prst="roundRect">
-            <a:avLst>
-              <a:gd name="adj" fmla="val 2000"/>
-            </a:avLst>
-          </a:prstGeom>
-          <a:solidFill>
-            <a:srgbClr val="252220"/>
-          </a:solidFill>
-          <a:ln>
-            <a:noFill/>
-          </a:ln>
-        </p:spPr>
-        <p:style>
-          <a:lnRef idx="1">
-            <a:schemeClr val="accent1"/>
-          </a:lnRef>
-          <a:fillRef idx="3">
-            <a:schemeClr val="accent1"/>
-          </a:fillRef>
-          <a:effectRef idx="2">
-            <a:schemeClr val="accent1"/>
-          </a:effectRef>
-          <a:fontRef idx="minor">
-            <a:schemeClr val="lt1"/>
-          </a:fontRef>
-        </p:style>
-        <p:txBody>
-          <a:bodyPr rtlCol="0" anchor="ctr"/>
-          <a:lstStyle/>
-          <a:p>
-            <a:pPr algn="ctr"/>
-          </a:p>
-        </p:txBody>
-      </p:sp>
-      <p:sp>
-        <p:nvSpPr>
-          <p:cNvPr id="14" name="TextBox 13"/>
-          <p:cNvSpPr txBox="1"/>
-          <p:nvPr/>
-        </p:nvSpPr>
-        <p:spPr>
-          <a:xfrm>
-            <a:off x="1188720" y="4736592"/>
-            <a:ext cx="2743200" cy="457200"/>
+              <a:t>Plan Modeで方針を固めてから実装に入る</a:t>
+            </a:r>
+          </a:p>
+        </p:txBody>
+      </p:sp>
+      <p:sp>
+        <p:nvSpPr>
+          <p:cNvPr id="15" name="TextBox 14"/>
+          <p:cNvSpPr txBox="1"/>
+          <p:nvPr/>
+        </p:nvSpPr>
+        <p:spPr>
+          <a:xfrm>
+            <a:off x="731520" y="5486400"/>
+            <a:ext cx="10515600" cy="457200"/>
           </a:xfrm>
           <a:prstGeom prst="rect">
             <a:avLst/>
@@ -10593,240 +10762,27 @@
           <a:p>
             <a:pPr algn="l">
               <a:lnSpc>
-                <a:spcPts val="3000"/>
-              </a:lnSpc>
-              <a:spcAft>
-                <a:spcPts val="0"/>
-              </a:spcAft>
-              <a:defRPr sz="2000" b="1">
-                <a:solidFill>
-                  <a:srgbClr val="7BC9A0"/>
+                <a:spcPts val="2700"/>
+              </a:lnSpc>
+              <a:spcAft>
+                <a:spcPts val="0"/>
+              </a:spcAft>
+              <a:defRPr sz="1800" b="1">
+                <a:solidFill>
+                  <a:srgbClr val="D97757"/>
                 </a:solidFill>
                 <a:latin typeface="Hiragino Sans"/>
               </a:defRPr>
             </a:pPr>
             <a:r>
-              <a:t>禁止事項</a:t>
-            </a:r>
-          </a:p>
-        </p:txBody>
-      </p:sp>
-      <p:sp>
-        <p:nvSpPr>
-          <p:cNvPr id="15" name="TextBox 14"/>
-          <p:cNvSpPr txBox="1"/>
-          <p:nvPr/>
-        </p:nvSpPr>
-        <p:spPr>
-          <a:xfrm>
-            <a:off x="4572000" y="4736592"/>
-            <a:ext cx="6400800" cy="457200"/>
-          </a:xfrm>
-          <a:prstGeom prst="rect">
-            <a:avLst/>
-          </a:prstGeom>
-          <a:noFill/>
-        </p:spPr>
-        <p:txBody>
-          <a:bodyPr wrap="square">
-            <a:spAutoFit/>
-          </a:bodyPr>
-          <a:lstStyle/>
-          <a:p>
-            <a:pPr algn="l">
-              <a:lnSpc>
-                <a:spcPts val="2550"/>
-              </a:lnSpc>
-              <a:spcAft>
-                <a:spcPts val="0"/>
-              </a:spcAft>
-              <a:defRPr sz="1700" b="0">
-                <a:solidFill>
-                  <a:srgbClr val="C5C3BB"/>
-                </a:solidFill>
-                <a:latin typeface="Hiragino Sans"/>
-              </a:defRPr>
-            </a:pPr>
-            <a:r>
-              <a:t>絶対にやってはいけない変更</a:t>
-            </a:r>
-          </a:p>
-        </p:txBody>
-      </p:sp>
-      <p:sp>
-        <p:nvSpPr>
-          <p:cNvPr id="16" name="Rounded Rectangle 15"/>
-          <p:cNvSpPr/>
-          <p:nvPr/>
-        </p:nvSpPr>
-        <p:spPr>
-          <a:xfrm>
-            <a:off x="731520" y="5486400"/>
-            <a:ext cx="10515600" cy="822960"/>
-          </a:xfrm>
-          <a:prstGeom prst="roundRect">
-            <a:avLst>
-              <a:gd name="adj" fmla="val 2000"/>
-            </a:avLst>
-          </a:prstGeom>
-          <a:solidFill>
-            <a:srgbClr val="252220"/>
-          </a:solidFill>
-          <a:ln>
-            <a:noFill/>
-          </a:ln>
-        </p:spPr>
-        <p:style>
-          <a:lnRef idx="1">
-            <a:schemeClr val="accent1"/>
-          </a:lnRef>
-          <a:fillRef idx="3">
-            <a:schemeClr val="accent1"/>
-          </a:fillRef>
-          <a:effectRef idx="2">
-            <a:schemeClr val="accent1"/>
-          </a:effectRef>
-          <a:fontRef idx="minor">
-            <a:schemeClr val="lt1"/>
-          </a:fontRef>
-        </p:style>
-        <p:txBody>
-          <a:bodyPr rtlCol="0" anchor="ctr"/>
-          <a:lstStyle/>
-          <a:p>
-            <a:pPr algn="ctr"/>
-          </a:p>
-        </p:txBody>
-      </p:sp>
-      <p:sp>
-        <p:nvSpPr>
-          <p:cNvPr id="17" name="TextBox 16"/>
-          <p:cNvSpPr txBox="1"/>
-          <p:nvPr/>
-        </p:nvSpPr>
-        <p:spPr>
-          <a:xfrm>
-            <a:off x="1188720" y="5650992"/>
-            <a:ext cx="2743200" cy="457200"/>
-          </a:xfrm>
-          <a:prstGeom prst="rect">
-            <a:avLst/>
-          </a:prstGeom>
-          <a:noFill/>
-        </p:spPr>
-        <p:txBody>
-          <a:bodyPr wrap="square">
-            <a:spAutoFit/>
-          </a:bodyPr>
-          <a:lstStyle/>
-          <a:p>
-            <a:pPr algn="l">
-              <a:lnSpc>
-                <a:spcPts val="3000"/>
-              </a:lnSpc>
-              <a:spcAft>
-                <a:spcPts val="0"/>
-              </a:spcAft>
-              <a:defRPr sz="2000" b="1">
-                <a:solidFill>
-                  <a:srgbClr val="7BC9A0"/>
-                </a:solidFill>
-                <a:latin typeface="Hiragino Sans"/>
-              </a:defRPr>
-            </a:pPr>
-            <a:r>
-              <a:t>想定外の扱い</a:t>
-            </a:r>
-          </a:p>
-        </p:txBody>
-      </p:sp>
-      <p:sp>
-        <p:nvSpPr>
-          <p:cNvPr id="18" name="TextBox 17"/>
-          <p:cNvSpPr txBox="1"/>
-          <p:nvPr/>
-        </p:nvSpPr>
-        <p:spPr>
-          <a:xfrm>
-            <a:off x="4572000" y="5650992"/>
-            <a:ext cx="6400800" cy="457200"/>
-          </a:xfrm>
-          <a:prstGeom prst="rect">
-            <a:avLst/>
-          </a:prstGeom>
-          <a:noFill/>
-        </p:spPr>
-        <p:txBody>
-          <a:bodyPr wrap="square">
-            <a:spAutoFit/>
-          </a:bodyPr>
-          <a:lstStyle/>
-          <a:p>
-            <a:pPr algn="l">
-              <a:lnSpc>
-                <a:spcPts val="2550"/>
-              </a:lnSpc>
-              <a:spcAft>
-                <a:spcPts val="0"/>
-              </a:spcAft>
-              <a:defRPr sz="1700" b="0">
-                <a:solidFill>
-                  <a:srgbClr val="C5C3BB"/>
-                </a:solidFill>
-                <a:latin typeface="Hiragino Sans"/>
-              </a:defRPr>
-            </a:pPr>
-            <a:r>
-              <a:t>計画外の問題が見つかったらどうするか</a:t>
-            </a:r>
-          </a:p>
-        </p:txBody>
-      </p:sp>
-      <p:sp>
-        <p:nvSpPr>
-          <p:cNvPr id="19" name="TextBox 18"/>
-          <p:cNvSpPr txBox="1"/>
-          <p:nvPr/>
-        </p:nvSpPr>
-        <p:spPr>
-          <a:xfrm>
-            <a:off x="731520" y="6217920"/>
-            <a:ext cx="10515600" cy="457200"/>
-          </a:xfrm>
-          <a:prstGeom prst="rect">
-            <a:avLst/>
-          </a:prstGeom>
-          <a:noFill/>
-        </p:spPr>
-        <p:txBody>
-          <a:bodyPr wrap="square">
-            <a:spAutoFit/>
-          </a:bodyPr>
-          <a:lstStyle/>
-          <a:p>
-            <a:pPr algn="l">
-              <a:lnSpc>
-                <a:spcPts val="2400"/>
-              </a:lnSpc>
-              <a:spcAft>
-                <a:spcPts val="0"/>
-              </a:spcAft>
-              <a:defRPr sz="1600" b="0">
-                <a:solidFill>
-                  <a:srgbClr val="D97757"/>
-                </a:solidFill>
-                <a:latin typeface="Hiragino Sans"/>
-              </a:defRPr>
-            </a:pPr>
-            <a:r>
-              <a:t>→ これらが曖昧なまま実装に入ると、後から認識のズレが表面化する</a:t>
-            </a:r>
-          </a:p>
-        </p:txBody>
-      </p:sp>
-      <p:sp>
-        <p:nvSpPr>
-          <p:cNvPr id="20" name="TextBox 19"/>
+              <a:t>面倒な調査タスクを1件、Claude Codeに任せてみてください</a:t>
+            </a:r>
+          </a:p>
+        </p:txBody>
+      </p:sp>
+      <p:sp>
+        <p:nvSpPr>
+          <p:cNvPr id="16" name="TextBox 15"/>
           <p:cNvSpPr txBox="1"/>
           <p:nvPr/>
         </p:nvSpPr>
@@ -10861,630 +10817,7 @@
               </a:defRPr>
             </a:pPr>
             <a:r>
-              <a:t>16 / 17</a:t>
-            </a:r>
-          </a:p>
-        </p:txBody>
-      </p:sp>
-    </p:spTree>
-  </p:cSld>
-  <p:clrMapOvr>
-    <a:masterClrMapping/>
-  </p:clrMapOvr>
-</p:sld>
-</file>
-
-<file path=ppt/slides/slide17.xml><?xml version="1.0" encoding="utf-8"?>
-<p:sld xmlns:a="http://schemas.openxmlformats.org/drawingml/2006/main" xmlns:p="http://schemas.openxmlformats.org/presentationml/2006/main" xmlns:r="http://schemas.openxmlformats.org/officeDocument/2006/relationships">
-  <p:cSld>
-    <p:bg>
-      <p:bgPr>
-        <a:solidFill>
-          <a:srgbClr val="1B1918"/>
-        </a:solidFill>
-        <a:effectLst/>
-      </p:bgPr>
-    </p:bg>
-    <p:spTree>
-      <p:nvGrpSpPr>
-        <p:cNvPr id="1" name=""/>
-        <p:cNvGrpSpPr/>
-        <p:nvPr/>
-      </p:nvGrpSpPr>
-      <p:grpSpPr/>
-      <p:sp>
-        <p:nvSpPr>
-          <p:cNvPr id="2" name="TextBox 1"/>
-          <p:cNvSpPr txBox="1"/>
-          <p:nvPr/>
-        </p:nvSpPr>
-        <p:spPr>
-          <a:xfrm>
-            <a:off x="731520" y="457200"/>
-            <a:ext cx="10058400" cy="731520"/>
-          </a:xfrm>
-          <a:prstGeom prst="rect">
-            <a:avLst/>
-          </a:prstGeom>
-          <a:noFill/>
-        </p:spPr>
-        <p:txBody>
-          <a:bodyPr wrap="square">
-            <a:spAutoFit/>
-          </a:bodyPr>
-          <a:lstStyle/>
-          <a:p>
-            <a:pPr algn="l">
-              <a:lnSpc>
-                <a:spcPts val="5400"/>
-              </a:lnSpc>
-              <a:spcAft>
-                <a:spcPts val="0"/>
-              </a:spcAft>
-              <a:defRPr sz="3600" b="1">
-                <a:solidFill>
-                  <a:srgbClr val="FAF9F5"/>
-                </a:solidFill>
-                <a:latin typeface="Hiragino Sans"/>
-              </a:defRPr>
-            </a:pPr>
-            <a:r>
-              <a:t>まとめ</a:t>
-            </a:r>
-          </a:p>
-        </p:txBody>
-      </p:sp>
-      <p:sp>
-        <p:nvSpPr>
-          <p:cNvPr id="3" name="Rounded Rectangle 2"/>
-          <p:cNvSpPr/>
-          <p:nvPr/>
-        </p:nvSpPr>
-        <p:spPr>
-          <a:xfrm>
-            <a:off x="731520" y="1463040"/>
-            <a:ext cx="10515600" cy="1097280"/>
-          </a:xfrm>
-          <a:prstGeom prst="roundRect">
-            <a:avLst>
-              <a:gd name="adj" fmla="val 2000"/>
-            </a:avLst>
-          </a:prstGeom>
-          <a:solidFill>
-            <a:srgbClr val="252220"/>
-          </a:solidFill>
-          <a:ln>
-            <a:noFill/>
-          </a:ln>
-        </p:spPr>
-        <p:style>
-          <a:lnRef idx="1">
-            <a:schemeClr val="accent1"/>
-          </a:lnRef>
-          <a:fillRef idx="3">
-            <a:schemeClr val="accent1"/>
-          </a:fillRef>
-          <a:effectRef idx="2">
-            <a:schemeClr val="accent1"/>
-          </a:effectRef>
-          <a:fontRef idx="minor">
-            <a:schemeClr val="lt1"/>
-          </a:fontRef>
-        </p:style>
-        <p:txBody>
-          <a:bodyPr rtlCol="0" anchor="ctr"/>
-          <a:lstStyle/>
-          <a:p>
-            <a:pPr algn="ctr"/>
-          </a:p>
-        </p:txBody>
-      </p:sp>
-      <p:sp>
-        <p:nvSpPr>
-          <p:cNvPr id="4" name="TextBox 3"/>
-          <p:cNvSpPr txBox="1"/>
-          <p:nvPr/>
-        </p:nvSpPr>
-        <p:spPr>
-          <a:xfrm>
-            <a:off x="1097280" y="1554480"/>
-            <a:ext cx="457200" cy="457200"/>
-          </a:xfrm>
-          <a:prstGeom prst="rect">
-            <a:avLst/>
-          </a:prstGeom>
-          <a:noFill/>
-        </p:spPr>
-        <p:txBody>
-          <a:bodyPr wrap="square">
-            <a:spAutoFit/>
-          </a:bodyPr>
-          <a:lstStyle/>
-          <a:p>
-            <a:pPr algn="l">
-              <a:lnSpc>
-                <a:spcPts val="4200"/>
-              </a:lnSpc>
-              <a:spcAft>
-                <a:spcPts val="0"/>
-              </a:spcAft>
-              <a:defRPr sz="2800" b="1">
-                <a:solidFill>
-                  <a:srgbClr val="D97757"/>
-                </a:solidFill>
-                <a:latin typeface="Helvetica Neue"/>
-              </a:defRPr>
-            </a:pPr>
-            <a:r>
-              <a:t>1</a:t>
-            </a:r>
-          </a:p>
-        </p:txBody>
-      </p:sp>
-      <p:sp>
-        <p:nvSpPr>
-          <p:cNvPr id="5" name="TextBox 4"/>
-          <p:cNvSpPr txBox="1"/>
-          <p:nvPr/>
-        </p:nvSpPr>
-        <p:spPr>
-          <a:xfrm>
-            <a:off x="1828800" y="1554480"/>
-            <a:ext cx="8686800" cy="457200"/>
-          </a:xfrm>
-          <a:prstGeom prst="rect">
-            <a:avLst/>
-          </a:prstGeom>
-          <a:noFill/>
-        </p:spPr>
-        <p:txBody>
-          <a:bodyPr wrap="square">
-            <a:spAutoFit/>
-          </a:bodyPr>
-          <a:lstStyle/>
-          <a:p>
-            <a:pPr algn="l">
-              <a:lnSpc>
-                <a:spcPts val="3000"/>
-              </a:lnSpc>
-              <a:spcAft>
-                <a:spcPts val="0"/>
-              </a:spcAft>
-              <a:defRPr sz="2000" b="1">
-                <a:solidFill>
-                  <a:srgbClr val="FAF9F5"/>
-                </a:solidFill>
-                <a:latin typeface="Hiragino Sans"/>
-              </a:defRPr>
-            </a:pPr>
-            <a:r>
-              <a:t>Claude Code は「作業を進める」ツール</a:t>
-            </a:r>
-          </a:p>
-        </p:txBody>
-      </p:sp>
-      <p:sp>
-        <p:nvSpPr>
-          <p:cNvPr id="6" name="TextBox 5"/>
-          <p:cNvSpPr txBox="1"/>
-          <p:nvPr/>
-        </p:nvSpPr>
-        <p:spPr>
-          <a:xfrm>
-            <a:off x="1828800" y="2011680"/>
-            <a:ext cx="8686800" cy="457200"/>
-          </a:xfrm>
-          <a:prstGeom prst="rect">
-            <a:avLst/>
-          </a:prstGeom>
-          <a:noFill/>
-        </p:spPr>
-        <p:txBody>
-          <a:bodyPr wrap="square">
-            <a:spAutoFit/>
-          </a:bodyPr>
-          <a:lstStyle/>
-          <a:p>
-            <a:pPr algn="l">
-              <a:lnSpc>
-                <a:spcPts val="2250"/>
-              </a:lnSpc>
-              <a:spcAft>
-                <a:spcPts val="0"/>
-              </a:spcAft>
-              <a:defRPr sz="1500" b="0">
-                <a:solidFill>
-                  <a:srgbClr val="C5C3BB"/>
-                </a:solidFill>
-                <a:latin typeface="Hiragino Sans"/>
-              </a:defRPr>
-            </a:pPr>
-            <a:r>
-              <a:t>コード補完ではなく、調査→修正→検証→取りまとめの一連フロー</a:t>
-            </a:r>
-          </a:p>
-        </p:txBody>
-      </p:sp>
-      <p:sp>
-        <p:nvSpPr>
-          <p:cNvPr id="7" name="Rounded Rectangle 6"/>
-          <p:cNvSpPr/>
-          <p:nvPr/>
-        </p:nvSpPr>
-        <p:spPr>
-          <a:xfrm>
-            <a:off x="731520" y="2743200"/>
-            <a:ext cx="10515600" cy="1097280"/>
-          </a:xfrm>
-          <a:prstGeom prst="roundRect">
-            <a:avLst>
-              <a:gd name="adj" fmla="val 2000"/>
-            </a:avLst>
-          </a:prstGeom>
-          <a:solidFill>
-            <a:srgbClr val="252220"/>
-          </a:solidFill>
-          <a:ln>
-            <a:noFill/>
-          </a:ln>
-        </p:spPr>
-        <p:style>
-          <a:lnRef idx="1">
-            <a:schemeClr val="accent1"/>
-          </a:lnRef>
-          <a:fillRef idx="3">
-            <a:schemeClr val="accent1"/>
-          </a:fillRef>
-          <a:effectRef idx="2">
-            <a:schemeClr val="accent1"/>
-          </a:effectRef>
-          <a:fontRef idx="minor">
-            <a:schemeClr val="lt1"/>
-          </a:fontRef>
-        </p:style>
-        <p:txBody>
-          <a:bodyPr rtlCol="0" anchor="ctr"/>
-          <a:lstStyle/>
-          <a:p>
-            <a:pPr algn="ctr"/>
-          </a:p>
-        </p:txBody>
-      </p:sp>
-      <p:sp>
-        <p:nvSpPr>
-          <p:cNvPr id="8" name="TextBox 7"/>
-          <p:cNvSpPr txBox="1"/>
-          <p:nvPr/>
-        </p:nvSpPr>
-        <p:spPr>
-          <a:xfrm>
-            <a:off x="1097280" y="2834640"/>
-            <a:ext cx="457200" cy="457200"/>
-          </a:xfrm>
-          <a:prstGeom prst="rect">
-            <a:avLst/>
-          </a:prstGeom>
-          <a:noFill/>
-        </p:spPr>
-        <p:txBody>
-          <a:bodyPr wrap="square">
-            <a:spAutoFit/>
-          </a:bodyPr>
-          <a:lstStyle/>
-          <a:p>
-            <a:pPr algn="l">
-              <a:lnSpc>
-                <a:spcPts val="4200"/>
-              </a:lnSpc>
-              <a:spcAft>
-                <a:spcPts val="0"/>
-              </a:spcAft>
-              <a:defRPr sz="2800" b="1">
-                <a:solidFill>
-                  <a:srgbClr val="D97757"/>
-                </a:solidFill>
-                <a:latin typeface="Helvetica Neue"/>
-              </a:defRPr>
-            </a:pPr>
-            <a:r>
-              <a:t>2</a:t>
-            </a:r>
-          </a:p>
-        </p:txBody>
-      </p:sp>
-      <p:sp>
-        <p:nvSpPr>
-          <p:cNvPr id="9" name="TextBox 8"/>
-          <p:cNvSpPr txBox="1"/>
-          <p:nvPr/>
-        </p:nvSpPr>
-        <p:spPr>
-          <a:xfrm>
-            <a:off x="1828800" y="2834640"/>
-            <a:ext cx="8686800" cy="457200"/>
-          </a:xfrm>
-          <a:prstGeom prst="rect">
-            <a:avLst/>
-          </a:prstGeom>
-          <a:noFill/>
-        </p:spPr>
-        <p:txBody>
-          <a:bodyPr wrap="square">
-            <a:spAutoFit/>
-          </a:bodyPr>
-          <a:lstStyle/>
-          <a:p>
-            <a:pPr algn="l">
-              <a:lnSpc>
-                <a:spcPts val="3000"/>
-              </a:lnSpc>
-              <a:spcAft>
-                <a:spcPts val="0"/>
-              </a:spcAft>
-              <a:defRPr sz="2000" b="1">
-                <a:solidFill>
-                  <a:srgbClr val="FAF9F5"/>
-                </a:solidFill>
-                <a:latin typeface="Hiragino Sans"/>
-              </a:defRPr>
-            </a:pPr>
-            <a:r>
-              <a:t>伝え方が結果を左右する</a:t>
-            </a:r>
-          </a:p>
-        </p:txBody>
-      </p:sp>
-      <p:sp>
-        <p:nvSpPr>
-          <p:cNvPr id="10" name="TextBox 9"/>
-          <p:cNvSpPr txBox="1"/>
-          <p:nvPr/>
-        </p:nvSpPr>
-        <p:spPr>
-          <a:xfrm>
-            <a:off x="1828800" y="3291840"/>
-            <a:ext cx="8686800" cy="457200"/>
-          </a:xfrm>
-          <a:prstGeom prst="rect">
-            <a:avLst/>
-          </a:prstGeom>
-          <a:noFill/>
-        </p:spPr>
-        <p:txBody>
-          <a:bodyPr wrap="square">
-            <a:spAutoFit/>
-          </a:bodyPr>
-          <a:lstStyle/>
-          <a:p>
-            <a:pPr algn="l">
-              <a:lnSpc>
-                <a:spcPts val="2250"/>
-              </a:lnSpc>
-              <a:spcAft>
-                <a:spcPts val="0"/>
-              </a:spcAft>
-              <a:defRPr sz="1500" b="0">
-                <a:solidFill>
-                  <a:srgbClr val="C5C3BB"/>
-                </a:solidFill>
-                <a:latin typeface="Hiragino Sans"/>
-              </a:defRPr>
-            </a:pPr>
-            <a:r>
-              <a:t>目標・背景・現状・期待出力を明確にし、たたき台→改善ループで進める</a:t>
-            </a:r>
-          </a:p>
-        </p:txBody>
-      </p:sp>
-      <p:sp>
-        <p:nvSpPr>
-          <p:cNvPr id="11" name="Rounded Rectangle 10"/>
-          <p:cNvSpPr/>
-          <p:nvPr/>
-        </p:nvSpPr>
-        <p:spPr>
-          <a:xfrm>
-            <a:off x="731520" y="4023360"/>
-            <a:ext cx="10515600" cy="1097280"/>
-          </a:xfrm>
-          <a:prstGeom prst="roundRect">
-            <a:avLst>
-              <a:gd name="adj" fmla="val 2000"/>
-            </a:avLst>
-          </a:prstGeom>
-          <a:solidFill>
-            <a:srgbClr val="252220"/>
-          </a:solidFill>
-          <a:ln>
-            <a:noFill/>
-          </a:ln>
-        </p:spPr>
-        <p:style>
-          <a:lnRef idx="1">
-            <a:schemeClr val="accent1"/>
-          </a:lnRef>
-          <a:fillRef idx="3">
-            <a:schemeClr val="accent1"/>
-          </a:fillRef>
-          <a:effectRef idx="2">
-            <a:schemeClr val="accent1"/>
-          </a:effectRef>
-          <a:fontRef idx="minor">
-            <a:schemeClr val="lt1"/>
-          </a:fontRef>
-        </p:style>
-        <p:txBody>
-          <a:bodyPr rtlCol="0" anchor="ctr"/>
-          <a:lstStyle/>
-          <a:p>
-            <a:pPr algn="ctr"/>
-          </a:p>
-        </p:txBody>
-      </p:sp>
-      <p:sp>
-        <p:nvSpPr>
-          <p:cNvPr id="12" name="TextBox 11"/>
-          <p:cNvSpPr txBox="1"/>
-          <p:nvPr/>
-        </p:nvSpPr>
-        <p:spPr>
-          <a:xfrm>
-            <a:off x="1097280" y="4114800"/>
-            <a:ext cx="457200" cy="457200"/>
-          </a:xfrm>
-          <a:prstGeom prst="rect">
-            <a:avLst/>
-          </a:prstGeom>
-          <a:noFill/>
-        </p:spPr>
-        <p:txBody>
-          <a:bodyPr wrap="square">
-            <a:spAutoFit/>
-          </a:bodyPr>
-          <a:lstStyle/>
-          <a:p>
-            <a:pPr algn="l">
-              <a:lnSpc>
-                <a:spcPts val="4200"/>
-              </a:lnSpc>
-              <a:spcAft>
-                <a:spcPts val="0"/>
-              </a:spcAft>
-              <a:defRPr sz="2800" b="1">
-                <a:solidFill>
-                  <a:srgbClr val="D97757"/>
-                </a:solidFill>
-                <a:latin typeface="Helvetica Neue"/>
-              </a:defRPr>
-            </a:pPr>
-            <a:r>
-              <a:t>3</a:t>
-            </a:r>
-          </a:p>
-        </p:txBody>
-      </p:sp>
-      <p:sp>
-        <p:nvSpPr>
-          <p:cNvPr id="13" name="TextBox 12"/>
-          <p:cNvSpPr txBox="1"/>
-          <p:nvPr/>
-        </p:nvSpPr>
-        <p:spPr>
-          <a:xfrm>
-            <a:off x="1828800" y="4114800"/>
-            <a:ext cx="8686800" cy="457200"/>
-          </a:xfrm>
-          <a:prstGeom prst="rect">
-            <a:avLst/>
-          </a:prstGeom>
-          <a:noFill/>
-        </p:spPr>
-        <p:txBody>
-          <a:bodyPr wrap="square">
-            <a:spAutoFit/>
-          </a:bodyPr>
-          <a:lstStyle/>
-          <a:p>
-            <a:pPr algn="l">
-              <a:lnSpc>
-                <a:spcPts val="3000"/>
-              </a:lnSpc>
-              <a:spcAft>
-                <a:spcPts val="0"/>
-              </a:spcAft>
-              <a:defRPr sz="2000" b="1">
-                <a:solidFill>
-                  <a:srgbClr val="FAF9F5"/>
-                </a:solidFill>
-                <a:latin typeface="Hiragino Sans"/>
-              </a:defRPr>
-            </a:pPr>
-            <a:r>
-              <a:t>計画から始める習慣をつける</a:t>
-            </a:r>
-          </a:p>
-        </p:txBody>
-      </p:sp>
-      <p:sp>
-        <p:nvSpPr>
-          <p:cNvPr id="14" name="TextBox 13"/>
-          <p:cNvSpPr txBox="1"/>
-          <p:nvPr/>
-        </p:nvSpPr>
-        <p:spPr>
-          <a:xfrm>
-            <a:off x="1828800" y="4572000"/>
-            <a:ext cx="8686800" cy="457200"/>
-          </a:xfrm>
-          <a:prstGeom prst="rect">
-            <a:avLst/>
-          </a:prstGeom>
-          <a:noFill/>
-        </p:spPr>
-        <p:txBody>
-          <a:bodyPr wrap="square">
-            <a:spAutoFit/>
-          </a:bodyPr>
-          <a:lstStyle/>
-          <a:p>
-            <a:pPr algn="l">
-              <a:lnSpc>
-                <a:spcPts val="2250"/>
-              </a:lnSpc>
-              <a:spcAft>
-                <a:spcPts val="0"/>
-              </a:spcAft>
-              <a:defRPr sz="1500" b="0">
-                <a:solidFill>
-                  <a:srgbClr val="C5C3BB"/>
-                </a:solidFill>
-                <a:latin typeface="Hiragino Sans"/>
-              </a:defRPr>
-            </a:pPr>
-            <a:r>
-              <a:t>Plan Mode で方針を固めてから実装に入ると手戻りが減る</a:t>
-            </a:r>
-          </a:p>
-        </p:txBody>
-      </p:sp>
-      <p:sp>
-        <p:nvSpPr>
-          <p:cNvPr id="15" name="TextBox 14"/>
-          <p:cNvSpPr txBox="1"/>
-          <p:nvPr/>
-        </p:nvSpPr>
-        <p:spPr>
-          <a:xfrm>
-            <a:off x="11277295" y="6400800"/>
-            <a:ext cx="731520" cy="274320"/>
-          </a:xfrm>
-          <a:prstGeom prst="rect">
-            <a:avLst/>
-          </a:prstGeom>
-          <a:noFill/>
-        </p:spPr>
-        <p:txBody>
-          <a:bodyPr wrap="square">
-            <a:spAutoFit/>
-          </a:bodyPr>
-          <a:lstStyle/>
-          <a:p>
-            <a:pPr algn="r">
-              <a:lnSpc>
-                <a:spcPts val="1500"/>
-              </a:lnSpc>
-              <a:spcAft>
-                <a:spcPts val="0"/>
-              </a:spcAft>
-              <a:defRPr sz="1000" b="0">
-                <a:solidFill>
-                  <a:srgbClr val="B0AEA5"/>
-                </a:solidFill>
-                <a:latin typeface="Helvetica Neue"/>
-              </a:defRPr>
-            </a:pPr>
-            <a:r>
-              <a:t>17 / 17</a:t>
+              <a:t>16 / 16</a:t>
             </a:r>
           </a:p>
         </p:txBody>
@@ -12107,7 +11440,7 @@
               </a:defRPr>
             </a:pPr>
             <a:r>
-              <a:t>今日のゴール: 調査・要約タスクをClaude Codeに任せられるようになる</a:t>
+              <a:t>今日のゴール: 面倒な調査タスクを1件、Claude Codeに任せられるようになる</a:t>
             </a:r>
           </a:p>
         </p:txBody>
@@ -12149,7 +11482,7 @@
               </a:defRPr>
             </a:pPr>
             <a:r>
-              <a:t>2 / 17</a:t>
+              <a:t>2 / 16</a:t>
             </a:r>
           </a:p>
         </p:txBody>
@@ -12259,7 +11592,7 @@
               </a:defRPr>
             </a:pPr>
             <a:r>
-              <a:t>最初の1歩は「業務の一部だけ任せる」</a:t>
+              <a:t>まずは調査だけ任せてみる</a:t>
             </a:r>
           </a:p>
         </p:txBody>
@@ -12273,7 +11606,7 @@
         <p:spPr>
           <a:xfrm>
             <a:off x="731520" y="1828800"/>
-            <a:ext cx="5486400" cy="457200"/>
+            <a:ext cx="10058400" cy="457200"/>
           </a:xfrm>
           <a:prstGeom prst="rect">
             <a:avLst/>
@@ -12288,95 +11621,34 @@
           <a:p>
             <a:pPr algn="l">
               <a:lnSpc>
-                <a:spcPts val="3000"/>
-              </a:lnSpc>
-              <a:spcAft>
-                <a:spcPts val="0"/>
-              </a:spcAft>
-              <a:defRPr sz="2000" b="1">
-                <a:solidFill>
-                  <a:srgbClr val="D97757"/>
+                <a:spcPts val="2700"/>
+              </a:lnSpc>
+              <a:spcAft>
+                <a:spcPts val="0"/>
+              </a:spcAft>
+              <a:defRPr sz="1800" b="0">
+                <a:solidFill>
+                  <a:srgbClr val="B0AEA5"/>
                 </a:solidFill>
                 <a:latin typeface="Hiragino Sans"/>
               </a:defRPr>
             </a:pPr>
             <a:r>
-              <a:t>最初の一歩の例</a:t>
-            </a:r>
-          </a:p>
-        </p:txBody>
-      </p:sp>
-      <p:sp>
-        <p:nvSpPr>
-          <p:cNvPr id="5" name="TextBox 4"/>
-          <p:cNvSpPr txBox="1"/>
-          <p:nvPr/>
-        </p:nvSpPr>
-        <p:spPr>
-          <a:xfrm>
-            <a:off x="1097280" y="2377440"/>
-            <a:ext cx="9144000" cy="1097280"/>
-          </a:xfrm>
-          <a:prstGeom prst="rect">
-            <a:avLst/>
-          </a:prstGeom>
-          <a:noFill/>
-        </p:spPr>
-        <p:txBody>
-          <a:bodyPr wrap="square">
-            <a:spAutoFit/>
-          </a:bodyPr>
-          <a:lstStyle/>
-          <a:p>
-            <a:pPr>
-              <a:lnSpc>
-                <a:spcPts val="3060"/>
-              </a:lnSpc>
-              <a:spcAft>
-                <a:spcPts val="800"/>
-              </a:spcAft>
-              <a:defRPr sz="1800">
-                <a:solidFill>
-                  <a:srgbClr val="FAF9F5"/>
-                </a:solidFill>
-                <a:latin typeface="Hiragino Sans"/>
-              </a:defRPr>
-            </a:pPr>
-            <a:r>
-              <a:t>• 既存チケット1件の「調査・要約・差分整理」だけ任せる</a:t>
-            </a:r>
-          </a:p>
-          <a:p>
-            <a:pPr>
-              <a:lnSpc>
-                <a:spcPts val="3060"/>
-              </a:lnSpc>
-              <a:spcAft>
-                <a:spcPts val="800"/>
-              </a:spcAft>
-              <a:defRPr sz="1800">
-                <a:solidFill>
-                  <a:srgbClr val="FAF9F5"/>
-                </a:solidFill>
-                <a:latin typeface="Hiragino Sans"/>
-              </a:defRPr>
-            </a:pPr>
-            <a:r>
-              <a:t>• 影響範囲の洗い出しや、ログの要点整理に限定する</a:t>
-            </a:r>
-          </a:p>
-        </p:txBody>
-      </p:sp>
-      <p:sp>
-        <p:nvSpPr>
-          <p:cNvPr id="6" name="Rounded Rectangle 5"/>
+              <a:t>よくある痛み: 調査・影響範囲の把握で時間が溶ける</a:t>
+            </a:r>
+          </a:p>
+        </p:txBody>
+      </p:sp>
+      <p:sp>
+        <p:nvSpPr>
+          <p:cNvPr id="5" name="Rounded Rectangle 4"/>
           <p:cNvSpPr/>
           <p:nvPr/>
         </p:nvSpPr>
         <p:spPr>
           <a:xfrm>
-            <a:off x="731520" y="3840480"/>
-            <a:ext cx="4846320" cy="914400"/>
+            <a:off x="731520" y="2560320"/>
+            <a:ext cx="4846320" cy="1828800"/>
           </a:xfrm>
           <a:prstGeom prst="roundRect">
             <a:avLst>
@@ -12414,14 +11686,56 @@
       </p:sp>
       <p:sp>
         <p:nvSpPr>
+          <p:cNvPr id="6" name="TextBox 5"/>
+          <p:cNvSpPr txBox="1"/>
+          <p:nvPr/>
+        </p:nvSpPr>
+        <p:spPr>
+          <a:xfrm>
+            <a:off x="1097280" y="2697480"/>
+            <a:ext cx="4389120" cy="320040"/>
+          </a:xfrm>
+          <a:prstGeom prst="rect">
+            <a:avLst/>
+          </a:prstGeom>
+          <a:noFill/>
+        </p:spPr>
+        <p:txBody>
+          <a:bodyPr wrap="square">
+            <a:spAutoFit/>
+          </a:bodyPr>
+          <a:lstStyle/>
+          <a:p>
+            <a:pPr algn="l">
+              <a:lnSpc>
+                <a:spcPts val="2400"/>
+              </a:lnSpc>
+              <a:spcAft>
+                <a:spcPts val="0"/>
+              </a:spcAft>
+              <a:defRPr sz="1600" b="1">
+                <a:solidFill>
+                  <a:srgbClr val="E07070"/>
+                </a:solidFill>
+                <a:latin typeface="Helvetica Neue"/>
+              </a:defRPr>
+            </a:pPr>
+            <a:r>
+              <a:t>Before</a:t>
+            </a:r>
+          </a:p>
+        </p:txBody>
+      </p:sp>
+      <p:sp>
+        <p:nvSpPr>
           <p:cNvPr id="7" name="TextBox 6"/>
           <p:cNvSpPr txBox="1"/>
           <p:nvPr/>
         </p:nvSpPr>
         <p:spPr>
           <a:xfrm>
-            <a:off x="1097280" y="3931920"/>
-            <a:ext cx="4389120" cy="320040"/>
+            <a:off x="1097280" y="3108960"/>
+            <a:ext cx="4389120" cy="1097280"/>
           </a:xfrm>
           <a:prstGeom prst="rect">
             <a:avLst/>
@@ -12436,76 +11750,42 @@
           <a:p>
             <a:pPr algn="l">
               <a:lnSpc>
-                <a:spcPts val="2100"/>
-              </a:lnSpc>
-              <a:spcAft>
-                <a:spcPts val="0"/>
-              </a:spcAft>
-              <a:defRPr sz="1400" b="1">
-                <a:solidFill>
-                  <a:srgbClr val="E07070"/>
+                <a:spcPts val="2400"/>
+              </a:lnSpc>
+              <a:spcAft>
+                <a:spcPts val="0"/>
+              </a:spcAft>
+              <a:defRPr sz="1600" b="0">
+                <a:solidFill>
+                  <a:srgbClr val="C5C3BB"/>
                 </a:solidFill>
                 <a:latin typeface="Hiragino Sans"/>
               </a:defRPr>
             </a:pPr>
             <a:r>
-              <a:t>よくある痛み</a:t>
-            </a:r>
-          </a:p>
-        </p:txBody>
-      </p:sp>
-      <p:sp>
-        <p:nvSpPr>
-          <p:cNvPr id="8" name="TextBox 7"/>
-          <p:cNvSpPr txBox="1"/>
-          <p:nvPr/>
-        </p:nvSpPr>
-        <p:spPr>
-          <a:xfrm>
-            <a:off x="1097280" y="4297680"/>
-            <a:ext cx="4389120" cy="365760"/>
-          </a:xfrm>
-          <a:prstGeom prst="rect">
-            <a:avLst/>
-          </a:prstGeom>
-          <a:noFill/>
-        </p:spPr>
-        <p:txBody>
-          <a:bodyPr wrap="square">
-            <a:spAutoFit/>
-          </a:bodyPr>
-          <a:lstStyle/>
-          <a:p>
-            <a:pPr algn="l">
-              <a:lnSpc>
-                <a:spcPts val="2550"/>
-              </a:lnSpc>
-              <a:spcAft>
-                <a:spcPts val="0"/>
-              </a:spcAft>
-              <a:defRPr sz="1700" b="0">
-                <a:solidFill>
-                  <a:srgbClr val="C5C3BB"/>
-                </a:solidFill>
-                <a:latin typeface="Hiragino Sans"/>
-              </a:defRPr>
-            </a:pPr>
-            <a:r>
-              <a:t>調査・影響範囲の把握で時間が溶ける</a:t>
-            </a:r>
-          </a:p>
-        </p:txBody>
-      </p:sp>
-      <p:sp>
-        <p:nvSpPr>
-          <p:cNvPr id="9" name="Rounded Rectangle 8"/>
+              <a:t>チケット1件の調査に30分。</a:t>
+            </a:r>
+            <a:br/>
+            <a:r>
+              <a:t>ログを追い、参照箇所を探し、</a:t>
+            </a:r>
+            <a:br/>
+            <a:r>
+              <a:t>影響範囲を整理する</a:t>
+            </a:r>
+          </a:p>
+        </p:txBody>
+      </p:sp>
+      <p:sp>
+        <p:nvSpPr>
+          <p:cNvPr id="8" name="Rounded Rectangle 7"/>
           <p:cNvSpPr/>
           <p:nvPr/>
         </p:nvSpPr>
         <p:spPr>
           <a:xfrm>
-            <a:off x="5943600" y="3840480"/>
-            <a:ext cx="5029200" cy="914400"/>
+            <a:off x="5943600" y="2560320"/>
+            <a:ext cx="5303520" cy="1828800"/>
           </a:xfrm>
           <a:prstGeom prst="roundRect">
             <a:avLst>
@@ -12543,14 +11823,56 @@
       </p:sp>
       <p:sp>
         <p:nvSpPr>
+          <p:cNvPr id="9" name="TextBox 8"/>
+          <p:cNvSpPr txBox="1"/>
+          <p:nvPr/>
+        </p:nvSpPr>
+        <p:spPr>
+          <a:xfrm>
+            <a:off x="6309360" y="2697480"/>
+            <a:ext cx="4572000" cy="320040"/>
+          </a:xfrm>
+          <a:prstGeom prst="rect">
+            <a:avLst/>
+          </a:prstGeom>
+          <a:noFill/>
+        </p:spPr>
+        <p:txBody>
+          <a:bodyPr wrap="square">
+            <a:spAutoFit/>
+          </a:bodyPr>
+          <a:lstStyle/>
+          <a:p>
+            <a:pPr algn="l">
+              <a:lnSpc>
+                <a:spcPts val="2400"/>
+              </a:lnSpc>
+              <a:spcAft>
+                <a:spcPts val="0"/>
+              </a:spcAft>
+              <a:defRPr sz="1600" b="1">
+                <a:solidFill>
+                  <a:srgbClr val="7BC9A0"/>
+                </a:solidFill>
+                <a:latin typeface="Helvetica Neue"/>
+              </a:defRPr>
+            </a:pPr>
+            <a:r>
+              <a:t>After</a:t>
+            </a:r>
+          </a:p>
+        </p:txBody>
+      </p:sp>
+      <p:sp>
+        <p:nvSpPr>
           <p:cNvPr id="10" name="TextBox 9"/>
           <p:cNvSpPr txBox="1"/>
           <p:nvPr/>
         </p:nvSpPr>
         <p:spPr>
           <a:xfrm>
-            <a:off x="6309360" y="3931920"/>
-            <a:ext cx="4572000" cy="320040"/>
+            <a:off x="6309360" y="3108960"/>
+            <a:ext cx="4572000" cy="1097280"/>
           </a:xfrm>
           <a:prstGeom prst="rect">
             <a:avLst/>
@@ -12565,20 +11887,28 @@
           <a:p>
             <a:pPr algn="l">
               <a:lnSpc>
-                <a:spcPts val="2100"/>
-              </a:lnSpc>
-              <a:spcAft>
-                <a:spcPts val="0"/>
-              </a:spcAft>
-              <a:defRPr sz="1400" b="1">
-                <a:solidFill>
-                  <a:srgbClr val="7BC9A0"/>
+                <a:spcPts val="2400"/>
+              </a:lnSpc>
+              <a:spcAft>
+                <a:spcPts val="0"/>
+              </a:spcAft>
+              <a:defRPr sz="1600" b="0">
+                <a:solidFill>
+                  <a:srgbClr val="C5C3BB"/>
                 </a:solidFill>
                 <a:latin typeface="Hiragino Sans"/>
               </a:defRPr>
             </a:pPr>
             <a:r>
-              <a:t>小さな成果</a:t>
+              <a:t>Claude Codeに任せると数分で返ってくる。</a:t>
+            </a:r>
+            <a:br/>
+            <a:r>
+              <a:t>調査結果・原因候補・影響範囲が</a:t>
+            </a:r>
+            <a:br/>
+            <a:r>
+              <a:t>まとまる</a:t>
             </a:r>
           </a:p>
         </p:txBody>
@@ -12591,8 +11921,8 @@
         </p:nvSpPr>
         <p:spPr>
           <a:xfrm>
-            <a:off x="6309360" y="4297680"/>
-            <a:ext cx="4572000" cy="365760"/>
+            <a:off x="731520" y="4754880"/>
+            <a:ext cx="10058400" cy="457200"/>
           </a:xfrm>
           <a:prstGeom prst="rect">
             <a:avLst/>
@@ -12607,12 +11937,12 @@
           <a:p>
             <a:pPr algn="l">
               <a:lnSpc>
-                <a:spcPts val="2550"/>
-              </a:lnSpc>
-              <a:spcAft>
-                <a:spcPts val="0"/>
-              </a:spcAft>
-              <a:defRPr sz="1700" b="0">
+                <a:spcPts val="2700"/>
+              </a:lnSpc>
+              <a:spcAft>
+                <a:spcPts val="0"/>
+              </a:spcAft>
+              <a:defRPr sz="1800" b="0">
                 <a:solidFill>
                   <a:srgbClr val="C5C3BB"/>
                 </a:solidFill>
@@ -12620,7 +11950,7 @@
               </a:defRPr>
             </a:pPr>
             <a:r>
-              <a:t>影響範囲が数分で整理できる</a:t>
+              <a:t>入口: 最初は実装ではなく「調査・要約・差分整理」だけ</a:t>
             </a:r>
           </a:p>
         </p:txBody>
@@ -12662,7 +11992,7 @@
               </a:defRPr>
             </a:pPr>
             <a:r>
-              <a:t>→ いきなり実装させず、業務の一部から始めるのが安全で現実的</a:t>
+              <a:t>→ いきなり実装させず、業務の一部から始める</a:t>
             </a:r>
           </a:p>
         </p:txBody>
@@ -12704,7 +12034,7 @@
               </a:defRPr>
             </a:pPr>
             <a:r>
-              <a:t>3 / 17</a:t>
+              <a:t>3 / 16</a:t>
             </a:r>
           </a:p>
         </p:txBody>
@@ -12814,7 +12144,7 @@
               </a:defRPr>
             </a:pPr>
             <a:r>
-              <a:t>Claude Code とは</a:t>
+              <a:t>Claude Code でできること</a:t>
             </a:r>
           </a:p>
         </p:txBody>
@@ -12856,7 +12186,7 @@
               </a:defRPr>
             </a:pPr>
             <a:r>
-              <a:t>• ターミナル上で動くAIエージェント</a:t>
+              <a:t>• ターミナルで動くAIエージェント</a:t>
             </a:r>
             <a:br/>
             <a:r>
@@ -12879,7 +12209,11 @@
               </a:defRPr>
             </a:pPr>
             <a:r>
-              <a:t>• 調査 → 修正 → 検証 → 取りまとめを一連で扱う</a:t>
+              <a:t>• 調査 → 計画 → 実装 → 検証 → 取りまとめ</a:t>
+            </a:r>
+            <a:br/>
+            <a:r>
+              <a:t>  を一連で扱う</a:t>
             </a:r>
           </a:p>
           <a:p>
@@ -12902,7 +12236,7 @@
             </a:r>
             <a:br/>
             <a:r>
-              <a:t>  最初はコードを読むだけで安全</a:t>
+              <a:t>  ファイル編集やコマンド実行は許可制</a:t>
             </a:r>
           </a:p>
           <a:p>
@@ -12921,30 +12255,7 @@
               </a:defRPr>
             </a:pPr>
             <a:r>
-              <a:t>• ファイル編集やコマンド実行は都度許可制</a:t>
-            </a:r>
-            <a:br/>
-            <a:r>
-              <a:t>  勝手に変更される心配はない</a:t>
-            </a:r>
-          </a:p>
-          <a:p>
-            <a:pPr>
-              <a:lnSpc>
-                <a:spcPts val="2880"/>
-              </a:lnSpc>
-              <a:spcAft>
-                <a:spcPts val="800"/>
-              </a:spcAft>
-              <a:defRPr sz="1800">
-                <a:solidFill>
-                  <a:srgbClr val="FAF9F5"/>
-                </a:solidFill>
-                <a:latin typeface="Hiragino Sans"/>
-              </a:defRPr>
-            </a:pPr>
-            <a:r>
-              <a:t>• 「コードを書く」ではなく「作業を進める」ツール</a:t>
+              <a:t>• コード補完ではなく「作業を進める」ツール</a:t>
             </a:r>
           </a:p>
         </p:txBody>
@@ -12957,7 +12268,7 @@
         </p:nvSpPr>
         <p:spPr>
           <a:xfrm>
-            <a:off x="7315200" y="2011680"/>
+            <a:off x="7315200" y="1828800"/>
             <a:ext cx="2743200" cy="640080"/>
           </a:xfrm>
           <a:prstGeom prst="roundRect">
@@ -13002,7 +12313,7 @@
         </p:nvSpPr>
         <p:spPr>
           <a:xfrm>
-            <a:off x="7315200" y="2103120"/>
+            <a:off x="7315200" y="1920240"/>
             <a:ext cx="2743200" cy="457200"/>
           </a:xfrm>
           <a:prstGeom prst="rect">
@@ -13044,7 +12355,7 @@
         </p:nvSpPr>
         <p:spPr>
           <a:xfrm>
-            <a:off x="7315200" y="2926080"/>
+            <a:off x="7315200" y="2651760"/>
             <a:ext cx="2743200" cy="640080"/>
           </a:xfrm>
           <a:prstGeom prst="roundRect">
@@ -13089,7 +12400,7 @@
         </p:nvSpPr>
         <p:spPr>
           <a:xfrm>
-            <a:off x="7315200" y="3017520"/>
+            <a:off x="7315200" y="2743200"/>
             <a:ext cx="2743200" cy="457200"/>
           </a:xfrm>
           <a:prstGeom prst="rect">
@@ -13118,7 +12429,7 @@
               </a:defRPr>
             </a:pPr>
             <a:r>
-              <a:t>→ 修正</a:t>
+              <a:t>→ 計画</a:t>
             </a:r>
           </a:p>
         </p:txBody>
@@ -13131,7 +12442,7 @@
         </p:nvSpPr>
         <p:spPr>
           <a:xfrm>
-            <a:off x="7315200" y="3840480"/>
+            <a:off x="7315200" y="3474720"/>
             <a:ext cx="2743200" cy="640080"/>
           </a:xfrm>
           <a:prstGeom prst="roundRect">
@@ -13176,7 +12487,7 @@
         </p:nvSpPr>
         <p:spPr>
           <a:xfrm>
-            <a:off x="7315200" y="3931920"/>
+            <a:off x="7315200" y="3566160"/>
             <a:ext cx="2743200" cy="457200"/>
           </a:xfrm>
           <a:prstGeom prst="rect">
@@ -13205,7 +12516,7 @@
               </a:defRPr>
             </a:pPr>
             <a:r>
-              <a:t>→ 検証</a:t>
+              <a:t>→ 実装</a:t>
             </a:r>
           </a:p>
         </p:txBody>
@@ -13218,7 +12529,7 @@
         </p:nvSpPr>
         <p:spPr>
           <a:xfrm>
-            <a:off x="7315200" y="4754880"/>
+            <a:off x="7315200" y="4297680"/>
             <a:ext cx="2743200" cy="640080"/>
           </a:xfrm>
           <a:prstGeom prst="roundRect">
@@ -13263,7 +12574,7 @@
         </p:nvSpPr>
         <p:spPr>
           <a:xfrm>
-            <a:off x="7315200" y="4846320"/>
+            <a:off x="7315200" y="4389120"/>
             <a:ext cx="2743200" cy="457200"/>
           </a:xfrm>
           <a:prstGeom prst="rect">
@@ -13292,6 +12603,93 @@
               </a:defRPr>
             </a:pPr>
             <a:r>
+              <a:t>→ 検証</a:t>
+            </a:r>
+          </a:p>
+        </p:txBody>
+      </p:sp>
+      <p:sp>
+        <p:nvSpPr>
+          <p:cNvPr id="13" name="Rounded Rectangle 12"/>
+          <p:cNvSpPr/>
+          <p:nvPr/>
+        </p:nvSpPr>
+        <p:spPr>
+          <a:xfrm>
+            <a:off x="7315200" y="5120640"/>
+            <a:ext cx="2743200" cy="640080"/>
+          </a:xfrm>
+          <a:prstGeom prst="roundRect">
+            <a:avLst>
+              <a:gd name="adj" fmla="val 5000"/>
+            </a:avLst>
+          </a:prstGeom>
+          <a:solidFill>
+            <a:srgbClr val="2D2926"/>
+          </a:solidFill>
+          <a:ln>
+            <a:noFill/>
+          </a:ln>
+        </p:spPr>
+        <p:style>
+          <a:lnRef idx="1">
+            <a:schemeClr val="accent1"/>
+          </a:lnRef>
+          <a:fillRef idx="3">
+            <a:schemeClr val="accent1"/>
+          </a:fillRef>
+          <a:effectRef idx="2">
+            <a:schemeClr val="accent1"/>
+          </a:effectRef>
+          <a:fontRef idx="minor">
+            <a:schemeClr val="lt1"/>
+          </a:fontRef>
+        </p:style>
+        <p:txBody>
+          <a:bodyPr rtlCol="0" anchor="ctr"/>
+          <a:lstStyle/>
+          <a:p>
+            <a:pPr algn="ctr"/>
+          </a:p>
+        </p:txBody>
+      </p:sp>
+      <p:sp>
+        <p:nvSpPr>
+          <p:cNvPr id="14" name="TextBox 13"/>
+          <p:cNvSpPr txBox="1"/>
+          <p:nvPr/>
+        </p:nvSpPr>
+        <p:spPr>
+          <a:xfrm>
+            <a:off x="7315200" y="5212080"/>
+            <a:ext cx="2743200" cy="457200"/>
+          </a:xfrm>
+          <a:prstGeom prst="rect">
+            <a:avLst/>
+          </a:prstGeom>
+          <a:noFill/>
+        </p:spPr>
+        <p:txBody>
+          <a:bodyPr wrap="square">
+            <a:spAutoFit/>
+          </a:bodyPr>
+          <a:lstStyle/>
+          <a:p>
+            <a:pPr algn="ctr">
+              <a:lnSpc>
+                <a:spcPts val="3000"/>
+              </a:lnSpc>
+              <a:spcAft>
+                <a:spcPts val="0"/>
+              </a:spcAft>
+              <a:defRPr sz="2000" b="1">
+                <a:solidFill>
+                  <a:srgbClr val="FAF9F5"/>
+                </a:solidFill>
+                <a:latin typeface="Hiragino Sans"/>
+              </a:defRPr>
+            </a:pPr>
+            <a:r>
               <a:t>→ 要約</a:t>
             </a:r>
           </a:p>
@@ -13299,7 +12697,7 @@
       </p:sp>
       <p:sp>
         <p:nvSpPr>
-          <p:cNvPr id="13" name="TextBox 12"/>
+          <p:cNvPr id="15" name="TextBox 14"/>
           <p:cNvSpPr txBox="1"/>
           <p:nvPr/>
         </p:nvSpPr>
@@ -13334,7 +12732,7 @@
               </a:defRPr>
             </a:pPr>
             <a:r>
-              <a:t>4 / 17</a:t>
+              <a:t>4 / 16</a:t>
             </a:r>
           </a:p>
         </p:txBody>
@@ -13402,7 +12800,7 @@
               </a:defRPr>
             </a:pPr>
             <a:r>
-              <a:t>他ツールとの役割分担</a:t>
+              <a:t>ChatGPT・Copilotとの使い分け</a:t>
             </a:r>
           </a:p>
         </p:txBody>
@@ -13615,7 +13013,7 @@
               </a:defRPr>
             </a:pPr>
             <a:r>
-              <a:t>設計・壁打ち</a:t>
+              <a:t>壁打ち</a:t>
             </a:r>
           </a:p>
         </p:txBody>
@@ -13786,7 +13184,7 @@
               </a:defRPr>
             </a:pPr>
             <a:r>
-              <a:t>コードを書く</a:t>
+              <a:t>書く</a:t>
             </a:r>
           </a:p>
         </p:txBody>
@@ -13957,7 +13355,7 @@
               </a:defRPr>
             </a:pPr>
             <a:r>
-              <a:t>作業を進める</a:t>
+              <a:t>進める</a:t>
             </a:r>
           </a:p>
         </p:txBody>
@@ -13999,7 +13397,7 @@
               </a:defRPr>
             </a:pPr>
             <a:r>
-              <a:t>→ 排他的ではなく補完的。それぞれの得意領域で使い分けるのがおすすめ</a:t>
+              <a:t>→ 排他的ではなく補完的。併用するのがおすすめ</a:t>
             </a:r>
           </a:p>
         </p:txBody>
@@ -14041,7 +13439,7 @@
               </a:defRPr>
             </a:pPr>
             <a:r>
-              <a:t>5 / 17</a:t>
+              <a:t>5 / 16</a:t>
             </a:r>
           </a:p>
         </p:txBody>
@@ -14109,7 +13507,7 @@
               </a:defRPr>
             </a:pPr>
             <a:r>
-              <a:t>開発フローの変化</a:t>
+              <a:t>開発フローがどう変わるか</a:t>
             </a:r>
           </a:p>
         </p:txBody>
@@ -14151,7 +13549,7 @@
               </a:defRPr>
             </a:pPr>
             <a:r>
-              <a:t>通常の開発フロー</a:t>
+              <a:t>従来の開発フロー</a:t>
             </a:r>
           </a:p>
         </p:txBody>
@@ -16041,7 +15439,7 @@
               </a:defRPr>
             </a:pPr>
             <a:r>
-              <a:t>→ 開発者の役割が「実行者」から「方向づけ + レビュー」に変わる</a:t>
+              <a:t>→ 開発者の出番は「方向づけ」と「判断」の2回だけになる</a:t>
             </a:r>
           </a:p>
         </p:txBody>
@@ -16049,48 +15447,6 @@
       <p:sp>
         <p:nvSpPr>
           <p:cNvPr id="48" name="TextBox 47"/>
-          <p:cNvSpPr txBox="1"/>
-          <p:nvPr/>
-        </p:nvSpPr>
-        <p:spPr>
-          <a:xfrm>
-            <a:off x="731520" y="6217920"/>
-            <a:ext cx="10515600" cy="365760"/>
-          </a:xfrm>
-          <a:prstGeom prst="rect">
-            <a:avLst/>
-          </a:prstGeom>
-          <a:noFill/>
-        </p:spPr>
-        <p:txBody>
-          <a:bodyPr wrap="square">
-            <a:spAutoFit/>
-          </a:bodyPr>
-          <a:lstStyle/>
-          <a:p>
-            <a:pPr algn="l">
-              <a:lnSpc>
-                <a:spcPts val="2400"/>
-              </a:lnSpc>
-              <a:spcAft>
-                <a:spcPts val="0"/>
-              </a:spcAft>
-              <a:defRPr sz="1600" b="0">
-                <a:solidFill>
-                  <a:srgbClr val="B0AEA5"/>
-                </a:solidFill>
-                <a:latin typeface="Hiragino Sans"/>
-              </a:defRPr>
-            </a:pPr>
-            <a:r>
-              <a:t>→ 介入ポイントは2回だけ（方向づけ / 判断）</a:t>
-            </a:r>
-          </a:p>
-        </p:txBody>
-      </p:sp>
-      <p:sp>
-        <p:nvSpPr>
-          <p:cNvPr id="49" name="TextBox 48"/>
           <p:cNvSpPr txBox="1"/>
           <p:nvPr/>
         </p:nvSpPr>
@@ -16125,7 +15481,7 @@
               </a:defRPr>
             </a:pPr>
             <a:r>
-              <a:t>6 / 17</a:t>
+              <a:t>6 / 16</a:t>
             </a:r>
           </a:p>
         </p:txBody>
@@ -16193,7 +15549,7 @@
               </a:defRPr>
             </a:pPr>
             <a:r>
-              <a:t>実際のタスクで見てみよう</a:t>
+              <a:t>具体例で見てみる</a:t>
             </a:r>
           </a:p>
         </p:txBody>
@@ -16235,7 +15591,7 @@
               </a:defRPr>
             </a:pPr>
             <a:r>
-              <a:t>例：「ビルド失敗ログを要約し、原因候補を整理する」場合</a:t>
+              <a:t>例：「CIが落ちた。原因を調査して修正案を出して」</a:t>
             </a:r>
           </a:p>
         </p:txBody>
@@ -16451,7 +15807,7 @@
               </a:defRPr>
             </a:pPr>
             <a:r>
-              <a:t>"ビルドが失敗した。</a:t>
+              <a:t>"CIが落ちた。</a:t>
             </a:r>
             <a:br/>
             <a:r>
@@ -16825,7 +16181,7 @@
             </a:r>
             <a:br/>
             <a:r>
-              <a:t> 変えない"</a:t>
+              <a:t> 変えないで"</a:t>
             </a:r>
           </a:p>
         </p:txBody>
@@ -16996,15 +16352,15 @@
               </a:defRPr>
             </a:pPr>
             <a:r>
-              <a:t>"根拠と次の確認</a:t>
+              <a:t>"根拠と修正案を</a:t>
             </a:r>
             <a:br/>
             <a:r>
-              <a:t> 手順を整理。</a:t>
+              <a:t> 整理。テストも</a:t>
             </a:r>
             <a:br/>
             <a:r>
-              <a:t> 修正案も添付。"</a:t>
+              <a:t> 追加済み。"</a:t>
             </a:r>
           </a:p>
         </p:txBody>
@@ -17046,7 +16402,7 @@
               </a:defRPr>
             </a:pPr>
             <a:r>
-              <a:t>→ 開発者は「何をしたいか」と「判断」に集中する。このあと、その具体的な方法を見ていく</a:t>
+              <a:t>→ 「丸投げ」ではなく「要所で判断する」。この感覚が重要</a:t>
             </a:r>
           </a:p>
         </p:txBody>
@@ -17088,7 +16444,7 @@
               </a:defRPr>
             </a:pPr>
             <a:r>
-              <a:t>7 / 17</a:t>
+              <a:t>7 / 16</a:t>
             </a:r>
           </a:p>
         </p:txBody>
@@ -17240,7 +16596,7 @@
               </a:defRPr>
             </a:pPr>
             <a:r>
-              <a:t>伝え方によって結果が変わるのは、</a:t>
+              <a:t>伝え方で結果が変わるのは、</a:t>
             </a:r>
             <a:br/>
             <a:r>
@@ -17286,7 +16642,7 @@
               </a:defRPr>
             </a:pPr>
             <a:r>
-              <a:t>8 / 17</a:t>
+              <a:t>8 / 16</a:t>
             </a:r>
           </a:p>
         </p:txBody>
@@ -17396,7 +16752,7 @@
               </a:defRPr>
             </a:pPr>
             <a:r>
-              <a:t>チャットボット vs エージェント</a:t>
+              <a:t>チャットボットとエージェントの違い</a:t>
             </a:r>
           </a:p>
         </p:txBody>
@@ -17496,8 +16852,50 @@
         </p:nvSpPr>
         <p:spPr>
           <a:xfrm>
-            <a:off x="1097280" y="2651760"/>
-            <a:ext cx="4114800" cy="2743200"/>
+            <a:off x="1097280" y="2468880"/>
+            <a:ext cx="4114800" cy="365760"/>
+          </a:xfrm>
+          <a:prstGeom prst="rect">
+            <a:avLst/>
+          </a:prstGeom>
+          <a:noFill/>
+        </p:spPr>
+        <p:txBody>
+          <a:bodyPr wrap="square">
+            <a:spAutoFit/>
+          </a:bodyPr>
+          <a:lstStyle/>
+          <a:p>
+            <a:pPr algn="l">
+              <a:lnSpc>
+                <a:spcPts val="2250"/>
+              </a:lnSpc>
+              <a:spcAft>
+                <a:spcPts val="0"/>
+              </a:spcAft>
+              <a:defRPr sz="1500" b="0">
+                <a:solidFill>
+                  <a:srgbClr val="B0AEA5"/>
+                </a:solidFill>
+                <a:latin typeface="Hiragino Sans"/>
+              </a:defRPr>
+            </a:pPr>
+            <a:r>
+              <a:t>電話サポートに近い</a:t>
+            </a:r>
+          </a:p>
+        </p:txBody>
+      </p:sp>
+      <p:sp>
+        <p:nvSpPr>
+          <p:cNvPr id="7" name="TextBox 6"/>
+          <p:cNvSpPr txBox="1"/>
+          <p:nvPr/>
+        </p:nvSpPr>
+        <p:spPr>
+          <a:xfrm>
+            <a:off x="1097280" y="3017520"/>
+            <a:ext cx="4114800" cy="2286000"/>
           </a:xfrm>
           <a:prstGeom prst="rect">
             <a:avLst/>
@@ -17544,7 +16942,7 @@
               </a:defRPr>
             </a:pPr>
             <a:r>
-              <a:t>• ピンポン型のやりとり</a:t>
+              <a:t>• 1回のやりとりが完結</a:t>
             </a:r>
           </a:p>
           <a:p>
@@ -17563,33 +16961,18 @@
               </a:defRPr>
             </a:pPr>
             <a:r>
-              <a:t>• 1回のやりとりが完結</a:t>
-            </a:r>
-          </a:p>
-          <a:p>
-            <a:pPr>
-              <a:lnSpc>
-                <a:spcPts val="2720"/>
-              </a:lnSpc>
-              <a:spcAft>
-                <a:spcPts val="800"/>
-              </a:spcAft>
-              <a:defRPr sz="1600">
-                <a:solidFill>
-                  <a:srgbClr val="C5C3BB"/>
-                </a:solidFill>
-                <a:latin typeface="Hiragino Sans"/>
-              </a:defRPr>
-            </a:pPr>
-            <a:r>
-              <a:t>• ユーザーが手順を管理する</a:t>
-            </a:r>
-          </a:p>
-        </p:txBody>
-      </p:sp>
-      <p:sp>
-        <p:nvSpPr>
-          <p:cNvPr id="7" name="Rounded Rectangle 6"/>
+              <a:t>• ユーザーが手順を考え、</a:t>
+            </a:r>
+            <a:br/>
+            <a:r>
+              <a:t>  1ステップずつ指示する</a:t>
+            </a:r>
+          </a:p>
+        </p:txBody>
+      </p:sp>
+      <p:sp>
+        <p:nvSpPr>
+          <p:cNvPr id="8" name="Rounded Rectangle 7"/>
           <p:cNvSpPr/>
           <p:nvPr/>
         </p:nvSpPr>
@@ -17634,7 +17017,7 @@
       </p:sp>
       <p:sp>
         <p:nvSpPr>
-          <p:cNvPr id="8" name="TextBox 7"/>
+          <p:cNvPr id="9" name="TextBox 8"/>
           <p:cNvSpPr txBox="1"/>
           <p:nvPr/>
         </p:nvSpPr>
@@ -17676,14 +17059,56 @@
       </p:sp>
       <p:sp>
         <p:nvSpPr>
-          <p:cNvPr id="9" name="TextBox 8"/>
-          <p:cNvSpPr txBox="1"/>
-          <p:nvPr/>
-        </p:nvSpPr>
-        <p:spPr>
-          <a:xfrm>
-            <a:off x="6766560" y="2651760"/>
-            <a:ext cx="4114800" cy="2743200"/>
+          <p:cNvPr id="10" name="TextBox 9"/>
+          <p:cNvSpPr txBox="1"/>
+          <p:nvPr/>
+        </p:nvSpPr>
+        <p:spPr>
+          <a:xfrm>
+            <a:off x="6766560" y="2468880"/>
+            <a:ext cx="4114800" cy="365760"/>
+          </a:xfrm>
+          <a:prstGeom prst="rect">
+            <a:avLst/>
+          </a:prstGeom>
+          <a:noFill/>
+        </p:spPr>
+        <p:txBody>
+          <a:bodyPr wrap="square">
+            <a:spAutoFit/>
+          </a:bodyPr>
+          <a:lstStyle/>
+          <a:p>
+            <a:pPr algn="l">
+              <a:lnSpc>
+                <a:spcPts val="2250"/>
+              </a:lnSpc>
+              <a:spcAft>
+                <a:spcPts val="0"/>
+              </a:spcAft>
+              <a:defRPr sz="1500" b="0">
+                <a:solidFill>
+                  <a:srgbClr val="B0AEA5"/>
+                </a:solidFill>
+                <a:latin typeface="Hiragino Sans"/>
+              </a:defRPr>
+            </a:pPr>
+            <a:r>
+              <a:t>仕事を任せた同僚に近い</a:t>
+            </a:r>
+          </a:p>
+        </p:txBody>
+      </p:sp>
+      <p:sp>
+        <p:nvSpPr>
+          <p:cNvPr id="11" name="TextBox 10"/>
+          <p:cNvSpPr txBox="1"/>
+          <p:nvPr/>
+        </p:nvSpPr>
+        <p:spPr>
+          <a:xfrm>
+            <a:off x="6766560" y="3017520"/>
+            <a:ext cx="4114800" cy="2286000"/>
           </a:xfrm>
           <a:prstGeom prst="rect">
             <a:avLst/>
@@ -17711,7 +17136,7 @@
               </a:defRPr>
             </a:pPr>
             <a:r>
-              <a:t>• 目標を委任 → 自律的に実行</a:t>
+              <a:t>• ゴールを伝えたら自律的に実行</a:t>
             </a:r>
           </a:p>
           <a:p>
@@ -17730,7 +17155,11 @@
               </a:defRPr>
             </a:pPr>
             <a:r>
-              <a:t>• ファイル読み書き・コマンド実行</a:t>
+              <a:t>• ファイル読み書き・コマンド実行・</a:t>
+            </a:r>
+            <a:br/>
+            <a:r>
+              <a:t>  Web検索</a:t>
             </a:r>
           </a:p>
           <a:p>
@@ -17749,33 +17178,18 @@
               </a:defRPr>
             </a:pPr>
             <a:r>
-              <a:t>• 調査 → 計画 → 実装を一連で行う</a:t>
-            </a:r>
-          </a:p>
-          <a:p>
-            <a:pPr>
-              <a:lnSpc>
-                <a:spcPts val="2720"/>
-              </a:lnSpc>
-              <a:spcAft>
-                <a:spcPts val="800"/>
-              </a:spcAft>
-              <a:defRPr sz="1600">
-                <a:solidFill>
-                  <a:srgbClr val="C5C3BB"/>
-                </a:solidFill>
-                <a:latin typeface="Hiragino Sans"/>
-              </a:defRPr>
-            </a:pPr>
-            <a:r>
-              <a:t>• エージェントが手順を判断する</a:t>
-            </a:r>
-          </a:p>
-        </p:txBody>
-      </p:sp>
-      <p:sp>
-        <p:nvSpPr>
-          <p:cNvPr id="10" name="TextBox 9"/>
+              <a:t>• 調査 → 計画 → 実装を</a:t>
+            </a:r>
+            <a:br/>
+            <a:r>
+              <a:t>  一連で判断・実行する</a:t>
+            </a:r>
+          </a:p>
+        </p:txBody>
+      </p:sp>
+      <p:sp>
+        <p:nvSpPr>
+          <p:cNvPr id="12" name="TextBox 11"/>
           <p:cNvSpPr txBox="1"/>
           <p:nvPr/>
         </p:nvSpPr>
@@ -17810,14 +17224,14 @@
               </a:defRPr>
             </a:pPr>
             <a:r>
-              <a:t>→ コミュニケーションの方法も変わる。「指示」ではなく「委任」の意識が重要</a:t>
-            </a:r>
-          </a:p>
-        </p:txBody>
-      </p:sp>
-      <p:sp>
-        <p:nvSpPr>
-          <p:cNvPr id="11" name="TextBox 10"/>
+              <a:t>→ 「1行ずつ指示する」のではなく「ゴールと背景を伝えて任せる」</a:t>
+            </a:r>
+          </a:p>
+        </p:txBody>
+      </p:sp>
+      <p:sp>
+        <p:nvSpPr>
+          <p:cNvPr id="13" name="TextBox 12"/>
           <p:cNvSpPr txBox="1"/>
           <p:nvPr/>
         </p:nvSpPr>
@@ -17852,7 +17266,7 @@
               </a:defRPr>
             </a:pPr>
             <a:r>
-              <a:t>9 / 17</a:t>
+              <a:t>9 / 16</a:t>
             </a:r>
           </a:p>
         </p:txBody>

--- a/slides/session1.pptx
+++ b/slides/session1.pptx
@@ -20,7 +20,6 @@
     <p:sldId id="268" r:id="rId20"/>
     <p:sldId id="269" r:id="rId21"/>
     <p:sldId id="270" r:id="rId22"/>
-    <p:sldId id="271" r:id="rId23"/>
   </p:sldIdLst>
   <p:sldSz cx="12191695" cy="6858000" type="screen4x3"/>
   <p:notesSz cx="6858000" cy="9144000"/>
@@ -1092,101 +1091,6 @@
           <a:lstStyle/>
           <a:p>
             <a:r>
-              <a:t>実際に使い始める手順。</a:t>
-            </a:r>
-          </a:p>
-          <a:p>
-            <a:r>
-              <a:t>インストールはワンライナー。自動更新されるので常に最新版。</a:t>
-            </a:r>
-          </a:p>
-          <a:p>
-            <a:r>
-              <a:t>対象リポジトリのディレクトリで claude を実行するだけ。初回は認証設定が求められる。</a:t>
-            </a:r>
-          </a:p>
-          <a:p>
-            <a:r>
-              <a:t>最初のタスクは結果がわかりやすいものが良い。</a:t>
-            </a:r>
-          </a:p>
-          <a:p>
-            <a:r>
-              <a:t>リポジトリの要約、テスト実行、参照箇所の列挙など。</a:t>
-            </a:r>
-          </a:p>
-          <a:p>
-            <a:r>
-              <a:t>権限設定は /config で確認できる。最初はPlan Mode固定で始めると安全。</a:t>
-            </a:r>
-          </a:p>
-        </p:txBody>
-      </p:sp>
-      <p:sp>
-        <p:nvSpPr>
-          <p:cNvPr id="4" name="Slide Number Placeholder 3"/>
-          <p:cNvSpPr>
-            <a:spLocks noGrp="1"/>
-          </p:cNvSpPr>
-          <p:nvPr>
-            <p:ph type="sldNum" idx="5" sz="quarter"/>
-          </p:nvPr>
-        </p:nvSpPr>
-        <p:spPr/>
-      </p:sp>
-    </p:spTree>
-  </p:cSld>
-  <p:clrMapOvr>
-    <a:masterClrMapping/>
-  </p:clrMapOvr>
-</p:notes>
-</file>
-
-<file path=ppt/notesSlides/notesSlide16.xml><?xml version="1.0" encoding="utf-8"?>
-<p:notes xmlns:a="http://schemas.openxmlformats.org/drawingml/2006/main" xmlns:p="http://schemas.openxmlformats.org/presentationml/2006/main" xmlns:r="http://schemas.openxmlformats.org/officeDocument/2006/relationships">
-  <p:cSld>
-    <p:spTree>
-      <p:nvGrpSpPr>
-        <p:cNvPr id="1" name=""/>
-        <p:cNvGrpSpPr/>
-        <p:nvPr/>
-      </p:nvGrpSpPr>
-      <p:grpSpPr>
-        <a:xfrm>
-          <a:off x="0" y="0"/>
-          <a:ext cx="0" cy="0"/>
-          <a:chOff x="0" y="0"/>
-          <a:chExt cx="0" cy="0"/>
-        </a:xfrm>
-      </p:grpSpPr>
-      <p:sp>
-        <p:nvSpPr>
-          <p:cNvPr id="2" name="Slide Image Placeholder 1"/>
-          <p:cNvSpPr>
-            <a:spLocks noGrp="1"/>
-          </p:cNvSpPr>
-          <p:nvPr>
-            <p:ph type="sldImg" idx="2"/>
-          </p:nvPr>
-        </p:nvSpPr>
-        <p:spPr/>
-      </p:sp>
-      <p:sp>
-        <p:nvSpPr>
-          <p:cNvPr id="3" name="Notes Placeholder 2"/>
-          <p:cNvSpPr>
-            <a:spLocks noGrp="1"/>
-          </p:cNvSpPr>
-          <p:nvPr>
-            <p:ph type="body" idx="3" sz="quarter"/>
-          </p:nvPr>
-        </p:nvSpPr>
-        <p:spPr/>
-        <p:txBody>
-          <a:bodyPr/>
-          <a:lstStyle/>
-          <a:p>
-            <a:r>
               <a:t>まとめ。今日の持ち帰りは3つ。</a:t>
             </a:r>
           </a:p>
@@ -1207,12 +1111,12 @@
           </a:p>
           <a:p>
             <a:r>
-              <a:t>面倒な調査タスクを1件、任せてみてほしい。</a:t>
-            </a:r>
-          </a:p>
-          <a:p>
-            <a:r>
-              <a:t>次回は「カスタマイズする」がテーマ。コンテキスト管理、Skills、サブエージェント。</a:t>
+              <a:t>日常業務の一部を、まず任せてみてほしい。</a:t>
+            </a:r>
+          </a:p>
+          <a:p>
+            <a:r>
+              <a:t>次回は「プロジェクトに合わせたカスタマイズ」。CLAUDE.md、Skills、Hooks。</a:t>
             </a:r>
           </a:p>
           <a:p>
@@ -1297,12 +1201,12 @@
           </a:p>
           <a:p>
             <a:r>
-              <a:t>第2回は「カスタマイズする」。チームに合わせた設定。</a:t>
-            </a:r>
-          </a:p>
-          <a:p>
-            <a:r>
-              <a:t>第3回は「スケールさせる」。自動化と並列化。</a:t>
+              <a:t>第2回は「プロジェクトに合わせたカスタマイズ」。CLAUDE.md、Skills、Hooks。</a:t>
+            </a:r>
+          </a:p>
+          <a:p>
+            <a:r>
+              <a:t>第3回は「外部連携と並列開発」。MCP、worktree、サブエージェント。</a:t>
             </a:r>
           </a:p>
           <a:p>
@@ -1312,7 +1216,7 @@
           </a:p>
           <a:p>
             <a:r>
-              <a:t>今日のゴールは明確に。「面倒な調査を1件、任せられる」ようになること。</a:t>
+              <a:t>今日のゴールは「日常業務の一部を任せられる」ようになること。</a:t>
             </a:r>
           </a:p>
         </p:txBody>
@@ -6094,7 +5998,7 @@
               </a:defRPr>
             </a:pPr>
             <a:r>
-              <a:t>10 / 16</a:t>
+              <a:t>10 / 15</a:t>
             </a:r>
           </a:p>
         </p:txBody>
@@ -7077,7 +6981,7 @@
               </a:defRPr>
             </a:pPr>
             <a:r>
-              <a:t>11 / 16</a:t>
+              <a:t>11 / 15</a:t>
             </a:r>
           </a:p>
         </p:txBody>
@@ -7271,7 +7175,7 @@
               </a:defRPr>
             </a:pPr>
             <a:r>
-              <a:t>12 / 16</a:t>
+              <a:t>12 / 15</a:t>
             </a:r>
           </a:p>
         </p:txBody>
@@ -7928,7 +7832,7 @@
               </a:defRPr>
             </a:pPr>
             <a:r>
-              <a:t>13 / 16</a:t>
+              <a:t>13 / 15</a:t>
             </a:r>
           </a:p>
         </p:txBody>
@@ -9361,7 +9265,7 @@
               </a:defRPr>
             </a:pPr>
             <a:r>
-              <a:t>14 / 16</a:t>
+              <a:t>14 / 15</a:t>
             </a:r>
           </a:p>
         </p:txBody>
@@ -9429,437 +9333,21 @@
               </a:defRPr>
             </a:pPr>
             <a:r>
-              <a:t>始め方</a:t>
-            </a:r>
-          </a:p>
-        </p:txBody>
-      </p:sp>
-      <p:sp>
-        <p:nvSpPr>
-          <p:cNvPr id="3" name="TextBox 2"/>
-          <p:cNvSpPr txBox="1"/>
-          <p:nvPr/>
-        </p:nvSpPr>
-        <p:spPr>
-          <a:xfrm>
-            <a:off x="731520" y="1371600"/>
-            <a:ext cx="2743200" cy="457200"/>
-          </a:xfrm>
-          <a:prstGeom prst="rect">
-            <a:avLst/>
-          </a:prstGeom>
-          <a:noFill/>
-        </p:spPr>
-        <p:txBody>
-          <a:bodyPr wrap="square">
-            <a:spAutoFit/>
-          </a:bodyPr>
-          <a:lstStyle/>
-          <a:p>
-            <a:pPr algn="l">
-              <a:lnSpc>
-                <a:spcPts val="3000"/>
-              </a:lnSpc>
-              <a:spcAft>
-                <a:spcPts val="0"/>
-              </a:spcAft>
-              <a:defRPr sz="2000" b="1">
-                <a:solidFill>
-                  <a:srgbClr val="D97757"/>
-                </a:solidFill>
-                <a:latin typeface="Hiragino Sans"/>
-              </a:defRPr>
-            </a:pPr>
-            <a:r>
-              <a:t>インストール</a:t>
-            </a:r>
-          </a:p>
-        </p:txBody>
-      </p:sp>
-      <p:sp>
-        <p:nvSpPr>
-          <p:cNvPr id="4" name="Rounded Rectangle 3"/>
+              <a:t>まとめ / 次回予告</a:t>
+            </a:r>
+          </a:p>
+        </p:txBody>
+      </p:sp>
+      <p:sp>
+        <p:nvSpPr>
+          <p:cNvPr id="3" name="Rounded Rectangle 2"/>
           <p:cNvSpPr/>
           <p:nvPr/>
         </p:nvSpPr>
         <p:spPr>
           <a:xfrm>
-            <a:off x="731520" y="1920240"/>
-            <a:ext cx="5029200" cy="1463040"/>
-          </a:xfrm>
-          <a:prstGeom prst="roundRect">
-            <a:avLst>
-              <a:gd name="adj" fmla="val 3000"/>
-            </a:avLst>
-          </a:prstGeom>
-          <a:solidFill>
-            <a:srgbClr val="141210"/>
-          </a:solidFill>
-          <a:ln>
-            <a:noFill/>
-          </a:ln>
-        </p:spPr>
-        <p:style>
-          <a:lnRef idx="1">
-            <a:schemeClr val="accent1"/>
-          </a:lnRef>
-          <a:fillRef idx="3">
-            <a:schemeClr val="accent1"/>
-          </a:fillRef>
-          <a:effectRef idx="2">
-            <a:schemeClr val="accent1"/>
-          </a:effectRef>
-          <a:fontRef idx="minor">
-            <a:schemeClr val="lt1"/>
-          </a:fontRef>
-        </p:style>
-        <p:txBody>
-          <a:bodyPr rtlCol="0" anchor="ctr"/>
-          <a:lstStyle/>
-          <a:p>
-            <a:pPr algn="ctr"/>
-          </a:p>
-        </p:txBody>
-      </p:sp>
-      <p:sp>
-        <p:nvSpPr>
-          <p:cNvPr id="5" name="TextBox 4"/>
-          <p:cNvSpPr txBox="1"/>
-          <p:nvPr/>
-        </p:nvSpPr>
-        <p:spPr>
-          <a:xfrm>
-            <a:off x="1005840" y="2103120"/>
-            <a:ext cx="4480560" cy="1097280"/>
-          </a:xfrm>
-          <a:prstGeom prst="rect">
-            <a:avLst/>
-          </a:prstGeom>
-          <a:noFill/>
-        </p:spPr>
-        <p:txBody>
-          <a:bodyPr wrap="square">
-            <a:spAutoFit/>
-          </a:bodyPr>
-          <a:lstStyle/>
-          <a:p>
-            <a:pPr>
-              <a:lnSpc>
-                <a:spcPts val="2080"/>
-              </a:lnSpc>
-              <a:spcAft>
-                <a:spcPts val="200"/>
-              </a:spcAft>
-              <a:defRPr sz="1300">
-                <a:solidFill>
-                  <a:srgbClr val="6A9BCC"/>
-                </a:solidFill>
-                <a:latin typeface="SF Mono"/>
-              </a:defRPr>
-            </a:pPr>
-            <a:r>
-              <a:t># Mac</a:t>
-            </a:r>
-          </a:p>
-          <a:p>
-            <a:pPr>
-              <a:lnSpc>
-                <a:spcPts val="2080"/>
-              </a:lnSpc>
-              <a:spcAft>
-                <a:spcPts val="200"/>
-              </a:spcAft>
-              <a:defRPr sz="1300">
-                <a:solidFill>
-                  <a:srgbClr val="6A9BCC"/>
-                </a:solidFill>
-                <a:latin typeface="SF Mono"/>
-              </a:defRPr>
-            </a:pPr>
-            <a:r>
-              <a:t>curl -fsSL https://claude.ai/install.sh | bash</a:t>
-            </a:r>
-          </a:p>
-          <a:p>
-            <a:pPr>
-              <a:lnSpc>
-                <a:spcPts val="2080"/>
-              </a:lnSpc>
-              <a:spcAft>
-                <a:spcPts val="200"/>
-              </a:spcAft>
-              <a:defRPr sz="1300">
-                <a:solidFill>
-                  <a:srgbClr val="6A9BCC"/>
-                </a:solidFill>
-                <a:latin typeface="SF Mono"/>
-              </a:defRPr>
-            </a:pPr>
-          </a:p>
-          <a:p>
-            <a:pPr>
-              <a:lnSpc>
-                <a:spcPts val="2080"/>
-              </a:lnSpc>
-              <a:spcAft>
-                <a:spcPts val="200"/>
-              </a:spcAft>
-              <a:defRPr sz="1300">
-                <a:solidFill>
-                  <a:srgbClr val="6A9BCC"/>
-                </a:solidFill>
-                <a:latin typeface="SF Mono"/>
-              </a:defRPr>
-            </a:pPr>
-            <a:r>
-              <a:t># Windows</a:t>
-            </a:r>
-          </a:p>
-          <a:p>
-            <a:pPr>
-              <a:lnSpc>
-                <a:spcPts val="2080"/>
-              </a:lnSpc>
-              <a:spcAft>
-                <a:spcPts val="200"/>
-              </a:spcAft>
-              <a:defRPr sz="1300">
-                <a:solidFill>
-                  <a:srgbClr val="6A9BCC"/>
-                </a:solidFill>
-                <a:latin typeface="SF Mono"/>
-              </a:defRPr>
-            </a:pPr>
-            <a:r>
-              <a:t>winget install Anthropic.ClaudeCode</a:t>
-            </a:r>
-          </a:p>
-        </p:txBody>
-      </p:sp>
-      <p:sp>
-        <p:nvSpPr>
-          <p:cNvPr id="6" name="TextBox 5"/>
-          <p:cNvSpPr txBox="1"/>
-          <p:nvPr/>
-        </p:nvSpPr>
-        <p:spPr>
-          <a:xfrm>
-            <a:off x="6400800" y="1371600"/>
-            <a:ext cx="4572000" cy="457200"/>
-          </a:xfrm>
-          <a:prstGeom prst="rect">
-            <a:avLst/>
-          </a:prstGeom>
-          <a:noFill/>
-        </p:spPr>
-        <p:txBody>
-          <a:bodyPr wrap="square">
-            <a:spAutoFit/>
-          </a:bodyPr>
-          <a:lstStyle/>
-          <a:p>
-            <a:pPr algn="l">
-              <a:lnSpc>
-                <a:spcPts val="3000"/>
-              </a:lnSpc>
-              <a:spcAft>
-                <a:spcPts val="0"/>
-              </a:spcAft>
-              <a:defRPr sz="2000" b="1">
-                <a:solidFill>
-                  <a:srgbClr val="D97757"/>
-                </a:solidFill>
-                <a:latin typeface="Hiragino Sans"/>
-              </a:defRPr>
-            </a:pPr>
-            <a:r>
-              <a:t>起動</a:t>
-            </a:r>
-          </a:p>
-        </p:txBody>
-      </p:sp>
-      <p:sp>
-        <p:nvSpPr>
-          <p:cNvPr id="7" name="TextBox 6"/>
-          <p:cNvSpPr txBox="1"/>
-          <p:nvPr/>
-        </p:nvSpPr>
-        <p:spPr>
-          <a:xfrm>
-            <a:off x="6400800" y="1920240"/>
-            <a:ext cx="4572000" cy="457200"/>
-          </a:xfrm>
-          <a:prstGeom prst="rect">
-            <a:avLst/>
-          </a:prstGeom>
-          <a:noFill/>
-        </p:spPr>
-        <p:txBody>
-          <a:bodyPr wrap="square">
-            <a:spAutoFit/>
-          </a:bodyPr>
-          <a:lstStyle/>
-          <a:p>
-            <a:pPr algn="l">
-              <a:lnSpc>
-                <a:spcPts val="2400"/>
-              </a:lnSpc>
-              <a:spcAft>
-                <a:spcPts val="0"/>
-              </a:spcAft>
-              <a:defRPr sz="1600" b="0">
-                <a:solidFill>
-                  <a:srgbClr val="C5C3BB"/>
-                </a:solidFill>
-                <a:latin typeface="Hiragino Sans"/>
-              </a:defRPr>
-            </a:pPr>
-            <a:r>
-              <a:t>対象リポジトリで claude を実行</a:t>
-            </a:r>
-          </a:p>
-        </p:txBody>
-      </p:sp>
-      <p:sp>
-        <p:nvSpPr>
-          <p:cNvPr id="8" name="TextBox 7"/>
-          <p:cNvSpPr txBox="1"/>
-          <p:nvPr/>
-        </p:nvSpPr>
-        <p:spPr>
-          <a:xfrm>
-            <a:off x="6400800" y="2651760"/>
-            <a:ext cx="4572000" cy="457200"/>
-          </a:xfrm>
-          <a:prstGeom prst="rect">
-            <a:avLst/>
-          </a:prstGeom>
-          <a:noFill/>
-        </p:spPr>
-        <p:txBody>
-          <a:bodyPr wrap="square">
-            <a:spAutoFit/>
-          </a:bodyPr>
-          <a:lstStyle/>
-          <a:p>
-            <a:pPr algn="l">
-              <a:lnSpc>
-                <a:spcPts val="3000"/>
-              </a:lnSpc>
-              <a:spcAft>
-                <a:spcPts val="0"/>
-              </a:spcAft>
-              <a:defRPr sz="2000" b="1">
-                <a:solidFill>
-                  <a:srgbClr val="D97757"/>
-                </a:solidFill>
-                <a:latin typeface="Hiragino Sans"/>
-              </a:defRPr>
-            </a:pPr>
-            <a:r>
-              <a:t>権限設定</a:t>
-            </a:r>
-          </a:p>
-        </p:txBody>
-      </p:sp>
-      <p:sp>
-        <p:nvSpPr>
-          <p:cNvPr id="9" name="TextBox 8"/>
-          <p:cNvSpPr txBox="1"/>
-          <p:nvPr/>
-        </p:nvSpPr>
-        <p:spPr>
-          <a:xfrm>
-            <a:off x="6400800" y="3108960"/>
-            <a:ext cx="4572000" cy="731520"/>
-          </a:xfrm>
-          <a:prstGeom prst="rect">
-            <a:avLst/>
-          </a:prstGeom>
-          <a:noFill/>
-        </p:spPr>
-        <p:txBody>
-          <a:bodyPr wrap="square">
-            <a:spAutoFit/>
-          </a:bodyPr>
-          <a:lstStyle/>
-          <a:p>
-            <a:pPr algn="l">
-              <a:lnSpc>
-                <a:spcPts val="2250"/>
-              </a:lnSpc>
-              <a:spcAft>
-                <a:spcPts val="0"/>
-              </a:spcAft>
-              <a:defRPr sz="1500" b="0">
-                <a:solidFill>
-                  <a:srgbClr val="C5C3BB"/>
-                </a:solidFill>
-                <a:latin typeface="Hiragino Sans"/>
-              </a:defRPr>
-            </a:pPr>
-            <a:r>
-              <a:t>/config で確認・変更</a:t>
-            </a:r>
-            <a:br/>
-            <a:r>
-              <a:t>最初は Plan Mode 固定がおすすめ</a:t>
-            </a:r>
-          </a:p>
-        </p:txBody>
-      </p:sp>
-      <p:sp>
-        <p:nvSpPr>
-          <p:cNvPr id="10" name="TextBox 9"/>
-          <p:cNvSpPr txBox="1"/>
-          <p:nvPr/>
-        </p:nvSpPr>
-        <p:spPr>
-          <a:xfrm>
-            <a:off x="731520" y="3931920"/>
-            <a:ext cx="10058400" cy="457200"/>
-          </a:xfrm>
-          <a:prstGeom prst="rect">
-            <a:avLst/>
-          </a:prstGeom>
-          <a:noFill/>
-        </p:spPr>
-        <p:txBody>
-          <a:bodyPr wrap="square">
-            <a:spAutoFit/>
-          </a:bodyPr>
-          <a:lstStyle/>
-          <a:p>
-            <a:pPr algn="l">
-              <a:lnSpc>
-                <a:spcPts val="3000"/>
-              </a:lnSpc>
-              <a:spcAft>
-                <a:spcPts val="0"/>
-              </a:spcAft>
-              <a:defRPr sz="2000" b="1">
-                <a:solidFill>
-                  <a:srgbClr val="D97757"/>
-                </a:solidFill>
-                <a:latin typeface="Hiragino Sans"/>
-              </a:defRPr>
-            </a:pPr>
-            <a:r>
-              <a:t>最初のタスク例</a:t>
-            </a:r>
-          </a:p>
-        </p:txBody>
-      </p:sp>
-      <p:sp>
-        <p:nvSpPr>
-          <p:cNvPr id="11" name="Rounded Rectangle 10"/>
-          <p:cNvSpPr/>
-          <p:nvPr/>
-        </p:nvSpPr>
-        <p:spPr>
-          <a:xfrm>
-            <a:off x="731520" y="4480560"/>
-            <a:ext cx="10515600" cy="640080"/>
+            <a:off x="731520" y="1463040"/>
+            <a:ext cx="10515600" cy="1097280"/>
           </a:xfrm>
           <a:prstGeom prst="roundRect">
             <a:avLst>
@@ -9897,14 +9385,14 @@
       </p:sp>
       <p:sp>
         <p:nvSpPr>
-          <p:cNvPr id="12" name="TextBox 11"/>
-          <p:cNvSpPr txBox="1"/>
-          <p:nvPr/>
-        </p:nvSpPr>
-        <p:spPr>
-          <a:xfrm>
-            <a:off x="1188720" y="4590288"/>
-            <a:ext cx="9601200" cy="457200"/>
+          <p:cNvPr id="4" name="TextBox 3"/>
+          <p:cNvSpPr txBox="1"/>
+          <p:nvPr/>
+        </p:nvSpPr>
+        <p:spPr>
+          <a:xfrm>
+            <a:off x="1097280" y="1554480"/>
+            <a:ext cx="457200" cy="457200"/>
           </a:xfrm>
           <a:prstGeom prst="rect">
             <a:avLst/>
@@ -9919,34 +9407,122 @@
           <a:p>
             <a:pPr algn="l">
               <a:lnSpc>
-                <a:spcPts val="2400"/>
-              </a:lnSpc>
-              <a:spcAft>
-                <a:spcPts val="0"/>
-              </a:spcAft>
-              <a:defRPr sz="1600" b="0">
-                <a:solidFill>
-                  <a:srgbClr val="6A9BCC"/>
-                </a:solidFill>
-                <a:latin typeface="SF Mono"/>
-              </a:defRPr>
-            </a:pPr>
-            <a:r>
-              <a:t>「このリポジトリの構成を要約して」</a:t>
-            </a:r>
-          </a:p>
-        </p:txBody>
-      </p:sp>
-      <p:sp>
-        <p:nvSpPr>
-          <p:cNvPr id="13" name="Rounded Rectangle 12"/>
+                <a:spcPts val="4200"/>
+              </a:lnSpc>
+              <a:spcAft>
+                <a:spcPts val="0"/>
+              </a:spcAft>
+              <a:defRPr sz="2800" b="1">
+                <a:solidFill>
+                  <a:srgbClr val="D97757"/>
+                </a:solidFill>
+                <a:latin typeface="Helvetica Neue"/>
+              </a:defRPr>
+            </a:pPr>
+            <a:r>
+              <a:t>1</a:t>
+            </a:r>
+          </a:p>
+        </p:txBody>
+      </p:sp>
+      <p:sp>
+        <p:nvSpPr>
+          <p:cNvPr id="5" name="TextBox 4"/>
+          <p:cNvSpPr txBox="1"/>
+          <p:nvPr/>
+        </p:nvSpPr>
+        <p:spPr>
+          <a:xfrm>
+            <a:off x="1828800" y="1554480"/>
+            <a:ext cx="8686800" cy="457200"/>
+          </a:xfrm>
+          <a:prstGeom prst="rect">
+            <a:avLst/>
+          </a:prstGeom>
+          <a:noFill/>
+        </p:spPr>
+        <p:txBody>
+          <a:bodyPr wrap="square">
+            <a:spAutoFit/>
+          </a:bodyPr>
+          <a:lstStyle/>
+          <a:p>
+            <a:pPr algn="l">
+              <a:lnSpc>
+                <a:spcPts val="3000"/>
+              </a:lnSpc>
+              <a:spcAft>
+                <a:spcPts val="0"/>
+              </a:spcAft>
+              <a:defRPr sz="2000" b="1">
+                <a:solidFill>
+                  <a:srgbClr val="FAF9F5"/>
+                </a:solidFill>
+                <a:latin typeface="Hiragino Sans"/>
+              </a:defRPr>
+            </a:pPr>
+            <a:r>
+              <a:t>Claude Code はコード補完ではなく</a:t>
+            </a:r>
+            <a:br/>
+            <a:r>
+              <a:t>「作業を進める」ツール</a:t>
+            </a:r>
+          </a:p>
+        </p:txBody>
+      </p:sp>
+      <p:sp>
+        <p:nvSpPr>
+          <p:cNvPr id="6" name="TextBox 5"/>
+          <p:cNvSpPr txBox="1"/>
+          <p:nvPr/>
+        </p:nvSpPr>
+        <p:spPr>
+          <a:xfrm>
+            <a:off x="1828800" y="2057400"/>
+            <a:ext cx="8686800" cy="457200"/>
+          </a:xfrm>
+          <a:prstGeom prst="rect">
+            <a:avLst/>
+          </a:prstGeom>
+          <a:noFill/>
+        </p:spPr>
+        <p:txBody>
+          <a:bodyPr wrap="square">
+            <a:spAutoFit/>
+          </a:bodyPr>
+          <a:lstStyle/>
+          <a:p>
+            <a:pPr algn="l">
+              <a:lnSpc>
+                <a:spcPts val="2250"/>
+              </a:lnSpc>
+              <a:spcAft>
+                <a:spcPts val="0"/>
+              </a:spcAft>
+              <a:defRPr sz="1500" b="0">
+                <a:solidFill>
+                  <a:srgbClr val="C5C3BB"/>
+                </a:solidFill>
+                <a:latin typeface="Hiragino Sans"/>
+              </a:defRPr>
+            </a:pPr>
+            <a:r>
+              <a:t>調査→計画→実装→検証→取りまとめの一連フロー</a:t>
+            </a:r>
+          </a:p>
+        </p:txBody>
+      </p:sp>
+      <p:sp>
+        <p:nvSpPr>
+          <p:cNvPr id="7" name="Rounded Rectangle 6"/>
           <p:cNvSpPr/>
           <p:nvPr/>
         </p:nvSpPr>
         <p:spPr>
           <a:xfrm>
-            <a:off x="731520" y="5212080"/>
-            <a:ext cx="10515600" cy="640080"/>
+            <a:off x="731520" y="2743200"/>
+            <a:ext cx="10515600" cy="1097280"/>
           </a:xfrm>
           <a:prstGeom prst="roundRect">
             <a:avLst>
@@ -9984,14 +9560,14 @@
       </p:sp>
       <p:sp>
         <p:nvSpPr>
-          <p:cNvPr id="14" name="TextBox 13"/>
-          <p:cNvSpPr txBox="1"/>
-          <p:nvPr/>
-        </p:nvSpPr>
-        <p:spPr>
-          <a:xfrm>
-            <a:off x="1188720" y="5321808"/>
-            <a:ext cx="9601200" cy="457200"/>
+          <p:cNvPr id="8" name="TextBox 7"/>
+          <p:cNvSpPr txBox="1"/>
+          <p:nvPr/>
+        </p:nvSpPr>
+        <p:spPr>
+          <a:xfrm>
+            <a:off x="1097280" y="2834640"/>
+            <a:ext cx="457200" cy="457200"/>
           </a:xfrm>
           <a:prstGeom prst="rect">
             <a:avLst/>
@@ -10006,34 +9582,118 @@
           <a:p>
             <a:pPr algn="l">
               <a:lnSpc>
-                <a:spcPts val="2400"/>
-              </a:lnSpc>
-              <a:spcAft>
-                <a:spcPts val="0"/>
-              </a:spcAft>
-              <a:defRPr sz="1600" b="0">
-                <a:solidFill>
-                  <a:srgbClr val="6A9BCC"/>
-                </a:solidFill>
-                <a:latin typeface="SF Mono"/>
-              </a:defRPr>
-            </a:pPr>
-            <a:r>
-              <a:t>「テストを実行して、失敗しているケースがあれば原因を教えて」</a:t>
-            </a:r>
-          </a:p>
-        </p:txBody>
-      </p:sp>
-      <p:sp>
-        <p:nvSpPr>
-          <p:cNvPr id="15" name="Rounded Rectangle 14"/>
+                <a:spcPts val="4200"/>
+              </a:lnSpc>
+              <a:spcAft>
+                <a:spcPts val="0"/>
+              </a:spcAft>
+              <a:defRPr sz="2800" b="1">
+                <a:solidFill>
+                  <a:srgbClr val="D97757"/>
+                </a:solidFill>
+                <a:latin typeface="Helvetica Neue"/>
+              </a:defRPr>
+            </a:pPr>
+            <a:r>
+              <a:t>2</a:t>
+            </a:r>
+          </a:p>
+        </p:txBody>
+      </p:sp>
+      <p:sp>
+        <p:nvSpPr>
+          <p:cNvPr id="9" name="TextBox 8"/>
+          <p:cNvSpPr txBox="1"/>
+          <p:nvPr/>
+        </p:nvSpPr>
+        <p:spPr>
+          <a:xfrm>
+            <a:off x="1828800" y="2834640"/>
+            <a:ext cx="8686800" cy="457200"/>
+          </a:xfrm>
+          <a:prstGeom prst="rect">
+            <a:avLst/>
+          </a:prstGeom>
+          <a:noFill/>
+        </p:spPr>
+        <p:txBody>
+          <a:bodyPr wrap="square">
+            <a:spAutoFit/>
+          </a:bodyPr>
+          <a:lstStyle/>
+          <a:p>
+            <a:pPr algn="l">
+              <a:lnSpc>
+                <a:spcPts val="3000"/>
+              </a:lnSpc>
+              <a:spcAft>
+                <a:spcPts val="0"/>
+              </a:spcAft>
+              <a:defRPr sz="2000" b="1">
+                <a:solidFill>
+                  <a:srgbClr val="FAF9F5"/>
+                </a:solidFill>
+                <a:latin typeface="Hiragino Sans"/>
+              </a:defRPr>
+            </a:pPr>
+            <a:r>
+              <a:t>伝え方で結果が変わる</a:t>
+            </a:r>
+          </a:p>
+        </p:txBody>
+      </p:sp>
+      <p:sp>
+        <p:nvSpPr>
+          <p:cNvPr id="10" name="TextBox 9"/>
+          <p:cNvSpPr txBox="1"/>
+          <p:nvPr/>
+        </p:nvSpPr>
+        <p:spPr>
+          <a:xfrm>
+            <a:off x="1828800" y="3337560"/>
+            <a:ext cx="8686800" cy="457200"/>
+          </a:xfrm>
+          <a:prstGeom prst="rect">
+            <a:avLst/>
+          </a:prstGeom>
+          <a:noFill/>
+        </p:spPr>
+        <p:txBody>
+          <a:bodyPr wrap="square">
+            <a:spAutoFit/>
+          </a:bodyPr>
+          <a:lstStyle/>
+          <a:p>
+            <a:pPr algn="l">
+              <a:lnSpc>
+                <a:spcPts val="2250"/>
+              </a:lnSpc>
+              <a:spcAft>
+                <a:spcPts val="0"/>
+              </a:spcAft>
+              <a:defRPr sz="1500" b="0">
+                <a:solidFill>
+                  <a:srgbClr val="C5C3BB"/>
+                </a:solidFill>
+                <a:latin typeface="Hiragino Sans"/>
+              </a:defRPr>
+            </a:pPr>
+            <a:r>
+              <a:t>目標・背景・現状・期待出力を伝え、たたき台→改善ループで進める</a:t>
+            </a:r>
+          </a:p>
+        </p:txBody>
+      </p:sp>
+      <p:sp>
+        <p:nvSpPr>
+          <p:cNvPr id="11" name="Rounded Rectangle 10"/>
           <p:cNvSpPr/>
           <p:nvPr/>
         </p:nvSpPr>
         <p:spPr>
           <a:xfrm>
-            <a:off x="731520" y="5943600"/>
-            <a:ext cx="10515600" cy="640080"/>
+            <a:off x="731520" y="4023360"/>
+            <a:ext cx="10515600" cy="1097280"/>
           </a:xfrm>
           <a:prstGeom prst="roundRect">
             <a:avLst>
@@ -10071,49 +9731,175 @@
       </p:sp>
       <p:sp>
         <p:nvSpPr>
+          <p:cNvPr id="12" name="TextBox 11"/>
+          <p:cNvSpPr txBox="1"/>
+          <p:nvPr/>
+        </p:nvSpPr>
+        <p:spPr>
+          <a:xfrm>
+            <a:off x="1097280" y="4114800"/>
+            <a:ext cx="457200" cy="457200"/>
+          </a:xfrm>
+          <a:prstGeom prst="rect">
+            <a:avLst/>
+          </a:prstGeom>
+          <a:noFill/>
+        </p:spPr>
+        <p:txBody>
+          <a:bodyPr wrap="square">
+            <a:spAutoFit/>
+          </a:bodyPr>
+          <a:lstStyle/>
+          <a:p>
+            <a:pPr algn="l">
+              <a:lnSpc>
+                <a:spcPts val="4200"/>
+              </a:lnSpc>
+              <a:spcAft>
+                <a:spcPts val="0"/>
+              </a:spcAft>
+              <a:defRPr sz="2800" b="1">
+                <a:solidFill>
+                  <a:srgbClr val="D97757"/>
+                </a:solidFill>
+                <a:latin typeface="Helvetica Neue"/>
+              </a:defRPr>
+            </a:pPr>
+            <a:r>
+              <a:t>3</a:t>
+            </a:r>
+          </a:p>
+        </p:txBody>
+      </p:sp>
+      <p:sp>
+        <p:nvSpPr>
+          <p:cNvPr id="13" name="TextBox 12"/>
+          <p:cNvSpPr txBox="1"/>
+          <p:nvPr/>
+        </p:nvSpPr>
+        <p:spPr>
+          <a:xfrm>
+            <a:off x="1828800" y="4114800"/>
+            <a:ext cx="8686800" cy="457200"/>
+          </a:xfrm>
+          <a:prstGeom prst="rect">
+            <a:avLst/>
+          </a:prstGeom>
+          <a:noFill/>
+        </p:spPr>
+        <p:txBody>
+          <a:bodyPr wrap="square">
+            <a:spAutoFit/>
+          </a:bodyPr>
+          <a:lstStyle/>
+          <a:p>
+            <a:pPr algn="l">
+              <a:lnSpc>
+                <a:spcPts val="3000"/>
+              </a:lnSpc>
+              <a:spcAft>
+                <a:spcPts val="0"/>
+              </a:spcAft>
+              <a:defRPr sz="2000" b="1">
+                <a:solidFill>
+                  <a:srgbClr val="FAF9F5"/>
+                </a:solidFill>
+                <a:latin typeface="Hiragino Sans"/>
+              </a:defRPr>
+            </a:pPr>
+            <a:r>
+              <a:t>いきなりコードを書かせない</a:t>
+            </a:r>
+          </a:p>
+        </p:txBody>
+      </p:sp>
+      <p:sp>
+        <p:nvSpPr>
+          <p:cNvPr id="14" name="TextBox 13"/>
+          <p:cNvSpPr txBox="1"/>
+          <p:nvPr/>
+        </p:nvSpPr>
+        <p:spPr>
+          <a:xfrm>
+            <a:off x="1828800" y="4617720"/>
+            <a:ext cx="8686800" cy="457200"/>
+          </a:xfrm>
+          <a:prstGeom prst="rect">
+            <a:avLst/>
+          </a:prstGeom>
+          <a:noFill/>
+        </p:spPr>
+        <p:txBody>
+          <a:bodyPr wrap="square">
+            <a:spAutoFit/>
+          </a:bodyPr>
+          <a:lstStyle/>
+          <a:p>
+            <a:pPr algn="l">
+              <a:lnSpc>
+                <a:spcPts val="2250"/>
+              </a:lnSpc>
+              <a:spcAft>
+                <a:spcPts val="0"/>
+              </a:spcAft>
+              <a:defRPr sz="1500" b="0">
+                <a:solidFill>
+                  <a:srgbClr val="C5C3BB"/>
+                </a:solidFill>
+                <a:latin typeface="Hiragino Sans"/>
+              </a:defRPr>
+            </a:pPr>
+            <a:r>
+              <a:t>Plan Modeで方針を固めてから実装に入る</a:t>
+            </a:r>
+          </a:p>
+        </p:txBody>
+      </p:sp>
+      <p:sp>
+        <p:nvSpPr>
+          <p:cNvPr id="15" name="TextBox 14"/>
+          <p:cNvSpPr txBox="1"/>
+          <p:nvPr/>
+        </p:nvSpPr>
+        <p:spPr>
+          <a:xfrm>
+            <a:off x="731520" y="5486400"/>
+            <a:ext cx="10515600" cy="457200"/>
+          </a:xfrm>
+          <a:prstGeom prst="rect">
+            <a:avLst/>
+          </a:prstGeom>
+          <a:noFill/>
+        </p:spPr>
+        <p:txBody>
+          <a:bodyPr wrap="square">
+            <a:spAutoFit/>
+          </a:bodyPr>
+          <a:lstStyle/>
+          <a:p>
+            <a:pPr algn="l">
+              <a:lnSpc>
+                <a:spcPts val="2700"/>
+              </a:lnSpc>
+              <a:spcAft>
+                <a:spcPts val="0"/>
+              </a:spcAft>
+              <a:defRPr sz="1800" b="1">
+                <a:solidFill>
+                  <a:srgbClr val="D97757"/>
+                </a:solidFill>
+                <a:latin typeface="Hiragino Sans"/>
+              </a:defRPr>
+            </a:pPr>
+            <a:r>
+              <a:t>日常業務の一部を、Claude Codeに任せてみてください</a:t>
+            </a:r>
+          </a:p>
+        </p:txBody>
+      </p:sp>
+      <p:sp>
+        <p:nvSpPr>
           <p:cNvPr id="16" name="TextBox 15"/>
-          <p:cNvSpPr txBox="1"/>
-          <p:nvPr/>
-        </p:nvSpPr>
-        <p:spPr>
-          <a:xfrm>
-            <a:off x="1188720" y="6053328"/>
-            <a:ext cx="9601200" cy="457200"/>
-          </a:xfrm>
-          <a:prstGeom prst="rect">
-            <a:avLst/>
-          </a:prstGeom>
-          <a:noFill/>
-        </p:spPr>
-        <p:txBody>
-          <a:bodyPr wrap="square">
-            <a:spAutoFit/>
-          </a:bodyPr>
-          <a:lstStyle/>
-          <a:p>
-            <a:pPr algn="l">
-              <a:lnSpc>
-                <a:spcPts val="2400"/>
-              </a:lnSpc>
-              <a:spcAft>
-                <a:spcPts val="0"/>
-              </a:spcAft>
-              <a:defRPr sz="1600" b="0">
-                <a:solidFill>
-                  <a:srgbClr val="6A9BCC"/>
-                </a:solidFill>
-                <a:latin typeface="SF Mono"/>
-              </a:defRPr>
-            </a:pPr>
-            <a:r>
-              <a:t>「この関数の参照箇所を全部列挙して」</a:t>
-            </a:r>
-          </a:p>
-        </p:txBody>
-      </p:sp>
-      <p:sp>
-        <p:nvSpPr>
-          <p:cNvPr id="17" name="TextBox 16"/>
           <p:cNvSpPr txBox="1"/>
           <p:nvPr/>
         </p:nvSpPr>
@@ -10148,676 +9934,7 @@
               </a:defRPr>
             </a:pPr>
             <a:r>
-              <a:t>15 / 16</a:t>
-            </a:r>
-          </a:p>
-        </p:txBody>
-      </p:sp>
-    </p:spTree>
-  </p:cSld>
-  <p:clrMapOvr>
-    <a:masterClrMapping/>
-  </p:clrMapOvr>
-</p:sld>
-</file>
-
-<file path=ppt/slides/slide16.xml><?xml version="1.0" encoding="utf-8"?>
-<p:sld xmlns:a="http://schemas.openxmlformats.org/drawingml/2006/main" xmlns:p="http://schemas.openxmlformats.org/presentationml/2006/main" xmlns:r="http://schemas.openxmlformats.org/officeDocument/2006/relationships">
-  <p:cSld>
-    <p:bg>
-      <p:bgPr>
-        <a:solidFill>
-          <a:srgbClr val="1B1918"/>
-        </a:solidFill>
-        <a:effectLst/>
-      </p:bgPr>
-    </p:bg>
-    <p:spTree>
-      <p:nvGrpSpPr>
-        <p:cNvPr id="1" name=""/>
-        <p:cNvGrpSpPr/>
-        <p:nvPr/>
-      </p:nvGrpSpPr>
-      <p:grpSpPr/>
-      <p:sp>
-        <p:nvSpPr>
-          <p:cNvPr id="2" name="TextBox 1"/>
-          <p:cNvSpPr txBox="1"/>
-          <p:nvPr/>
-        </p:nvSpPr>
-        <p:spPr>
-          <a:xfrm>
-            <a:off x="731520" y="457200"/>
-            <a:ext cx="10058400" cy="731520"/>
-          </a:xfrm>
-          <a:prstGeom prst="rect">
-            <a:avLst/>
-          </a:prstGeom>
-          <a:noFill/>
-        </p:spPr>
-        <p:txBody>
-          <a:bodyPr wrap="square">
-            <a:spAutoFit/>
-          </a:bodyPr>
-          <a:lstStyle/>
-          <a:p>
-            <a:pPr algn="l">
-              <a:lnSpc>
-                <a:spcPts val="5400"/>
-              </a:lnSpc>
-              <a:spcAft>
-                <a:spcPts val="0"/>
-              </a:spcAft>
-              <a:defRPr sz="3600" b="1">
-                <a:solidFill>
-                  <a:srgbClr val="FAF9F5"/>
-                </a:solidFill>
-                <a:latin typeface="Hiragino Sans"/>
-              </a:defRPr>
-            </a:pPr>
-            <a:r>
-              <a:t>まとめ / 次回予告</a:t>
-            </a:r>
-          </a:p>
-        </p:txBody>
-      </p:sp>
-      <p:sp>
-        <p:nvSpPr>
-          <p:cNvPr id="3" name="Rounded Rectangle 2"/>
-          <p:cNvSpPr/>
-          <p:nvPr/>
-        </p:nvSpPr>
-        <p:spPr>
-          <a:xfrm>
-            <a:off x="731520" y="1463040"/>
-            <a:ext cx="10515600" cy="1097280"/>
-          </a:xfrm>
-          <a:prstGeom prst="roundRect">
-            <a:avLst>
-              <a:gd name="adj" fmla="val 2000"/>
-            </a:avLst>
-          </a:prstGeom>
-          <a:solidFill>
-            <a:srgbClr val="252220"/>
-          </a:solidFill>
-          <a:ln>
-            <a:noFill/>
-          </a:ln>
-        </p:spPr>
-        <p:style>
-          <a:lnRef idx="1">
-            <a:schemeClr val="accent1"/>
-          </a:lnRef>
-          <a:fillRef idx="3">
-            <a:schemeClr val="accent1"/>
-          </a:fillRef>
-          <a:effectRef idx="2">
-            <a:schemeClr val="accent1"/>
-          </a:effectRef>
-          <a:fontRef idx="minor">
-            <a:schemeClr val="lt1"/>
-          </a:fontRef>
-        </p:style>
-        <p:txBody>
-          <a:bodyPr rtlCol="0" anchor="ctr"/>
-          <a:lstStyle/>
-          <a:p>
-            <a:pPr algn="ctr"/>
-          </a:p>
-        </p:txBody>
-      </p:sp>
-      <p:sp>
-        <p:nvSpPr>
-          <p:cNvPr id="4" name="TextBox 3"/>
-          <p:cNvSpPr txBox="1"/>
-          <p:nvPr/>
-        </p:nvSpPr>
-        <p:spPr>
-          <a:xfrm>
-            <a:off x="1097280" y="1554480"/>
-            <a:ext cx="457200" cy="457200"/>
-          </a:xfrm>
-          <a:prstGeom prst="rect">
-            <a:avLst/>
-          </a:prstGeom>
-          <a:noFill/>
-        </p:spPr>
-        <p:txBody>
-          <a:bodyPr wrap="square">
-            <a:spAutoFit/>
-          </a:bodyPr>
-          <a:lstStyle/>
-          <a:p>
-            <a:pPr algn="l">
-              <a:lnSpc>
-                <a:spcPts val="4200"/>
-              </a:lnSpc>
-              <a:spcAft>
-                <a:spcPts val="0"/>
-              </a:spcAft>
-              <a:defRPr sz="2800" b="1">
-                <a:solidFill>
-                  <a:srgbClr val="D97757"/>
-                </a:solidFill>
-                <a:latin typeface="Helvetica Neue"/>
-              </a:defRPr>
-            </a:pPr>
-            <a:r>
-              <a:t>1</a:t>
-            </a:r>
-          </a:p>
-        </p:txBody>
-      </p:sp>
-      <p:sp>
-        <p:nvSpPr>
-          <p:cNvPr id="5" name="TextBox 4"/>
-          <p:cNvSpPr txBox="1"/>
-          <p:nvPr/>
-        </p:nvSpPr>
-        <p:spPr>
-          <a:xfrm>
-            <a:off x="1828800" y="1554480"/>
-            <a:ext cx="8686800" cy="457200"/>
-          </a:xfrm>
-          <a:prstGeom prst="rect">
-            <a:avLst/>
-          </a:prstGeom>
-          <a:noFill/>
-        </p:spPr>
-        <p:txBody>
-          <a:bodyPr wrap="square">
-            <a:spAutoFit/>
-          </a:bodyPr>
-          <a:lstStyle/>
-          <a:p>
-            <a:pPr algn="l">
-              <a:lnSpc>
-                <a:spcPts val="3000"/>
-              </a:lnSpc>
-              <a:spcAft>
-                <a:spcPts val="0"/>
-              </a:spcAft>
-              <a:defRPr sz="2000" b="1">
-                <a:solidFill>
-                  <a:srgbClr val="FAF9F5"/>
-                </a:solidFill>
-                <a:latin typeface="Hiragino Sans"/>
-              </a:defRPr>
-            </a:pPr>
-            <a:r>
-              <a:t>Claude Code はコード補完ではなく</a:t>
-            </a:r>
-            <a:br/>
-            <a:r>
-              <a:t>「作業を進める」ツール</a:t>
-            </a:r>
-          </a:p>
-        </p:txBody>
-      </p:sp>
-      <p:sp>
-        <p:nvSpPr>
-          <p:cNvPr id="6" name="TextBox 5"/>
-          <p:cNvSpPr txBox="1"/>
-          <p:nvPr/>
-        </p:nvSpPr>
-        <p:spPr>
-          <a:xfrm>
-            <a:off x="1828800" y="2057400"/>
-            <a:ext cx="8686800" cy="457200"/>
-          </a:xfrm>
-          <a:prstGeom prst="rect">
-            <a:avLst/>
-          </a:prstGeom>
-          <a:noFill/>
-        </p:spPr>
-        <p:txBody>
-          <a:bodyPr wrap="square">
-            <a:spAutoFit/>
-          </a:bodyPr>
-          <a:lstStyle/>
-          <a:p>
-            <a:pPr algn="l">
-              <a:lnSpc>
-                <a:spcPts val="2250"/>
-              </a:lnSpc>
-              <a:spcAft>
-                <a:spcPts val="0"/>
-              </a:spcAft>
-              <a:defRPr sz="1500" b="0">
-                <a:solidFill>
-                  <a:srgbClr val="C5C3BB"/>
-                </a:solidFill>
-                <a:latin typeface="Hiragino Sans"/>
-              </a:defRPr>
-            </a:pPr>
-            <a:r>
-              <a:t>調査→計画→実装→検証→取りまとめの一連フロー</a:t>
-            </a:r>
-          </a:p>
-        </p:txBody>
-      </p:sp>
-      <p:sp>
-        <p:nvSpPr>
-          <p:cNvPr id="7" name="Rounded Rectangle 6"/>
-          <p:cNvSpPr/>
-          <p:nvPr/>
-        </p:nvSpPr>
-        <p:spPr>
-          <a:xfrm>
-            <a:off x="731520" y="2743200"/>
-            <a:ext cx="10515600" cy="1097280"/>
-          </a:xfrm>
-          <a:prstGeom prst="roundRect">
-            <a:avLst>
-              <a:gd name="adj" fmla="val 2000"/>
-            </a:avLst>
-          </a:prstGeom>
-          <a:solidFill>
-            <a:srgbClr val="252220"/>
-          </a:solidFill>
-          <a:ln>
-            <a:noFill/>
-          </a:ln>
-        </p:spPr>
-        <p:style>
-          <a:lnRef idx="1">
-            <a:schemeClr val="accent1"/>
-          </a:lnRef>
-          <a:fillRef idx="3">
-            <a:schemeClr val="accent1"/>
-          </a:fillRef>
-          <a:effectRef idx="2">
-            <a:schemeClr val="accent1"/>
-          </a:effectRef>
-          <a:fontRef idx="minor">
-            <a:schemeClr val="lt1"/>
-          </a:fontRef>
-        </p:style>
-        <p:txBody>
-          <a:bodyPr rtlCol="0" anchor="ctr"/>
-          <a:lstStyle/>
-          <a:p>
-            <a:pPr algn="ctr"/>
-          </a:p>
-        </p:txBody>
-      </p:sp>
-      <p:sp>
-        <p:nvSpPr>
-          <p:cNvPr id="8" name="TextBox 7"/>
-          <p:cNvSpPr txBox="1"/>
-          <p:nvPr/>
-        </p:nvSpPr>
-        <p:spPr>
-          <a:xfrm>
-            <a:off x="1097280" y="2834640"/>
-            <a:ext cx="457200" cy="457200"/>
-          </a:xfrm>
-          <a:prstGeom prst="rect">
-            <a:avLst/>
-          </a:prstGeom>
-          <a:noFill/>
-        </p:spPr>
-        <p:txBody>
-          <a:bodyPr wrap="square">
-            <a:spAutoFit/>
-          </a:bodyPr>
-          <a:lstStyle/>
-          <a:p>
-            <a:pPr algn="l">
-              <a:lnSpc>
-                <a:spcPts val="4200"/>
-              </a:lnSpc>
-              <a:spcAft>
-                <a:spcPts val="0"/>
-              </a:spcAft>
-              <a:defRPr sz="2800" b="1">
-                <a:solidFill>
-                  <a:srgbClr val="D97757"/>
-                </a:solidFill>
-                <a:latin typeface="Helvetica Neue"/>
-              </a:defRPr>
-            </a:pPr>
-            <a:r>
-              <a:t>2</a:t>
-            </a:r>
-          </a:p>
-        </p:txBody>
-      </p:sp>
-      <p:sp>
-        <p:nvSpPr>
-          <p:cNvPr id="9" name="TextBox 8"/>
-          <p:cNvSpPr txBox="1"/>
-          <p:nvPr/>
-        </p:nvSpPr>
-        <p:spPr>
-          <a:xfrm>
-            <a:off x="1828800" y="2834640"/>
-            <a:ext cx="8686800" cy="457200"/>
-          </a:xfrm>
-          <a:prstGeom prst="rect">
-            <a:avLst/>
-          </a:prstGeom>
-          <a:noFill/>
-        </p:spPr>
-        <p:txBody>
-          <a:bodyPr wrap="square">
-            <a:spAutoFit/>
-          </a:bodyPr>
-          <a:lstStyle/>
-          <a:p>
-            <a:pPr algn="l">
-              <a:lnSpc>
-                <a:spcPts val="3000"/>
-              </a:lnSpc>
-              <a:spcAft>
-                <a:spcPts val="0"/>
-              </a:spcAft>
-              <a:defRPr sz="2000" b="1">
-                <a:solidFill>
-                  <a:srgbClr val="FAF9F5"/>
-                </a:solidFill>
-                <a:latin typeface="Hiragino Sans"/>
-              </a:defRPr>
-            </a:pPr>
-            <a:r>
-              <a:t>伝え方で結果が変わる</a:t>
-            </a:r>
-          </a:p>
-        </p:txBody>
-      </p:sp>
-      <p:sp>
-        <p:nvSpPr>
-          <p:cNvPr id="10" name="TextBox 9"/>
-          <p:cNvSpPr txBox="1"/>
-          <p:nvPr/>
-        </p:nvSpPr>
-        <p:spPr>
-          <a:xfrm>
-            <a:off x="1828800" y="3337560"/>
-            <a:ext cx="8686800" cy="457200"/>
-          </a:xfrm>
-          <a:prstGeom prst="rect">
-            <a:avLst/>
-          </a:prstGeom>
-          <a:noFill/>
-        </p:spPr>
-        <p:txBody>
-          <a:bodyPr wrap="square">
-            <a:spAutoFit/>
-          </a:bodyPr>
-          <a:lstStyle/>
-          <a:p>
-            <a:pPr algn="l">
-              <a:lnSpc>
-                <a:spcPts val="2250"/>
-              </a:lnSpc>
-              <a:spcAft>
-                <a:spcPts val="0"/>
-              </a:spcAft>
-              <a:defRPr sz="1500" b="0">
-                <a:solidFill>
-                  <a:srgbClr val="C5C3BB"/>
-                </a:solidFill>
-                <a:latin typeface="Hiragino Sans"/>
-              </a:defRPr>
-            </a:pPr>
-            <a:r>
-              <a:t>目標・背景・現状・期待出力を伝え、たたき台→改善ループで進める</a:t>
-            </a:r>
-          </a:p>
-        </p:txBody>
-      </p:sp>
-      <p:sp>
-        <p:nvSpPr>
-          <p:cNvPr id="11" name="Rounded Rectangle 10"/>
-          <p:cNvSpPr/>
-          <p:nvPr/>
-        </p:nvSpPr>
-        <p:spPr>
-          <a:xfrm>
-            <a:off x="731520" y="4023360"/>
-            <a:ext cx="10515600" cy="1097280"/>
-          </a:xfrm>
-          <a:prstGeom prst="roundRect">
-            <a:avLst>
-              <a:gd name="adj" fmla="val 2000"/>
-            </a:avLst>
-          </a:prstGeom>
-          <a:solidFill>
-            <a:srgbClr val="252220"/>
-          </a:solidFill>
-          <a:ln>
-            <a:noFill/>
-          </a:ln>
-        </p:spPr>
-        <p:style>
-          <a:lnRef idx="1">
-            <a:schemeClr val="accent1"/>
-          </a:lnRef>
-          <a:fillRef idx="3">
-            <a:schemeClr val="accent1"/>
-          </a:fillRef>
-          <a:effectRef idx="2">
-            <a:schemeClr val="accent1"/>
-          </a:effectRef>
-          <a:fontRef idx="minor">
-            <a:schemeClr val="lt1"/>
-          </a:fontRef>
-        </p:style>
-        <p:txBody>
-          <a:bodyPr rtlCol="0" anchor="ctr"/>
-          <a:lstStyle/>
-          <a:p>
-            <a:pPr algn="ctr"/>
-          </a:p>
-        </p:txBody>
-      </p:sp>
-      <p:sp>
-        <p:nvSpPr>
-          <p:cNvPr id="12" name="TextBox 11"/>
-          <p:cNvSpPr txBox="1"/>
-          <p:nvPr/>
-        </p:nvSpPr>
-        <p:spPr>
-          <a:xfrm>
-            <a:off x="1097280" y="4114800"/>
-            <a:ext cx="457200" cy="457200"/>
-          </a:xfrm>
-          <a:prstGeom prst="rect">
-            <a:avLst/>
-          </a:prstGeom>
-          <a:noFill/>
-        </p:spPr>
-        <p:txBody>
-          <a:bodyPr wrap="square">
-            <a:spAutoFit/>
-          </a:bodyPr>
-          <a:lstStyle/>
-          <a:p>
-            <a:pPr algn="l">
-              <a:lnSpc>
-                <a:spcPts val="4200"/>
-              </a:lnSpc>
-              <a:spcAft>
-                <a:spcPts val="0"/>
-              </a:spcAft>
-              <a:defRPr sz="2800" b="1">
-                <a:solidFill>
-                  <a:srgbClr val="D97757"/>
-                </a:solidFill>
-                <a:latin typeface="Helvetica Neue"/>
-              </a:defRPr>
-            </a:pPr>
-            <a:r>
-              <a:t>3</a:t>
-            </a:r>
-          </a:p>
-        </p:txBody>
-      </p:sp>
-      <p:sp>
-        <p:nvSpPr>
-          <p:cNvPr id="13" name="TextBox 12"/>
-          <p:cNvSpPr txBox="1"/>
-          <p:nvPr/>
-        </p:nvSpPr>
-        <p:spPr>
-          <a:xfrm>
-            <a:off x="1828800" y="4114800"/>
-            <a:ext cx="8686800" cy="457200"/>
-          </a:xfrm>
-          <a:prstGeom prst="rect">
-            <a:avLst/>
-          </a:prstGeom>
-          <a:noFill/>
-        </p:spPr>
-        <p:txBody>
-          <a:bodyPr wrap="square">
-            <a:spAutoFit/>
-          </a:bodyPr>
-          <a:lstStyle/>
-          <a:p>
-            <a:pPr algn="l">
-              <a:lnSpc>
-                <a:spcPts val="3000"/>
-              </a:lnSpc>
-              <a:spcAft>
-                <a:spcPts val="0"/>
-              </a:spcAft>
-              <a:defRPr sz="2000" b="1">
-                <a:solidFill>
-                  <a:srgbClr val="FAF9F5"/>
-                </a:solidFill>
-                <a:latin typeface="Hiragino Sans"/>
-              </a:defRPr>
-            </a:pPr>
-            <a:r>
-              <a:t>いきなりコードを書かせない</a:t>
-            </a:r>
-          </a:p>
-        </p:txBody>
-      </p:sp>
-      <p:sp>
-        <p:nvSpPr>
-          <p:cNvPr id="14" name="TextBox 13"/>
-          <p:cNvSpPr txBox="1"/>
-          <p:nvPr/>
-        </p:nvSpPr>
-        <p:spPr>
-          <a:xfrm>
-            <a:off x="1828800" y="4617720"/>
-            <a:ext cx="8686800" cy="457200"/>
-          </a:xfrm>
-          <a:prstGeom prst="rect">
-            <a:avLst/>
-          </a:prstGeom>
-          <a:noFill/>
-        </p:spPr>
-        <p:txBody>
-          <a:bodyPr wrap="square">
-            <a:spAutoFit/>
-          </a:bodyPr>
-          <a:lstStyle/>
-          <a:p>
-            <a:pPr algn="l">
-              <a:lnSpc>
-                <a:spcPts val="2250"/>
-              </a:lnSpc>
-              <a:spcAft>
-                <a:spcPts val="0"/>
-              </a:spcAft>
-              <a:defRPr sz="1500" b="0">
-                <a:solidFill>
-                  <a:srgbClr val="C5C3BB"/>
-                </a:solidFill>
-                <a:latin typeface="Hiragino Sans"/>
-              </a:defRPr>
-            </a:pPr>
-            <a:r>
-              <a:t>Plan Modeで方針を固めてから実装に入る</a:t>
-            </a:r>
-          </a:p>
-        </p:txBody>
-      </p:sp>
-      <p:sp>
-        <p:nvSpPr>
-          <p:cNvPr id="15" name="TextBox 14"/>
-          <p:cNvSpPr txBox="1"/>
-          <p:nvPr/>
-        </p:nvSpPr>
-        <p:spPr>
-          <a:xfrm>
-            <a:off x="731520" y="5486400"/>
-            <a:ext cx="10515600" cy="457200"/>
-          </a:xfrm>
-          <a:prstGeom prst="rect">
-            <a:avLst/>
-          </a:prstGeom>
-          <a:noFill/>
-        </p:spPr>
-        <p:txBody>
-          <a:bodyPr wrap="square">
-            <a:spAutoFit/>
-          </a:bodyPr>
-          <a:lstStyle/>
-          <a:p>
-            <a:pPr algn="l">
-              <a:lnSpc>
-                <a:spcPts val="2700"/>
-              </a:lnSpc>
-              <a:spcAft>
-                <a:spcPts val="0"/>
-              </a:spcAft>
-              <a:defRPr sz="1800" b="1">
-                <a:solidFill>
-                  <a:srgbClr val="D97757"/>
-                </a:solidFill>
-                <a:latin typeface="Hiragino Sans"/>
-              </a:defRPr>
-            </a:pPr>
-            <a:r>
-              <a:t>面倒な調査タスクを1件、Claude Codeに任せてみてください</a:t>
-            </a:r>
-          </a:p>
-        </p:txBody>
-      </p:sp>
-      <p:sp>
-        <p:nvSpPr>
-          <p:cNvPr id="16" name="TextBox 15"/>
-          <p:cNvSpPr txBox="1"/>
-          <p:nvPr/>
-        </p:nvSpPr>
-        <p:spPr>
-          <a:xfrm>
-            <a:off x="11277295" y="6400800"/>
-            <a:ext cx="731520" cy="274320"/>
-          </a:xfrm>
-          <a:prstGeom prst="rect">
-            <a:avLst/>
-          </a:prstGeom>
-          <a:noFill/>
-        </p:spPr>
-        <p:txBody>
-          <a:bodyPr wrap="square">
-            <a:spAutoFit/>
-          </a:bodyPr>
-          <a:lstStyle/>
-          <a:p>
-            <a:pPr algn="r">
-              <a:lnSpc>
-                <a:spcPts val="1500"/>
-              </a:lnSpc>
-              <a:spcAft>
-                <a:spcPts val="0"/>
-              </a:spcAft>
-              <a:defRPr sz="1000" b="0">
-                <a:solidFill>
-                  <a:srgbClr val="B0AEA5"/>
-                </a:solidFill>
-                <a:latin typeface="Helvetica Neue"/>
-              </a:defRPr>
-            </a:pPr>
-            <a:r>
-              <a:t>16 / 16</a:t>
+              <a:t>15 / 15</a:t>
             </a:r>
           </a:p>
         </p:txBody>
@@ -11185,7 +10302,11 @@
               </a:defRPr>
             </a:pPr>
             <a:r>
-              <a:t>カスタマイズする</a:t>
+              <a:t>プロジェクトに合わせた</a:t>
+            </a:r>
+            <a:br/>
+            <a:r>
+              <a:t>カスタマイズ</a:t>
             </a:r>
           </a:p>
         </p:txBody>
@@ -11227,7 +10348,7 @@
               </a:defRPr>
             </a:pPr>
             <a:r>
-              <a:t>コンテキスト管理 / Skills / サブエージェント</a:t>
+              <a:t>CLAUDE.md / Skills / Hooks</a:t>
             </a:r>
           </a:p>
         </p:txBody>
@@ -11356,7 +10477,7 @@
               </a:defRPr>
             </a:pPr>
             <a:r>
-              <a:t>スケールさせる</a:t>
+              <a:t>外部連携と並列開発</a:t>
             </a:r>
           </a:p>
         </p:txBody>
@@ -11398,7 +10519,7 @@
               </a:defRPr>
             </a:pPr>
             <a:r>
-              <a:t>Hooks / MCP / worktree / /insights</a:t>
+              <a:t>MCP / worktree / サブエージェント</a:t>
             </a:r>
           </a:p>
         </p:txBody>
@@ -11440,7 +10561,7 @@
               </a:defRPr>
             </a:pPr>
             <a:r>
-              <a:t>今日のゴール: 面倒な調査タスクを1件、Claude Codeに任せられるようになる</a:t>
+              <a:t>今日のゴール: 日常業務の一部をClaude Codeに任せられるようになる</a:t>
             </a:r>
           </a:p>
         </p:txBody>
@@ -11482,7 +10603,7 @@
               </a:defRPr>
             </a:pPr>
             <a:r>
-              <a:t>2 / 16</a:t>
+              <a:t>2 / 15</a:t>
             </a:r>
           </a:p>
         </p:txBody>
@@ -12034,7 +11155,7 @@
               </a:defRPr>
             </a:pPr>
             <a:r>
-              <a:t>3 / 16</a:t>
+              <a:t>3 / 15</a:t>
             </a:r>
           </a:p>
         </p:txBody>
@@ -12732,7 +11853,7 @@
               </a:defRPr>
             </a:pPr>
             <a:r>
-              <a:t>4 / 16</a:t>
+              <a:t>4 / 15</a:t>
             </a:r>
           </a:p>
         </p:txBody>
@@ -13439,7 +12560,7 @@
               </a:defRPr>
             </a:pPr>
             <a:r>
-              <a:t>5 / 16</a:t>
+              <a:t>5 / 15</a:t>
             </a:r>
           </a:p>
         </p:txBody>
@@ -15481,7 +14602,7 @@
               </a:defRPr>
             </a:pPr>
             <a:r>
-              <a:t>6 / 16</a:t>
+              <a:t>6 / 15</a:t>
             </a:r>
           </a:p>
         </p:txBody>
@@ -16444,7 +15565,7 @@
               </a:defRPr>
             </a:pPr>
             <a:r>
-              <a:t>7 / 16</a:t>
+              <a:t>7 / 15</a:t>
             </a:r>
           </a:p>
         </p:txBody>
@@ -16642,7 +15763,7 @@
               </a:defRPr>
             </a:pPr>
             <a:r>
-              <a:t>8 / 16</a:t>
+              <a:t>8 / 15</a:t>
             </a:r>
           </a:p>
         </p:txBody>
@@ -17266,7 +16387,7 @@
               </a:defRPr>
             </a:pPr>
             <a:r>
-              <a:t>9 / 16</a:t>
+              <a:t>9 / 15</a:t>
             </a:r>
           </a:p>
         </p:txBody>

--- a/slides/session1.pptx
+++ b/slides/session1.pptx
@@ -1583,6 +1583,11 @@
           <a:p>
             <a:r>
               <a:t>どのツールを使うかは指定不要。指示に応じてClaude Codeが自動で組み合わせる。</a:t>
+            </a:r>
+          </a:p>
+          <a:p>
+            <a:r>
+              <a:t>ちなみにスライド上ではgitを例にしているが、PerforceやSVNなど、コマンドラインから操作できるツールなら同じように使える。普段の開発環境がそのまま活きる。</a:t>
             </a:r>
           </a:p>
         </p:txBody>
@@ -13412,7 +13417,7 @@
               </a:defRPr>
             </a:pPr>
             <a:r>
-              <a:t>python generate_slides.py    # スライド生成</a:t>
+              <a:t>marp slides.md --pptx        # スライド生成</a:t>
             </a:r>
           </a:p>
           <a:p>

--- a/slides/session1.pptx
+++ b/slides/session1.pptx
@@ -517,17 +517,17 @@
           <a:lstStyle/>
           <a:p>
             <a:r>
-              <a:t>オープニング。自己紹介は軽く。</a:t>
-            </a:r>
-          </a:p>
-          <a:p>
-            <a:r>
-              <a:t>Claude Codeの社内勉強会、全3回の第1回。</a:t>
-            </a:r>
-          </a:p>
-          <a:p>
-            <a:r>
-              <a:t>今日は「理解する」がテーマ。基本と対話の心得を扱う。</a:t>
+              <a:t>では始めます。自己紹介は軽く済ませて。</a:t>
+            </a:r>
+          </a:p>
+          <a:p>
+            <a:r>
+              <a:t>Claude Codeの社内勉強会、全3回の第1回です。</a:t>
+            </a:r>
+          </a:p>
+          <a:p>
+            <a:r>
+              <a:t>今日のテーマは「理解する」。基本と対話の心得を扱います。</a:t>
             </a:r>
           </a:p>
         </p:txBody>
@@ -597,22 +597,22 @@
           <a:lstStyle/>
           <a:p>
             <a:r>
-              <a:t>チャットボットとエージェントは根本的に違う。</a:t>
-            </a:r>
-          </a:p>
-          <a:p>
-            <a:r>
-              <a:t>チャットボットは電話サポートに近い。こちらが1ステップずつ指示して、その都度答えが返ってくる。</a:t>
-            </a:r>
-          </a:p>
-          <a:p>
-            <a:r>
-              <a:t>エージェントは仕事を任せた同僚に近い。ゴールと背景を伝えたら、やり方は本人が判断する。</a:t>
-            </a:r>
-          </a:p>
-          <a:p>
-            <a:r>
-              <a:t>同僚に仕事を任せるとき、1行ずつ「次はこのファイルを開いて、次はこの関数を見て」と指示しない。</a:t>
+              <a:t>チャットボットとエージェントは根本的に違います。</a:t>
+            </a:r>
+          </a:p>
+          <a:p>
+            <a:r>
+              <a:t>チャットボットは電話サポートに近い。こちらが1ステップずつ指示して、その都度答えが返ってきます。</a:t>
+            </a:r>
+          </a:p>
+          <a:p>
+            <a:r>
+              <a:t>エージェントは仕事を任せた同僚に近い。ゴールと背景を伝えたら、やり方は本人が判断します。</a:t>
+            </a:r>
+          </a:p>
+          <a:p>
+            <a:r>
+              <a:t>同僚に仕事を任せるとき、1行ずつ「次はこのファイルを開いて、次はこの関数を見て」とは指示しませんよね。</a:t>
             </a:r>
           </a:p>
           <a:p>
@@ -622,7 +622,7 @@
           </a:p>
           <a:p>
             <a:r>
-              <a:t>この「委任」の感覚が、Claude Codeではとても重要。</a:t>
+              <a:t>この「委任」の感覚が、Claude Codeではとても大事です。</a:t>
             </a:r>
           </a:p>
         </p:txBody>
@@ -692,32 +692,32 @@
           <a:lstStyle/>
           <a:p>
             <a:r>
-              <a:t>指示の4要素：目標、背景・制約、現状、期待する出力。</a:t>
-            </a:r>
-          </a:p>
-          <a:p>
-            <a:r>
-              <a:t>全部揃っている必要はない。しかし、目標は必須。</a:t>
-            </a:r>
-          </a:p>
-          <a:p>
-            <a:r>
-              <a:t>悪い例：「この機能を改善して」。何を？どう？がまったく不明。</a:t>
-            </a:r>
-          </a:p>
-          <a:p>
-            <a:r>
-              <a:t>良い例：Slide 08と同じCIのシナリオ。現状・目標・制約・出力形式が明確。</a:t>
-            </a:r>
-          </a:p>
-          <a:p>
-            <a:r>
-              <a:t>「コードの変更はまだしないこと」が地味に大事。やってほしくないことを書くと暴走を防げる。</a:t>
-            </a:r>
-          </a:p>
-          <a:p>
-            <a:r>
-              <a:t>ポイント：指示が具体的であるほど、結果も具体的になる。</a:t>
+              <a:t>指示の4要素。目標、背景・制約、現状、期待する出力です。</a:t>
+            </a:r>
+          </a:p>
+          <a:p>
+            <a:r>
+              <a:t>全部揃っている必要はありません。ただし、目標は必須です。</a:t>
+            </a:r>
+          </a:p>
+          <a:p>
+            <a:r>
+              <a:t>悪い例を見てください。「この機能を改善して」。何を？どう？がまったくわかりません。</a:t>
+            </a:r>
+          </a:p>
+          <a:p>
+            <a:r>
+              <a:t>良い例は、さっきと同じCIのシナリオです。現状・目標・制約・出力形式が明確になっています。</a:t>
+            </a:r>
+          </a:p>
+          <a:p>
+            <a:r>
+              <a:t>「コードの変更はまだしないこと」が地味に大事で、やってほしくないことを書くと暴走を防げます。</a:t>
+            </a:r>
+          </a:p>
+          <a:p>
+            <a:r>
+              <a:t>指示が具体的であるほど、結果も具体的になります。</a:t>
             </a:r>
           </a:p>
         </p:txBody>
@@ -787,32 +787,32 @@
           <a:lstStyle/>
           <a:p>
             <a:r>
-              <a:t>最初から完璧を求めない。これが一番大事なマインドセット。</a:t>
-            </a:r>
-          </a:p>
-          <a:p>
-            <a:r>
-              <a:t>まず出力を見て、良い点と悪い点を具体的にフィードバックし、改善版を出してもらう。</a:t>
-            </a:r>
-          </a:p>
-          <a:p>
-            <a:r>
-              <a:t>テクニック3つ。</a:t>
-            </a:r>
-          </a:p>
-          <a:p>
-            <a:r>
-              <a:t>1つ目：「なぜそうしたのか」と聞く。自分の指示に問題があったケースも多い。</a:t>
-            </a:r>
-          </a:p>
-          <a:p>
-            <a:r>
-              <a:t>2つ目：命令ではなく提案。「Xを考えているが、どう思うか」と聞くと、自分では気づかなかった選択肢が出てくる。</a:t>
-            </a:r>
-          </a:p>
-          <a:p>
-            <a:r>
-              <a:t>3つ目：自分でコードを直接編集したら、必ずClaudeに伝える。伝えないと古い状態を前提に動いてしまう。</a:t>
+              <a:t>最初から完璧を求めない。これが一番大事なマインドセットです。</a:t>
+            </a:r>
+          </a:p>
+          <a:p>
+            <a:r>
+              <a:t>まず出力を見て、良い点と悪い点を具体的にフィードバックして、改善版を出してもらいます。</a:t>
+            </a:r>
+          </a:p>
+          <a:p>
+            <a:r>
+              <a:t>テクニックを3つ紹介します。</a:t>
+            </a:r>
+          </a:p>
+          <a:p>
+            <a:r>
+              <a:t>1つ目：「なぜそうしたのか」と聞く。自分の指示に問題があったケースも多いです。</a:t>
+            </a:r>
+          </a:p>
+          <a:p>
+            <a:r>
+              <a:t>2つ目：命令ではなく提案で伝える。「Xを考えているけど、どう思う？」と聞くと、自分では気づかなかった選択肢が出てきます。</a:t>
+            </a:r>
+          </a:p>
+          <a:p>
+            <a:r>
+              <a:t>3つ目：自分でコードを直接編集したら、必ずClaudeに伝えてください。伝えないと古い状態を前提に動いてしまいます。</a:t>
             </a:r>
           </a:p>
         </p:txBody>
@@ -882,27 +882,27 @@
           <a:lstStyle/>
           <a:p>
             <a:r>
-              <a:t>Part 3。Plan Modeの話。</a:t>
-            </a:r>
-          </a:p>
-          <a:p>
-            <a:r>
-              <a:t>「いきなりコードを書かせない」。これが合言葉。</a:t>
-            </a:r>
-          </a:p>
-          <a:p>
-            <a:r>
-              <a:t>ここまでのPART 1-2で「何ができるか」と「どう伝えるか」を見てきた。</a:t>
-            </a:r>
-          </a:p>
-          <a:p>
-            <a:r>
-              <a:t>PART 3は「どう進めるか」。ワークフローの話。</a:t>
-            </a:r>
-          </a:p>
-          <a:p>
-            <a:r>
-              <a:t>計画から始めることで手戻りを大幅に減らせる。</a:t>
+              <a:t>PART 3、Plan Modeの話に入ります。</a:t>
+            </a:r>
+          </a:p>
+          <a:p>
+            <a:r>
+              <a:t>「いきなりコードを書かせない」。これが合言葉です。</a:t>
+            </a:r>
+          </a:p>
+          <a:p>
+            <a:r>
+              <a:t>PART 1-2で「何ができるか」と「どう伝えるか」を見てきました。</a:t>
+            </a:r>
+          </a:p>
+          <a:p>
+            <a:r>
+              <a:t>PART 3は「どう進めるか」。ワークフローの話です。</a:t>
+            </a:r>
+          </a:p>
+          <a:p>
+            <a:r>
+              <a:t>計画から始めることで、手戻りを大幅に減らせます。</a:t>
             </a:r>
           </a:p>
         </p:txBody>
@@ -972,47 +972,32 @@
           <a:lstStyle/>
           <a:p>
             <a:r>
-              <a:t>Plan Modeは読み取り専用。ファイルを見たり検索はできるが、編集やコマンド実行はできない。</a:t>
-            </a:r>
-          </a:p>
-          <a:p>
-            <a:r>
-              <a:t>なぜ計画から始めるのか。Anthropicのベストプラクティスにも明記されている。</a:t>
-            </a:r>
-          </a:p>
-          <a:p>
-            <a:r>
-              <a:t>「ステップ1-2は重要。これがないと、Claudeは直接コーディングに飛び込む傾向がある」と。</a:t>
-            </a:r>
-          </a:p>
-          <a:p>
-            <a:r>
-              <a:t>計画なしで実装を始めると、前提の認識ズレで根本から作り直しになることがある。</a:t>
-            </a:r>
-          </a:p>
-          <a:p>
-            <a:r>
-              <a:t>Plan Modeなら壊すリスクはゼロ。安心して調査・計画できる。</a:t>
-            </a:r>
-          </a:p>
-          <a:p>
-            <a:r>
-              <a:t>操作はShift+Tabで切替。起動時に --permission-mode plan で指定もできる。</a:t>
-            </a:r>
-          </a:p>
-          <a:p>
-            <a:r>
-              <a:t>Extended Thinkingとは別の概念。</a:t>
-            </a:r>
-          </a:p>
-          <a:p>
-            <a:r>
-              <a:t>Extended Thinking = 深く考えさせる（think, think hard）。Plan Mode = ツール制限。</a:t>
-            </a:r>
-          </a:p>
-          <a:p>
-            <a:r>
-              <a:t>両者の併用も可能。</a:t>
+              <a:t>Plan Modeは読み取り専用のモードです。ファイルを見たり検索はできますが、編集やコマンド実行はできません。</a:t>
+            </a:r>
+          </a:p>
+          <a:p>
+            <a:r>
+              <a:t>なぜ計画から始めるのか。公式のベストプラクティスにも「計画ステップがないと、Claudeは直接コーディングに飛び込む傾向がある」と書かれています。</a:t>
+            </a:r>
+          </a:p>
+          <a:p>
+            <a:r>
+              <a:t>計画なしで実装を始めると、前提の認識ズレで根本から作り直しになることがあります。</a:t>
+            </a:r>
+          </a:p>
+          <a:p>
+            <a:r>
+              <a:t>Plan Modeなら壊すリスクはゼロです。安心して調査・計画できます。</a:t>
+            </a:r>
+          </a:p>
+          <a:p>
+            <a:r>
+              <a:t>操作はShift+Tabで切替。起動時に --permission-mode plan で指定もできます。</a:t>
+            </a:r>
+          </a:p>
+          <a:p>
+            <a:r>
+              <a:t>補足ですが、Extended Thinkingとは別の概念です。Extended Thinkingは深く考えさせる機能。Plan Modeはツールの制限。両方を同時に使うこともできます。</a:t>
             </a:r>
           </a:p>
         </p:txBody>
@@ -1082,42 +1067,37 @@
           <a:lstStyle/>
           <a:p>
             <a:r>
-              <a:t>4ステップのワークフロー。</a:t>
-            </a:r>
-          </a:p>
-          <a:p>
-            <a:r>
-              <a:t>Step 1：「計画を立てて。実装はまだしないで。」この一言が鍵。</a:t>
-            </a:r>
-          </a:p>
-          <a:p>
-            <a:r>
-              <a:t>このとき、受け入れ基準・禁止事項・想定外の扱いも伝えておくとブレない。</a:t>
-            </a:r>
-          </a:p>
-          <a:p>
-            <a:r>
-              <a:t>例えば「既存APIは壊さない」「計画にない問題を見つけたら報告して止まって」など。</a:t>
-            </a:r>
-          </a:p>
-          <a:p>
-            <a:r>
-              <a:t>Step 2：計画が返ってきたらレビューする。「後方互換性は？」「テストは？」と聞く。</a:t>
-            </a:r>
-          </a:p>
-          <a:p>
-            <a:r>
-              <a:t>Step 3：計画に納得したら「OK、実装して」。調査だけが目的ならここで完了。</a:t>
-            </a:r>
-          </a:p>
-          <a:p>
-            <a:r>
-              <a:t>Step 4：テストを実行し、結果を確認してコミット。</a:t>
-            </a:r>
-          </a:p>
-          <a:p>
-            <a:r>
-              <a:t>小さな修正でもこの流れを習慣にすると手戻りが劇的に減る。</a:t>
+              <a:t>4ステップのワークフローです。</a:t>
+            </a:r>
+          </a:p>
+          <a:p>
+            <a:r>
+              <a:t>Step 1：「計画を立てて。実装はまだしないで。」この一言が鍵です。</a:t>
+            </a:r>
+          </a:p>
+          <a:p>
+            <a:r>
+              <a:t>このとき、受け入れ基準や禁止事項も伝えておくとブレません。たとえば「既存APIは壊さない」「計画にない問題を見つけたら報告して止まって」など。</a:t>
+            </a:r>
+          </a:p>
+          <a:p>
+            <a:r>
+              <a:t>Step 2：計画が返ってきたらレビューします。「後方互換性は？」「テストは？」と聞いてみてください。</a:t>
+            </a:r>
+          </a:p>
+          <a:p>
+            <a:r>
+              <a:t>Step 3：計画に納得したら「OK、実装して」。調査だけが目的ならここで完了です。</a:t>
+            </a:r>
+          </a:p>
+          <a:p>
+            <a:r>
+              <a:t>Step 4：テストを実行して、結果を確認してコミット。</a:t>
+            </a:r>
+          </a:p>
+          <a:p>
+            <a:r>
+              <a:t>小さな修正でもこの流れを習慣にすると、手戻りが劇的に減ります。</a:t>
             </a:r>
           </a:p>
         </p:txBody>
@@ -1187,7 +1167,7 @@
           <a:lstStyle/>
           <a:p>
             <a:r>
-              <a:t>まとめ。今日の持ち帰りは3つ。</a:t>
+              <a:t>まとめです。今日の持ち帰りは3つ。</a:t>
             </a:r>
           </a:p>
           <a:p>
@@ -1197,7 +1177,7 @@
           </a:p>
           <a:p>
             <a:r>
-              <a:t>2つ目：伝え方で結果が変わる。目標・背景・現状・期待出力を伝える。</a:t>
+              <a:t>2つ目：伝え方で結果が変わる。目標・背景・現状・期待出力を意識してみてください。</a:t>
             </a:r>
           </a:p>
           <a:p>
@@ -1207,17 +1187,17 @@
           </a:p>
           <a:p>
             <a:r>
-              <a:t>日常業務の一部を、まず任せてみてほしい。</a:t>
-            </a:r>
-          </a:p>
-          <a:p>
-            <a:r>
-              <a:t>次回は「プロジェクトに合わせたカスタマイズ」。CLAUDE.md、Skills、Hooks。</a:t>
-            </a:r>
-          </a:p>
-          <a:p>
-            <a:r>
-              <a:t>質疑応答の時間へ。</a:t>
+              <a:t>日常業務の一部を、まず任せてみてください。</a:t>
+            </a:r>
+          </a:p>
+          <a:p>
+            <a:r>
+              <a:t>次回は「プロジェクトに合わせたカスタマイズ」。CLAUDE.md、Skills、Hooksを扱います。</a:t>
+            </a:r>
+          </a:p>
+          <a:p>
+            <a:r>
+              <a:t>では、質疑応答に移ります。</a:t>
             </a:r>
           </a:p>
         </p:txBody>
@@ -1287,32 +1267,27 @@
           <a:lstStyle/>
           <a:p>
             <a:r>
-              <a:t>3回シリーズの構成を説明。</a:t>
-            </a:r>
-          </a:p>
-          <a:p>
-            <a:r>
-              <a:t>第1回は「理解する」。Claude Codeとは何か、どう使うかの基本。</a:t>
-            </a:r>
-          </a:p>
-          <a:p>
-            <a:r>
-              <a:t>第2回は「プロジェクトに合わせたカスタマイズ」。CLAUDE.md、Skills、Hooks。</a:t>
-            </a:r>
-          </a:p>
-          <a:p>
-            <a:r>
-              <a:t>第3回は「外部連携と並列開発」。MCP、worktree、サブエージェント。</a:t>
-            </a:r>
-          </a:p>
-          <a:p>
-            <a:r>
-              <a:t>同じメンバーが3回とも参加する前提。</a:t>
-            </a:r>
-          </a:p>
-          <a:p>
-            <a:r>
-              <a:t>今日のゴールは「日常業務の一部を任せられる」ようになること。</a:t>
+              <a:t>3回シリーズの全体像です。</a:t>
+            </a:r>
+          </a:p>
+          <a:p>
+            <a:r>
+              <a:t>第1回、今日は「理解する」。Claude Codeの基本と使い方を押さえます。</a:t>
+            </a:r>
+          </a:p>
+          <a:p>
+            <a:r>
+              <a:t>第2回は「カスタマイズ」。プロジェクトに合わせた設定の話です。</a:t>
+            </a:r>
+          </a:p>
+          <a:p>
+            <a:r>
+              <a:t>第3回は「外部連携と並列開発」。MCP、worktree、サブエージェントを扱います。</a:t>
+            </a:r>
+          </a:p>
+          <a:p>
+            <a:r>
+              <a:t>今日のゴールは、日常業務の一部をClaude Codeに任せられるようになることです。</a:t>
             </a:r>
           </a:p>
         </p:txBody>
@@ -1382,27 +1357,27 @@
           <a:lstStyle/>
           <a:p>
             <a:r>
-              <a:t>調査・影響範囲の把握は時間が溶けやすい。ここが最初の狙いどころ。</a:t>
-            </a:r>
-          </a:p>
-          <a:p>
-            <a:r>
-              <a:t>いきなり実装を任せる必要はない。読み取り専用で始められるのでリスクも低い。</a:t>
-            </a:r>
-          </a:p>
-          <a:p>
-            <a:r>
-              <a:t>Before/Afterは体感の話。人やリポジトリによって差はある。</a:t>
-            </a:r>
-          </a:p>
-          <a:p>
-            <a:r>
-              <a:t>ただ「調査の時間が減る」のは共通して体感しやすいポイント。</a:t>
-            </a:r>
-          </a:p>
-          <a:p>
-            <a:r>
-              <a:t>この感覚を持ってもらった上で、もう少し詳しく見ていく。</a:t>
+              <a:t>調査や影響範囲の把握って、時間が溶けやすい作業です。ここが最初の狙いどころになります。</a:t>
+            </a:r>
+          </a:p>
+          <a:p>
+            <a:r>
+              <a:t>いきなり実装を任せる必要はありません。読み取り専用で始められるのでリスクも低い。</a:t>
+            </a:r>
+          </a:p>
+          <a:p>
+            <a:r>
+              <a:t>Before/Afterは体感の話なので、人やリポジトリによって差はあります。</a:t>
+            </a:r>
+          </a:p>
+          <a:p>
+            <a:r>
+              <a:t>ただ「調査の時間が減る」のは、共通して実感しやすいポイントです。</a:t>
+            </a:r>
+          </a:p>
+          <a:p>
+            <a:r>
+              <a:t>この感覚を持ってもらった上で、もう少し詳しく見ていきます。</a:t>
             </a:r>
           </a:p>
         </p:txBody>
@@ -1472,22 +1447,22 @@
           <a:lstStyle/>
           <a:p>
             <a:r>
-              <a:t>Claude Codeはターミナルベースのエージェント型開発支援ツール。</a:t>
-            </a:r>
-          </a:p>
-          <a:p>
-            <a:r>
-              <a:t>「AIにコードを書かせるツールでしょ？」と思われがちだが、コード生成はできることの一部。</a:t>
-            </a:r>
-          </a:p>
-          <a:p>
-            <a:r>
-              <a:t>調査、計画、実装、検証、取りまとめを一つのセッションで連続的に扱える。</a:t>
-            </a:r>
-          </a:p>
-          <a:p>
-            <a:r>
-              <a:t>安全面：デフォルトは読み取り専用で、ファイル編集やコマンド実行には都度許可が必要。勝手に壊す心配はない。</a:t>
+              <a:t>Claude Codeは、ターミナルで動くAIエージェントです。</a:t>
+            </a:r>
+          </a:p>
+          <a:p>
+            <a:r>
+              <a:t>「AIにコードを書かせるツールでしょ？」と思われがちですが、コード生成はできることの一部にすぎません。</a:t>
+            </a:r>
+          </a:p>
+          <a:p>
+            <a:r>
+              <a:t>調査、計画、実装、検証、取りまとめ。これを一つのセッションで連続的に扱えます。</a:t>
+            </a:r>
+          </a:p>
+          <a:p>
+            <a:r>
+              <a:t>安全面としては、デフォルトは読み取り専用で、ファイル編集やコマンド実行には都度許可が要ります。勝手に何かを壊す心配はありません。</a:t>
             </a:r>
           </a:p>
         </p:txBody>
@@ -1557,37 +1532,37 @@
           <a:lstStyle/>
           <a:p>
             <a:r>
-              <a:t>Claude Codeが使えるツールを見てみる。</a:t>
-            </a:r>
-          </a:p>
-          <a:p>
-            <a:r>
-              <a:t>基本ツール：ファイルの読み書き・検索、Web検索、サブエージェント。これらはClaude Codeの内蔵ツール。</a:t>
-            </a:r>
-          </a:p>
-          <a:p>
-            <a:r>
-              <a:t>注目はBash。文字通り「あらゆるコマンド」を実行できる。</a:t>
-            </a:r>
-          </a:p>
-          <a:p>
-            <a:r>
-              <a:t>テストやビルドはもちろん、たとえば音声で通知を鳴らす、Pythonスクリプトでスライドを生成する、ffmpegで動画を変換する。こういったことも全部Bashツールの守備範囲。</a:t>
-            </a:r>
-          </a:p>
-          <a:p>
-            <a:r>
-              <a:t>つまり「ターミナルでコマンドを叩けばできること」は、原理的にすべてClaude Codeに任せられる。</a:t>
-            </a:r>
-          </a:p>
-          <a:p>
-            <a:r>
-              <a:t>どのツールを使うかは指定不要。指示に応じてClaude Codeが自動で組み合わせる。</a:t>
-            </a:r>
-          </a:p>
-          <a:p>
-            <a:r>
-              <a:t>ちなみにスライド上ではgitを例にしているが、PerforceやSVNなど、コマンドラインから操作できるツールなら同じように使える。普段の開発環境がそのまま活きる。</a:t>
+              <a:t>Claude Codeが使えるツールを見てみます。</a:t>
+            </a:r>
+          </a:p>
+          <a:p>
+            <a:r>
+              <a:t>基本ツールとして、ファイルの読み書き・検索、Web検索、サブエージェントがあります。これらはClaude Codeの内蔵ツールです。</a:t>
+            </a:r>
+          </a:p>
+          <a:p>
+            <a:r>
+              <a:t>注目はBash。文字通り「あらゆるコマンド」を実行できます。</a:t>
+            </a:r>
+          </a:p>
+          <a:p>
+            <a:r>
+              <a:t>テストやビルドはもちろん、marpでスライドを生成する、ffmpegで動画を変換する。こういったことも全部Bashの守備範囲です。</a:t>
+            </a:r>
+          </a:p>
+          <a:p>
+            <a:r>
+              <a:t>コマンドで実現できることは、原理的にすべてClaude Codeに任せられます。</a:t>
+            </a:r>
+          </a:p>
+          <a:p>
+            <a:r>
+              <a:t>どのツールを使うかは指定不要で、指示に応じてClaude Codeが自動で組み合わせます。</a:t>
+            </a:r>
+          </a:p>
+          <a:p>
+            <a:r>
+              <a:t>ちなみにスライドではgitを例に出していますが、Perforceなら p4 changes -m 10 で同じようなことができます。コマンドラインから操作できるツールなら何でも使えます。</a:t>
             </a:r>
           </a:p>
         </p:txBody>
@@ -1657,32 +1632,27 @@
           <a:lstStyle/>
           <a:p>
             <a:r>
-              <a:t>3つのツールは競合ではなく補完的。得意領域が異なる。</a:t>
-            </a:r>
-          </a:p>
-          <a:p>
-            <a:r>
-              <a:t>ChatGPTは壁打ちに強い。設計議論、仕様の言語化、アプローチ比較。</a:t>
-            </a:r>
-          </a:p>
-          <a:p>
-            <a:r>
-              <a:t>Copilotはコードを書くことに強い。IDEから離れずに入力を補助。</a:t>
-            </a:r>
-          </a:p>
-          <a:p>
-            <a:r>
-              <a:t>Claude Codeは一連の作業フローを進めることに強い。</a:t>
-            </a:r>
-          </a:p>
-          <a:p>
-            <a:r>
-              <a:t>IDEで記述し、ターミナル側で調査・実行・差分整理という分担が自然。</a:t>
-            </a:r>
-          </a:p>
-          <a:p>
-            <a:r>
-              <a:t>大事なのは「どれか1つ」ではなく使い分けること。</a:t>
+              <a:t>この3つのツールは競合ではなく、補完的な関係です。得意領域が違います。</a:t>
+            </a:r>
+          </a:p>
+          <a:p>
+            <a:r>
+              <a:t>ChatGPTは壁打ちに強い。設計議論、仕様の言語化、アプローチの比較に向いています。</a:t>
+            </a:r>
+          </a:p>
+          <a:p>
+            <a:r>
+              <a:t>Copilotはコードを書くことに強い。IDEから離れずに入力を補助してくれます。</a:t>
+            </a:r>
+          </a:p>
+          <a:p>
+            <a:r>
+              <a:t>Claude Codeは一連の作業フローを進めることに強い。調査から実装、差分整理まで通しで扱えます。</a:t>
+            </a:r>
+          </a:p>
+          <a:p>
+            <a:r>
+              <a:t>大事なのは「どれか1つ」ではなく、使い分けることです。</a:t>
             </a:r>
           </a:p>
         </p:txBody>
@@ -1752,22 +1722,22 @@
           <a:lstStyle/>
           <a:p>
             <a:r>
-              <a:t>従来の開発では全工程を自分で回す。6ステップすべてが自分の作業。</a:t>
-            </a:r>
-          </a:p>
-          <a:p>
-            <a:r>
-              <a:t>Claude Codeを使うと、開発者の出番は2箇所に絞られる。最初の方向づけと、途中の判断。</a:t>
-            </a:r>
-          </a:p>
-          <a:p>
-            <a:r>
-              <a:t>これは「サボる」ではなく「判断に集中する」ということ。</a:t>
-            </a:r>
-          </a:p>
-          <a:p>
-            <a:r>
-              <a:t>「コード補完」と「エージェント」の本質的な違いはここにある。</a:t>
+              <a:t>従来の開発では、全工程を自分で回します。6ステップすべてが自分の作業です。</a:t>
+            </a:r>
+          </a:p>
+          <a:p>
+            <a:r>
+              <a:t>Claude Codeを使うと、開発者の出番は2箇所に絞られます。最初の方向づけと、途中の判断。</a:t>
+            </a:r>
+          </a:p>
+          <a:p>
+            <a:r>
+              <a:t>これは「サボる」ではなく「判断に集中する」ということです。</a:t>
+            </a:r>
+          </a:p>
+          <a:p>
+            <a:r>
+              <a:t>「コード補完」と「エージェント」の本質的な違いはここにあります。</a:t>
             </a:r>
           </a:p>
         </p:txBody>
@@ -1837,12 +1807,7 @@
           <a:lstStyle/>
           <a:p>
             <a:r>
-              <a:t>具体的なタスクで流れを見てみる。</a:t>
-            </a:r>
-          </a:p>
-          <a:p>
-            <a:r>
-              <a:t>「CIが落ちた」という日常的なシナリオ。</a:t>
+              <a:t>具体的なタスクで流れを見てみます。「CIが落ちた」という日常的なシナリオです。</a:t>
             </a:r>
           </a:p>
           <a:p>
@@ -1852,27 +1817,27 @@
           </a:p>
           <a:p>
             <a:r>
-              <a:t>Claudeが調査・計画提案と結果の取りまとめを担当する。</a:t>
-            </a:r>
-          </a:p>
-          <a:p>
-            <a:r>
-              <a:t>開発者の介入は2回。方向づけと判断。</a:t>
-            </a:r>
-          </a:p>
-          <a:p>
-            <a:r>
-              <a:t>「丸投げ」ではない。要所で判断を入れるから品質を保てる。</a:t>
-            </a:r>
-          </a:p>
-          <a:p>
-            <a:r>
-              <a:t>原因調査に30分かかるところが、5分で俯瞰できるイメージ。</a:t>
-            </a:r>
-          </a:p>
-          <a:p>
-            <a:r>
-              <a:t>ここからPART 2で「伝え方のコツ」を見ていく。</a:t>
+              <a:t>Claudeが調査・計画提案と結果の取りまとめを担当します。</a:t>
+            </a:r>
+          </a:p>
+          <a:p>
+            <a:r>
+              <a:t>開発者の介入は2回。方向づけと判断だけです。</a:t>
+            </a:r>
+          </a:p>
+          <a:p>
+            <a:r>
+              <a:t>「丸投げ」ではありません。要所で判断を入れるから品質を保てます。</a:t>
+            </a:r>
+          </a:p>
+          <a:p>
+            <a:r>
+              <a:t>原因調査に30分かかるところが、5分で俯瞰できるイメージです。</a:t>
+            </a:r>
+          </a:p>
+          <a:p>
+            <a:r>
+              <a:t>ここからPART 2で「伝え方のコツ」を見ていきます。</a:t>
             </a:r>
           </a:p>
         </p:txBody>
@@ -1942,27 +1907,22 @@
           <a:lstStyle/>
           <a:p>
             <a:r>
-              <a:t>PART 2。コミュニケーションの話。</a:t>
-            </a:r>
-          </a:p>
-          <a:p>
-            <a:r>
-              <a:t>先ほどの例で、開発者の発話は2回だけだった。短い。でも、伝え方で結果は大きく変わる。</a:t>
-            </a:r>
-          </a:p>
-          <a:p>
-            <a:r>
-              <a:t>Anthropicのベストプラクティスにも明記されている。</a:t>
-            </a:r>
-          </a:p>
-          <a:p>
-            <a:r>
-              <a:t>「Claude Codeとの通信方法は、結果の質に大きく影響します」と。</a:t>
-            </a:r>
-          </a:p>
-          <a:p>
-            <a:r>
-              <a:t>人間相手と同じ。何をしてほしいか明確に伝えないと、期待通りの結果は返ってこない。</a:t>
+              <a:t>PART 2、コミュニケーションの話に入ります。</a:t>
+            </a:r>
+          </a:p>
+          <a:p>
+            <a:r>
+              <a:t>先ほどの例で、開発者の発話は2回だけでした。短いですよね。でも、伝え方で結果は大きく変わります。</a:t>
+            </a:r>
+          </a:p>
+          <a:p>
+            <a:r>
+              <a:t>公式のベストプラクティスにも「Claude Codeへの伝え方は、結果の質に大きく影響する」と書かれています。</a:t>
+            </a:r>
+          </a:p>
+          <a:p>
+            <a:r>
+              <a:t>人間相手と同じです。何をしてほしいか明確に伝えないと、期待通りの結果は返ってきません。</a:t>
             </a:r>
           </a:p>
         </p:txBody>

--- a/slides/session1.pptx
+++ b/slides/session1.pptx
@@ -17,9 +17,9 @@
     <p:sldId id="280" r:id="rId8"/>
     <p:sldId id="281" r:id="rId9"/>
     <p:sldId id="289" r:id="rId10"/>
-    <p:sldId id="284" r:id="rId11"/>
-    <p:sldId id="285" r:id="rId12"/>
-    <p:sldId id="287" r:id="rId13"/>
+    <p:sldId id="299" r:id="rId11"/>
+    <p:sldId id="300" r:id="rId12"/>
+    <p:sldId id="301" r:id="rId13"/>
     <p:sldId id="290" r:id="rId14"/>
     <p:sldId id="295" r:id="rId15"/>
     <p:sldId id="292" r:id="rId16"/>
@@ -311,17 +311,36 @@
           <a:lstStyle/>
           <a:p>
             <a:r>
-              <a:t>では始めます。自己紹介は軽く済ませて。</a:t>
-            </a:r>
-          </a:p>
-          <a:p>
-            <a:r>
+              <a:rPr dirty="0" err="1"/>
+              <a:t>では始めます。自己紹介は軽く済ませて</a:t>
+            </a:r>
+            <a:r>
+              <a:rPr dirty="0"/>
+              <a:t>。</a:t>
+            </a:r>
+          </a:p>
+          <a:p>
+            <a:r>
+              <a:rPr dirty="0"/>
               <a:t>Claude Codeの社内勉強会、全3回の第1回です。</a:t>
             </a:r>
           </a:p>
           <a:p>
             <a:r>
-              <a:t>今日のテーマは「理解する」。基本と対話の心得を扱います。</a:t>
+              <a:rPr dirty="0" err="1"/>
+              <a:t>今日のテーマは「理解する</a:t>
+            </a:r>
+            <a:r>
+              <a:rPr dirty="0"/>
+              <a:t>」。</a:t>
+            </a:r>
+            <a:r>
+              <a:rPr dirty="0" err="1"/>
+              <a:t>基本と対話の心得を扱います</a:t>
+            </a:r>
+            <a:r>
+              <a:rPr dirty="0"/>
+              <a:t>。</a:t>
             </a:r>
           </a:p>
         </p:txBody>
@@ -391,32 +410,100 @@
           <a:lstStyle/>
           <a:p>
             <a:r>
+              <a:rPr dirty="0"/>
               <a:t>チャットボットとエージェントは根本的に違います。</a:t>
             </a:r>
           </a:p>
           <a:p>
             <a:r>
-              <a:t>チャットボットは電話サポートに近い。こちらが1ステップずつ指示して、その都度答えが返ってきます。</a:t>
-            </a:r>
-          </a:p>
-          <a:p>
-            <a:r>
-              <a:t>エージェントは仕事を任せた同僚に近い。ゴールと背景を伝えたら、やり方は本人が判断します。</a:t>
-            </a:r>
-          </a:p>
-          <a:p>
-            <a:r>
-              <a:t>同僚に仕事を任せるとき、1行ずつ「次はこのファイルを開いて、次はこの関数を見て」とは指示しませんよね。</a:t>
-            </a:r>
-          </a:p>
-          <a:p>
-            <a:r>
-              <a:t>「CIが落ちてるから原因を調べて」と伝えて、やり方は任せる。</a:t>
-            </a:r>
-          </a:p>
-          <a:p>
-            <a:r>
-              <a:t>この「委任」の感覚が、Claude Codeではとても大事です。</a:t>
+              <a:rPr dirty="0"/>
+              <a:t>チャットボットは電話サポートに近い。こちらが1ステップずつ指示して、その都度答えが返ってくる。だからプロンプトテンプレートのような「こう聞けばうまくいく」という型が有効です。</a:t>
+            </a:r>
+          </a:p>
+          <a:p>
+            <a:endParaRPr lang="en-US" dirty="0"/>
+          </a:p>
+          <a:p>
+            <a:r>
+              <a:rPr dirty="0" err="1"/>
+              <a:t>一方、エージェントは仕事を任せた同僚に近い。ゴールと背景を伝えたら、やり方は本人が判断します</a:t>
+            </a:r>
+            <a:r>
+              <a:rPr dirty="0"/>
+              <a:t>。</a:t>
+            </a:r>
+          </a:p>
+          <a:p>
+            <a:r>
+              <a:rPr dirty="0"/>
+              <a:t>ここで大事なのは、巨大な1プロンプトで全部を完璧に指示しようとしないこと</a:t>
+            </a:r>
+            <a:r>
+              <a:rPr lang="ja-JP" altLang="en-US"/>
+              <a:t>です</a:t>
+            </a:r>
+            <a:r>
+              <a:rPr dirty="0"/>
+              <a:t>。</a:t>
+            </a:r>
+            <a:endParaRPr lang="en-US" dirty="0"/>
+          </a:p>
+          <a:p>
+            <a:r>
+              <a:rPr lang="en-US" dirty="0" err="1"/>
+              <a:t>それをすれば勝手に色々動いてはくれますが、動いているうちにコンテキストが切迫して、最初の指示を徐々に忘れていってしまいます</a:t>
+            </a:r>
+            <a:r>
+              <a:rPr lang="en-US" dirty="0"/>
+              <a:t>。</a:t>
+            </a:r>
+          </a:p>
+          <a:p>
+            <a:r>
+              <a:rPr lang="en-US" dirty="0" err="1"/>
+              <a:t>また</a:t>
+            </a:r>
+            <a:r>
+              <a:rPr lang="en-US" dirty="0"/>
+              <a:t>、「やっていくうちに諸々別の問題が発覚し、当初の計画通りにいかないことがわかる」ということは、人間ではよくありますがエージェントでも同様です。</a:t>
+            </a:r>
+          </a:p>
+          <a:p>
+            <a:endParaRPr lang="en-US" dirty="0"/>
+          </a:p>
+          <a:p>
+            <a:r>
+              <a:rPr dirty="0" err="1"/>
+              <a:t>エージェントの場合は、まず方向付けをして動いてもらい、出てきたものを見てディスカッションしながら進めるのが正しい使い方です</a:t>
+            </a:r>
+            <a:r>
+              <a:rPr dirty="0"/>
+              <a:t>。</a:t>
+            </a:r>
+          </a:p>
+          <a:p>
+            <a:r>
+              <a:rPr dirty="0" err="1"/>
+              <a:t>チャットボットで有効だったプロンプトテンプレート的なアプローチを、そのままエージェントに持ち込むとうまくいきません</a:t>
+            </a:r>
+            <a:r>
+              <a:rPr dirty="0"/>
+              <a:t>。</a:t>
+            </a:r>
+            <a:endParaRPr lang="en-US" dirty="0"/>
+          </a:p>
+          <a:p>
+            <a:r>
+              <a:rPr dirty="0" err="1"/>
+              <a:t>コミュニケーションの設計自体が</a:t>
+            </a:r>
+            <a:r>
+              <a:rPr lang="ja-JP" altLang="en-US"/>
+              <a:t>違うということがわかると、性能を引き出せるようになります</a:t>
+            </a:r>
+            <a:r>
+              <a:rPr dirty="0"/>
+              <a:t>。</a:t>
             </a:r>
           </a:p>
         </p:txBody>
@@ -486,32 +573,38 @@
           <a:lstStyle/>
           <a:p>
             <a:r>
-              <a:t>指示の4要素。目標、背景・制約、現状、期待する出力です。</a:t>
-            </a:r>
-          </a:p>
-          <a:p>
-            <a:r>
-              <a:t>全部揃っている必要はありません。ただし、目標は必須です。</a:t>
-            </a:r>
-          </a:p>
-          <a:p>
-            <a:r>
-              <a:t>悪い例を見てください。「この機能を改善して」。何を？どう？がまったくわかりません。</a:t>
-            </a:r>
-          </a:p>
-          <a:p>
-            <a:r>
-              <a:t>良い例は、さっきと同じCIのシナリオです。現状・目標・制約・出力形式が明確になっています。</a:t>
-            </a:r>
-          </a:p>
-          <a:p>
-            <a:r>
-              <a:t>「コードの変更はまだしないこと」が地味に大事で、やってほしくないことを書くと暴走を防げます。</a:t>
-            </a:r>
-          </a:p>
-          <a:p>
-            <a:r>
-              <a:t>指示が具体的であるほど、結果も具体的になります。</a:t>
+              <a:rPr dirty="0"/>
+              <a:t>じゃあ、最初の方向付けでは何を伝えればいいのか。4つの要素があります。ゴール、背景・制約、現状、そしてまず見たいもの。</a:t>
+            </a:r>
+          </a:p>
+          <a:p>
+            <a:r>
+              <a:rPr dirty="0"/>
+              <a:t>全部揃っている必要はありません。ただし、ゴールは必須です。</a:t>
+            </a:r>
+          </a:p>
+          <a:p>
+            <a:r>
+              <a:rPr dirty="0"/>
+              <a:t>ポイントは、これは「完璧なプロンプトを書く」ための要素ではないということ。最初の一歩を踏み出すための方向付けです。</a:t>
+            </a:r>
+          </a:p>
+          <a:p>
+            <a:r>
+              <a:rPr dirty="0"/>
+              <a:t>悪い例を見てください。「この機能を改善して」。これだとチャットボットにもエージェントにも方向が伝わりません。</a:t>
+            </a:r>
+          </a:p>
+          <a:p>
+            <a:r>
+              <a:rPr dirty="0"/>
+              <a:t>良い例はCIのシナリオです。現状・ゴール・制約が明確で、「まず調査だけ」という最初の一歩も示している。</a:t>
+            </a:r>
+          </a:p>
+          <a:p>
+            <a:r>
+              <a:rPr dirty="0"/>
+              <a:t>「コードの変更はまだしないこと」が地味に大事で、やってほしくないことを書くと暴走を防げます。ここから先は、出てきたものを見て対話で進めていきます。</a:t>
             </a:r>
           </a:p>
         </p:txBody>
@@ -581,32 +674,38 @@
           <a:lstStyle/>
           <a:p>
             <a:r>
-              <a:t>最初から完璧を求めない。これが一番大事なマインドセットです。</a:t>
-            </a:r>
-          </a:p>
-          <a:p>
-            <a:r>
-              <a:t>まず出力を見て、良い点と悪い点を具体的にフィードバックして、改善版を出してもらいます。</a:t>
-            </a:r>
-          </a:p>
-          <a:p>
-            <a:r>
-              <a:t>テクニックを3つ紹介します。</a:t>
-            </a:r>
-          </a:p>
-          <a:p>
-            <a:r>
-              <a:t>1つ目：「なぜそうしたのか」と聞く。自分の指示に問題があったケースも多いです。</a:t>
-            </a:r>
-          </a:p>
-          <a:p>
-            <a:r>
-              <a:t>2つ目：命令ではなく提案で伝える。「Xを考えているけど、どう思う？」と聞くと、自分では気づかなかった選択肢が出てきます。</a:t>
-            </a:r>
-          </a:p>
-          <a:p>
-            <a:r>
-              <a:t>3つ目：自分でコードを直接編集したら、必ずClaudeに伝えてください。伝えないと古い状態を前提に動いてしまいます。</a:t>
+              <a:rPr dirty="0"/>
+              <a:t>エージェントとの仕事は、対話で進めるものです。方向付け、たたき台を見る、議論・修正、次の一手。このサイクルを回します。</a:t>
+            </a:r>
+          </a:p>
+          <a:p>
+            <a:r>
+              <a:rPr dirty="0"/>
+              <a:t>最初の指示で完璧を目指す必要はありません。まず動いてもらって、出てきたものを見て一緒に考える。この感覚が大事です。</a:t>
+            </a:r>
+          </a:p>
+          <a:p>
+            <a:r>
+              <a:rPr dirty="0"/>
+              <a:t>対話のコツを3つ紹介します。</a:t>
+            </a:r>
+          </a:p>
+          <a:p>
+            <a:r>
+              <a:rPr dirty="0"/>
+              <a:t>1つ目：「なぜそうしたのか」と聞く。期待と違う出力が出たとき、すぐ修正指示を出すのではなく、まず理由を聞いてみる。自分の方向付けに問題があったケースも多いです。</a:t>
+            </a:r>
+          </a:p>
+          <a:p>
+            <a:r>
+              <a:rPr dirty="0"/>
+              <a:t>2つ目：命令ではなく提案形式で議論する。「Xして」ではなく「Xを考えているけど、どう思う？」と聞くと、自分では気づかなかった選択肢が出てきます。</a:t>
+            </a:r>
+          </a:p>
+          <a:p>
+            <a:r>
+              <a:rPr dirty="0"/>
+              <a:t>3つ目：自分でコードを直接編集したら、必ずClaudeに共有してください。伝えないと古い状態を前提に動いてしまいます。同僚と同じで、情報共有が大事です。</a:t>
             </a:r>
           </a:p>
         </p:txBody>
@@ -961,37 +1060,80 @@
           <a:lstStyle/>
           <a:p>
             <a:r>
+              <a:rPr dirty="0"/>
               <a:t>まとめです。今日の持ち帰りは3つ。</a:t>
             </a:r>
           </a:p>
           <a:p>
             <a:r>
-              <a:t>1つ目：Claude Codeはコード補完ではなく「作業を進める」ツール。</a:t>
-            </a:r>
-          </a:p>
-          <a:p>
-            <a:r>
+              <a:rPr dirty="0"/>
+              <a:t>1つ目：Claude </a:t>
+            </a:r>
+            <a:r>
+              <a:rPr dirty="0" err="1"/>
+              <a:t>Codeはコード補完ではなく「作業を進める」ツール</a:t>
+            </a:r>
+            <a:r>
+              <a:rPr dirty="0"/>
+              <a:t>。</a:t>
+            </a:r>
+          </a:p>
+          <a:p>
+            <a:r>
+              <a:rPr dirty="0"/>
               <a:t>2つ目：伝え方で結果が変わる。目標・背景・現状・期待出力を意識してみてください。</a:t>
             </a:r>
           </a:p>
           <a:p>
             <a:r>
-              <a:t>3つ目：いきなりコードを書かせない。Plan Modeで方針を固めてから実装に入る。</a:t>
-            </a:r>
-          </a:p>
-          <a:p>
-            <a:r>
-              <a:t>日常業務の一部を、まず任せてみてください。</a:t>
-            </a:r>
-          </a:p>
-          <a:p>
-            <a:r>
-              <a:t>次回は「プロジェクトに合わせたカスタマイズ」。CLAUDE.md、Skills、Hooksを扱います。</a:t>
-            </a:r>
-          </a:p>
-          <a:p>
-            <a:r>
-              <a:t>では、質疑応答に移ります。</a:t>
+              <a:rPr dirty="0"/>
+              <a:t>3つ目：いきなりコードを書かせない。Plan </a:t>
+            </a:r>
+            <a:r>
+              <a:rPr dirty="0" err="1"/>
+              <a:t>Modeで方針を固めてから実装に入る</a:t>
+            </a:r>
+            <a:r>
+              <a:rPr dirty="0"/>
+              <a:t>。</a:t>
+            </a:r>
+          </a:p>
+          <a:p>
+            <a:r>
+              <a:rPr dirty="0" err="1"/>
+              <a:t>日常業務の一部を、まず任せてみてください</a:t>
+            </a:r>
+            <a:r>
+              <a:rPr dirty="0"/>
+              <a:t>。</a:t>
+            </a:r>
+          </a:p>
+          <a:p>
+            <a:r>
+              <a:rPr dirty="0" err="1"/>
+              <a:t>次回は「プロジェクトに合わせたカスタマイズ</a:t>
+            </a:r>
+            <a:r>
+              <a:rPr dirty="0"/>
+              <a:t>」。</a:t>
+            </a:r>
+            <a:r>
+              <a:rPr dirty="0" err="1"/>
+              <a:t>CLAUDE.md、Skills、Hooksを扱います</a:t>
+            </a:r>
+            <a:r>
+              <a:rPr dirty="0"/>
+              <a:t>。</a:t>
+            </a:r>
+          </a:p>
+          <a:p>
+            <a:r>
+              <a:rPr dirty="0" err="1"/>
+              <a:t>では、質疑応答に移ります</a:t>
+            </a:r>
+            <a:r>
+              <a:rPr dirty="0"/>
+              <a:t>。</a:t>
             </a:r>
           </a:p>
         </p:txBody>
@@ -1061,27 +1203,67 @@
           <a:lstStyle/>
           <a:p>
             <a:r>
+              <a:rPr dirty="0"/>
               <a:t>3回シリーズの全体像です。</a:t>
             </a:r>
           </a:p>
           <a:p>
             <a:r>
-              <a:t>第1回、今日は「理解する」。Claude Codeの基本と使い方を押さえます。</a:t>
-            </a:r>
-          </a:p>
-          <a:p>
-            <a:r>
-              <a:t>第2回は「カスタマイズ」。プロジェクトに合わせた設定の話です。</a:t>
-            </a:r>
-          </a:p>
-          <a:p>
-            <a:r>
-              <a:t>第3回は「外部連携と並列開発」。MCP、worktree、サブエージェントを扱います。</a:t>
-            </a:r>
-          </a:p>
-          <a:p>
-            <a:r>
-              <a:t>今日のゴールは、日常業務の一部をClaude Codeに任せられるようになることです。</a:t>
+              <a:rPr dirty="0"/>
+              <a:t>第1回、今日は「理解する」。Claude </a:t>
+            </a:r>
+            <a:r>
+              <a:rPr dirty="0" err="1"/>
+              <a:t>Codeの基本と使い方を押さえます</a:t>
+            </a:r>
+            <a:r>
+              <a:rPr dirty="0"/>
+              <a:t>。</a:t>
+            </a:r>
+          </a:p>
+          <a:p>
+            <a:r>
+              <a:rPr dirty="0"/>
+              <a:t>第2回は「カスタマイズ」。</a:t>
+            </a:r>
+            <a:r>
+              <a:rPr dirty="0" err="1"/>
+              <a:t>プロジェクトに合わせた設定の話です</a:t>
+            </a:r>
+            <a:r>
+              <a:rPr dirty="0"/>
+              <a:t>。</a:t>
+            </a:r>
+          </a:p>
+          <a:p>
+            <a:r>
+              <a:rPr dirty="0"/>
+              <a:t>第3回は「外部連携と並列開発」。</a:t>
+            </a:r>
+            <a:r>
+              <a:rPr dirty="0" err="1"/>
+              <a:t>MCP、worktree、サブエージェントを扱います</a:t>
+            </a:r>
+            <a:r>
+              <a:rPr dirty="0"/>
+              <a:t>。</a:t>
+            </a:r>
+          </a:p>
+          <a:p>
+            <a:r>
+              <a:rPr dirty="0" err="1"/>
+              <a:t>今日のゴールは、日常業務の一部をClaude</a:t>
+            </a:r>
+            <a:r>
+              <a:rPr dirty="0"/>
+              <a:t> </a:t>
+            </a:r>
+            <a:r>
+              <a:rPr dirty="0" err="1"/>
+              <a:t>Codeに任せられるようになることです</a:t>
+            </a:r>
+            <a:r>
+              <a:t>。</a:t>
             </a:r>
           </a:p>
         </p:txBody>
@@ -1151,27 +1333,56 @@
           <a:lstStyle/>
           <a:p>
             <a:r>
-              <a:t>調査や影響範囲の把握って、時間が溶けやすい作業です。ここが最初の狙いどころになります。</a:t>
-            </a:r>
-          </a:p>
-          <a:p>
-            <a:r>
-              <a:t>いきなり実装を任せる必要はありません。読み取り専用で始められるのでリスクも低い。</a:t>
-            </a:r>
-          </a:p>
-          <a:p>
-            <a:r>
-              <a:t>Before/Afterは体感の話なので、人やリポジトリによって差はあります。</a:t>
-            </a:r>
-          </a:p>
-          <a:p>
-            <a:r>
-              <a:t>ただ「調査の時間が減る」のは、共通して実感しやすいポイントです。</a:t>
-            </a:r>
-          </a:p>
-          <a:p>
-            <a:r>
-              <a:t>この感覚を持ってもらった上で、もう少し詳しく見ていきます。</a:t>
+              <a:rPr dirty="0" err="1"/>
+              <a:t>調査や影響範囲の把握って、時間が溶けやすい作業です。ここが最初の狙いどころになります</a:t>
+            </a:r>
+            <a:r>
+              <a:rPr dirty="0"/>
+              <a:t>。</a:t>
+            </a:r>
+          </a:p>
+          <a:p>
+            <a:r>
+              <a:rPr dirty="0" err="1"/>
+              <a:t>いきなり実装を任せる必要はありません。読み取り専用で始められるのでリスクも低い</a:t>
+            </a:r>
+            <a:r>
+              <a:rPr dirty="0"/>
+              <a:t>。</a:t>
+            </a:r>
+          </a:p>
+          <a:p>
+            <a:r>
+              <a:rPr dirty="0"/>
+              <a:t>Before/</a:t>
+            </a:r>
+            <a:r>
+              <a:rPr dirty="0" err="1"/>
+              <a:t>Afterは体感の話なので、人やリポジトリによって差はあります</a:t>
+            </a:r>
+            <a:r>
+              <a:rPr dirty="0"/>
+              <a:t>。</a:t>
+            </a:r>
+          </a:p>
+          <a:p>
+            <a:r>
+              <a:rPr dirty="0" err="1"/>
+              <a:t>ただ「調査の時間が減る」のは、共通して実感しやすいポイントです</a:t>
+            </a:r>
+            <a:r>
+              <a:rPr dirty="0"/>
+              <a:t>。</a:t>
+            </a:r>
+          </a:p>
+          <a:p>
+            <a:r>
+              <a:rPr dirty="0" err="1"/>
+              <a:t>この感覚を持ってもらった上で、もう少し詳しく見ていきます</a:t>
+            </a:r>
+            <a:r>
+              <a:rPr dirty="0"/>
+              <a:t>。</a:t>
             </a:r>
           </a:p>
         </p:txBody>
@@ -1326,37 +1537,104 @@
           <a:lstStyle/>
           <a:p>
             <a:r>
-              <a:t>Claude Codeが使えるツールを見てみます。</a:t>
-            </a:r>
-          </a:p>
-          <a:p>
-            <a:r>
-              <a:t>基本ツールとして、ファイルの読み書き・検索、Web検索、サブエージェントがあります。これらはClaude Codeの内蔵ツールです。</a:t>
-            </a:r>
-          </a:p>
-          <a:p>
-            <a:r>
-              <a:t>注目はBash。文字通り「あらゆるコマンド」を実行できます。</a:t>
-            </a:r>
-          </a:p>
-          <a:p>
-            <a:r>
+              <a:rPr dirty="0"/>
+              <a:t>Claude </a:t>
+            </a:r>
+            <a:r>
+              <a:rPr dirty="0" err="1"/>
+              <a:t>Codeが使えるツールを見てみます</a:t>
+            </a:r>
+            <a:r>
+              <a:rPr dirty="0"/>
+              <a:t>。</a:t>
+            </a:r>
+          </a:p>
+          <a:p>
+            <a:r>
+              <a:rPr dirty="0" err="1"/>
+              <a:t>基本ツールとして、ファイルの読み書き・検索、Web検索、サブエージェントがあります。これらはClaude</a:t>
+            </a:r>
+            <a:r>
+              <a:rPr dirty="0"/>
+              <a:t> </a:t>
+            </a:r>
+            <a:r>
+              <a:rPr dirty="0" err="1"/>
+              <a:t>Codeの内蔵ツールです</a:t>
+            </a:r>
+            <a:r>
+              <a:rPr dirty="0"/>
+              <a:t>。</a:t>
+            </a:r>
+          </a:p>
+          <a:p>
+            <a:r>
+              <a:rPr dirty="0" err="1"/>
+              <a:t>注目はBash。文字通り「あらゆるコマンド」を実行できます</a:t>
+            </a:r>
+            <a:r>
+              <a:rPr dirty="0"/>
+              <a:t>。</a:t>
+            </a:r>
+          </a:p>
+          <a:p>
+            <a:r>
+              <a:rPr dirty="0"/>
               <a:t>テストやビルドはもちろん、marpでスライドを生成する、ffmpegで動画を変換する。こういったことも全部Bashの守備範囲です。</a:t>
             </a:r>
           </a:p>
           <a:p>
             <a:r>
-              <a:t>コマンドで実現できることは、原理的にすべてClaude Codeに任せられます。</a:t>
-            </a:r>
-          </a:p>
-          <a:p>
-            <a:r>
-              <a:t>どのツールを使うかは指定不要で、指示に応じてClaude Codeが自動で組み合わせます。</a:t>
-            </a:r>
-          </a:p>
-          <a:p>
-            <a:r>
-              <a:t>ちなみにスライドではgitを例に出していますが、Perforceなら p4 changes -m 10 で同じようなことができます。コマンドラインから操作できるツールなら何でも使えます。</a:t>
+              <a:rPr dirty="0" err="1"/>
+              <a:t>コマンドで実現できることは、原理的にすべてClaude</a:t>
+            </a:r>
+            <a:r>
+              <a:rPr dirty="0"/>
+              <a:t> </a:t>
+            </a:r>
+            <a:r>
+              <a:rPr dirty="0" err="1"/>
+              <a:t>Codeに任せられます</a:t>
+            </a:r>
+            <a:r>
+              <a:rPr dirty="0"/>
+              <a:t>。</a:t>
+            </a:r>
+          </a:p>
+          <a:p>
+            <a:r>
+              <a:rPr dirty="0" err="1"/>
+              <a:t>どのツールを使うかは指定不要で、指示に応じてClaude</a:t>
+            </a:r>
+            <a:r>
+              <a:rPr dirty="0"/>
+              <a:t> </a:t>
+            </a:r>
+            <a:r>
+              <a:rPr dirty="0" err="1"/>
+              <a:t>Codeが自動で組み合わせます</a:t>
+            </a:r>
+            <a:r>
+              <a:rPr dirty="0"/>
+              <a:t>。</a:t>
+            </a:r>
+          </a:p>
+          <a:p>
+            <a:r>
+              <a:rPr dirty="0" err="1"/>
+              <a:t>ちなみにスライドではgitを例に出していますが、Perforceなら</a:t>
+            </a:r>
+            <a:r>
+              <a:rPr dirty="0"/>
+              <a:t> p4 changes -m 10 </a:t>
+            </a:r>
+            <a:r>
+              <a:rPr dirty="0" err="1"/>
+              <a:t>で同じようなことができます。コマンドラインから操作できるツールなら何でも使えます</a:t>
+            </a:r>
+            <a:r>
+              <a:rPr dirty="0"/>
+              <a:t>。</a:t>
             </a:r>
           </a:p>
         </p:txBody>
@@ -1426,26 +1704,47 @@
           <a:lstStyle/>
           <a:p>
             <a:r>
+              <a:rPr dirty="0"/>
               <a:t>この3つのツールは競合ではなく、補完的な関係です。得意領域が違います。</a:t>
             </a:r>
           </a:p>
           <a:p>
             <a:r>
-              <a:t>ChatGPTは壁打ちに強い。設計議論、仕様の言語化、アプローチの比較に向いています。</a:t>
-            </a:r>
-          </a:p>
-          <a:p>
-            <a:r>
-              <a:t>Copilotはコードを書くことに強い。IDEから離れずに入力を補助してくれます。</a:t>
-            </a:r>
-          </a:p>
-          <a:p>
-            <a:r>
-              <a:t>Claude Codeは一連の作業フローを進めることに強い。調査から実装、差分整理まで通しで扱えます。</a:t>
-            </a:r>
-          </a:p>
-          <a:p>
-            <a:r>
+              <a:rPr dirty="0" err="1"/>
+              <a:t>ChatGPTは壁打ちに強い。設計議論、仕様の言語化、アプローチの比較に向いています</a:t>
+            </a:r>
+            <a:r>
+              <a:rPr dirty="0"/>
+              <a:t>。</a:t>
+            </a:r>
+          </a:p>
+          <a:p>
+            <a:r>
+              <a:rPr dirty="0" err="1"/>
+              <a:t>Copilotはコードを書くことに強い。IDEから離れずに入力を補助してくれます</a:t>
+            </a:r>
+            <a:r>
+              <a:rPr dirty="0"/>
+              <a:t>。</a:t>
+            </a:r>
+          </a:p>
+          <a:p>
+            <a:r>
+              <a:rPr dirty="0"/>
+              <a:t>Claude </a:t>
+            </a:r>
+            <a:r>
+              <a:rPr dirty="0" err="1"/>
+              <a:t>Codeは一連の作業フローを進めることに強い。調査から実装、差分整理まで通しで扱えます</a:t>
+            </a:r>
+            <a:r>
+              <a:rPr dirty="0"/>
+              <a:t>。</a:t>
+            </a:r>
+          </a:p>
+          <a:p>
+            <a:r>
+              <a:rPr dirty="0"/>
               <a:t>大事なのは「どれか1つ」ではなく、使い分けることです。</a:t>
             </a:r>
           </a:p>
@@ -1920,7 +2219,7 @@
           <a:p>
             <a:fld id="{5BCAD085-E8A6-8845-BD4E-CB4CCA059FC4}" type="datetimeFigureOut">
               <a:rPr lang="en-US" smtClean="0"/>
-              <a:t>2/24/26</a:t>
+              <a:t>2/26/26</a:t>
             </a:fld>
             <a:endParaRPr lang="en-US"/>
           </a:p>
@@ -2088,7 +2387,7 @@
           <a:p>
             <a:fld id="{5BCAD085-E8A6-8845-BD4E-CB4CCA059FC4}" type="datetimeFigureOut">
               <a:rPr lang="en-US" smtClean="0"/>
-              <a:t>2/24/26</a:t>
+              <a:t>2/26/26</a:t>
             </a:fld>
             <a:endParaRPr lang="en-US"/>
           </a:p>
@@ -2266,7 +2565,7 @@
           <a:p>
             <a:fld id="{5BCAD085-E8A6-8845-BD4E-CB4CCA059FC4}" type="datetimeFigureOut">
               <a:rPr lang="en-US" smtClean="0"/>
-              <a:t>2/24/26</a:t>
+              <a:t>2/26/26</a:t>
             </a:fld>
             <a:endParaRPr lang="en-US"/>
           </a:p>
@@ -2434,7 +2733,7 @@
           <a:p>
             <a:fld id="{5BCAD085-E8A6-8845-BD4E-CB4CCA059FC4}" type="datetimeFigureOut">
               <a:rPr lang="en-US" smtClean="0"/>
-              <a:t>2/24/26</a:t>
+              <a:t>2/26/26</a:t>
             </a:fld>
             <a:endParaRPr lang="en-US"/>
           </a:p>
@@ -2679,7 +2978,7 @@
           <a:p>
             <a:fld id="{5BCAD085-E8A6-8845-BD4E-CB4CCA059FC4}" type="datetimeFigureOut">
               <a:rPr lang="en-US" smtClean="0"/>
-              <a:t>2/24/26</a:t>
+              <a:t>2/26/26</a:t>
             </a:fld>
             <a:endParaRPr lang="en-US"/>
           </a:p>
@@ -2964,7 +3263,7 @@
           <a:p>
             <a:fld id="{5BCAD085-E8A6-8845-BD4E-CB4CCA059FC4}" type="datetimeFigureOut">
               <a:rPr lang="en-US" smtClean="0"/>
-              <a:t>2/24/26</a:t>
+              <a:t>2/26/26</a:t>
             </a:fld>
             <a:endParaRPr lang="en-US"/>
           </a:p>
@@ -3383,7 +3682,7 @@
           <a:p>
             <a:fld id="{5BCAD085-E8A6-8845-BD4E-CB4CCA059FC4}" type="datetimeFigureOut">
               <a:rPr lang="en-US" smtClean="0"/>
-              <a:t>2/24/26</a:t>
+              <a:t>2/26/26</a:t>
             </a:fld>
             <a:endParaRPr lang="en-US"/>
           </a:p>
@@ -3500,7 +3799,7 @@
           <a:p>
             <a:fld id="{5BCAD085-E8A6-8845-BD4E-CB4CCA059FC4}" type="datetimeFigureOut">
               <a:rPr lang="en-US" smtClean="0"/>
-              <a:t>2/24/26</a:t>
+              <a:t>2/26/26</a:t>
             </a:fld>
             <a:endParaRPr lang="en-US"/>
           </a:p>
@@ -3595,7 +3894,7 @@
           <a:p>
             <a:fld id="{5BCAD085-E8A6-8845-BD4E-CB4CCA059FC4}" type="datetimeFigureOut">
               <a:rPr lang="en-US" smtClean="0"/>
-              <a:t>2/24/26</a:t>
+              <a:t>2/26/26</a:t>
             </a:fld>
             <a:endParaRPr lang="en-US"/>
           </a:p>
@@ -3870,7 +4169,7 @@
           <a:p>
             <a:fld id="{5BCAD085-E8A6-8845-BD4E-CB4CCA059FC4}" type="datetimeFigureOut">
               <a:rPr lang="en-US" smtClean="0"/>
-              <a:t>2/24/26</a:t>
+              <a:t>2/26/26</a:t>
             </a:fld>
             <a:endParaRPr lang="en-US"/>
           </a:p>
@@ -4122,7 +4421,7 @@
           <a:p>
             <a:fld id="{5BCAD085-E8A6-8845-BD4E-CB4CCA059FC4}" type="datetimeFigureOut">
               <a:rPr lang="en-US" smtClean="0"/>
-              <a:t>2/24/26</a:t>
+              <a:t>2/26/26</a:t>
             </a:fld>
             <a:endParaRPr lang="en-US"/>
           </a:p>
@@ -4333,7 +4632,7 @@
           <a:p>
             <a:fld id="{5BCAD085-E8A6-8845-BD4E-CB4CCA059FC4}" type="datetimeFigureOut">
               <a:rPr lang="en-US" smtClean="0"/>
-              <a:t>2/24/26</a:t>
+              <a:t>2/26/26</a:t>
             </a:fld>
             <a:endParaRPr lang="en-US"/>
           </a:p>
@@ -5377,7 +5676,7 @@
         <p:spPr>
           <a:xfrm>
             <a:off x="960120" y="1600200"/>
-            <a:ext cx="4526520" cy="3291840"/>
+            <a:ext cx="4526520" cy="1829603"/>
           </a:xfrm>
           <a:prstGeom prst="rect">
             <a:avLst/>
@@ -5414,7 +5713,7 @@
                 <a:spcPts val="2200"/>
               </a:lnSpc>
               <a:spcAft>
-                <a:spcPts val="600"/>
+                <a:spcPts val="500"/>
               </a:spcAft>
             </a:pPr>
             <a:r>
@@ -5430,14 +5729,14 @@
           <a:p>
             <a:pPr algn="l">
               <a:lnSpc>
-                <a:spcPts val="2400"/>
+                <a:spcPts val="2200"/>
               </a:lnSpc>
               <a:spcAft>
-                <a:spcPts val="400"/>
+                <a:spcPts val="300"/>
               </a:spcAft>
             </a:pPr>
             <a:r>
-              <a:rPr lang="ja-JP" sz="1600" b="0" dirty="0">
+              <a:rPr lang="ja-JP" sz="1500" b="0" dirty="0">
                 <a:solidFill>
                   <a:srgbClr val="C5C3BB"/>
                 </a:solidFill>
@@ -5449,14 +5748,14 @@
           <a:p>
             <a:pPr algn="l">
               <a:lnSpc>
-                <a:spcPts val="2400"/>
+                <a:spcPts val="2200"/>
               </a:lnSpc>
               <a:spcAft>
-                <a:spcPts val="400"/>
+                <a:spcPts val="300"/>
               </a:spcAft>
             </a:pPr>
             <a:r>
-              <a:rPr lang="ja-JP" sz="1600" b="0" dirty="0">
+              <a:rPr lang="ja-JP" sz="1500" b="0" dirty="0">
                 <a:solidFill>
                   <a:srgbClr val="C5C3BB"/>
                 </a:solidFill>
@@ -5468,36 +5767,20 @@
           <a:p>
             <a:pPr algn="l">
               <a:lnSpc>
-                <a:spcPts val="2400"/>
+                <a:spcPts val="2200"/>
               </a:lnSpc>
               <a:spcAft>
-                <a:spcPts val="0"/>
+                <a:spcPts val="300"/>
               </a:spcAft>
             </a:pPr>
             <a:r>
-              <a:rPr lang="ja-JP" sz="1600" b="0" dirty="0">
+              <a:rPr lang="ja-JP" sz="1500" b="0" dirty="0">
                 <a:solidFill>
                   <a:srgbClr val="C5C3BB"/>
                 </a:solidFill>
                 <a:latin typeface="Hiragino Sans"/>
               </a:rPr>
-              <a:t>• ユーザーが手順を考え、</a:t>
-            </a:r>
-          </a:p>
-          <a:p>
-            <a:pPr algn="l">
-              <a:lnSpc>
-                <a:spcPts val="2400"/>
-              </a:lnSpc>
-            </a:pPr>
-            <a:r>
-              <a:rPr lang="ja-JP" sz="1600" b="0" dirty="0">
-                <a:solidFill>
-                  <a:srgbClr val="C5C3BB"/>
-                </a:solidFill>
-                <a:latin typeface="Hiragino Sans"/>
-              </a:rPr>
-              <a:t>  1ステップずつ指示する</a:t>
+              <a:t>• プロンプトテンプレートが有効</a:t>
             </a:r>
           </a:p>
         </p:txBody>
@@ -5647,7 +5930,7 @@
                 <a:spcPts val="2200"/>
               </a:lnSpc>
               <a:spcAft>
-                <a:spcPts val="600"/>
+                <a:spcPts val="500"/>
               </a:spcAft>
             </a:pPr>
             <a:r>
@@ -5663,74 +5946,58 @@
           <a:p>
             <a:pPr algn="l">
               <a:lnSpc>
-                <a:spcPts val="2400"/>
+                <a:spcPts val="2200"/>
               </a:lnSpc>
               <a:spcAft>
-                <a:spcPts val="400"/>
+                <a:spcPts val="300"/>
               </a:spcAft>
             </a:pPr>
             <a:r>
-              <a:rPr lang="ja-JP" sz="1600" b="0" dirty="0">
+              <a:rPr lang="ja-JP" sz="1500" b="0" dirty="0">
                 <a:solidFill>
                   <a:srgbClr val="C5C3BB"/>
                 </a:solidFill>
                 <a:latin typeface="Hiragino Sans"/>
               </a:rPr>
-              <a:t>• ゴールを伝えたら自律的に実行</a:t>
+              <a:t>• 方向付けして、まず動いてもらう</a:t>
             </a:r>
           </a:p>
           <a:p>
             <a:pPr algn="l">
               <a:lnSpc>
-                <a:spcPts val="2400"/>
+                <a:spcPts val="2200"/>
               </a:lnSpc>
               <a:spcAft>
-                <a:spcPts val="400"/>
+                <a:spcPts val="300"/>
               </a:spcAft>
             </a:pPr>
             <a:r>
-              <a:rPr lang="ja-JP" sz="1600" b="0" dirty="0">
+              <a:rPr lang="ja-JP" sz="1500" b="0" dirty="0">
                 <a:solidFill>
                   <a:srgbClr val="C5C3BB"/>
                 </a:solidFill>
                 <a:latin typeface="Hiragino Sans"/>
               </a:rPr>
-              <a:t>• ファイル読み書き・コマンド実行・</a:t>
+              <a:t>• 出力を見てディスカッションする</a:t>
             </a:r>
           </a:p>
           <a:p>
             <a:pPr algn="l">
               <a:lnSpc>
-                <a:spcPts val="2400"/>
+                <a:spcPts val="2200"/>
               </a:lnSpc>
               <a:spcAft>
-                <a:spcPts val="400"/>
+                <a:spcPts val="300"/>
               </a:spcAft>
             </a:pPr>
             <a:r>
-              <a:rPr lang="ja-JP" sz="1600" b="0" dirty="0">
+              <a:rPr lang="ja-JP" sz="1500" b="0" dirty="0">
                 <a:solidFill>
                   <a:srgbClr val="C5C3BB"/>
                 </a:solidFill>
                 <a:latin typeface="Hiragino Sans"/>
               </a:rPr>
-              <a:t>  Web検索も自分でやる</a:t>
-            </a:r>
-          </a:p>
-          <a:p>
-            <a:pPr algn="l">
-              <a:lnSpc>
-                <a:spcPts val="2400"/>
-              </a:lnSpc>
-            </a:pPr>
-            <a:r>
-              <a:rPr lang="ja-JP" sz="1600" b="0" dirty="0">
-                <a:solidFill>
-                  <a:srgbClr val="C5C3BB"/>
-                </a:solidFill>
-                <a:latin typeface="Hiragino Sans"/>
-              </a:rPr>
-              <a:t>• 調査→計画→実装を一連で判断・実行</a:t>
+              <a:t>• 対話の中で方向を修正していく</a:t>
             </a:r>
           </a:p>
         </p:txBody>
@@ -5829,7 +6096,7 @@
                 </a:solidFill>
                 <a:latin typeface="Hiragino Sans"/>
               </a:rPr>
-              <a:t>→ 「1行ずつ指示する」のではなく「ゴールと背景を伝えて任せる」</a:t>
+              <a:t>→ チャットボットの作法をそのままエージェントに持ち込まない</a:t>
             </a:r>
           </a:p>
         </p:txBody>
@@ -5876,7 +6143,7 @@
     </p:spTree>
     <p:extLst>
       <p:ext uri="{BB962C8B-B14F-4D97-AF65-F5344CB8AC3E}">
-        <p14:creationId xmlns:p14="http://schemas.microsoft.com/office/powerpoint/2010/main" val="1032312635"/>
+        <p14:creationId xmlns:p14="http://schemas.microsoft.com/office/powerpoint/2010/main" val="2398341452"/>
       </p:ext>
     </p:extLst>
   </p:cSld>
@@ -5984,7 +6251,7 @@
                 </a:solidFill>
                 <a:latin typeface="Hiragino Sans"/>
               </a:rPr>
-              <a:t>指示の出し方</a:t>
+              <a:t>初手の方向付け</a:t>
             </a:r>
           </a:p>
         </p:txBody>
@@ -6107,7 +6374,7 @@
                 </a:solidFill>
                 <a:latin typeface="Hiragino Sans"/>
               </a:rPr>
-              <a:t>目標</a:t>
+              <a:t>ゴール</a:t>
             </a:r>
           </a:p>
           <a:p>
@@ -6461,7 +6728,7 @@
                 </a:solidFill>
                 <a:latin typeface="Hiragino Sans"/>
               </a:rPr>
-              <a:t>期待する出力</a:t>
+              <a:t>まず見たいもの</a:t>
             </a:r>
           </a:p>
           <a:p>
@@ -6477,7 +6744,7 @@
                 </a:solidFill>
                 <a:latin typeface="Hiragino Sans"/>
               </a:rPr>
-              <a:t>どういう形式で結果がほしいか</a:t>
+              <a:t>最初の一歩としてほしい出力</a:t>
             </a:r>
           </a:p>
         </p:txBody>
@@ -6510,13 +6777,13 @@
               </a:lnSpc>
             </a:pPr>
             <a:r>
-              <a:rPr lang="en-US" sz="1600" b="1" dirty="0">
+              <a:rPr lang="ja-JP" sz="1600" b="1" dirty="0">
                 <a:solidFill>
                   <a:srgbClr val="E07070"/>
                 </a:solidFill>
                 <a:latin typeface="Hiragino Sans"/>
               </a:rPr>
-              <a:t>Bad</a:t>
+              <a:t>✕ チャットボット的な指示</a:t>
             </a:r>
           </a:p>
         </p:txBody>
@@ -6599,13 +6866,13 @@
               </a:lnSpc>
             </a:pPr>
             <a:r>
-              <a:rPr lang="en-US" sz="1600" b="1" dirty="0">
+              <a:rPr lang="ja-JP" sz="1600" b="1" dirty="0">
                 <a:solidFill>
                   <a:srgbClr val="7BC9A0"/>
                 </a:solidFill>
                 <a:latin typeface="Hiragino Sans"/>
               </a:rPr>
-              <a:t>Good</a:t>
+              <a:t>○ エージェントへの方向付け</a:t>
             </a:r>
           </a:p>
         </p:txBody>
@@ -6816,7 +7083,7 @@
     </p:spTree>
     <p:extLst>
       <p:ext uri="{BB962C8B-B14F-4D97-AF65-F5344CB8AC3E}">
-        <p14:creationId xmlns:p14="http://schemas.microsoft.com/office/powerpoint/2010/main" val="1369130849"/>
+        <p14:creationId xmlns:p14="http://schemas.microsoft.com/office/powerpoint/2010/main" val="1645294279"/>
       </p:ext>
     </p:extLst>
   </p:cSld>
@@ -6924,7 +7191,7 @@
                 </a:solidFill>
                 <a:latin typeface="Hiragino Sans"/>
               </a:rPr>
-              <a:t>たたき台から始める</a:t>
+              <a:t>対話しながら進める</a:t>
             </a:r>
           </a:p>
         </p:txBody>
@@ -6972,7 +7239,7 @@
                 </a:solidFill>
                 <a:latin typeface="Hiragino Sans"/>
               </a:rPr>
-              <a:t>1. 指示を出す</a:t>
+              <a:t>1. 方向付け</a:t>
             </a:r>
           </a:p>
         </p:txBody>
@@ -7053,7 +7320,7 @@
                 </a:solidFill>
                 <a:latin typeface="Hiragino Sans"/>
               </a:rPr>
-              <a:t>2. 出力を確認</a:t>
+              <a:t>2. たたき台を見る</a:t>
             </a:r>
           </a:p>
         </p:txBody>
@@ -7134,7 +7401,7 @@
                 </a:solidFill>
                 <a:latin typeface="Hiragino Sans"/>
               </a:rPr>
-              <a:t>3. フィードバック</a:t>
+              <a:t>3. 議論・修正</a:t>
             </a:r>
           </a:p>
         </p:txBody>
@@ -7215,7 +7482,7 @@
                 </a:solidFill>
                 <a:latin typeface="Hiragino Sans"/>
               </a:rPr>
-              <a:t>4. 改善版</a:t>
+              <a:t>4. 次の一手</a:t>
             </a:r>
           </a:p>
         </p:txBody>
@@ -7275,7 +7542,7 @@
                 </a:solidFill>
                 <a:latin typeface="Hiragino Sans"/>
               </a:rPr>
-              <a:t>3つのテクニック</a:t>
+              <a:t>対話のコツ</a:t>
             </a:r>
           </a:p>
         </p:txBody>
@@ -7395,7 +7662,7 @@
                 </a:solidFill>
                 <a:latin typeface="Hiragino Sans"/>
               </a:rPr>
-              <a:t>期待と違ったら、修正指示の前に理由を聞く。自分の指示の問題が見えることがある</a:t>
+              <a:t>期待と違ったら、すぐ修正指示を出さず理由を聞く。自分の方向付けの問題が見えることも</a:t>
             </a:r>
           </a:p>
         </p:txBody>
@@ -7499,7 +7766,7 @@
                 </a:solidFill>
                 <a:latin typeface="Hiragino Sans"/>
               </a:rPr>
-              <a:t>提案形式で伝える</a:t>
+              <a:t>提案形式で議論する</a:t>
             </a:r>
           </a:p>
           <a:p>
@@ -7515,7 +7782,7 @@
                 </a:solidFill>
                 <a:latin typeface="Hiragino Sans"/>
               </a:rPr>
-              <a:t>「Xをして」より「Xを考えているが、どう思うか」。別の選択肢が出てくる</a:t>
+              <a:t>「Xして」ではなく「Xを考えているが、どう思うか」。別の選択肢が出てくる</a:t>
             </a:r>
           </a:p>
         </p:txBody>
@@ -7619,7 +7886,7 @@
                 </a:solidFill>
                 <a:latin typeface="Hiragino Sans"/>
               </a:rPr>
-              <a:t>手直ししたら伝える</a:t>
+              <a:t>手直ししたら共有する</a:t>
             </a:r>
           </a:p>
           <a:p>
@@ -7635,7 +7902,7 @@
                 </a:solidFill>
                 <a:latin typeface="Hiragino Sans"/>
               </a:rPr>
-              <a:t>自分で編集した場合はClaudeに共有する。伝えないと古い状態で動き続ける</a:t>
+              <a:t>自分で編集した場合は必ず伝える。伝えないと古い状態で動き続ける</a:t>
             </a:r>
           </a:p>
         </p:txBody>
@@ -7682,7 +7949,7 @@
     </p:spTree>
     <p:extLst>
       <p:ext uri="{BB962C8B-B14F-4D97-AF65-F5344CB8AC3E}">
-        <p14:creationId xmlns:p14="http://schemas.microsoft.com/office/powerpoint/2010/main" val="3580656662"/>
+        <p14:creationId xmlns:p14="http://schemas.microsoft.com/office/powerpoint/2010/main" val="1063114241"/>
       </p:ext>
     </p:extLst>
   </p:cSld>
@@ -7803,7 +8070,7 @@
         </p:nvSpPr>
         <p:spPr>
           <a:xfrm>
-            <a:off x="2921000" y="2730500"/>
+            <a:off x="2921000" y="2779487"/>
             <a:ext cx="6350000" cy="762000"/>
           </a:xfrm>
           <a:prstGeom prst="rect">
@@ -12153,7 +12420,7 @@
         <p:spPr>
           <a:xfrm>
             <a:off x="960120" y="2148840"/>
-            <a:ext cx="4526520" cy="2560320"/>
+            <a:ext cx="4526520" cy="1098634"/>
           </a:xfrm>
           <a:prstGeom prst="rect">
             <a:avLst/>
@@ -12228,18 +12495,17 @@
                 </a:solidFill>
                 <a:latin typeface="Hiragino Sans"/>
               </a:rPr>
-              <a:t>ログを追い、参照箇所を探し、</a:t>
-            </a:r>
-          </a:p>
-          <a:p>
-            <a:pPr algn="l">
-              <a:lnSpc>
-                <a:spcPts val="2400"/>
-              </a:lnSpc>
-              <a:spcAft>
-                <a:spcPts val="0"/>
-              </a:spcAft>
-            </a:pPr>
+              <a:t>ログを追い、参照箇所を</a:t>
+            </a:r>
+            <a:r>
+              <a:rPr lang="ja-JP" sz="1600" b="0">
+                <a:solidFill>
+                  <a:srgbClr val="C5C3BB"/>
+                </a:solidFill>
+                <a:latin typeface="Hiragino Sans"/>
+              </a:rPr>
+              <a:t>探し、影響</a:t>
+            </a:r>
             <a:r>
               <a:rPr lang="ja-JP" sz="1600" b="0" dirty="0">
                 <a:solidFill>
@@ -12247,7 +12513,7 @@
                 </a:solidFill>
                 <a:latin typeface="Hiragino Sans"/>
               </a:rPr>
-              <a:t>影響範囲を整理する</a:t>
+              <a:t>範囲を整理する</a:t>
             </a:r>
           </a:p>
         </p:txBody>
@@ -12360,7 +12626,7 @@
         <p:spPr>
           <a:xfrm>
             <a:off x="6675360" y="2148840"/>
-            <a:ext cx="4526520" cy="2560320"/>
+            <a:ext cx="4526520" cy="1098634"/>
           </a:xfrm>
           <a:prstGeom prst="rect">
             <a:avLst/>
@@ -12435,27 +12701,23 @@
                 </a:solidFill>
                 <a:latin typeface="Hiragino Sans"/>
               </a:rPr>
-              <a:t>調査結果・原因候補・影響範囲が</a:t>
-            </a:r>
-          </a:p>
-          <a:p>
-            <a:pPr algn="l">
-              <a:lnSpc>
-                <a:spcPts val="2400"/>
-              </a:lnSpc>
-              <a:spcAft>
-                <a:spcPts val="0"/>
-              </a:spcAft>
-            </a:pPr>
-            <a:r>
-              <a:rPr lang="ja-JP" sz="1600" b="0" dirty="0">
+              <a:t>調査結果・原因候補・影響</a:t>
+            </a:r>
+            <a:r>
+              <a:rPr lang="ja-JP" sz="1600" b="0">
                 <a:solidFill>
                   <a:srgbClr val="C5C3BB"/>
                 </a:solidFill>
                 <a:latin typeface="Hiragino Sans"/>
               </a:rPr>
-              <a:t>まとまる</a:t>
-            </a:r>
+              <a:t>範囲がまとまる</a:t>
+            </a:r>
+            <a:endParaRPr lang="ja-JP" sz="1600" b="0" dirty="0">
+              <a:solidFill>
+                <a:srgbClr val="C5C3BB"/>
+              </a:solidFill>
+              <a:latin typeface="Hiragino Sans"/>
+            </a:endParaRPr>
           </a:p>
         </p:txBody>
       </p:sp>
@@ -17730,7 +17992,7 @@
         <p:spPr>
           <a:xfrm>
             <a:off x="1295400" y="1600200"/>
-            <a:ext cx="4572000" cy="1005840"/>
+            <a:ext cx="4572000" cy="1143000"/>
           </a:xfrm>
           <a:prstGeom prst="roundRect">
             <a:avLst>
@@ -17861,7 +18123,7 @@
         <p:spPr>
           <a:xfrm>
             <a:off x="6324600" y="2697480"/>
-            <a:ext cx="4572000" cy="1005840"/>
+            <a:ext cx="4572000" cy="1097280"/>
           </a:xfrm>
           <a:prstGeom prst="roundRect">
             <a:avLst>
@@ -18338,7 +18600,7 @@
         </p:nvCxnSpPr>
         <p:spPr>
           <a:xfrm>
-            <a:off x="2286000" y="3302000"/>
+            <a:off x="1725564" y="3302000"/>
             <a:ext cx="1524000" cy="0"/>
           </a:xfrm>
           <a:prstGeom prst="line">
@@ -18359,7 +18621,7 @@
         </p:nvCxnSpPr>
         <p:spPr>
           <a:xfrm>
-            <a:off x="8382000" y="3302000"/>
+            <a:off x="8971934" y="3302000"/>
             <a:ext cx="1524000" cy="0"/>
           </a:xfrm>
           <a:prstGeom prst="line">
@@ -18416,7 +18678,7 @@
         </p:nvSpPr>
         <p:spPr>
           <a:xfrm>
-            <a:off x="2286000" y="2730500"/>
+            <a:off x="2286000" y="2818989"/>
             <a:ext cx="7620000" cy="762000"/>
           </a:xfrm>
           <a:prstGeom prst="rect">
@@ -18493,13 +18755,22 @@
               </a:lnSpc>
             </a:pPr>
             <a:r>
+              <a:rPr lang="ja-JP" sz="2400">
+                <a:solidFill>
+                  <a:srgbClr val="C5C3BB"/>
+                </a:solidFill>
+                <a:latin typeface="Hiragino Sans"/>
+              </a:rPr>
+              <a:t>人間と</a:t>
+            </a:r>
+            <a:r>
               <a:rPr lang="ja-JP" sz="2400" dirty="0">
                 <a:solidFill>
                   <a:srgbClr val="C5C3BB"/>
                 </a:solidFill>
                 <a:latin typeface="Hiragino Sans"/>
               </a:rPr>
-              <a:t>人間相手と同じ</a:t>
+              <a:t>同じ</a:t>
             </a:r>
           </a:p>
         </p:txBody>
